--- a/docs/Fig R1.pptx
+++ b/docs/Fig R1.pptx
@@ -1,21 +1,32 @@
 
 <file path=ppt/presentation.xml><?xml version="1.0" encoding="utf-8"?>
-<p:presentation xmlns:a="http://schemas.openxmlformats.org/drawingml/2006/main" xmlns:r="http://schemas.openxmlformats.org/officeDocument/2006/relationships" xmlns:mc="http://schemas.openxmlformats.org/markup-compatibility/2006" xmlns:mv="urn:schemas-microsoft-com:mac:vml" xmlns:p="http://schemas.openxmlformats.org/presentationml/2006/main" xmlns:c="http://schemas.openxmlformats.org/drawingml/2006/chart" xmlns:dgm="http://schemas.openxmlformats.org/drawingml/2006/diagram" xmlns:o="urn:schemas-microsoft-com:office:office" xmlns:v="urn:schemas-microsoft-com:vml" xmlns:pvml="urn:schemas-microsoft-com:office:powerpoint" xmlns:com="http://schemas.openxmlformats.org/drawingml/2006/compatibility" xmlns:p14="http://schemas.microsoft.com/office/powerpoint/2010/main" xmlns:p15="http://schemas.microsoft.com/office/powerpoint/2012/main" xmlns:ahyp="http://schemas.microsoft.com/office/drawing/2018/hyperlinkcolor" autoCompressPictures="0" strictFirstAndLastChars="0" saveSubsetFonts="1">
+<p:presentation xmlns:a="http://schemas.openxmlformats.org/drawingml/2006/main" xmlns:r="http://schemas.openxmlformats.org/officeDocument/2006/relationships" xmlns:mc="http://schemas.openxmlformats.org/markup-compatibility/2006" xmlns:mv="urn:schemas-microsoft-com:mac:vml" xmlns:p="http://schemas.openxmlformats.org/presentationml/2006/main" xmlns:c="http://schemas.openxmlformats.org/drawingml/2006/chart" xmlns:dgm="http://schemas.openxmlformats.org/drawingml/2006/diagram" xmlns:o="urn:schemas-microsoft-com:office:office" xmlns:v="urn:schemas-microsoft-com:vml" xmlns:pvml="urn:schemas-microsoft-com:office:powerpoint" xmlns:com="http://schemas.openxmlformats.org/drawingml/2006/compatibility" xmlns:p14="http://schemas.microsoft.com/office/powerpoint/2010/main" xmlns:p15="http://schemas.microsoft.com/office/powerpoint/2012/main" xmlns:ahyp="http://schemas.microsoft.com/office/drawing/2018/hyperlinkcolor" autoCompressPictures="0" embedTrueTypeFonts="1" strictFirstAndLastChars="0" saveSubsetFonts="1">
   <p:sldMasterIdLst>
-    <p:sldMasterId id="2147483659" r:id="rId5"/>
+    <p:sldMasterId id="2147483659" r:id="rId4"/>
   </p:sldMasterIdLst>
   <p:notesMasterIdLst>
-    <p:notesMasterId r:id="rId6"/>
+    <p:notesMasterId r:id="rId5"/>
   </p:notesMasterIdLst>
   <p:sldIdLst>
-    <p:sldId id="256" r:id="rId7"/>
-    <p:sldId id="257" r:id="rId8"/>
-    <p:sldId id="258" r:id="rId9"/>
-    <p:sldId id="259" r:id="rId10"/>
-    <p:sldId id="260" r:id="rId11"/>
+    <p:sldId id="256" r:id="rId6"/>
+    <p:sldId id="257" r:id="rId7"/>
+    <p:sldId id="258" r:id="rId8"/>
+    <p:sldId id="259" r:id="rId9"/>
+    <p:sldId id="260" r:id="rId10"/>
+    <p:sldId id="261" r:id="rId11"/>
+    <p:sldId id="262" r:id="rId12"/>
   </p:sldIdLst>
   <p:sldSz cy="5143500" cx="9144000"/>
   <p:notesSz cx="6858000" cy="9144000"/>
+  <p:embeddedFontLst>
+    <p:embeddedFont>
+      <p:font typeface="Roboto"/>
+      <p:regular r:id="rId13"/>
+      <p:bold r:id="rId14"/>
+      <p:italic r:id="rId15"/>
+      <p:boldItalic r:id="rId16"/>
+    </p:embeddedFont>
+  </p:embeddedFontLst>
   <p:defaultTextStyle>
     <a:defPPr lvl="0" marR="0" rtl="0" algn="l">
       <a:lnSpc>
@@ -262,21 +273,6 @@
     </p:ext>
   </p:extLst>
 </p:presentation>
-</file>
-
-<file path=ppt/commentAuthors.xml><?xml version="1.0" encoding="utf-8"?>
-<p:cmAuthorLst xmlns:a="http://schemas.openxmlformats.org/drawingml/2006/main" xmlns:r="http://schemas.openxmlformats.org/officeDocument/2006/relationships" xmlns:mc="http://schemas.openxmlformats.org/markup-compatibility/2006" xmlns:mv="urn:schemas-microsoft-com:mac:vml" xmlns:p="http://schemas.openxmlformats.org/presentationml/2006/main" xmlns:c="http://schemas.openxmlformats.org/drawingml/2006/chart" xmlns:dgm="http://schemas.openxmlformats.org/drawingml/2006/diagram" xmlns:o="urn:schemas-microsoft-com:office:office" xmlns:v="urn:schemas-microsoft-com:vml" xmlns:pvml="urn:schemas-microsoft-com:office:powerpoint" xmlns:com="http://schemas.openxmlformats.org/drawingml/2006/compatibility" xmlns:p14="http://schemas.microsoft.com/office/powerpoint/2010/main" xmlns:p15="http://schemas.microsoft.com/office/powerpoint/2012/main" xmlns:ahyp="http://schemas.microsoft.com/office/drawing/2018/hyperlinkcolor">
-  <p:cmAuthor clrIdx="0" id="0" initials="" lastIdx="1" name="Martin Iungman"/>
-</p:cmAuthorLst>
-</file>
-
-<file path=ppt/comments/comment1.xml><?xml version="1.0" encoding="utf-8"?>
-<p:cmLst xmlns:a="http://schemas.openxmlformats.org/drawingml/2006/main" xmlns:r="http://schemas.openxmlformats.org/officeDocument/2006/relationships" xmlns:mc="http://schemas.openxmlformats.org/markup-compatibility/2006" xmlns:mv="urn:schemas-microsoft-com:mac:vml" xmlns:p="http://schemas.openxmlformats.org/presentationml/2006/main" xmlns:c="http://schemas.openxmlformats.org/drawingml/2006/chart" xmlns:dgm="http://schemas.openxmlformats.org/drawingml/2006/diagram" xmlns:o="urn:schemas-microsoft-com:office:office" xmlns:v="urn:schemas-microsoft-com:vml" xmlns:pvml="urn:schemas-microsoft-com:office:powerpoint" xmlns:com="http://schemas.openxmlformats.org/drawingml/2006/compatibility" xmlns:p14="http://schemas.microsoft.com/office/powerpoint/2010/main" xmlns:p15="http://schemas.microsoft.com/office/powerpoint/2012/main" xmlns:ahyp="http://schemas.microsoft.com/office/drawing/2018/hyperlinkcolor">
-  <p:cm authorId="0" idx="1" dt="2026-04-15T21:24:19.254">
-    <p:pos x="6000" y="0"/>
-    <p:text>modificar aca para que la leyenda quede fuera del density (y agrandar tamano puntos leyenda)</p:text>
-  </p:cm>
-</p:cmLst>
 </file>
 
 <file path=ppt/notesMasters/notesMaster1.xml><?xml version="1.0" encoding="utf-8"?>
@@ -1021,7 +1017,7 @@
       </p:grpSpPr>
       <p:sp>
         <p:nvSpPr>
-          <p:cNvPr id="96" name="Google Shape;96;g3d678bf7346_0_23:notes"/>
+          <p:cNvPr id="96" name="Google Shape;96;g3f5e045cd8f_0_8:notes"/>
           <p:cNvSpPr/>
           <p:nvPr>
             <p:ph idx="2" type="sldImg"/>
@@ -1056,7 +1052,7 @@
       </p:sp>
       <p:sp>
         <p:nvSpPr>
-          <p:cNvPr id="97" name="Google Shape;97;g3d678bf7346_0_23:notes"/>
+          <p:cNvPr id="97" name="Google Shape;97;g3f5e045cd8f_0_8:notes"/>
           <p:cNvSpPr txBox="1"/>
           <p:nvPr>
             <p:ph idx="1" type="body"/>
@@ -1106,7 +1102,7 @@
   <p:cSld>
     <p:spTree>
       <p:nvGrpSpPr>
-        <p:cNvPr id="103" name="Shape 103"/>
+        <p:cNvPr id="101" name="Shape 101"/>
         <p:cNvGrpSpPr/>
         <p:nvPr/>
       </p:nvGrpSpPr>
@@ -1120,7 +1116,7 @@
       </p:grpSpPr>
       <p:sp>
         <p:nvSpPr>
-          <p:cNvPr id="104" name="Google Shape;104;g3d678bf7346_0_17:notes"/>
+          <p:cNvPr id="102" name="Google Shape;102;g3f5e045cd8f_0_2:notes"/>
           <p:cNvSpPr/>
           <p:nvPr>
             <p:ph idx="2" type="sldImg"/>
@@ -1155,7 +1151,205 @@
       </p:sp>
       <p:sp>
         <p:nvSpPr>
-          <p:cNvPr id="105" name="Google Shape;105;g3d678bf7346_0_17:notes"/>
+          <p:cNvPr id="103" name="Google Shape;103;g3f5e045cd8f_0_2:notes"/>
+          <p:cNvSpPr txBox="1"/>
+          <p:nvPr>
+            <p:ph idx="1" type="body"/>
+          </p:nvPr>
+        </p:nvSpPr>
+        <p:spPr>
+          <a:xfrm>
+            <a:off x="685800" y="4343400"/>
+            <a:ext cx="5486400" cy="4114800"/>
+          </a:xfrm>
+          <a:prstGeom prst="rect">
+            <a:avLst/>
+          </a:prstGeom>
+        </p:spPr>
+        <p:txBody>
+          <a:bodyPr anchorCtr="0" anchor="t" bIns="91425" lIns="91425" spcFirstLastPara="1" rIns="91425" wrap="square" tIns="91425">
+            <a:noAutofit/>
+          </a:bodyPr>
+          <a:lstStyle/>
+          <a:p>
+            <a:pPr indent="0" lvl="0" marL="0" rtl="0" algn="l">
+              <a:spcBef>
+                <a:spcPts val="0"/>
+              </a:spcBef>
+              <a:spcAft>
+                <a:spcPts val="0"/>
+              </a:spcAft>
+              <a:buNone/>
+            </a:pPr>
+            <a:r>
+              <a:t/>
+            </a:r>
+            <a:endParaRPr/>
+          </a:p>
+        </p:txBody>
+      </p:sp>
+    </p:spTree>
+  </p:cSld>
+  <p:clrMapOvr>
+    <a:masterClrMapping/>
+  </p:clrMapOvr>
+</p:notes>
+</file>
+
+<file path=ppt/notesSlides/notesSlide6.xml><?xml version="1.0" encoding="utf-8"?>
+<p:notes xmlns:a="http://schemas.openxmlformats.org/drawingml/2006/main" xmlns:r="http://schemas.openxmlformats.org/officeDocument/2006/relationships" xmlns:mc="http://schemas.openxmlformats.org/markup-compatibility/2006" xmlns:mv="urn:schemas-microsoft-com:mac:vml" xmlns:p="http://schemas.openxmlformats.org/presentationml/2006/main" xmlns:c="http://schemas.openxmlformats.org/drawingml/2006/chart" xmlns:dgm="http://schemas.openxmlformats.org/drawingml/2006/diagram" xmlns:o="urn:schemas-microsoft-com:office:office" xmlns:v="urn:schemas-microsoft-com:vml" xmlns:pvml="urn:schemas-microsoft-com:office:powerpoint" xmlns:com="http://schemas.openxmlformats.org/drawingml/2006/compatibility" xmlns:p14="http://schemas.microsoft.com/office/powerpoint/2010/main" xmlns:p15="http://schemas.microsoft.com/office/powerpoint/2012/main" xmlns:ahyp="http://schemas.microsoft.com/office/drawing/2018/hyperlinkcolor" showMasterPhAnim="0" showMasterSp="0">
+  <p:cSld>
+    <p:spTree>
+      <p:nvGrpSpPr>
+        <p:cNvPr id="107" name="Shape 107"/>
+        <p:cNvGrpSpPr/>
+        <p:nvPr/>
+      </p:nvGrpSpPr>
+      <p:grpSpPr>
+        <a:xfrm>
+          <a:off x="0" y="0"/>
+          <a:ext cx="0" cy="0"/>
+          <a:chOff x="0" y="0"/>
+          <a:chExt cx="0" cy="0"/>
+        </a:xfrm>
+      </p:grpSpPr>
+      <p:sp>
+        <p:nvSpPr>
+          <p:cNvPr id="108" name="Google Shape;108;g3d678bf7346_0_23:notes"/>
+          <p:cNvSpPr/>
+          <p:nvPr>
+            <p:ph idx="2" type="sldImg"/>
+          </p:nvPr>
+        </p:nvSpPr>
+        <p:spPr>
+          <a:xfrm>
+            <a:off x="381300" y="685800"/>
+            <a:ext cx="6096000" cy="3429000"/>
+          </a:xfrm>
+          <a:custGeom>
+            <a:rect b="b" l="l" r="r" t="t"/>
+            <a:pathLst>
+              <a:path extrusionOk="0" h="120000" w="120000">
+                <a:moveTo>
+                  <a:pt x="0" y="0"/>
+                </a:moveTo>
+                <a:lnTo>
+                  <a:pt x="120000" y="0"/>
+                </a:lnTo>
+                <a:lnTo>
+                  <a:pt x="120000" y="120000"/>
+                </a:lnTo>
+                <a:lnTo>
+                  <a:pt x="0" y="120000"/>
+                </a:lnTo>
+                <a:close/>
+              </a:path>
+            </a:pathLst>
+          </a:custGeom>
+        </p:spPr>
+      </p:sp>
+      <p:sp>
+        <p:nvSpPr>
+          <p:cNvPr id="109" name="Google Shape;109;g3d678bf7346_0_23:notes"/>
+          <p:cNvSpPr txBox="1"/>
+          <p:nvPr>
+            <p:ph idx="1" type="body"/>
+          </p:nvPr>
+        </p:nvSpPr>
+        <p:spPr>
+          <a:xfrm>
+            <a:off x="685800" y="4343400"/>
+            <a:ext cx="5486400" cy="4114800"/>
+          </a:xfrm>
+          <a:prstGeom prst="rect">
+            <a:avLst/>
+          </a:prstGeom>
+        </p:spPr>
+        <p:txBody>
+          <a:bodyPr anchorCtr="0" anchor="t" bIns="91425" lIns="91425" spcFirstLastPara="1" rIns="91425" wrap="square" tIns="91425">
+            <a:noAutofit/>
+          </a:bodyPr>
+          <a:lstStyle/>
+          <a:p>
+            <a:pPr indent="0" lvl="0" marL="0" rtl="0" algn="l">
+              <a:spcBef>
+                <a:spcPts val="0"/>
+              </a:spcBef>
+              <a:spcAft>
+                <a:spcPts val="0"/>
+              </a:spcAft>
+              <a:buNone/>
+            </a:pPr>
+            <a:r>
+              <a:t/>
+            </a:r>
+            <a:endParaRPr/>
+          </a:p>
+        </p:txBody>
+      </p:sp>
+    </p:spTree>
+  </p:cSld>
+  <p:clrMapOvr>
+    <a:masterClrMapping/>
+  </p:clrMapOvr>
+</p:notes>
+</file>
+
+<file path=ppt/notesSlides/notesSlide7.xml><?xml version="1.0" encoding="utf-8"?>
+<p:notes xmlns:a="http://schemas.openxmlformats.org/drawingml/2006/main" xmlns:r="http://schemas.openxmlformats.org/officeDocument/2006/relationships" xmlns:mc="http://schemas.openxmlformats.org/markup-compatibility/2006" xmlns:mv="urn:schemas-microsoft-com:mac:vml" xmlns:p="http://schemas.openxmlformats.org/presentationml/2006/main" xmlns:c="http://schemas.openxmlformats.org/drawingml/2006/chart" xmlns:dgm="http://schemas.openxmlformats.org/drawingml/2006/diagram" xmlns:o="urn:schemas-microsoft-com:office:office" xmlns:v="urn:schemas-microsoft-com:vml" xmlns:pvml="urn:schemas-microsoft-com:office:powerpoint" xmlns:com="http://schemas.openxmlformats.org/drawingml/2006/compatibility" xmlns:p14="http://schemas.microsoft.com/office/powerpoint/2010/main" xmlns:p15="http://schemas.microsoft.com/office/powerpoint/2012/main" xmlns:ahyp="http://schemas.microsoft.com/office/drawing/2018/hyperlinkcolor" showMasterPhAnim="0" showMasterSp="0">
+  <p:cSld>
+    <p:spTree>
+      <p:nvGrpSpPr>
+        <p:cNvPr id="115" name="Shape 115"/>
+        <p:cNvGrpSpPr/>
+        <p:nvPr/>
+      </p:nvGrpSpPr>
+      <p:grpSpPr>
+        <a:xfrm>
+          <a:off x="0" y="0"/>
+          <a:ext cx="0" cy="0"/>
+          <a:chOff x="0" y="0"/>
+          <a:chExt cx="0" cy="0"/>
+        </a:xfrm>
+      </p:grpSpPr>
+      <p:sp>
+        <p:nvSpPr>
+          <p:cNvPr id="116" name="Google Shape;116;g3d678bf7346_0_17:notes"/>
+          <p:cNvSpPr/>
+          <p:nvPr>
+            <p:ph idx="2" type="sldImg"/>
+          </p:nvPr>
+        </p:nvSpPr>
+        <p:spPr>
+          <a:xfrm>
+            <a:off x="381300" y="685800"/>
+            <a:ext cx="6096000" cy="3429000"/>
+          </a:xfrm>
+          <a:custGeom>
+            <a:rect b="b" l="l" r="r" t="t"/>
+            <a:pathLst>
+              <a:path extrusionOk="0" h="120000" w="120000">
+                <a:moveTo>
+                  <a:pt x="0" y="0"/>
+                </a:moveTo>
+                <a:lnTo>
+                  <a:pt x="120000" y="0"/>
+                </a:lnTo>
+                <a:lnTo>
+                  <a:pt x="120000" y="120000"/>
+                </a:lnTo>
+                <a:lnTo>
+                  <a:pt x="0" y="120000"/>
+                </a:lnTo>
+                <a:close/>
+              </a:path>
+            </a:pathLst>
+          </a:custGeom>
+        </p:spPr>
+      </p:sp>
+      <p:sp>
+        <p:nvSpPr>
+          <p:cNvPr id="117" name="Google Shape;117;g3d678bf7346_0_17:notes"/>
           <p:cNvSpPr txBox="1"/>
           <p:nvPr>
             <p:ph idx="1" type="body"/>
@@ -7584,9 +7778,115 @@
           <a:chExt cx="0" cy="0"/>
         </a:xfrm>
       </p:grpSpPr>
+      <p:sp>
+        <p:nvSpPr>
+          <p:cNvPr id="99" name="Google Shape;99;p16"/>
+          <p:cNvSpPr txBox="1"/>
+          <p:nvPr/>
+        </p:nvSpPr>
+        <p:spPr>
+          <a:xfrm>
+            <a:off x="0" y="0"/>
+            <a:ext cx="3000000" cy="1647000"/>
+          </a:xfrm>
+          <a:prstGeom prst="rect">
+            <a:avLst/>
+          </a:prstGeom>
+          <a:noFill/>
+          <a:ln>
+            <a:noFill/>
+          </a:ln>
+        </p:spPr>
+        <p:txBody>
+          <a:bodyPr anchorCtr="0" anchor="t" bIns="91425" lIns="91425" spcFirstLastPara="1" rIns="91425" wrap="square" tIns="91425">
+            <a:spAutoFit/>
+          </a:bodyPr>
+          <a:lstStyle/>
+          <a:p>
+            <a:pPr indent="0" lvl="0" marL="0" rtl="0" algn="l">
+              <a:spcBef>
+                <a:spcPts val="0"/>
+              </a:spcBef>
+              <a:spcAft>
+                <a:spcPts val="0"/>
+              </a:spcAft>
+              <a:buNone/>
+            </a:pPr>
+            <a:r>
+              <a:rPr b="1" lang="es-419" sz="1050">
+                <a:solidFill>
+                  <a:srgbClr val="0B0B0B"/>
+                </a:solidFill>
+                <a:highlight>
+                  <a:srgbClr val="FCFCFB"/>
+                </a:highlight>
+                <a:latin typeface="Roboto"/>
+                <a:ea typeface="Roboto"/>
+                <a:cs typeface="Roboto"/>
+                <a:sym typeface="Roboto"/>
+              </a:rPr>
+              <a:t>Reconstrucción de la distribución de expresión para un promotor individual</a:t>
+            </a:r>
+            <a:r>
+              <a:rPr lang="es-419" sz="1050">
+                <a:solidFill>
+                  <a:srgbClr val="0B0B0B"/>
+                </a:solidFill>
+                <a:highlight>
+                  <a:srgbClr val="FCFCFB"/>
+                </a:highlight>
+                <a:latin typeface="Roboto"/>
+                <a:ea typeface="Roboto"/>
+                <a:cs typeface="Roboto"/>
+                <a:sym typeface="Roboto"/>
+              </a:rPr>
+              <a:t>, KIAA0753_1, a modo de ejemplo. El histograma muestra la frecuencia relativa de lecturas normalizadas asociadas a esta secuencia en cada una de las 6 fracciones (</a:t>
+            </a:r>
+            <a:r>
+              <a:rPr i="1" lang="es-419" sz="1050">
+                <a:solidFill>
+                  <a:srgbClr val="0B0B0B"/>
+                </a:solidFill>
+                <a:highlight>
+                  <a:srgbClr val="FCFCFB"/>
+                </a:highlight>
+                <a:latin typeface="Roboto"/>
+                <a:ea typeface="Roboto"/>
+                <a:cs typeface="Roboto"/>
+                <a:sym typeface="Roboto"/>
+              </a:rPr>
+              <a:t>gates</a:t>
+            </a:r>
+            <a:r>
+              <a:rPr lang="es-419" sz="1050">
+                <a:solidFill>
+                  <a:srgbClr val="0B0B0B"/>
+                </a:solidFill>
+                <a:highlight>
+                  <a:srgbClr val="FCFCFB"/>
+                </a:highlight>
+                <a:latin typeface="Roboto"/>
+                <a:ea typeface="Roboto"/>
+                <a:cs typeface="Roboto"/>
+                <a:sym typeface="Roboto"/>
+              </a:rPr>
+              <a:t>) de fluorescencia EGFP en que fueron clasificadas las células, para ambas réplicas experimentales (tonalidades clara/oscura).</a:t>
+            </a:r>
+            <a:r>
+              <a:rPr lang="es-419" sz="1100">
+                <a:solidFill>
+                  <a:schemeClr val="dk1"/>
+                </a:solidFill>
+              </a:rPr>
+              <a:t> </a:t>
+            </a:r>
+            <a:endParaRPr/>
+          </a:p>
+        </p:txBody>
+      </p:sp>
       <p:pic>
         <p:nvPicPr>
-          <p:cNvPr id="99" name="Google Shape;99;p16"/>
+          <p:cNvPr id="100" name="Google Shape;100;p16" title="histograma_gates_KIAA0753.jpg"/>
           <p:cNvPicPr preferRelativeResize="0"/>
           <p:nvPr/>
         </p:nvPicPr>
@@ -7600,8 +7900,8 @@
         </p:blipFill>
         <p:spPr>
           <a:xfrm>
-            <a:off x="152400" y="152400"/>
-            <a:ext cx="2628900" cy="2590800"/>
+            <a:off x="3152400" y="152400"/>
+            <a:ext cx="5839201" cy="4379401"/>
           </a:xfrm>
           <a:prstGeom prst="rect">
             <a:avLst/>
@@ -7612,14 +7912,39 @@
           </a:ln>
         </p:spPr>
       </p:pic>
+    </p:spTree>
+  </p:cSld>
+  <p:clrMapOvr>
+    <a:masterClrMapping/>
+  </p:clrMapOvr>
+</p:sld>
+</file>
+
+<file path=ppt/slides/slide5.xml><?xml version="1.0" encoding="utf-8"?>
+<p:sld xmlns:a="http://schemas.openxmlformats.org/drawingml/2006/main" xmlns:r="http://schemas.openxmlformats.org/officeDocument/2006/relationships" xmlns:mc="http://schemas.openxmlformats.org/markup-compatibility/2006" xmlns:mv="urn:schemas-microsoft-com:mac:vml" xmlns:p="http://schemas.openxmlformats.org/presentationml/2006/main" xmlns:c="http://schemas.openxmlformats.org/drawingml/2006/chart" xmlns:dgm="http://schemas.openxmlformats.org/drawingml/2006/diagram" xmlns:o="urn:schemas-microsoft-com:office:office" xmlns:v="urn:schemas-microsoft-com:vml" xmlns:pvml="urn:schemas-microsoft-com:office:powerpoint" xmlns:com="http://schemas.openxmlformats.org/drawingml/2006/compatibility" xmlns:p14="http://schemas.microsoft.com/office/powerpoint/2010/main" xmlns:p15="http://schemas.microsoft.com/office/powerpoint/2012/main" xmlns:ahyp="http://schemas.microsoft.com/office/drawing/2018/hyperlinkcolor">
+  <p:cSld>
+    <p:spTree>
+      <p:nvGrpSpPr>
+        <p:cNvPr id="104" name="Shape 104"/>
+        <p:cNvGrpSpPr/>
+        <p:nvPr/>
+      </p:nvGrpSpPr>
+      <p:grpSpPr>
+        <a:xfrm>
+          <a:off x="0" y="0"/>
+          <a:ext cx="0" cy="0"/>
+          <a:chOff x="0" y="0"/>
+          <a:chExt cx="0" cy="0"/>
+        </a:xfrm>
+      </p:grpSpPr>
       <p:pic>
         <p:nvPicPr>
-          <p:cNvPr id="100" name="Google Shape;100;p16"/>
+          <p:cNvPr id="105" name="Google Shape;105;p17" title="extra_densidad_individual.jpg"/>
           <p:cNvPicPr preferRelativeResize="0"/>
           <p:nvPr/>
         </p:nvPicPr>
         <p:blipFill>
-          <a:blip r:embed="rId4">
+          <a:blip r:embed="rId3">
             <a:alphaModFix/>
           </a:blip>
           <a:stretch>
@@ -7628,7 +7953,170 @@
         </p:blipFill>
         <p:spPr>
           <a:xfrm>
-            <a:off x="2933700" y="152400"/>
+            <a:off x="1788012" y="548950"/>
+            <a:ext cx="4725724" cy="3544301"/>
+          </a:xfrm>
+          <a:prstGeom prst="rect">
+            <a:avLst/>
+          </a:prstGeom>
+          <a:noFill/>
+          <a:ln>
+            <a:noFill/>
+          </a:ln>
+        </p:spPr>
+      </p:pic>
+      <p:sp>
+        <p:nvSpPr>
+          <p:cNvPr id="106" name="Google Shape;106;p17"/>
+          <p:cNvSpPr txBox="1"/>
+          <p:nvPr/>
+        </p:nvSpPr>
+        <p:spPr>
+          <a:xfrm>
+            <a:off x="353950" y="4093250"/>
+            <a:ext cx="5775300" cy="1485300"/>
+          </a:xfrm>
+          <a:prstGeom prst="rect">
+            <a:avLst/>
+          </a:prstGeom>
+          <a:noFill/>
+          <a:ln>
+            <a:noFill/>
+          </a:ln>
+        </p:spPr>
+        <p:txBody>
+          <a:bodyPr anchorCtr="0" anchor="t" bIns="91425" lIns="91425" spcFirstLastPara="1" rIns="91425" wrap="square" tIns="91425">
+            <a:spAutoFit/>
+          </a:bodyPr>
+          <a:lstStyle/>
+          <a:p>
+            <a:pPr indent="0" lvl="0" marL="0" rtl="0" algn="l">
+              <a:spcBef>
+                <a:spcPts val="0"/>
+              </a:spcBef>
+              <a:spcAft>
+                <a:spcPts val="0"/>
+              </a:spcAft>
+              <a:buNone/>
+            </a:pPr>
+            <a:r>
+              <a:rPr b="1" lang="es-419" sz="1050">
+                <a:solidFill>
+                  <a:srgbClr val="0B0B0B"/>
+                </a:solidFill>
+                <a:highlight>
+                  <a:srgbClr val="FCFCFB"/>
+                </a:highlight>
+                <a:latin typeface="Roboto"/>
+                <a:ea typeface="Roboto"/>
+                <a:cs typeface="Roboto"/>
+                <a:sym typeface="Roboto"/>
+              </a:rPr>
+              <a:t>Distribución de fluorescencia EGFP para promotores individuales, validados por citometría de flujo. </a:t>
+            </a:r>
+            <a:r>
+              <a:rPr lang="es-419" sz="1050">
+                <a:solidFill>
+                  <a:srgbClr val="0B0B0B"/>
+                </a:solidFill>
+                <a:highlight>
+                  <a:srgbClr val="FCFCFB"/>
+                </a:highlight>
+                <a:latin typeface="Roboto"/>
+                <a:ea typeface="Roboto"/>
+                <a:cs typeface="Roboto"/>
+                <a:sym typeface="Roboto"/>
+              </a:rPr>
+              <a:t>Se generaron líneas celulares HEK293T-A2 estables integradas con el reportero EGFP bajo el control de un promotor individual, para 8 secuencias de la </a:t>
+            </a:r>
+            <a:r>
+              <a:rPr i="1" lang="es-419" sz="1050">
+                <a:solidFill>
+                  <a:srgbClr val="0B0B0B"/>
+                </a:solidFill>
+                <a:highlight>
+                  <a:srgbClr val="FCFCFB"/>
+                </a:highlight>
+                <a:latin typeface="Roboto"/>
+                <a:ea typeface="Roboto"/>
+                <a:cs typeface="Roboto"/>
+                <a:sym typeface="Roboto"/>
+              </a:rPr>
+              <a:t>library</a:t>
+            </a:r>
+            <a:r>
+              <a:rPr lang="es-419" sz="1050">
+                <a:solidFill>
+                  <a:srgbClr val="0B0B0B"/>
+                </a:solidFill>
+                <a:highlight>
+                  <a:srgbClr val="FCFCFB"/>
+                </a:highlight>
+                <a:latin typeface="Roboto"/>
+                <a:ea typeface="Roboto"/>
+                <a:cs typeface="Roboto"/>
+                <a:sym typeface="Roboto"/>
+              </a:rPr>
+              <a:t> (BTG1_1, ETS1_1, KIAA0753_1, LSM1_1, METAP2_1, PPP1R14B_3, TMEM87A_1, ZKSCAN2_1; n = 3 réplicas técnicas cada una) y un promotor de referencia de alta actividad (Strong). En cada panel se muestra la densidad de la señal de fluorescencia EGFP (escala logarítmica) del promotor correspondiente, superpuesta a la distribución de fondo de una población no transfectada (Control, gris).</a:t>
+            </a:r>
+            <a:r>
+              <a:rPr lang="es-419" sz="1100">
+                <a:solidFill>
+                  <a:schemeClr val="dk1"/>
+                </a:solidFill>
+              </a:rPr>
+              <a:t> </a:t>
+            </a:r>
+            <a:endParaRPr sz="1800">
+              <a:solidFill>
+                <a:schemeClr val="dk2"/>
+              </a:solidFill>
+            </a:endParaRPr>
+          </a:p>
+        </p:txBody>
+      </p:sp>
+    </p:spTree>
+  </p:cSld>
+  <p:clrMapOvr>
+    <a:masterClrMapping/>
+  </p:clrMapOvr>
+</p:sld>
+</file>
+
+<file path=ppt/slides/slide6.xml><?xml version="1.0" encoding="utf-8"?>
+<p:sld xmlns:a="http://schemas.openxmlformats.org/drawingml/2006/main" xmlns:r="http://schemas.openxmlformats.org/officeDocument/2006/relationships" xmlns:mc="http://schemas.openxmlformats.org/markup-compatibility/2006" xmlns:mv="urn:schemas-microsoft-com:mac:vml" xmlns:p="http://schemas.openxmlformats.org/presentationml/2006/main" xmlns:c="http://schemas.openxmlformats.org/drawingml/2006/chart" xmlns:dgm="http://schemas.openxmlformats.org/drawingml/2006/diagram" xmlns:o="urn:schemas-microsoft-com:office:office" xmlns:v="urn:schemas-microsoft-com:vml" xmlns:pvml="urn:schemas-microsoft-com:office:powerpoint" xmlns:com="http://schemas.openxmlformats.org/drawingml/2006/compatibility" xmlns:p14="http://schemas.microsoft.com/office/powerpoint/2010/main" xmlns:p15="http://schemas.microsoft.com/office/powerpoint/2012/main" xmlns:ahyp="http://schemas.microsoft.com/office/drawing/2018/hyperlinkcolor">
+  <p:cSld>
+    <p:spTree>
+      <p:nvGrpSpPr>
+        <p:cNvPr id="110" name="Shape 110"/>
+        <p:cNvGrpSpPr/>
+        <p:nvPr/>
+      </p:nvGrpSpPr>
+      <p:grpSpPr>
+        <a:xfrm>
+          <a:off x="0" y="0"/>
+          <a:ext cx="0" cy="0"/>
+          <a:chOff x="0" y="0"/>
+          <a:chExt cx="0" cy="0"/>
+        </a:xfrm>
+      </p:grpSpPr>
+      <p:pic>
+        <p:nvPicPr>
+          <p:cNvPr id="111" name="Google Shape;111;p18"/>
+          <p:cNvPicPr preferRelativeResize="0"/>
+          <p:nvPr/>
+        </p:nvPicPr>
+        <p:blipFill>
+          <a:blip r:embed="rId3">
+            <a:alphaModFix/>
+          </a:blip>
+          <a:stretch>
+            <a:fillRect/>
+          </a:stretch>
+        </p:blipFill>
+        <p:spPr>
+          <a:xfrm>
+            <a:off x="-133350" y="97100"/>
             <a:ext cx="3419475" cy="2638425"/>
           </a:xfrm>
           <a:prstGeom prst="rect">
@@ -7642,12 +8130,12 @@
       </p:pic>
       <p:pic>
         <p:nvPicPr>
-          <p:cNvPr id="101" name="Google Shape;101;p16"/>
+          <p:cNvPr id="112" name="Google Shape;112;p18"/>
           <p:cNvPicPr preferRelativeResize="0"/>
           <p:nvPr/>
         </p:nvPicPr>
         <p:blipFill>
-          <a:blip r:embed="rId5">
+          <a:blip r:embed="rId4">
             <a:alphaModFix/>
           </a:blip>
           <a:stretch>
@@ -7670,14 +8158,14 @@
       </p:pic>
       <p:sp>
         <p:nvSpPr>
-          <p:cNvPr id="102" name="Google Shape;102;p16"/>
+          <p:cNvPr id="113" name="Google Shape;113;p18"/>
           <p:cNvSpPr txBox="1"/>
           <p:nvPr/>
         </p:nvSpPr>
         <p:spPr>
           <a:xfrm>
             <a:off x="735375" y="3120725"/>
-            <a:ext cx="5866500" cy="2401200"/>
+            <a:ext cx="5866500" cy="2216400"/>
           </a:xfrm>
           <a:prstGeom prst="rect">
             <a:avLst/>
@@ -7716,7 +8204,39 @@
                   <a:schemeClr val="dk2"/>
                 </a:solidFill>
               </a:rPr>
-              <a:t>  Histogramas representativos de la reconstrucción de las distribuciones de expresión para secuencias individuales de la library. Las barras indican la frecuencia de lecturas normalizadas en cada fracción de células recolectada. Cada color representa la distribución de un promotor distinto, mientras que las dos tonalidades reflejan los resultados de cada réplica experimental. (B) Perfiles de densidad de fluorescencia de EGFP obtenidos por citometría de flujo para una selección de promotores integrados de forma individual (n = 3 réplicas técnicas). (C) Correlación entre la media de expresión calculada a partir de los datos discretizados de la </a:t>
+              <a:t>  (A) </a:t>
+            </a:r>
+            <a:r>
+              <a:rPr lang="es-419" sz="1200">
+                <a:solidFill>
+                  <a:schemeClr val="dk2"/>
+                </a:solidFill>
+              </a:rPr>
+              <a:t>Perfiles de densidad de fluorescencia de EGFP obtenidos por citometría de flujo para una selección de promotores integrados de forma individual (n = 3 réplicas técnicas).</a:t>
+            </a:r>
+            <a:r>
+              <a:rPr lang="es-419" sz="1200">
+                <a:solidFill>
+                  <a:schemeClr val="dk2"/>
+                </a:solidFill>
+              </a:rPr>
+              <a:t> (B) </a:t>
+            </a:r>
+            <a:r>
+              <a:rPr lang="es-419" sz="1200">
+                <a:solidFill>
+                  <a:schemeClr val="dk2"/>
+                </a:solidFill>
+              </a:rPr>
+              <a:t>Histogramas representativos de la reconstrucción de las distribuciones de expresión para secuencias individuales de la library. Las barras indican la frecuencia de lecturas normalizadas en cada fracción de células recolectada. Cada color representa la distribución de un promotor distinto, en una única de las réplicas experimentales</a:t>
+            </a:r>
+            <a:r>
+              <a:rPr lang="es-419" sz="1200">
+                <a:solidFill>
+                  <a:schemeClr val="dk2"/>
+                </a:solidFill>
+              </a:rPr>
+              <a:t>(C) Correlación entre la media de expresión calculada a partir de los datos discretizados de la </a:t>
             </a:r>
             <a:r>
               <a:rPr i="1" lang="es-419" sz="1200">
@@ -7742,6 +8262,34 @@
           </a:p>
         </p:txBody>
       </p:sp>
+      <p:pic>
+        <p:nvPicPr>
+          <p:cNvPr id="114" name="Google Shape;114;p18" title="panel_b_histograma_gates_ejemplo.jpg"/>
+          <p:cNvPicPr preferRelativeResize="0"/>
+          <p:nvPr/>
+        </p:nvPicPr>
+        <p:blipFill>
+          <a:blip r:embed="rId5">
+            <a:alphaModFix/>
+          </a:blip>
+          <a:stretch>
+            <a:fillRect/>
+          </a:stretch>
+        </p:blipFill>
+        <p:spPr>
+          <a:xfrm>
+            <a:off x="3438525" y="152400"/>
+            <a:ext cx="2914652" cy="2185989"/>
+          </a:xfrm>
+          <a:prstGeom prst="rect">
+            <a:avLst/>
+          </a:prstGeom>
+          <a:noFill/>
+          <a:ln>
+            <a:noFill/>
+          </a:ln>
+        </p:spPr>
+      </p:pic>
     </p:spTree>
   </p:cSld>
   <p:clrMapOvr>
@@ -7750,12 +8298,12 @@
 </p:sld>
 </file>
 
-<file path=ppt/slides/slide5.xml><?xml version="1.0" encoding="utf-8"?>
+<file path=ppt/slides/slide7.xml><?xml version="1.0" encoding="utf-8"?>
 <p:sld xmlns:a="http://schemas.openxmlformats.org/drawingml/2006/main" xmlns:r="http://schemas.openxmlformats.org/officeDocument/2006/relationships" xmlns:mc="http://schemas.openxmlformats.org/markup-compatibility/2006" xmlns:mv="urn:schemas-microsoft-com:mac:vml" xmlns:p="http://schemas.openxmlformats.org/presentationml/2006/main" xmlns:c="http://schemas.openxmlformats.org/drawingml/2006/chart" xmlns:dgm="http://schemas.openxmlformats.org/drawingml/2006/diagram" xmlns:o="urn:schemas-microsoft-com:office:office" xmlns:v="urn:schemas-microsoft-com:vml" xmlns:pvml="urn:schemas-microsoft-com:office:powerpoint" xmlns:com="http://schemas.openxmlformats.org/drawingml/2006/compatibility" xmlns:p14="http://schemas.microsoft.com/office/powerpoint/2010/main" xmlns:p15="http://schemas.microsoft.com/office/powerpoint/2012/main" xmlns:ahyp="http://schemas.microsoft.com/office/drawing/2018/hyperlinkcolor">
   <p:cSld>
     <p:spTree>
       <p:nvGrpSpPr>
-        <p:cNvPr id="106" name="Shape 106"/>
+        <p:cNvPr id="118" name="Shape 118"/>
         <p:cNvGrpSpPr/>
         <p:nvPr/>
       </p:nvGrpSpPr>
@@ -7769,26 +8317,26 @@
       </p:grpSpPr>
       <p:grpSp>
         <p:nvGrpSpPr>
-          <p:cNvPr id="107" name="Google Shape;107;p17"/>
+          <p:cNvPr id="119" name="Google Shape;119;p19"/>
           <p:cNvGrpSpPr/>
           <p:nvPr/>
         </p:nvGrpSpPr>
         <p:grpSpPr>
           <a:xfrm>
-            <a:off x="6079523" y="5"/>
-            <a:ext cx="3000912" cy="2988263"/>
+            <a:off x="2391552" y="-2"/>
+            <a:ext cx="2391285" cy="2381206"/>
             <a:chOff x="86225" y="82225"/>
             <a:chExt cx="3256551" cy="3242825"/>
           </a:xfrm>
         </p:grpSpPr>
         <p:pic>
           <p:nvPicPr>
-            <p:cNvPr id="108" name="Google Shape;108;p17"/>
+            <p:cNvPr id="120" name="Google Shape;120;p19"/>
             <p:cNvPicPr preferRelativeResize="0"/>
             <p:nvPr/>
           </p:nvPicPr>
           <p:blipFill rotWithShape="1">
-            <a:blip r:embed="rId4">
+            <a:blip r:embed="rId3">
               <a:alphaModFix/>
             </a:blip>
             <a:srcRect b="0" l="744" r="0" t="970"/>
@@ -7810,7 +8358,7 @@
         </p:pic>
         <p:sp>
           <p:nvSpPr>
-            <p:cNvPr id="109" name="Google Shape;109;p17"/>
+            <p:cNvPr id="121" name="Google Shape;121;p19"/>
             <p:cNvSpPr txBox="1"/>
             <p:nvPr/>
           </p:nvSpPr>
@@ -7830,7 +8378,7 @@
             </a:ln>
           </p:spPr>
           <p:txBody>
-            <a:bodyPr anchorCtr="0" anchor="t" bIns="84250" lIns="84250" spcFirstLastPara="1" rIns="84250" wrap="square" tIns="84250">
+            <a:bodyPr anchorCtr="0" anchor="t" bIns="67150" lIns="67150" spcFirstLastPara="1" rIns="67150" wrap="square" tIns="67150">
               <a:spAutoFit/>
             </a:bodyPr>
             <a:lstStyle/>
@@ -7845,14 +8393,14 @@
                 <a:buNone/>
               </a:pPr>
               <a:r>
-                <a:rPr lang="es-419" sz="1014">
+                <a:rPr lang="es-419" sz="808">
                   <a:solidFill>
                     <a:schemeClr val="dk2"/>
                   </a:solidFill>
                 </a:rPr>
                 <a:t>9756</a:t>
               </a:r>
-              <a:endParaRPr sz="1014">
+              <a:endParaRPr sz="808">
                 <a:solidFill>
                   <a:schemeClr val="dk2"/>
                 </a:solidFill>
@@ -7862,7 +8410,7 @@
         </p:sp>
         <p:sp>
           <p:nvSpPr>
-            <p:cNvPr id="110" name="Google Shape;110;p17"/>
+            <p:cNvPr id="122" name="Google Shape;122;p19"/>
             <p:cNvSpPr txBox="1"/>
             <p:nvPr/>
           </p:nvSpPr>
@@ -7880,7 +8428,7 @@
             </a:ln>
           </p:spPr>
           <p:txBody>
-            <a:bodyPr anchorCtr="0" anchor="t" bIns="84250" lIns="84250" spcFirstLastPara="1" rIns="84250" wrap="square" tIns="84250">
+            <a:bodyPr anchorCtr="0" anchor="t" bIns="67150" lIns="67150" spcFirstLastPara="1" rIns="67150" wrap="square" tIns="67150">
               <a:spAutoFit/>
             </a:bodyPr>
             <a:lstStyle/>
@@ -7895,14 +8443,14 @@
                 <a:buNone/>
               </a:pPr>
               <a:r>
-                <a:rPr lang="es-419" sz="1106">
+                <a:rPr lang="es-419" sz="881">
                   <a:solidFill>
                     <a:schemeClr val="dk2"/>
                   </a:solidFill>
                 </a:rPr>
                 <a:t>Library</a:t>
               </a:r>
-              <a:endParaRPr sz="1106">
+              <a:endParaRPr sz="881">
                 <a:solidFill>
                   <a:schemeClr val="dk2"/>
                 </a:solidFill>
@@ -7912,7 +8460,7 @@
         </p:sp>
         <p:sp>
           <p:nvSpPr>
-            <p:cNvPr id="111" name="Google Shape;111;p17"/>
+            <p:cNvPr id="123" name="Google Shape;123;p19"/>
             <p:cNvSpPr txBox="1"/>
             <p:nvPr/>
           </p:nvSpPr>
@@ -7930,7 +8478,7 @@
             </a:ln>
           </p:spPr>
           <p:txBody>
-            <a:bodyPr anchorCtr="0" anchor="t" bIns="84250" lIns="84250" spcFirstLastPara="1" rIns="84250" wrap="square" tIns="84250">
+            <a:bodyPr anchorCtr="0" anchor="t" bIns="67150" lIns="67150" spcFirstLastPara="1" rIns="67150" wrap="square" tIns="67150">
               <a:spAutoFit/>
             </a:bodyPr>
             <a:lstStyle/>
@@ -7945,14 +8493,14 @@
                 <a:buNone/>
               </a:pPr>
               <a:r>
-                <a:rPr lang="es-419" sz="1106">
+                <a:rPr lang="es-419" sz="881">
                   <a:solidFill>
                     <a:schemeClr val="dk2"/>
                   </a:solidFill>
                 </a:rPr>
                 <a:t>Réplica 1 </a:t>
               </a:r>
-              <a:endParaRPr sz="1106">
+              <a:endParaRPr sz="881">
                 <a:solidFill>
                   <a:schemeClr val="dk2"/>
                 </a:solidFill>
@@ -7962,7 +8510,7 @@
         </p:sp>
         <p:sp>
           <p:nvSpPr>
-            <p:cNvPr id="112" name="Google Shape;112;p17"/>
+            <p:cNvPr id="124" name="Google Shape;124;p19"/>
             <p:cNvSpPr txBox="1"/>
             <p:nvPr/>
           </p:nvSpPr>
@@ -7980,7 +8528,7 @@
             </a:ln>
           </p:spPr>
           <p:txBody>
-            <a:bodyPr anchorCtr="0" anchor="t" bIns="84250" lIns="84250" spcFirstLastPara="1" rIns="84250" wrap="square" tIns="84250">
+            <a:bodyPr anchorCtr="0" anchor="t" bIns="67150" lIns="67150" spcFirstLastPara="1" rIns="67150" wrap="square" tIns="67150">
               <a:spAutoFit/>
             </a:bodyPr>
             <a:lstStyle/>
@@ -7995,14 +8543,14 @@
                 <a:buNone/>
               </a:pPr>
               <a:r>
-                <a:rPr lang="es-419" sz="1106">
+                <a:rPr lang="es-419" sz="881">
                   <a:solidFill>
                     <a:schemeClr val="dk2"/>
                   </a:solidFill>
                 </a:rPr>
                 <a:t>Réplica 2 </a:t>
               </a:r>
-              <a:endParaRPr sz="1106">
+              <a:endParaRPr sz="881">
                 <a:solidFill>
                   <a:schemeClr val="dk2"/>
                 </a:solidFill>
@@ -8012,7 +8560,7 @@
         </p:sp>
         <p:sp>
           <p:nvSpPr>
-            <p:cNvPr id="113" name="Google Shape;113;p17"/>
+            <p:cNvPr id="125" name="Google Shape;125;p19"/>
             <p:cNvSpPr txBox="1"/>
             <p:nvPr/>
           </p:nvSpPr>
@@ -8032,7 +8580,7 @@
             </a:ln>
           </p:spPr>
           <p:txBody>
-            <a:bodyPr anchorCtr="0" anchor="t" bIns="84250" lIns="84250" spcFirstLastPara="1" rIns="84250" wrap="square" tIns="84250">
+            <a:bodyPr anchorCtr="0" anchor="t" bIns="67150" lIns="67150" spcFirstLastPara="1" rIns="67150" wrap="square" tIns="67150">
               <a:spAutoFit/>
             </a:bodyPr>
             <a:lstStyle/>
@@ -8047,14 +8595,14 @@
                 <a:buNone/>
               </a:pPr>
               <a:r>
-                <a:rPr lang="es-419" sz="1014">
+                <a:rPr lang="es-419" sz="808">
                   <a:solidFill>
                     <a:schemeClr val="dk2"/>
                   </a:solidFill>
                 </a:rPr>
                 <a:t>835</a:t>
               </a:r>
-              <a:endParaRPr sz="1014">
+              <a:endParaRPr sz="808">
                 <a:solidFill>
                   <a:schemeClr val="dk2"/>
                 </a:solidFill>
@@ -8064,7 +8612,7 @@
         </p:sp>
         <p:sp>
           <p:nvSpPr>
-            <p:cNvPr id="114" name="Google Shape;114;p17"/>
+            <p:cNvPr id="126" name="Google Shape;126;p19"/>
             <p:cNvSpPr txBox="1"/>
             <p:nvPr/>
           </p:nvSpPr>
@@ -8084,7 +8632,7 @@
             </a:ln>
           </p:spPr>
           <p:txBody>
-            <a:bodyPr anchorCtr="0" anchor="t" bIns="84250" lIns="84250" spcFirstLastPara="1" rIns="84250" wrap="square" tIns="84250">
+            <a:bodyPr anchorCtr="0" anchor="t" bIns="67150" lIns="67150" spcFirstLastPara="1" rIns="67150" wrap="square" tIns="67150">
               <a:spAutoFit/>
             </a:bodyPr>
             <a:lstStyle/>
@@ -8099,14 +8647,14 @@
                 <a:buNone/>
               </a:pPr>
               <a:r>
-                <a:rPr lang="es-419" sz="1014">
+                <a:rPr lang="es-419" sz="808">
                   <a:solidFill>
                     <a:schemeClr val="dk2"/>
                   </a:solidFill>
                 </a:rPr>
                 <a:t>10401</a:t>
               </a:r>
-              <a:endParaRPr sz="1014">
+              <a:endParaRPr sz="808">
                 <a:solidFill>
                   <a:schemeClr val="dk2"/>
                 </a:solidFill>
@@ -8116,7 +8664,7 @@
         </p:sp>
         <p:sp>
           <p:nvSpPr>
-            <p:cNvPr id="115" name="Google Shape;115;p17"/>
+            <p:cNvPr id="127" name="Google Shape;127;p19"/>
             <p:cNvSpPr txBox="1"/>
             <p:nvPr/>
           </p:nvSpPr>
@@ -8136,7 +8684,7 @@
             </a:ln>
           </p:spPr>
           <p:txBody>
-            <a:bodyPr anchorCtr="0" anchor="t" bIns="84250" lIns="84250" spcFirstLastPara="1" rIns="84250" wrap="square" tIns="84250">
+            <a:bodyPr anchorCtr="0" anchor="t" bIns="67150" lIns="67150" spcFirstLastPara="1" rIns="67150" wrap="square" tIns="67150">
               <a:spAutoFit/>
             </a:bodyPr>
             <a:lstStyle/>
@@ -8151,19 +8699,19 @@
                 <a:buClr>
                   <a:schemeClr val="dk1"/>
                 </a:buClr>
-                <a:buSzPts val="1100"/>
+                <a:buSzPts val="877"/>
                 <a:buFont typeface="Arial"/>
                 <a:buNone/>
               </a:pPr>
               <a:r>
-                <a:rPr lang="es-419" sz="1014">
+                <a:rPr lang="es-419" sz="808">
                   <a:solidFill>
                     <a:schemeClr val="dk2"/>
                   </a:solidFill>
                 </a:rPr>
                 <a:t>2919</a:t>
               </a:r>
-              <a:endParaRPr sz="1014">
+              <a:endParaRPr sz="808">
                 <a:solidFill>
                   <a:schemeClr val="dk2"/>
                 </a:solidFill>
@@ -8174,14 +8722,14 @@
       </p:grpSp>
       <p:sp>
         <p:nvSpPr>
-          <p:cNvPr id="116" name="Google Shape;116;p17"/>
+          <p:cNvPr id="128" name="Google Shape;128;p19"/>
           <p:cNvSpPr txBox="1"/>
           <p:nvPr/>
         </p:nvSpPr>
         <p:spPr>
           <a:xfrm>
-            <a:off x="114750" y="3566075"/>
-            <a:ext cx="8609100" cy="1954800"/>
+            <a:off x="5057225" y="91400"/>
+            <a:ext cx="3948900" cy="4051200"/>
           </a:xfrm>
           <a:prstGeom prst="rect">
             <a:avLst/>
@@ -8244,7 +8792,7 @@
                   <a:schemeClr val="dk1"/>
                 </a:solidFill>
               </a:rPr>
-              <a:t> Gráfico de dispersión que muestra la correlación de la media de expresión entre las dos réplicas experimentales antes (A) y después (B) de aplicar los filtros de consistencia (coeficientes de </a:t>
+              <a:t> Gráfico de dispersión que muestra la correlación de la media de expresión entre las dos réplicas experimentales antes (A) y después (A confianza alta, y B) de aplicar los filtros de consistencia (coeficientes de </a:t>
             </a:r>
             <a:r>
               <a:rPr i="1" lang="es-419" sz="1200">
@@ -8294,7 +8842,39 @@
               </a:rPr>
               <a:t> Representación del subconjunto final de 12214 promotores de alta confianza seleccionados para los análisis subsiguientes, detallando su presencia por réplicas.</a:t>
             </a:r>
-            <a:endParaRPr sz="1200">
+            <a:r>
+              <a:rPr b="1" lang="es-419" sz="1200">
+                <a:solidFill>
+                  <a:schemeClr val="dk1"/>
+                </a:solidFill>
+              </a:rPr>
+              <a:t>(D) </a:t>
+            </a:r>
+            <a:r>
+              <a:rPr lang="es-419" sz="1200">
+                <a:solidFill>
+                  <a:schemeClr val="dk1"/>
+                </a:solidFill>
+              </a:rPr>
+              <a:t>Gráfico de dispersión que muestra la correlación de la varianza de expresión entre las dos réplicas experimentales después de aplicar los filtros de consistencia (coeficientes de </a:t>
+            </a:r>
+            <a:r>
+              <a:rPr i="1" lang="es-419" sz="1200">
+                <a:solidFill>
+                  <a:schemeClr val="dk1"/>
+                </a:solidFill>
+              </a:rPr>
+              <a:t>Pearson</a:t>
+            </a:r>
+            <a:r>
+              <a:rPr lang="es-419" sz="1200">
+                <a:solidFill>
+                  <a:schemeClr val="dk1"/>
+                </a:solidFill>
+              </a:rPr>
+              <a:t> 0.31). </a:t>
+            </a:r>
+            <a:endParaRPr b="1" sz="1200">
               <a:solidFill>
                 <a:schemeClr val="dk1"/>
               </a:solidFill>
@@ -8319,26 +8899,26 @@
       </p:sp>
       <p:grpSp>
         <p:nvGrpSpPr>
-          <p:cNvPr id="117" name="Google Shape;117;p17"/>
+          <p:cNvPr id="129" name="Google Shape;129;p19"/>
           <p:cNvGrpSpPr/>
           <p:nvPr/>
         </p:nvGrpSpPr>
         <p:grpSpPr>
           <a:xfrm>
-            <a:off x="2" y="-3"/>
-            <a:ext cx="3001132" cy="2796036"/>
+            <a:off x="9" y="167053"/>
+            <a:ext cx="2391724" cy="2228275"/>
             <a:chOff x="208625" y="-206579"/>
             <a:chExt cx="4062721" cy="3785076"/>
           </a:xfrm>
         </p:grpSpPr>
         <p:pic>
           <p:nvPicPr>
-            <p:cNvPr id="118" name="Google Shape;118;p17" title="mean_replicates_prefilter.jpg"/>
+            <p:cNvPr id="130" name="Google Shape;130;p19" title="mean_replicates_prefilter.jpg"/>
             <p:cNvPicPr preferRelativeResize="0"/>
             <p:nvPr/>
           </p:nvPicPr>
           <p:blipFill rotWithShape="1">
-            <a:blip r:embed="rId5">
+            <a:blip r:embed="rId4">
               <a:alphaModFix/>
             </a:blip>
             <a:srcRect b="0" l="87149" r="0" t="0"/>
@@ -8360,12 +8940,12 @@
         </p:pic>
         <p:pic>
           <p:nvPicPr>
-            <p:cNvPr id="119" name="Google Shape;119;p17" title="mean_replicates_prefilter.jpg"/>
+            <p:cNvPr id="131" name="Google Shape;131;p19" title="mean_replicates_prefilter.jpg"/>
             <p:cNvPicPr preferRelativeResize="0"/>
             <p:nvPr/>
           </p:nvPicPr>
           <p:blipFill rotWithShape="1">
-            <a:blip r:embed="rId5">
+            <a:blip r:embed="rId4">
               <a:alphaModFix/>
             </a:blip>
             <a:srcRect b="0" l="0" r="31371" t="0"/>
@@ -8387,12 +8967,12 @@
         </p:pic>
         <p:pic>
           <p:nvPicPr>
-            <p:cNvPr id="120" name="Google Shape;120;p17" title="mean_replicates_prefilter.jpg"/>
+            <p:cNvPr id="132" name="Google Shape;132;p19" title="mean_replicates_prefilter.jpg"/>
             <p:cNvPicPr preferRelativeResize="0"/>
             <p:nvPr/>
           </p:nvPicPr>
           <p:blipFill rotWithShape="1">
-            <a:blip r:embed="rId5">
+            <a:blip r:embed="rId4">
               <a:alphaModFix/>
             </a:blip>
             <a:srcRect b="38266" l="69245" r="11846" t="43974"/>
@@ -8415,7 +8995,35 @@
       </p:grpSp>
       <p:pic>
         <p:nvPicPr>
-          <p:cNvPr id="121" name="Google Shape;121;p17" title="mean_replicates_postfilter.jpg"/>
+          <p:cNvPr id="133" name="Google Shape;133;p19" title="mean_replicates_postfilter.jpg"/>
+          <p:cNvPicPr preferRelativeResize="0"/>
+          <p:nvPr/>
+        </p:nvPicPr>
+        <p:blipFill>
+          <a:blip r:embed="rId5">
+            <a:alphaModFix/>
+          </a:blip>
+          <a:stretch>
+            <a:fillRect/>
+          </a:stretch>
+        </p:blipFill>
+        <p:spPr>
+          <a:xfrm>
+            <a:off x="40551" y="2395181"/>
+            <a:ext cx="2310431" cy="2228072"/>
+          </a:xfrm>
+          <a:prstGeom prst="rect">
+            <a:avLst/>
+          </a:prstGeom>
+          <a:noFill/>
+          <a:ln>
+            <a:noFill/>
+          </a:ln>
+        </p:spPr>
+      </p:pic>
+      <p:pic>
+        <p:nvPicPr>
+          <p:cNvPr id="134" name="Google Shape;134;p19" title="panel_d_var_replicates.jpg"/>
           <p:cNvPicPr preferRelativeResize="0"/>
           <p:nvPr/>
         </p:nvPicPr>
@@ -8429,8 +9037,8 @@
         </p:blipFill>
         <p:spPr>
           <a:xfrm>
-            <a:off x="3045238" y="6"/>
-            <a:ext cx="2899328" cy="2795973"/>
+            <a:off x="2513125" y="2371369"/>
+            <a:ext cx="2391726" cy="2306479"/>
           </a:xfrm>
           <a:prstGeom prst="rect">
             <a:avLst/>

--- a/docs/Fig R1.pptx
+++ b/docs/Fig R1.pptx
@@ -53,7 +53,7 @@
         <a:srgbClr val="000000"/>
       </a:buClr>
       <a:buFont typeface="Arial"/>
-      <a:defRPr b="0" i="0" sz="1400" u="none" cap="none" strike="noStrike">
+      <a:defRPr b="0" i="0" spc="0" sz="1400" u="none" cap="none" strike="noStrike">
         <a:solidFill>
           <a:srgbClr val="000000"/>
         </a:solidFill>
@@ -77,7 +77,7 @@
         <a:srgbClr val="000000"/>
       </a:buClr>
       <a:buFont typeface="Arial"/>
-      <a:defRPr b="0" i="0" sz="1400" u="none" cap="none" strike="noStrike">
+      <a:defRPr b="0" i="0" spc="0" sz="1400" u="none" cap="none" strike="noStrike">
         <a:solidFill>
           <a:srgbClr val="000000"/>
         </a:solidFill>
@@ -101,7 +101,7 @@
         <a:srgbClr val="000000"/>
       </a:buClr>
       <a:buFont typeface="Arial"/>
-      <a:defRPr b="0" i="0" sz="1400" u="none" cap="none" strike="noStrike">
+      <a:defRPr b="0" i="0" spc="0" sz="1400" u="none" cap="none" strike="noStrike">
         <a:solidFill>
           <a:srgbClr val="000000"/>
         </a:solidFill>
@@ -125,7 +125,7 @@
         <a:srgbClr val="000000"/>
       </a:buClr>
       <a:buFont typeface="Arial"/>
-      <a:defRPr b="0" i="0" sz="1400" u="none" cap="none" strike="noStrike">
+      <a:defRPr b="0" i="0" spc="0" sz="1400" u="none" cap="none" strike="noStrike">
         <a:solidFill>
           <a:srgbClr val="000000"/>
         </a:solidFill>
@@ -149,7 +149,7 @@
         <a:srgbClr val="000000"/>
       </a:buClr>
       <a:buFont typeface="Arial"/>
-      <a:defRPr b="0" i="0" sz="1400" u="none" cap="none" strike="noStrike">
+      <a:defRPr b="0" i="0" spc="0" sz="1400" u="none" cap="none" strike="noStrike">
         <a:solidFill>
           <a:srgbClr val="000000"/>
         </a:solidFill>
@@ -173,7 +173,7 @@
         <a:srgbClr val="000000"/>
       </a:buClr>
       <a:buFont typeface="Arial"/>
-      <a:defRPr b="0" i="0" sz="1400" u="none" cap="none" strike="noStrike">
+      <a:defRPr b="0" i="0" spc="0" sz="1400" u="none" cap="none" strike="noStrike">
         <a:solidFill>
           <a:srgbClr val="000000"/>
         </a:solidFill>
@@ -197,7 +197,7 @@
         <a:srgbClr val="000000"/>
       </a:buClr>
       <a:buFont typeface="Arial"/>
-      <a:defRPr b="0" i="0" sz="1400" u="none" cap="none" strike="noStrike">
+      <a:defRPr b="0" i="0" spc="0" sz="1400" u="none" cap="none" strike="noStrike">
         <a:solidFill>
           <a:srgbClr val="000000"/>
         </a:solidFill>
@@ -221,7 +221,7 @@
         <a:srgbClr val="000000"/>
       </a:buClr>
       <a:buFont typeface="Arial"/>
-      <a:defRPr b="0" i="0" sz="1400" u="none" cap="none" strike="noStrike">
+      <a:defRPr b="0" i="0" spc="0" sz="1400" u="none" cap="none" strike="noStrike">
         <a:solidFill>
           <a:srgbClr val="000000"/>
         </a:solidFill>
@@ -245,7 +245,7 @@
         <a:srgbClr val="000000"/>
       </a:buClr>
       <a:buFont typeface="Arial"/>
-      <a:defRPr b="0" i="0" sz="1400" u="none" cap="none" strike="noStrike">
+      <a:defRPr b="0" i="0" spc="0" sz="1400" u="none" cap="none" strike="noStrike">
         <a:solidFill>
           <a:srgbClr val="000000"/>
         </a:solidFill>
@@ -495,7 +495,7 @@
         <a:srgbClr val="000000"/>
       </a:buClr>
       <a:buFont typeface="Arial"/>
-      <a:defRPr b="0" i="0" sz="1400" u="none" cap="none" strike="noStrike">
+      <a:defRPr b="0" i="0" spc="0" sz="1400" u="none" cap="none" strike="noStrike">
         <a:solidFill>
           <a:srgbClr val="000000"/>
         </a:solidFill>
@@ -519,7 +519,7 @@
         <a:srgbClr val="000000"/>
       </a:buClr>
       <a:buFont typeface="Arial"/>
-      <a:defRPr b="0" i="0" sz="1400" u="none" cap="none" strike="noStrike">
+      <a:defRPr b="0" i="0" spc="0" sz="1400" u="none" cap="none" strike="noStrike">
         <a:solidFill>
           <a:srgbClr val="000000"/>
         </a:solidFill>
@@ -543,7 +543,7 @@
         <a:srgbClr val="000000"/>
       </a:buClr>
       <a:buFont typeface="Arial"/>
-      <a:defRPr b="0" i="0" sz="1400" u="none" cap="none" strike="noStrike">
+      <a:defRPr b="0" i="0" spc="0" sz="1400" u="none" cap="none" strike="noStrike">
         <a:solidFill>
           <a:srgbClr val="000000"/>
         </a:solidFill>
@@ -567,7 +567,7 @@
         <a:srgbClr val="000000"/>
       </a:buClr>
       <a:buFont typeface="Arial"/>
-      <a:defRPr b="0" i="0" sz="1400" u="none" cap="none" strike="noStrike">
+      <a:defRPr b="0" i="0" spc="0" sz="1400" u="none" cap="none" strike="noStrike">
         <a:solidFill>
           <a:srgbClr val="000000"/>
         </a:solidFill>
@@ -591,7 +591,7 @@
         <a:srgbClr val="000000"/>
       </a:buClr>
       <a:buFont typeface="Arial"/>
-      <a:defRPr b="0" i="0" sz="1400" u="none" cap="none" strike="noStrike">
+      <a:defRPr b="0" i="0" spc="0" sz="1400" u="none" cap="none" strike="noStrike">
         <a:solidFill>
           <a:srgbClr val="000000"/>
         </a:solidFill>
@@ -615,7 +615,7 @@
         <a:srgbClr val="000000"/>
       </a:buClr>
       <a:buFont typeface="Arial"/>
-      <a:defRPr b="0" i="0" sz="1400" u="none" cap="none" strike="noStrike">
+      <a:defRPr b="0" i="0" spc="0" sz="1400" u="none" cap="none" strike="noStrike">
         <a:solidFill>
           <a:srgbClr val="000000"/>
         </a:solidFill>
@@ -639,7 +639,7 @@
         <a:srgbClr val="000000"/>
       </a:buClr>
       <a:buFont typeface="Arial"/>
-      <a:defRPr b="0" i="0" sz="1400" u="none" cap="none" strike="noStrike">
+      <a:defRPr b="0" i="0" spc="0" sz="1400" u="none" cap="none" strike="noStrike">
         <a:solidFill>
           <a:srgbClr val="000000"/>
         </a:solidFill>
@@ -663,7 +663,7 @@
         <a:srgbClr val="000000"/>
       </a:buClr>
       <a:buFont typeface="Arial"/>
-      <a:defRPr b="0" i="0" sz="1400" u="none" cap="none" strike="noStrike">
+      <a:defRPr b="0" i="0" spc="0" sz="1400" u="none" cap="none" strike="noStrike">
         <a:solidFill>
           <a:srgbClr val="000000"/>
         </a:solidFill>
@@ -687,7 +687,7 @@
         <a:srgbClr val="000000"/>
       </a:buClr>
       <a:buFont typeface="Arial"/>
-      <a:defRPr b="0" i="0" sz="1400" u="none" cap="none" strike="noStrike">
+      <a:defRPr b="0" i="0" spc="0" sz="1400" u="none" cap="none" strike="noStrike">
         <a:solidFill>
           <a:srgbClr val="000000"/>
         </a:solidFill>
@@ -5378,7 +5378,7 @@
           <a:srgbClr val="000000"/>
         </a:buClr>
         <a:buFont typeface="Arial"/>
-        <a:defRPr b="0" i="0" sz="1400" u="none" cap="none" strike="noStrike">
+        <a:defRPr b="0" i="0" spc="0" sz="1400" u="none" cap="none" strike="noStrike">
           <a:solidFill>
             <a:srgbClr val="000000"/>
           </a:solidFill>
@@ -5402,7 +5402,7 @@
           <a:srgbClr val="000000"/>
         </a:buClr>
         <a:buFont typeface="Arial"/>
-        <a:defRPr b="0" i="0" sz="1400" u="none" cap="none" strike="noStrike">
+        <a:defRPr b="0" i="0" spc="0" sz="1400" u="none" cap="none" strike="noStrike">
           <a:solidFill>
             <a:srgbClr val="000000"/>
           </a:solidFill>
@@ -5426,7 +5426,7 @@
           <a:srgbClr val="000000"/>
         </a:buClr>
         <a:buFont typeface="Arial"/>
-        <a:defRPr b="0" i="0" sz="1400" u="none" cap="none" strike="noStrike">
+        <a:defRPr b="0" i="0" spc="0" sz="1400" u="none" cap="none" strike="noStrike">
           <a:solidFill>
             <a:srgbClr val="000000"/>
           </a:solidFill>
@@ -5450,7 +5450,7 @@
           <a:srgbClr val="000000"/>
         </a:buClr>
         <a:buFont typeface="Arial"/>
-        <a:defRPr b="0" i="0" sz="1400" u="none" cap="none" strike="noStrike">
+        <a:defRPr b="0" i="0" spc="0" sz="1400" u="none" cap="none" strike="noStrike">
           <a:solidFill>
             <a:srgbClr val="000000"/>
           </a:solidFill>
@@ -5474,7 +5474,7 @@
           <a:srgbClr val="000000"/>
         </a:buClr>
         <a:buFont typeface="Arial"/>
-        <a:defRPr b="0" i="0" sz="1400" u="none" cap="none" strike="noStrike">
+        <a:defRPr b="0" i="0" spc="0" sz="1400" u="none" cap="none" strike="noStrike">
           <a:solidFill>
             <a:srgbClr val="000000"/>
           </a:solidFill>
@@ -5498,7 +5498,7 @@
           <a:srgbClr val="000000"/>
         </a:buClr>
         <a:buFont typeface="Arial"/>
-        <a:defRPr b="0" i="0" sz="1400" u="none" cap="none" strike="noStrike">
+        <a:defRPr b="0" i="0" spc="0" sz="1400" u="none" cap="none" strike="noStrike">
           <a:solidFill>
             <a:srgbClr val="000000"/>
           </a:solidFill>
@@ -5522,7 +5522,7 @@
           <a:srgbClr val="000000"/>
         </a:buClr>
         <a:buFont typeface="Arial"/>
-        <a:defRPr b="0" i="0" sz="1400" u="none" cap="none" strike="noStrike">
+        <a:defRPr b="0" i="0" spc="0" sz="1400" u="none" cap="none" strike="noStrike">
           <a:solidFill>
             <a:srgbClr val="000000"/>
           </a:solidFill>
@@ -5546,7 +5546,7 @@
           <a:srgbClr val="000000"/>
         </a:buClr>
         <a:buFont typeface="Arial"/>
-        <a:defRPr b="0" i="0" sz="1400" u="none" cap="none" strike="noStrike">
+        <a:defRPr b="0" i="0" spc="0" sz="1400" u="none" cap="none" strike="noStrike">
           <a:solidFill>
             <a:srgbClr val="000000"/>
           </a:solidFill>
@@ -5570,7 +5570,7 @@
           <a:srgbClr val="000000"/>
         </a:buClr>
         <a:buFont typeface="Arial"/>
-        <a:defRPr b="0" i="0" sz="1400" u="none" cap="none" strike="noStrike">
+        <a:defRPr b="0" i="0" spc="0" sz="1400" u="none" cap="none" strike="noStrike">
           <a:solidFill>
             <a:srgbClr val="000000"/>
           </a:solidFill>
@@ -5607,7 +5607,7 @@
           <a:srgbClr val="000000"/>
         </a:buClr>
         <a:buFont typeface="Arial"/>
-        <a:defRPr b="0" i="0" sz="1400" u="none" cap="none" strike="noStrike">
+        <a:defRPr b="0" i="0" spc="0" sz="1400" u="none" cap="none" strike="noStrike">
           <a:solidFill>
             <a:srgbClr val="000000"/>
           </a:solidFill>
@@ -5631,7 +5631,7 @@
           <a:srgbClr val="000000"/>
         </a:buClr>
         <a:buFont typeface="Arial"/>
-        <a:defRPr b="0" i="0" sz="1400" u="none" cap="none" strike="noStrike">
+        <a:defRPr b="0" i="0" spc="0" sz="1400" u="none" cap="none" strike="noStrike">
           <a:solidFill>
             <a:srgbClr val="000000"/>
           </a:solidFill>
@@ -5655,7 +5655,7 @@
           <a:srgbClr val="000000"/>
         </a:buClr>
         <a:buFont typeface="Arial"/>
-        <a:defRPr b="0" i="0" sz="1400" u="none" cap="none" strike="noStrike">
+        <a:defRPr b="0" i="0" spc="0" sz="1400" u="none" cap="none" strike="noStrike">
           <a:solidFill>
             <a:srgbClr val="000000"/>
           </a:solidFill>
@@ -5679,7 +5679,7 @@
           <a:srgbClr val="000000"/>
         </a:buClr>
         <a:buFont typeface="Arial"/>
-        <a:defRPr b="0" i="0" sz="1400" u="none" cap="none" strike="noStrike">
+        <a:defRPr b="0" i="0" spc="0" sz="1400" u="none" cap="none" strike="noStrike">
           <a:solidFill>
             <a:srgbClr val="000000"/>
           </a:solidFill>
@@ -5703,7 +5703,7 @@
           <a:srgbClr val="000000"/>
         </a:buClr>
         <a:buFont typeface="Arial"/>
-        <a:defRPr b="0" i="0" sz="1400" u="none" cap="none" strike="noStrike">
+        <a:defRPr b="0" i="0" spc="0" sz="1400" u="none" cap="none" strike="noStrike">
           <a:solidFill>
             <a:srgbClr val="000000"/>
           </a:solidFill>
@@ -5727,7 +5727,7 @@
           <a:srgbClr val="000000"/>
         </a:buClr>
         <a:buFont typeface="Arial"/>
-        <a:defRPr b="0" i="0" sz="1400" u="none" cap="none" strike="noStrike">
+        <a:defRPr b="0" i="0" spc="0" sz="1400" u="none" cap="none" strike="noStrike">
           <a:solidFill>
             <a:srgbClr val="000000"/>
           </a:solidFill>
@@ -5751,7 +5751,7 @@
           <a:srgbClr val="000000"/>
         </a:buClr>
         <a:buFont typeface="Arial"/>
-        <a:defRPr b="0" i="0" sz="1400" u="none" cap="none" strike="noStrike">
+        <a:defRPr b="0" i="0" spc="0" sz="1400" u="none" cap="none" strike="noStrike">
           <a:solidFill>
             <a:srgbClr val="000000"/>
           </a:solidFill>
@@ -5775,7 +5775,7 @@
           <a:srgbClr val="000000"/>
         </a:buClr>
         <a:buFont typeface="Arial"/>
-        <a:defRPr b="0" i="0" sz="1400" u="none" cap="none" strike="noStrike">
+        <a:defRPr b="0" i="0" spc="0" sz="1400" u="none" cap="none" strike="noStrike">
           <a:solidFill>
             <a:srgbClr val="000000"/>
           </a:solidFill>
@@ -5799,7 +5799,7 @@
           <a:srgbClr val="000000"/>
         </a:buClr>
         <a:buFont typeface="Arial"/>
-        <a:defRPr b="0" i="0" sz="1400" u="none" cap="none" strike="noStrike">
+        <a:defRPr b="0" i="0" spc="0" sz="1400" u="none" cap="none" strike="noStrike">
           <a:solidFill>
             <a:srgbClr val="000000"/>
           </a:solidFill>
@@ -5836,7 +5836,7 @@
           <a:srgbClr val="000000"/>
         </a:buClr>
         <a:buFont typeface="Arial"/>
-        <a:defRPr b="0" i="0" sz="1400" u="none" cap="none" strike="noStrike">
+        <a:defRPr b="0" i="0" spc="0" sz="1400" u="none" cap="none" strike="noStrike">
           <a:solidFill>
             <a:srgbClr val="000000"/>
           </a:solidFill>
@@ -5860,7 +5860,7 @@
           <a:srgbClr val="000000"/>
         </a:buClr>
         <a:buFont typeface="Arial"/>
-        <a:defRPr b="0" i="0" sz="1400" u="none" cap="none" strike="noStrike">
+        <a:defRPr b="0" i="0" spc="0" sz="1400" u="none" cap="none" strike="noStrike">
           <a:solidFill>
             <a:srgbClr val="000000"/>
           </a:solidFill>
@@ -5884,7 +5884,7 @@
           <a:srgbClr val="000000"/>
         </a:buClr>
         <a:buFont typeface="Arial"/>
-        <a:defRPr b="0" i="0" sz="1400" u="none" cap="none" strike="noStrike">
+        <a:defRPr b="0" i="0" spc="0" sz="1400" u="none" cap="none" strike="noStrike">
           <a:solidFill>
             <a:srgbClr val="000000"/>
           </a:solidFill>
@@ -5908,7 +5908,7 @@
           <a:srgbClr val="000000"/>
         </a:buClr>
         <a:buFont typeface="Arial"/>
-        <a:defRPr b="0" i="0" sz="1400" u="none" cap="none" strike="noStrike">
+        <a:defRPr b="0" i="0" spc="0" sz="1400" u="none" cap="none" strike="noStrike">
           <a:solidFill>
             <a:srgbClr val="000000"/>
           </a:solidFill>
@@ -5932,7 +5932,7 @@
           <a:srgbClr val="000000"/>
         </a:buClr>
         <a:buFont typeface="Arial"/>
-        <a:defRPr b="0" i="0" sz="1400" u="none" cap="none" strike="noStrike">
+        <a:defRPr b="0" i="0" spc="0" sz="1400" u="none" cap="none" strike="noStrike">
           <a:solidFill>
             <a:srgbClr val="000000"/>
           </a:solidFill>
@@ -5956,7 +5956,7 @@
           <a:srgbClr val="000000"/>
         </a:buClr>
         <a:buFont typeface="Arial"/>
-        <a:defRPr b="0" i="0" sz="1400" u="none" cap="none" strike="noStrike">
+        <a:defRPr b="0" i="0" spc="0" sz="1400" u="none" cap="none" strike="noStrike">
           <a:solidFill>
             <a:srgbClr val="000000"/>
           </a:solidFill>
@@ -5980,7 +5980,7 @@
           <a:srgbClr val="000000"/>
         </a:buClr>
         <a:buFont typeface="Arial"/>
-        <a:defRPr b="0" i="0" sz="1400" u="none" cap="none" strike="noStrike">
+        <a:defRPr b="0" i="0" spc="0" sz="1400" u="none" cap="none" strike="noStrike">
           <a:solidFill>
             <a:srgbClr val="000000"/>
           </a:solidFill>
@@ -6004,7 +6004,7 @@
           <a:srgbClr val="000000"/>
         </a:buClr>
         <a:buFont typeface="Arial"/>
-        <a:defRPr b="0" i="0" sz="1400" u="none" cap="none" strike="noStrike">
+        <a:defRPr b="0" i="0" spc="0" sz="1400" u="none" cap="none" strike="noStrike">
           <a:solidFill>
             <a:srgbClr val="000000"/>
           </a:solidFill>
@@ -6028,7 +6028,7 @@
           <a:srgbClr val="000000"/>
         </a:buClr>
         <a:buFont typeface="Arial"/>
-        <a:defRPr b="0" i="0" sz="1400" u="none" cap="none" strike="noStrike">
+        <a:defRPr b="0" i="0" spc="0" sz="1400" u="none" cap="none" strike="noStrike">
           <a:solidFill>
             <a:srgbClr val="000000"/>
           </a:solidFill>

--- a/docs/Fig R1.pptx
+++ b/docs/Fig R1.pptx
@@ -9058,6 +9058,285 @@
 </file>
 
 <file path=ppt/theme/theme1.xml><?xml version="1.0" encoding="utf-8"?>
+<a:theme xmlns:a="http://schemas.openxmlformats.org/drawingml/2006/main" xmlns:r="http://schemas.openxmlformats.org/officeDocument/2006/relationships">
+  <a:themeElements>
+    <a:clrScheme name="Default">
+      <a:dk1>
+        <a:srgbClr val="000000"/>
+      </a:dk1>
+      <a:lt1>
+        <a:srgbClr val="FFFFFF"/>
+      </a:lt1>
+      <a:dk2>
+        <a:srgbClr val="158158"/>
+      </a:dk2>
+      <a:lt2>
+        <a:srgbClr val="F3F3F3"/>
+      </a:lt2>
+      <a:accent1>
+        <a:srgbClr val="058DC7"/>
+      </a:accent1>
+      <a:accent2>
+        <a:srgbClr val="50B432"/>
+      </a:accent2>
+      <a:accent3>
+        <a:srgbClr val="ED561B"/>
+      </a:accent3>
+      <a:accent4>
+        <a:srgbClr val="EDEF00"/>
+      </a:accent4>
+      <a:accent5>
+        <a:srgbClr val="24CBE5"/>
+      </a:accent5>
+      <a:accent6>
+        <a:srgbClr val="64E572"/>
+      </a:accent6>
+      <a:hlink>
+        <a:srgbClr val="2200CC"/>
+      </a:hlink>
+      <a:folHlink>
+        <a:srgbClr val="551A8B"/>
+      </a:folHlink>
+    </a:clrScheme>
+    <a:fontScheme name="Office">
+      <a:majorFont>
+        <a:latin typeface="Arial"/>
+        <a:ea typeface=""/>
+        <a:cs typeface=""/>
+        <a:font script="Jpan" typeface="ＭＳ Ｐゴシック"/>
+        <a:font script="Hang" typeface="맑은 고딕"/>
+        <a:font script="Hans" typeface="宋体"/>
+        <a:font script="Hant" typeface="新細明體"/>
+        <a:font script="Arab" typeface="Times New Roman"/>
+        <a:font script="Hebr" typeface="Times New Roman"/>
+        <a:font script="Thai" typeface="Angsana New"/>
+        <a:font script="Ethi" typeface="Nyala"/>
+        <a:font script="Beng" typeface="Vrinda"/>
+        <a:font script="Gujr" typeface="Shruti"/>
+        <a:font script="Khmr" typeface="MoolBoran"/>
+        <a:font script="Knda" typeface="Tunga"/>
+        <a:font script="Guru" typeface="Raavi"/>
+        <a:font script="Cans" typeface="Euphemia"/>
+        <a:font script="Cher" typeface="Plantagenet Cherokee"/>
+        <a:font script="Yiii" typeface="Microsoft Yi Baiti"/>
+        <a:font script="Tibt" typeface="Microsoft Himalaya"/>
+        <a:font script="Thaa" typeface="MV Boli"/>
+        <a:font script="Deva" typeface="Mangal"/>
+        <a:font script="Telu" typeface="Gautami"/>
+        <a:font script="Taml" typeface="Latha"/>
+        <a:font script="Syrc" typeface="Estrangelo Edessa"/>
+        <a:font script="Orya" typeface="Kalinga"/>
+        <a:font script="Mlym" typeface="Kartika"/>
+        <a:font script="Laoo" typeface="DokChampa"/>
+        <a:font script="Sinh" typeface="Iskoola Pota"/>
+        <a:font script="Mong" typeface="Mongolian Baiti"/>
+        <a:font script="Viet" typeface="Times New Roman"/>
+        <a:font script="Uigh" typeface="Microsoft Uighur"/>
+        <a:font script="Geor" typeface="Sylfaen"/>
+      </a:majorFont>
+      <a:minorFont>
+        <a:latin typeface="Arial"/>
+        <a:ea typeface=""/>
+        <a:cs typeface=""/>
+        <a:font script="Jpan" typeface="ＭＳ Ｐゴシック"/>
+        <a:font script="Hang" typeface="맑은 고딕"/>
+        <a:font script="Hans" typeface="宋体"/>
+        <a:font script="Hant" typeface="新細明體"/>
+        <a:font script="Arab" typeface="Arial"/>
+        <a:font script="Hebr" typeface="Arial"/>
+        <a:font script="Thai" typeface="Cordia New"/>
+        <a:font script="Ethi" typeface="Nyala"/>
+        <a:font script="Beng" typeface="Vrinda"/>
+        <a:font script="Gujr" typeface="Shruti"/>
+        <a:font script="Khmr" typeface="DaunPenh"/>
+        <a:font script="Knda" typeface="Tunga"/>
+        <a:font script="Guru" typeface="Raavi"/>
+        <a:font script="Cans" typeface="Euphemia"/>
+        <a:font script="Cher" typeface="Plantagenet Cherokee"/>
+        <a:font script="Yiii" typeface="Microsoft Yi Baiti"/>
+        <a:font script="Tibt" typeface="Microsoft Himalaya"/>
+        <a:font script="Thaa" typeface="MV Boli"/>
+        <a:font script="Deva" typeface="Mangal"/>
+        <a:font script="Telu" typeface="Gautami"/>
+        <a:font script="Taml" typeface="Latha"/>
+        <a:font script="Syrc" typeface="Estrangelo Edessa"/>
+        <a:font script="Orya" typeface="Kalinga"/>
+        <a:font script="Mlym" typeface="Kartika"/>
+        <a:font script="Laoo" typeface="DokChampa"/>
+        <a:font script="Sinh" typeface="Iskoola Pota"/>
+        <a:font script="Mong" typeface="Mongolian Baiti"/>
+        <a:font script="Viet" typeface="Arial"/>
+        <a:font script="Uigh" typeface="Microsoft Uighur"/>
+        <a:font script="Geor" typeface="Sylfaen"/>
+      </a:minorFont>
+    </a:fontScheme>
+    <a:fmtScheme name="Office">
+      <a:fillStyleLst>
+        <a:solidFill>
+          <a:schemeClr val="phClr"/>
+        </a:solidFill>
+        <a:gradFill rotWithShape="1">
+          <a:gsLst>
+            <a:gs pos="0">
+              <a:schemeClr val="phClr">
+                <a:tint val="50000"/>
+                <a:satMod val="300000"/>
+              </a:schemeClr>
+            </a:gs>
+            <a:gs pos="35000">
+              <a:schemeClr val="phClr">
+                <a:tint val="37000"/>
+                <a:satMod val="300000"/>
+              </a:schemeClr>
+            </a:gs>
+            <a:gs pos="100000">
+              <a:schemeClr val="phClr">
+                <a:tint val="15000"/>
+                <a:satMod val="350000"/>
+              </a:schemeClr>
+            </a:gs>
+          </a:gsLst>
+          <a:lin ang="16200000" scaled="1"/>
+        </a:gradFill>
+        <a:gradFill rotWithShape="1">
+          <a:gsLst>
+            <a:gs pos="0">
+              <a:schemeClr val="phClr">
+                <a:tint val="100000"/>
+                <a:shade val="100000"/>
+                <a:satMod val="130000"/>
+              </a:schemeClr>
+            </a:gs>
+            <a:gs pos="100000">
+              <a:schemeClr val="phClr">
+                <a:tint val="50000"/>
+                <a:shade val="100000"/>
+                <a:satMod val="350000"/>
+              </a:schemeClr>
+            </a:gs>
+          </a:gsLst>
+          <a:lin ang="16200000" scaled="0"/>
+        </a:gradFill>
+      </a:fillStyleLst>
+      <a:lnStyleLst>
+        <a:ln w="9525" cap="flat" cmpd="sng" algn="ctr">
+          <a:solidFill>
+            <a:schemeClr val="phClr">
+              <a:shade val="95000"/>
+              <a:satMod val="105000"/>
+            </a:schemeClr>
+          </a:solidFill>
+          <a:prstDash val="solid"/>
+        </a:ln>
+        <a:ln w="25400" cap="flat" cmpd="sng" algn="ctr">
+          <a:solidFill>
+            <a:schemeClr val="phClr"/>
+          </a:solidFill>
+          <a:prstDash val="solid"/>
+        </a:ln>
+        <a:ln w="38100" cap="flat" cmpd="sng" algn="ctr">
+          <a:solidFill>
+            <a:schemeClr val="phClr"/>
+          </a:solidFill>
+          <a:prstDash val="solid"/>
+        </a:ln>
+      </a:lnStyleLst>
+      <a:effectStyleLst>
+        <a:effectStyle>
+          <a:effectLst>
+            <a:outerShdw blurRad="40000" dist="20000" dir="5400000" rotWithShape="0">
+              <a:srgbClr val="000000">
+                <a:alpha val="38000"/>
+              </a:srgbClr>
+            </a:outerShdw>
+          </a:effectLst>
+        </a:effectStyle>
+        <a:effectStyle>
+          <a:effectLst>
+            <a:outerShdw blurRad="40000" dist="23000" dir="5400000" rotWithShape="0">
+              <a:srgbClr val="000000">
+                <a:alpha val="35000"/>
+              </a:srgbClr>
+            </a:outerShdw>
+          </a:effectLst>
+        </a:effectStyle>
+        <a:effectStyle>
+          <a:effectLst>
+            <a:outerShdw blurRad="40000" dist="23000" dir="5400000" rotWithShape="0">
+              <a:srgbClr val="000000">
+                <a:alpha val="35000"/>
+              </a:srgbClr>
+            </a:outerShdw>
+          </a:effectLst>
+          <a:scene3d>
+            <a:camera prst="orthographicFront">
+              <a:rot lat="0" lon="0" rev="0"/>
+            </a:camera>
+            <a:lightRig rig="threePt" dir="t">
+              <a:rot lat="0" lon="0" rev="1200000"/>
+            </a:lightRig>
+          </a:scene3d>
+          <a:sp3d>
+            <a:bevelT w="63500" h="25400"/>
+          </a:sp3d>
+        </a:effectStyle>
+      </a:effectStyleLst>
+      <a:bgFillStyleLst>
+        <a:solidFill>
+          <a:schemeClr val="phClr"/>
+        </a:solidFill>
+        <a:gradFill rotWithShape="1">
+          <a:gsLst>
+            <a:gs pos="0">
+              <a:schemeClr val="phClr">
+                <a:tint val="40000"/>
+                <a:satMod val="350000"/>
+              </a:schemeClr>
+            </a:gs>
+            <a:gs pos="40000">
+              <a:schemeClr val="phClr">
+                <a:tint val="45000"/>
+                <a:shade val="99000"/>
+                <a:satMod val="350000"/>
+              </a:schemeClr>
+            </a:gs>
+            <a:gs pos="100000">
+              <a:schemeClr val="phClr">
+                <a:shade val="20000"/>
+                <a:satMod val="255000"/>
+              </a:schemeClr>
+            </a:gs>
+          </a:gsLst>
+          <a:path path="circle">
+            <a:fillToRect l="50000" t="-80000" r="50000" b="180000"/>
+          </a:path>
+        </a:gradFill>
+        <a:gradFill rotWithShape="1">
+          <a:gsLst>
+            <a:gs pos="0">
+              <a:schemeClr val="phClr">
+                <a:tint val="80000"/>
+                <a:satMod val="300000"/>
+              </a:schemeClr>
+            </a:gs>
+            <a:gs pos="100000">
+              <a:schemeClr val="phClr">
+                <a:shade val="30000"/>
+                <a:satMod val="200000"/>
+              </a:schemeClr>
+            </a:gs>
+          </a:gsLst>
+          <a:path path="circle">
+            <a:fillToRect l="50000" t="50000" r="50000" b="50000"/>
+          </a:path>
+        </a:gradFill>
+      </a:bgFillStyleLst>
+    </a:fmtScheme>
+  </a:themeElements>
+</a:theme>
+</file>
+
+<file path=ppt/theme/theme2.xml><?xml version="1.0" encoding="utf-8"?>
 <a:theme xmlns:a="http://schemas.openxmlformats.org/drawingml/2006/main" xmlns:r="http://schemas.openxmlformats.org/officeDocument/2006/relationships" name="Simple Light">
   <a:themeElements>
     <a:clrScheme name="Simple Light">
@@ -9334,283 +9613,4 @@
     </a:fmtScheme>
   </a:themeElements>
 </a:theme>
-</file>
-
-<file path=ppt/theme/theme2.xml><?xml version="1.0" encoding="utf-8"?>
-<a:theme xmlns:a="http://schemas.openxmlformats.org/drawingml/2006/main" xmlns:r="http://schemas.openxmlformats.org/officeDocument/2006/relationships">
-  <a:themeElements>
-    <a:clrScheme name="Default">
-      <a:dk1>
-        <a:srgbClr val="000000"/>
-      </a:dk1>
-      <a:lt1>
-        <a:srgbClr val="FFFFFF"/>
-      </a:lt1>
-      <a:dk2>
-        <a:srgbClr val="158158"/>
-      </a:dk2>
-      <a:lt2>
-        <a:srgbClr val="F3F3F3"/>
-      </a:lt2>
-      <a:accent1>
-        <a:srgbClr val="058DC7"/>
-      </a:accent1>
-      <a:accent2>
-        <a:srgbClr val="50B432"/>
-      </a:accent2>
-      <a:accent3>
-        <a:srgbClr val="ED561B"/>
-      </a:accent3>
-      <a:accent4>
-        <a:srgbClr val="EDEF00"/>
-      </a:accent4>
-      <a:accent5>
-        <a:srgbClr val="24CBE5"/>
-      </a:accent5>
-      <a:accent6>
-        <a:srgbClr val="64E572"/>
-      </a:accent6>
-      <a:hlink>
-        <a:srgbClr val="2200CC"/>
-      </a:hlink>
-      <a:folHlink>
-        <a:srgbClr val="551A8B"/>
-      </a:folHlink>
-    </a:clrScheme>
-    <a:fontScheme name="Office">
-      <a:majorFont>
-        <a:latin typeface="Arial"/>
-        <a:ea typeface=""/>
-        <a:cs typeface=""/>
-        <a:font script="Jpan" typeface="ＭＳ Ｐゴシック"/>
-        <a:font script="Hang" typeface="맑은 고딕"/>
-        <a:font script="Hans" typeface="宋体"/>
-        <a:font script="Hant" typeface="新細明體"/>
-        <a:font script="Arab" typeface="Times New Roman"/>
-        <a:font script="Hebr" typeface="Times New Roman"/>
-        <a:font script="Thai" typeface="Angsana New"/>
-        <a:font script="Ethi" typeface="Nyala"/>
-        <a:font script="Beng" typeface="Vrinda"/>
-        <a:font script="Gujr" typeface="Shruti"/>
-        <a:font script="Khmr" typeface="MoolBoran"/>
-        <a:font script="Knda" typeface="Tunga"/>
-        <a:font script="Guru" typeface="Raavi"/>
-        <a:font script="Cans" typeface="Euphemia"/>
-        <a:font script="Cher" typeface="Plantagenet Cherokee"/>
-        <a:font script="Yiii" typeface="Microsoft Yi Baiti"/>
-        <a:font script="Tibt" typeface="Microsoft Himalaya"/>
-        <a:font script="Thaa" typeface="MV Boli"/>
-        <a:font script="Deva" typeface="Mangal"/>
-        <a:font script="Telu" typeface="Gautami"/>
-        <a:font script="Taml" typeface="Latha"/>
-        <a:font script="Syrc" typeface="Estrangelo Edessa"/>
-        <a:font script="Orya" typeface="Kalinga"/>
-        <a:font script="Mlym" typeface="Kartika"/>
-        <a:font script="Laoo" typeface="DokChampa"/>
-        <a:font script="Sinh" typeface="Iskoola Pota"/>
-        <a:font script="Mong" typeface="Mongolian Baiti"/>
-        <a:font script="Viet" typeface="Times New Roman"/>
-        <a:font script="Uigh" typeface="Microsoft Uighur"/>
-        <a:font script="Geor" typeface="Sylfaen"/>
-      </a:majorFont>
-      <a:minorFont>
-        <a:latin typeface="Arial"/>
-        <a:ea typeface=""/>
-        <a:cs typeface=""/>
-        <a:font script="Jpan" typeface="ＭＳ Ｐゴシック"/>
-        <a:font script="Hang" typeface="맑은 고딕"/>
-        <a:font script="Hans" typeface="宋体"/>
-        <a:font script="Hant" typeface="新細明體"/>
-        <a:font script="Arab" typeface="Arial"/>
-        <a:font script="Hebr" typeface="Arial"/>
-        <a:font script="Thai" typeface="Cordia New"/>
-        <a:font script="Ethi" typeface="Nyala"/>
-        <a:font script="Beng" typeface="Vrinda"/>
-        <a:font script="Gujr" typeface="Shruti"/>
-        <a:font script="Khmr" typeface="DaunPenh"/>
-        <a:font script="Knda" typeface="Tunga"/>
-        <a:font script="Guru" typeface="Raavi"/>
-        <a:font script="Cans" typeface="Euphemia"/>
-        <a:font script="Cher" typeface="Plantagenet Cherokee"/>
-        <a:font script="Yiii" typeface="Microsoft Yi Baiti"/>
-        <a:font script="Tibt" typeface="Microsoft Himalaya"/>
-        <a:font script="Thaa" typeface="MV Boli"/>
-        <a:font script="Deva" typeface="Mangal"/>
-        <a:font script="Telu" typeface="Gautami"/>
-        <a:font script="Taml" typeface="Latha"/>
-        <a:font script="Syrc" typeface="Estrangelo Edessa"/>
-        <a:font script="Orya" typeface="Kalinga"/>
-        <a:font script="Mlym" typeface="Kartika"/>
-        <a:font script="Laoo" typeface="DokChampa"/>
-        <a:font script="Sinh" typeface="Iskoola Pota"/>
-        <a:font script="Mong" typeface="Mongolian Baiti"/>
-        <a:font script="Viet" typeface="Arial"/>
-        <a:font script="Uigh" typeface="Microsoft Uighur"/>
-        <a:font script="Geor" typeface="Sylfaen"/>
-      </a:minorFont>
-    </a:fontScheme>
-    <a:fmtScheme name="Office">
-      <a:fillStyleLst>
-        <a:solidFill>
-          <a:schemeClr val="phClr"/>
-        </a:solidFill>
-        <a:gradFill rotWithShape="1">
-          <a:gsLst>
-            <a:gs pos="0">
-              <a:schemeClr val="phClr">
-                <a:tint val="50000"/>
-                <a:satMod val="300000"/>
-              </a:schemeClr>
-            </a:gs>
-            <a:gs pos="35000">
-              <a:schemeClr val="phClr">
-                <a:tint val="37000"/>
-                <a:satMod val="300000"/>
-              </a:schemeClr>
-            </a:gs>
-            <a:gs pos="100000">
-              <a:schemeClr val="phClr">
-                <a:tint val="15000"/>
-                <a:satMod val="350000"/>
-              </a:schemeClr>
-            </a:gs>
-          </a:gsLst>
-          <a:lin ang="16200000" scaled="1"/>
-        </a:gradFill>
-        <a:gradFill rotWithShape="1">
-          <a:gsLst>
-            <a:gs pos="0">
-              <a:schemeClr val="phClr">
-                <a:tint val="100000"/>
-                <a:shade val="100000"/>
-                <a:satMod val="130000"/>
-              </a:schemeClr>
-            </a:gs>
-            <a:gs pos="100000">
-              <a:schemeClr val="phClr">
-                <a:tint val="50000"/>
-                <a:shade val="100000"/>
-                <a:satMod val="350000"/>
-              </a:schemeClr>
-            </a:gs>
-          </a:gsLst>
-          <a:lin ang="16200000" scaled="0"/>
-        </a:gradFill>
-      </a:fillStyleLst>
-      <a:lnStyleLst>
-        <a:ln w="9525" cap="flat" cmpd="sng" algn="ctr">
-          <a:solidFill>
-            <a:schemeClr val="phClr">
-              <a:shade val="95000"/>
-              <a:satMod val="105000"/>
-            </a:schemeClr>
-          </a:solidFill>
-          <a:prstDash val="solid"/>
-        </a:ln>
-        <a:ln w="25400" cap="flat" cmpd="sng" algn="ctr">
-          <a:solidFill>
-            <a:schemeClr val="phClr"/>
-          </a:solidFill>
-          <a:prstDash val="solid"/>
-        </a:ln>
-        <a:ln w="38100" cap="flat" cmpd="sng" algn="ctr">
-          <a:solidFill>
-            <a:schemeClr val="phClr"/>
-          </a:solidFill>
-          <a:prstDash val="solid"/>
-        </a:ln>
-      </a:lnStyleLst>
-      <a:effectStyleLst>
-        <a:effectStyle>
-          <a:effectLst>
-            <a:outerShdw blurRad="40000" dist="20000" dir="5400000" rotWithShape="0">
-              <a:srgbClr val="000000">
-                <a:alpha val="38000"/>
-              </a:srgbClr>
-            </a:outerShdw>
-          </a:effectLst>
-        </a:effectStyle>
-        <a:effectStyle>
-          <a:effectLst>
-            <a:outerShdw blurRad="40000" dist="23000" dir="5400000" rotWithShape="0">
-              <a:srgbClr val="000000">
-                <a:alpha val="35000"/>
-              </a:srgbClr>
-            </a:outerShdw>
-          </a:effectLst>
-        </a:effectStyle>
-        <a:effectStyle>
-          <a:effectLst>
-            <a:outerShdw blurRad="40000" dist="23000" dir="5400000" rotWithShape="0">
-              <a:srgbClr val="000000">
-                <a:alpha val="35000"/>
-              </a:srgbClr>
-            </a:outerShdw>
-          </a:effectLst>
-          <a:scene3d>
-            <a:camera prst="orthographicFront">
-              <a:rot lat="0" lon="0" rev="0"/>
-            </a:camera>
-            <a:lightRig rig="threePt" dir="t">
-              <a:rot lat="0" lon="0" rev="1200000"/>
-            </a:lightRig>
-          </a:scene3d>
-          <a:sp3d>
-            <a:bevelT w="63500" h="25400"/>
-          </a:sp3d>
-        </a:effectStyle>
-      </a:effectStyleLst>
-      <a:bgFillStyleLst>
-        <a:solidFill>
-          <a:schemeClr val="phClr"/>
-        </a:solidFill>
-        <a:gradFill rotWithShape="1">
-          <a:gsLst>
-            <a:gs pos="0">
-              <a:schemeClr val="phClr">
-                <a:tint val="40000"/>
-                <a:satMod val="350000"/>
-              </a:schemeClr>
-            </a:gs>
-            <a:gs pos="40000">
-              <a:schemeClr val="phClr">
-                <a:tint val="45000"/>
-                <a:shade val="99000"/>
-                <a:satMod val="350000"/>
-              </a:schemeClr>
-            </a:gs>
-            <a:gs pos="100000">
-              <a:schemeClr val="phClr">
-                <a:shade val="20000"/>
-                <a:satMod val="255000"/>
-              </a:schemeClr>
-            </a:gs>
-          </a:gsLst>
-          <a:path path="circle">
-            <a:fillToRect l="50000" t="-80000" r="50000" b="180000"/>
-          </a:path>
-        </a:gradFill>
-        <a:gradFill rotWithShape="1">
-          <a:gsLst>
-            <a:gs pos="0">
-              <a:schemeClr val="phClr">
-                <a:tint val="80000"/>
-                <a:satMod val="300000"/>
-              </a:schemeClr>
-            </a:gs>
-            <a:gs pos="100000">
-              <a:schemeClr val="phClr">
-                <a:shade val="30000"/>
-                <a:satMod val="200000"/>
-              </a:schemeClr>
-            </a:gs>
-          </a:gsLst>
-          <a:path path="circle">
-            <a:fillToRect l="50000" t="50000" r="50000" b="50000"/>
-          </a:path>
-        </a:gradFill>
-      </a:bgFillStyleLst>
-    </a:fmtScheme>
-  </a:themeElements>
-</a:theme>
 </file>
--- a/docs/Fig R1.pptx
+++ b/docs/Fig R1.pptx
@@ -7415,7 +7415,7 @@
         </p:blipFill>
         <p:spPr>
           <a:xfrm>
-            <a:off x="3495175" y="152400"/>
+            <a:off x="3438900" y="163655"/>
             <a:ext cx="1858876" cy="2461777"/>
           </a:xfrm>
           <a:prstGeom prst="rect">
@@ -7435,7 +7435,7 @@
         </p:nvSpPr>
         <p:spPr>
           <a:xfrm>
-            <a:off x="3217016" y="2598167"/>
+            <a:off x="3160742" y="2609422"/>
             <a:ext cx="2073000" cy="523200"/>
           </a:xfrm>
           <a:prstGeom prst="rect">
@@ -7509,7 +7509,7 @@
         </p:nvSpPr>
         <p:spPr>
           <a:xfrm>
-            <a:off x="4604304" y="2614179"/>
+            <a:off x="4548029" y="2625434"/>
             <a:ext cx="928500" cy="523200"/>
           </a:xfrm>
           <a:prstGeom prst="rect">

--- a/docs/Fig R1.pptx
+++ b/docs/Fig R1.pptx
@@ -9058,6 +9058,285 @@
 </file>
 
 <file path=ppt/theme/theme1.xml><?xml version="1.0" encoding="utf-8"?>
+<a:theme xmlns:a="http://schemas.openxmlformats.org/drawingml/2006/main" xmlns:r="http://schemas.openxmlformats.org/officeDocument/2006/relationships" name="Simple Light">
+  <a:themeElements>
+    <a:clrScheme name="Simple Light">
+      <a:dk1>
+        <a:srgbClr val="000000"/>
+      </a:dk1>
+      <a:lt1>
+        <a:srgbClr val="FFFFFF"/>
+      </a:lt1>
+      <a:dk2>
+        <a:srgbClr val="595959"/>
+      </a:dk2>
+      <a:lt2>
+        <a:srgbClr val="EEEEEE"/>
+      </a:lt2>
+      <a:accent1>
+        <a:srgbClr val="4285F4"/>
+      </a:accent1>
+      <a:accent2>
+        <a:srgbClr val="212121"/>
+      </a:accent2>
+      <a:accent3>
+        <a:srgbClr val="78909C"/>
+      </a:accent3>
+      <a:accent4>
+        <a:srgbClr val="FFAB40"/>
+      </a:accent4>
+      <a:accent5>
+        <a:srgbClr val="0097A7"/>
+      </a:accent5>
+      <a:accent6>
+        <a:srgbClr val="EEFF41"/>
+      </a:accent6>
+      <a:hlink>
+        <a:srgbClr val="0097A7"/>
+      </a:hlink>
+      <a:folHlink>
+        <a:srgbClr val="0097A7"/>
+      </a:folHlink>
+    </a:clrScheme>
+    <a:fontScheme name="Office">
+      <a:majorFont>
+        <a:latin typeface="Arial"/>
+        <a:ea typeface=""/>
+        <a:cs typeface=""/>
+        <a:font script="Jpan" typeface="ＭＳ Ｐゴシック"/>
+        <a:font script="Hang" typeface="맑은 고딕"/>
+        <a:font script="Hans" typeface="宋体"/>
+        <a:font script="Hant" typeface="新細明體"/>
+        <a:font script="Arab" typeface="Times New Roman"/>
+        <a:font script="Hebr" typeface="Times New Roman"/>
+        <a:font script="Thai" typeface="Angsana New"/>
+        <a:font script="Ethi" typeface="Nyala"/>
+        <a:font script="Beng" typeface="Vrinda"/>
+        <a:font script="Gujr" typeface="Shruti"/>
+        <a:font script="Khmr" typeface="MoolBoran"/>
+        <a:font script="Knda" typeface="Tunga"/>
+        <a:font script="Guru" typeface="Raavi"/>
+        <a:font script="Cans" typeface="Euphemia"/>
+        <a:font script="Cher" typeface="Plantagenet Cherokee"/>
+        <a:font script="Yiii" typeface="Microsoft Yi Baiti"/>
+        <a:font script="Tibt" typeface="Microsoft Himalaya"/>
+        <a:font script="Thaa" typeface="MV Boli"/>
+        <a:font script="Deva" typeface="Mangal"/>
+        <a:font script="Telu" typeface="Gautami"/>
+        <a:font script="Taml" typeface="Latha"/>
+        <a:font script="Syrc" typeface="Estrangelo Edessa"/>
+        <a:font script="Orya" typeface="Kalinga"/>
+        <a:font script="Mlym" typeface="Kartika"/>
+        <a:font script="Laoo" typeface="DokChampa"/>
+        <a:font script="Sinh" typeface="Iskoola Pota"/>
+        <a:font script="Mong" typeface="Mongolian Baiti"/>
+        <a:font script="Viet" typeface="Times New Roman"/>
+        <a:font script="Uigh" typeface="Microsoft Uighur"/>
+        <a:font script="Geor" typeface="Sylfaen"/>
+      </a:majorFont>
+      <a:minorFont>
+        <a:latin typeface="Arial"/>
+        <a:ea typeface=""/>
+        <a:cs typeface=""/>
+        <a:font script="Jpan" typeface="ＭＳ Ｐゴシック"/>
+        <a:font script="Hang" typeface="맑은 고딕"/>
+        <a:font script="Hans" typeface="宋体"/>
+        <a:font script="Hant" typeface="新細明體"/>
+        <a:font script="Arab" typeface="Arial"/>
+        <a:font script="Hebr" typeface="Arial"/>
+        <a:font script="Thai" typeface="Cordia New"/>
+        <a:font script="Ethi" typeface="Nyala"/>
+        <a:font script="Beng" typeface="Vrinda"/>
+        <a:font script="Gujr" typeface="Shruti"/>
+        <a:font script="Khmr" typeface="DaunPenh"/>
+        <a:font script="Knda" typeface="Tunga"/>
+        <a:font script="Guru" typeface="Raavi"/>
+        <a:font script="Cans" typeface="Euphemia"/>
+        <a:font script="Cher" typeface="Plantagenet Cherokee"/>
+        <a:font script="Yiii" typeface="Microsoft Yi Baiti"/>
+        <a:font script="Tibt" typeface="Microsoft Himalaya"/>
+        <a:font script="Thaa" typeface="MV Boli"/>
+        <a:font script="Deva" typeface="Mangal"/>
+        <a:font script="Telu" typeface="Gautami"/>
+        <a:font script="Taml" typeface="Latha"/>
+        <a:font script="Syrc" typeface="Estrangelo Edessa"/>
+        <a:font script="Orya" typeface="Kalinga"/>
+        <a:font script="Mlym" typeface="Kartika"/>
+        <a:font script="Laoo" typeface="DokChampa"/>
+        <a:font script="Sinh" typeface="Iskoola Pota"/>
+        <a:font script="Mong" typeface="Mongolian Baiti"/>
+        <a:font script="Viet" typeface="Arial"/>
+        <a:font script="Uigh" typeface="Microsoft Uighur"/>
+        <a:font script="Geor" typeface="Sylfaen"/>
+      </a:minorFont>
+    </a:fontScheme>
+    <a:fmtScheme name="Office">
+      <a:fillStyleLst>
+        <a:solidFill>
+          <a:schemeClr val="phClr"/>
+        </a:solidFill>
+        <a:gradFill rotWithShape="1">
+          <a:gsLst>
+            <a:gs pos="0">
+              <a:schemeClr val="phClr">
+                <a:tint val="50000"/>
+                <a:satMod val="300000"/>
+              </a:schemeClr>
+            </a:gs>
+            <a:gs pos="35000">
+              <a:schemeClr val="phClr">
+                <a:tint val="37000"/>
+                <a:satMod val="300000"/>
+              </a:schemeClr>
+            </a:gs>
+            <a:gs pos="100000">
+              <a:schemeClr val="phClr">
+                <a:tint val="15000"/>
+                <a:satMod val="350000"/>
+              </a:schemeClr>
+            </a:gs>
+          </a:gsLst>
+          <a:lin ang="16200000" scaled="1"/>
+        </a:gradFill>
+        <a:gradFill rotWithShape="1">
+          <a:gsLst>
+            <a:gs pos="0">
+              <a:schemeClr val="phClr">
+                <a:tint val="100000"/>
+                <a:shade val="100000"/>
+                <a:satMod val="130000"/>
+              </a:schemeClr>
+            </a:gs>
+            <a:gs pos="100000">
+              <a:schemeClr val="phClr">
+                <a:tint val="50000"/>
+                <a:shade val="100000"/>
+                <a:satMod val="350000"/>
+              </a:schemeClr>
+            </a:gs>
+          </a:gsLst>
+          <a:lin ang="16200000" scaled="0"/>
+        </a:gradFill>
+      </a:fillStyleLst>
+      <a:lnStyleLst>
+        <a:ln w="9525" cap="flat" cmpd="sng" algn="ctr">
+          <a:solidFill>
+            <a:schemeClr val="phClr">
+              <a:shade val="95000"/>
+              <a:satMod val="105000"/>
+            </a:schemeClr>
+          </a:solidFill>
+          <a:prstDash val="solid"/>
+        </a:ln>
+        <a:ln w="25400" cap="flat" cmpd="sng" algn="ctr">
+          <a:solidFill>
+            <a:schemeClr val="phClr"/>
+          </a:solidFill>
+          <a:prstDash val="solid"/>
+        </a:ln>
+        <a:ln w="38100" cap="flat" cmpd="sng" algn="ctr">
+          <a:solidFill>
+            <a:schemeClr val="phClr"/>
+          </a:solidFill>
+          <a:prstDash val="solid"/>
+        </a:ln>
+      </a:lnStyleLst>
+      <a:effectStyleLst>
+        <a:effectStyle>
+          <a:effectLst>
+            <a:outerShdw blurRad="40000" dist="20000" dir="5400000" rotWithShape="0">
+              <a:srgbClr val="000000">
+                <a:alpha val="38000"/>
+              </a:srgbClr>
+            </a:outerShdw>
+          </a:effectLst>
+        </a:effectStyle>
+        <a:effectStyle>
+          <a:effectLst>
+            <a:outerShdw blurRad="40000" dist="23000" dir="5400000" rotWithShape="0">
+              <a:srgbClr val="000000">
+                <a:alpha val="35000"/>
+              </a:srgbClr>
+            </a:outerShdw>
+          </a:effectLst>
+        </a:effectStyle>
+        <a:effectStyle>
+          <a:effectLst>
+            <a:outerShdw blurRad="40000" dist="23000" dir="5400000" rotWithShape="0">
+              <a:srgbClr val="000000">
+                <a:alpha val="35000"/>
+              </a:srgbClr>
+            </a:outerShdw>
+          </a:effectLst>
+          <a:scene3d>
+            <a:camera prst="orthographicFront">
+              <a:rot lat="0" lon="0" rev="0"/>
+            </a:camera>
+            <a:lightRig rig="threePt" dir="t">
+              <a:rot lat="0" lon="0" rev="1200000"/>
+            </a:lightRig>
+          </a:scene3d>
+          <a:sp3d>
+            <a:bevelT w="63500" h="25400"/>
+          </a:sp3d>
+        </a:effectStyle>
+      </a:effectStyleLst>
+      <a:bgFillStyleLst>
+        <a:solidFill>
+          <a:schemeClr val="phClr"/>
+        </a:solidFill>
+        <a:gradFill rotWithShape="1">
+          <a:gsLst>
+            <a:gs pos="0">
+              <a:schemeClr val="phClr">
+                <a:tint val="40000"/>
+                <a:satMod val="350000"/>
+              </a:schemeClr>
+            </a:gs>
+            <a:gs pos="40000">
+              <a:schemeClr val="phClr">
+                <a:tint val="45000"/>
+                <a:shade val="99000"/>
+                <a:satMod val="350000"/>
+              </a:schemeClr>
+            </a:gs>
+            <a:gs pos="100000">
+              <a:schemeClr val="phClr">
+                <a:shade val="20000"/>
+                <a:satMod val="255000"/>
+              </a:schemeClr>
+            </a:gs>
+          </a:gsLst>
+          <a:path path="circle">
+            <a:fillToRect l="50000" t="-80000" r="50000" b="180000"/>
+          </a:path>
+        </a:gradFill>
+        <a:gradFill rotWithShape="1">
+          <a:gsLst>
+            <a:gs pos="0">
+              <a:schemeClr val="phClr">
+                <a:tint val="80000"/>
+                <a:satMod val="300000"/>
+              </a:schemeClr>
+            </a:gs>
+            <a:gs pos="100000">
+              <a:schemeClr val="phClr">
+                <a:shade val="30000"/>
+                <a:satMod val="200000"/>
+              </a:schemeClr>
+            </a:gs>
+          </a:gsLst>
+          <a:path path="circle">
+            <a:fillToRect l="50000" t="50000" r="50000" b="50000"/>
+          </a:path>
+        </a:gradFill>
+      </a:bgFillStyleLst>
+    </a:fmtScheme>
+  </a:themeElements>
+</a:theme>
+</file>
+
+<file path=ppt/theme/theme2.xml><?xml version="1.0" encoding="utf-8"?>
 <a:theme xmlns:a="http://schemas.openxmlformats.org/drawingml/2006/main" xmlns:r="http://schemas.openxmlformats.org/officeDocument/2006/relationships">
   <a:themeElements>
     <a:clrScheme name="Default">
@@ -9334,283 +9613,4 @@
     </a:fmtScheme>
   </a:themeElements>
 </a:theme>
-</file>
-
-<file path=ppt/theme/theme2.xml><?xml version="1.0" encoding="utf-8"?>
-<a:theme xmlns:a="http://schemas.openxmlformats.org/drawingml/2006/main" xmlns:r="http://schemas.openxmlformats.org/officeDocument/2006/relationships" name="Simple Light">
-  <a:themeElements>
-    <a:clrScheme name="Simple Light">
-      <a:dk1>
-        <a:srgbClr val="000000"/>
-      </a:dk1>
-      <a:lt1>
-        <a:srgbClr val="FFFFFF"/>
-      </a:lt1>
-      <a:dk2>
-        <a:srgbClr val="595959"/>
-      </a:dk2>
-      <a:lt2>
-        <a:srgbClr val="EEEEEE"/>
-      </a:lt2>
-      <a:accent1>
-        <a:srgbClr val="4285F4"/>
-      </a:accent1>
-      <a:accent2>
-        <a:srgbClr val="212121"/>
-      </a:accent2>
-      <a:accent3>
-        <a:srgbClr val="78909C"/>
-      </a:accent3>
-      <a:accent4>
-        <a:srgbClr val="FFAB40"/>
-      </a:accent4>
-      <a:accent5>
-        <a:srgbClr val="0097A7"/>
-      </a:accent5>
-      <a:accent6>
-        <a:srgbClr val="EEFF41"/>
-      </a:accent6>
-      <a:hlink>
-        <a:srgbClr val="0097A7"/>
-      </a:hlink>
-      <a:folHlink>
-        <a:srgbClr val="0097A7"/>
-      </a:folHlink>
-    </a:clrScheme>
-    <a:fontScheme name="Office">
-      <a:majorFont>
-        <a:latin typeface="Arial"/>
-        <a:ea typeface=""/>
-        <a:cs typeface=""/>
-        <a:font script="Jpan" typeface="ＭＳ Ｐゴシック"/>
-        <a:font script="Hang" typeface="맑은 고딕"/>
-        <a:font script="Hans" typeface="宋体"/>
-        <a:font script="Hant" typeface="新細明體"/>
-        <a:font script="Arab" typeface="Times New Roman"/>
-        <a:font script="Hebr" typeface="Times New Roman"/>
-        <a:font script="Thai" typeface="Angsana New"/>
-        <a:font script="Ethi" typeface="Nyala"/>
-        <a:font script="Beng" typeface="Vrinda"/>
-        <a:font script="Gujr" typeface="Shruti"/>
-        <a:font script="Khmr" typeface="MoolBoran"/>
-        <a:font script="Knda" typeface="Tunga"/>
-        <a:font script="Guru" typeface="Raavi"/>
-        <a:font script="Cans" typeface="Euphemia"/>
-        <a:font script="Cher" typeface="Plantagenet Cherokee"/>
-        <a:font script="Yiii" typeface="Microsoft Yi Baiti"/>
-        <a:font script="Tibt" typeface="Microsoft Himalaya"/>
-        <a:font script="Thaa" typeface="MV Boli"/>
-        <a:font script="Deva" typeface="Mangal"/>
-        <a:font script="Telu" typeface="Gautami"/>
-        <a:font script="Taml" typeface="Latha"/>
-        <a:font script="Syrc" typeface="Estrangelo Edessa"/>
-        <a:font script="Orya" typeface="Kalinga"/>
-        <a:font script="Mlym" typeface="Kartika"/>
-        <a:font script="Laoo" typeface="DokChampa"/>
-        <a:font script="Sinh" typeface="Iskoola Pota"/>
-        <a:font script="Mong" typeface="Mongolian Baiti"/>
-        <a:font script="Viet" typeface="Times New Roman"/>
-        <a:font script="Uigh" typeface="Microsoft Uighur"/>
-        <a:font script="Geor" typeface="Sylfaen"/>
-      </a:majorFont>
-      <a:minorFont>
-        <a:latin typeface="Arial"/>
-        <a:ea typeface=""/>
-        <a:cs typeface=""/>
-        <a:font script="Jpan" typeface="ＭＳ Ｐゴシック"/>
-        <a:font script="Hang" typeface="맑은 고딕"/>
-        <a:font script="Hans" typeface="宋体"/>
-        <a:font script="Hant" typeface="新細明體"/>
-        <a:font script="Arab" typeface="Arial"/>
-        <a:font script="Hebr" typeface="Arial"/>
-        <a:font script="Thai" typeface="Cordia New"/>
-        <a:font script="Ethi" typeface="Nyala"/>
-        <a:font script="Beng" typeface="Vrinda"/>
-        <a:font script="Gujr" typeface="Shruti"/>
-        <a:font script="Khmr" typeface="DaunPenh"/>
-        <a:font script="Knda" typeface="Tunga"/>
-        <a:font script="Guru" typeface="Raavi"/>
-        <a:font script="Cans" typeface="Euphemia"/>
-        <a:font script="Cher" typeface="Plantagenet Cherokee"/>
-        <a:font script="Yiii" typeface="Microsoft Yi Baiti"/>
-        <a:font script="Tibt" typeface="Microsoft Himalaya"/>
-        <a:font script="Thaa" typeface="MV Boli"/>
-        <a:font script="Deva" typeface="Mangal"/>
-        <a:font script="Telu" typeface="Gautami"/>
-        <a:font script="Taml" typeface="Latha"/>
-        <a:font script="Syrc" typeface="Estrangelo Edessa"/>
-        <a:font script="Orya" typeface="Kalinga"/>
-        <a:font script="Mlym" typeface="Kartika"/>
-        <a:font script="Laoo" typeface="DokChampa"/>
-        <a:font script="Sinh" typeface="Iskoola Pota"/>
-        <a:font script="Mong" typeface="Mongolian Baiti"/>
-        <a:font script="Viet" typeface="Arial"/>
-        <a:font script="Uigh" typeface="Microsoft Uighur"/>
-        <a:font script="Geor" typeface="Sylfaen"/>
-      </a:minorFont>
-    </a:fontScheme>
-    <a:fmtScheme name="Office">
-      <a:fillStyleLst>
-        <a:solidFill>
-          <a:schemeClr val="phClr"/>
-        </a:solidFill>
-        <a:gradFill rotWithShape="1">
-          <a:gsLst>
-            <a:gs pos="0">
-              <a:schemeClr val="phClr">
-                <a:tint val="50000"/>
-                <a:satMod val="300000"/>
-              </a:schemeClr>
-            </a:gs>
-            <a:gs pos="35000">
-              <a:schemeClr val="phClr">
-                <a:tint val="37000"/>
-                <a:satMod val="300000"/>
-              </a:schemeClr>
-            </a:gs>
-            <a:gs pos="100000">
-              <a:schemeClr val="phClr">
-                <a:tint val="15000"/>
-                <a:satMod val="350000"/>
-              </a:schemeClr>
-            </a:gs>
-          </a:gsLst>
-          <a:lin ang="16200000" scaled="1"/>
-        </a:gradFill>
-        <a:gradFill rotWithShape="1">
-          <a:gsLst>
-            <a:gs pos="0">
-              <a:schemeClr val="phClr">
-                <a:tint val="100000"/>
-                <a:shade val="100000"/>
-                <a:satMod val="130000"/>
-              </a:schemeClr>
-            </a:gs>
-            <a:gs pos="100000">
-              <a:schemeClr val="phClr">
-                <a:tint val="50000"/>
-                <a:shade val="100000"/>
-                <a:satMod val="350000"/>
-              </a:schemeClr>
-            </a:gs>
-          </a:gsLst>
-          <a:lin ang="16200000" scaled="0"/>
-        </a:gradFill>
-      </a:fillStyleLst>
-      <a:lnStyleLst>
-        <a:ln w="9525" cap="flat" cmpd="sng" algn="ctr">
-          <a:solidFill>
-            <a:schemeClr val="phClr">
-              <a:shade val="95000"/>
-              <a:satMod val="105000"/>
-            </a:schemeClr>
-          </a:solidFill>
-          <a:prstDash val="solid"/>
-        </a:ln>
-        <a:ln w="25400" cap="flat" cmpd="sng" algn="ctr">
-          <a:solidFill>
-            <a:schemeClr val="phClr"/>
-          </a:solidFill>
-          <a:prstDash val="solid"/>
-        </a:ln>
-        <a:ln w="38100" cap="flat" cmpd="sng" algn="ctr">
-          <a:solidFill>
-            <a:schemeClr val="phClr"/>
-          </a:solidFill>
-          <a:prstDash val="solid"/>
-        </a:ln>
-      </a:lnStyleLst>
-      <a:effectStyleLst>
-        <a:effectStyle>
-          <a:effectLst>
-            <a:outerShdw blurRad="40000" dist="20000" dir="5400000" rotWithShape="0">
-              <a:srgbClr val="000000">
-                <a:alpha val="38000"/>
-              </a:srgbClr>
-            </a:outerShdw>
-          </a:effectLst>
-        </a:effectStyle>
-        <a:effectStyle>
-          <a:effectLst>
-            <a:outerShdw blurRad="40000" dist="23000" dir="5400000" rotWithShape="0">
-              <a:srgbClr val="000000">
-                <a:alpha val="35000"/>
-              </a:srgbClr>
-            </a:outerShdw>
-          </a:effectLst>
-        </a:effectStyle>
-        <a:effectStyle>
-          <a:effectLst>
-            <a:outerShdw blurRad="40000" dist="23000" dir="5400000" rotWithShape="0">
-              <a:srgbClr val="000000">
-                <a:alpha val="35000"/>
-              </a:srgbClr>
-            </a:outerShdw>
-          </a:effectLst>
-          <a:scene3d>
-            <a:camera prst="orthographicFront">
-              <a:rot lat="0" lon="0" rev="0"/>
-            </a:camera>
-            <a:lightRig rig="threePt" dir="t">
-              <a:rot lat="0" lon="0" rev="1200000"/>
-            </a:lightRig>
-          </a:scene3d>
-          <a:sp3d>
-            <a:bevelT w="63500" h="25400"/>
-          </a:sp3d>
-        </a:effectStyle>
-      </a:effectStyleLst>
-      <a:bgFillStyleLst>
-        <a:solidFill>
-          <a:schemeClr val="phClr"/>
-        </a:solidFill>
-        <a:gradFill rotWithShape="1">
-          <a:gsLst>
-            <a:gs pos="0">
-              <a:schemeClr val="phClr">
-                <a:tint val="40000"/>
-                <a:satMod val="350000"/>
-              </a:schemeClr>
-            </a:gs>
-            <a:gs pos="40000">
-              <a:schemeClr val="phClr">
-                <a:tint val="45000"/>
-                <a:shade val="99000"/>
-                <a:satMod val="350000"/>
-              </a:schemeClr>
-            </a:gs>
-            <a:gs pos="100000">
-              <a:schemeClr val="phClr">
-                <a:shade val="20000"/>
-                <a:satMod val="255000"/>
-              </a:schemeClr>
-            </a:gs>
-          </a:gsLst>
-          <a:path path="circle">
-            <a:fillToRect l="50000" t="-80000" r="50000" b="180000"/>
-          </a:path>
-        </a:gradFill>
-        <a:gradFill rotWithShape="1">
-          <a:gsLst>
-            <a:gs pos="0">
-              <a:schemeClr val="phClr">
-                <a:tint val="80000"/>
-                <a:satMod val="300000"/>
-              </a:schemeClr>
-            </a:gs>
-            <a:gs pos="100000">
-              <a:schemeClr val="phClr">
-                <a:shade val="30000"/>
-                <a:satMod val="200000"/>
-              </a:schemeClr>
-            </a:gs>
-          </a:gsLst>
-          <a:path path="circle">
-            <a:fillToRect l="50000" t="50000" r="50000" b="50000"/>
-          </a:path>
-        </a:gradFill>
-      </a:bgFillStyleLst>
-    </a:fmtScheme>
-  </a:themeElements>
-</a:theme>
 </file>
--- a/docs/Fig R1.pptx
+++ b/docs/Fig R1.pptx
@@ -15,16 +15,17 @@
     <p:sldId id="260" r:id="rId10"/>
     <p:sldId id="261" r:id="rId11"/>
     <p:sldId id="262" r:id="rId12"/>
+    <p:sldId id="263" r:id="rId13"/>
   </p:sldIdLst>
   <p:sldSz cy="5143500" cx="9144000"/>
   <p:notesSz cx="6858000" cy="9144000"/>
   <p:embeddedFontLst>
     <p:embeddedFont>
       <p:font typeface="Roboto"/>
-      <p:regular r:id="rId13"/>
-      <p:bold r:id="rId14"/>
-      <p:italic r:id="rId15"/>
-      <p:boldItalic r:id="rId16"/>
+      <p:regular r:id="rId14"/>
+      <p:bold r:id="rId15"/>
+      <p:italic r:id="rId16"/>
+      <p:boldItalic r:id="rId17"/>
     </p:embeddedFont>
   </p:embeddedFontLst>
   <p:defaultTextStyle>
@@ -720,7 +721,7 @@
       </p:grpSpPr>
       <p:sp>
         <p:nvSpPr>
-          <p:cNvPr id="51" name="Google Shape;51;g3d678bf7346_0_0:notes"/>
+          <p:cNvPr id="51" name="Google Shape;51;h8824fc79a96d018_0_0:notes"/>
           <p:cNvSpPr/>
           <p:nvPr>
             <p:ph idx="2" type="sldImg"/>
@@ -755,7 +756,7 @@
       </p:sp>
       <p:sp>
         <p:nvSpPr>
-          <p:cNvPr id="52" name="Google Shape;52;g3d678bf7346_0_0:notes"/>
+          <p:cNvPr id="52" name="Google Shape;52;h8824fc79a96d018_0_0:notes"/>
           <p:cNvSpPr txBox="1"/>
           <p:nvPr>
             <p:ph idx="1" type="body"/>
@@ -805,7 +806,7 @@
   <p:cSld>
     <p:spTree>
       <p:nvGrpSpPr>
-        <p:cNvPr id="66" name="Shape 66"/>
+        <p:cNvPr id="56" name="Shape 56"/>
         <p:cNvGrpSpPr/>
         <p:nvPr/>
       </p:nvGrpSpPr>
@@ -819,7 +820,7 @@
       </p:grpSpPr>
       <p:sp>
         <p:nvSpPr>
-          <p:cNvPr id="67" name="Google Shape;67;g3d678bf7346_0_8:notes"/>
+          <p:cNvPr id="57" name="Google Shape;57;g3d678bf7346_0_0:notes"/>
           <p:cNvSpPr/>
           <p:nvPr>
             <p:ph idx="2" type="sldImg"/>
@@ -854,7 +855,7 @@
       </p:sp>
       <p:sp>
         <p:nvSpPr>
-          <p:cNvPr id="68" name="Google Shape;68;g3d678bf7346_0_8:notes"/>
+          <p:cNvPr id="58" name="Google Shape;58;g3d678bf7346_0_0:notes"/>
           <p:cNvSpPr txBox="1"/>
           <p:nvPr>
             <p:ph idx="1" type="body"/>
@@ -904,7 +905,7 @@
   <p:cSld>
     <p:spTree>
       <p:nvGrpSpPr>
-        <p:cNvPr id="89" name="Shape 89"/>
+        <p:cNvPr id="72" name="Shape 72"/>
         <p:cNvGrpSpPr/>
         <p:nvPr/>
       </p:nvGrpSpPr>
@@ -918,7 +919,7 @@
       </p:grpSpPr>
       <p:sp>
         <p:nvSpPr>
-          <p:cNvPr id="90" name="Google Shape;90;g396169342f1_0_0:notes"/>
+          <p:cNvPr id="73" name="Google Shape;73;g3d678bf7346_0_8:notes"/>
           <p:cNvSpPr/>
           <p:nvPr>
             <p:ph idx="2" type="sldImg"/>
@@ -953,7 +954,7 @@
       </p:sp>
       <p:sp>
         <p:nvSpPr>
-          <p:cNvPr id="91" name="Google Shape;91;g396169342f1_0_0:notes"/>
+          <p:cNvPr id="74" name="Google Shape;74;g3d678bf7346_0_8:notes"/>
           <p:cNvSpPr txBox="1"/>
           <p:nvPr>
             <p:ph idx="1" type="body"/>
@@ -1017,7 +1018,7 @@
       </p:grpSpPr>
       <p:sp>
         <p:nvSpPr>
-          <p:cNvPr id="96" name="Google Shape;96;g3f5e045cd8f_0_8:notes"/>
+          <p:cNvPr id="96" name="Google Shape;96;g396169342f1_0_0:notes"/>
           <p:cNvSpPr/>
           <p:nvPr>
             <p:ph idx="2" type="sldImg"/>
@@ -1052,7 +1053,7 @@
       </p:sp>
       <p:sp>
         <p:nvSpPr>
-          <p:cNvPr id="97" name="Google Shape;97;g3f5e045cd8f_0_8:notes"/>
+          <p:cNvPr id="97" name="Google Shape;97;g396169342f1_0_0:notes"/>
           <p:cNvSpPr txBox="1"/>
           <p:nvPr>
             <p:ph idx="1" type="body"/>
@@ -1116,7 +1117,7 @@
       </p:grpSpPr>
       <p:sp>
         <p:nvSpPr>
-          <p:cNvPr id="102" name="Google Shape;102;g3f5e045cd8f_0_2:notes"/>
+          <p:cNvPr id="102" name="Google Shape;102;g3f5e045cd8f_0_8:notes"/>
           <p:cNvSpPr/>
           <p:nvPr>
             <p:ph idx="2" type="sldImg"/>
@@ -1151,7 +1152,7 @@
       </p:sp>
       <p:sp>
         <p:nvSpPr>
-          <p:cNvPr id="103" name="Google Shape;103;g3f5e045cd8f_0_2:notes"/>
+          <p:cNvPr id="103" name="Google Shape;103;g3f5e045cd8f_0_8:notes"/>
           <p:cNvSpPr txBox="1"/>
           <p:nvPr>
             <p:ph idx="1" type="body"/>
@@ -1215,7 +1216,7 @@
       </p:grpSpPr>
       <p:sp>
         <p:nvSpPr>
-          <p:cNvPr id="108" name="Google Shape;108;g3d678bf7346_0_23:notes"/>
+          <p:cNvPr id="108" name="Google Shape;108;g3f5e045cd8f_0_2:notes"/>
           <p:cNvSpPr/>
           <p:nvPr>
             <p:ph idx="2" type="sldImg"/>
@@ -1250,7 +1251,7 @@
       </p:sp>
       <p:sp>
         <p:nvSpPr>
-          <p:cNvPr id="109" name="Google Shape;109;g3d678bf7346_0_23:notes"/>
+          <p:cNvPr id="109" name="Google Shape;109;g3f5e045cd8f_0_2:notes"/>
           <p:cNvSpPr txBox="1"/>
           <p:nvPr>
             <p:ph idx="1" type="body"/>
@@ -1300,7 +1301,7 @@
   <p:cSld>
     <p:spTree>
       <p:nvGrpSpPr>
-        <p:cNvPr id="115" name="Shape 115"/>
+        <p:cNvPr id="113" name="Shape 113"/>
         <p:cNvGrpSpPr/>
         <p:nvPr/>
       </p:nvGrpSpPr>
@@ -1314,7 +1315,7 @@
       </p:grpSpPr>
       <p:sp>
         <p:nvSpPr>
-          <p:cNvPr id="116" name="Google Shape;116;g3d678bf7346_0_17:notes"/>
+          <p:cNvPr id="114" name="Google Shape;114;g3d678bf7346_0_23:notes"/>
           <p:cNvSpPr/>
           <p:nvPr>
             <p:ph idx="2" type="sldImg"/>
@@ -1349,7 +1350,106 @@
       </p:sp>
       <p:sp>
         <p:nvSpPr>
-          <p:cNvPr id="117" name="Google Shape;117;g3d678bf7346_0_17:notes"/>
+          <p:cNvPr id="115" name="Google Shape;115;g3d678bf7346_0_23:notes"/>
+          <p:cNvSpPr txBox="1"/>
+          <p:nvPr>
+            <p:ph idx="1" type="body"/>
+          </p:nvPr>
+        </p:nvSpPr>
+        <p:spPr>
+          <a:xfrm>
+            <a:off x="685800" y="4343400"/>
+            <a:ext cx="5486400" cy="4114800"/>
+          </a:xfrm>
+          <a:prstGeom prst="rect">
+            <a:avLst/>
+          </a:prstGeom>
+        </p:spPr>
+        <p:txBody>
+          <a:bodyPr anchorCtr="0" anchor="t" bIns="91425" lIns="91425" spcFirstLastPara="1" rIns="91425" wrap="square" tIns="91425">
+            <a:noAutofit/>
+          </a:bodyPr>
+          <a:lstStyle/>
+          <a:p>
+            <a:pPr indent="0" lvl="0" marL="0" rtl="0" algn="l">
+              <a:spcBef>
+                <a:spcPts val="0"/>
+              </a:spcBef>
+              <a:spcAft>
+                <a:spcPts val="0"/>
+              </a:spcAft>
+              <a:buNone/>
+            </a:pPr>
+            <a:r>
+              <a:t/>
+            </a:r>
+            <a:endParaRPr/>
+          </a:p>
+        </p:txBody>
+      </p:sp>
+    </p:spTree>
+  </p:cSld>
+  <p:clrMapOvr>
+    <a:masterClrMapping/>
+  </p:clrMapOvr>
+</p:notes>
+</file>
+
+<file path=ppt/notesSlides/notesSlide8.xml><?xml version="1.0" encoding="utf-8"?>
+<p:notes xmlns:a="http://schemas.openxmlformats.org/drawingml/2006/main" xmlns:r="http://schemas.openxmlformats.org/officeDocument/2006/relationships" xmlns:mc="http://schemas.openxmlformats.org/markup-compatibility/2006" xmlns:mv="urn:schemas-microsoft-com:mac:vml" xmlns:p="http://schemas.openxmlformats.org/presentationml/2006/main" xmlns:c="http://schemas.openxmlformats.org/drawingml/2006/chart" xmlns:dgm="http://schemas.openxmlformats.org/drawingml/2006/diagram" xmlns:o="urn:schemas-microsoft-com:office:office" xmlns:v="urn:schemas-microsoft-com:vml" xmlns:pvml="urn:schemas-microsoft-com:office:powerpoint" xmlns:com="http://schemas.openxmlformats.org/drawingml/2006/compatibility" xmlns:p14="http://schemas.microsoft.com/office/powerpoint/2010/main" xmlns:p15="http://schemas.microsoft.com/office/powerpoint/2012/main" xmlns:ahyp="http://schemas.microsoft.com/office/drawing/2018/hyperlinkcolor" showMasterPhAnim="0" showMasterSp="0">
+  <p:cSld>
+    <p:spTree>
+      <p:nvGrpSpPr>
+        <p:cNvPr id="121" name="Shape 121"/>
+        <p:cNvGrpSpPr/>
+        <p:nvPr/>
+      </p:nvGrpSpPr>
+      <p:grpSpPr>
+        <a:xfrm>
+          <a:off x="0" y="0"/>
+          <a:ext cx="0" cy="0"/>
+          <a:chOff x="0" y="0"/>
+          <a:chExt cx="0" cy="0"/>
+        </a:xfrm>
+      </p:grpSpPr>
+      <p:sp>
+        <p:nvSpPr>
+          <p:cNvPr id="122" name="Google Shape;122;g3d678bf7346_0_17:notes"/>
+          <p:cNvSpPr/>
+          <p:nvPr>
+            <p:ph idx="2" type="sldImg"/>
+          </p:nvPr>
+        </p:nvSpPr>
+        <p:spPr>
+          <a:xfrm>
+            <a:off x="381300" y="685800"/>
+            <a:ext cx="6096000" cy="3429000"/>
+          </a:xfrm>
+          <a:custGeom>
+            <a:rect b="b" l="l" r="r" t="t"/>
+            <a:pathLst>
+              <a:path extrusionOk="0" h="120000" w="120000">
+                <a:moveTo>
+                  <a:pt x="0" y="0"/>
+                </a:moveTo>
+                <a:lnTo>
+                  <a:pt x="120000" y="0"/>
+                </a:lnTo>
+                <a:lnTo>
+                  <a:pt x="120000" y="120000"/>
+                </a:lnTo>
+                <a:lnTo>
+                  <a:pt x="0" y="120000"/>
+                </a:lnTo>
+                <a:close/>
+              </a:path>
+            </a:pathLst>
+          </a:custGeom>
+        </p:spPr>
+      </p:sp>
+      <p:sp>
+        <p:nvSpPr>
+          <p:cNvPr id="123" name="Google Shape;123;g3d678bf7346_0_17:notes"/>
           <p:cNvSpPr txBox="1"/>
           <p:nvPr>
             <p:ph idx="1" type="body"/>
@@ -6060,9 +6160,147 @@
           <a:chExt cx="0" cy="0"/>
         </a:xfrm>
       </p:grpSpPr>
+      <p:sp>
+        <p:nvSpPr>
+          <p:cNvPr id="54" name="Google Shape;54;p13"/>
+          <p:cNvSpPr txBox="1"/>
+          <p:nvPr/>
+        </p:nvSpPr>
+        <p:spPr>
+          <a:xfrm>
+            <a:off x="242725" y="4444225"/>
+            <a:ext cx="8832600" cy="1040400"/>
+          </a:xfrm>
+          <a:prstGeom prst="rect">
+            <a:avLst/>
+          </a:prstGeom>
+          <a:noFill/>
+          <a:ln>
+            <a:noFill/>
+          </a:ln>
+        </p:spPr>
+        <p:txBody>
+          <a:bodyPr anchorCtr="0" anchor="t" bIns="91425" lIns="91425" spcFirstLastPara="1" rIns="91425" wrap="square" tIns="91425">
+            <a:spAutoFit/>
+          </a:bodyPr>
+          <a:lstStyle/>
+          <a:p>
+            <a:pPr indent="0" lvl="0" marL="0" rtl="0" algn="l">
+              <a:lnSpc>
+                <a:spcPct val="115000"/>
+              </a:lnSpc>
+              <a:spcBef>
+                <a:spcPts val="0"/>
+              </a:spcBef>
+              <a:spcAft>
+                <a:spcPts val="0"/>
+              </a:spcAft>
+              <a:buClr>
+                <a:srgbClr val="000000"/>
+              </a:buClr>
+              <a:buSzPts val="1100"/>
+              <a:buFont typeface="Arial"/>
+              <a:buNone/>
+            </a:pPr>
+            <a:r>
+              <a:rPr b="1" lang="es-419" sz="1200">
+                <a:solidFill>
+                  <a:srgbClr val="595959"/>
+                </a:solidFill>
+              </a:rPr>
+              <a:t>Los niveles de ARN del reportero son consistentes con la fluorescencia de EGFP</a:t>
+            </a:r>
+            <a:r>
+              <a:rPr lang="es-419" sz="1200">
+                <a:solidFill>
+                  <a:srgbClr val="595959"/>
+                </a:solidFill>
+              </a:rPr>
+              <a:t>. Cuantificación por RT-qPCR del ARNm de EGFP en cada réplica. Cada punto representa una réplica técnica de la qPCR. </a:t>
+            </a:r>
+            <a:endParaRPr sz="1800">
+              <a:solidFill>
+                <a:srgbClr val="595959"/>
+              </a:solidFill>
+            </a:endParaRPr>
+          </a:p>
+          <a:p>
+            <a:pPr indent="0" lvl="0" marL="0" rtl="0" algn="l">
+              <a:spcBef>
+                <a:spcPts val="1200"/>
+              </a:spcBef>
+              <a:spcAft>
+                <a:spcPts val="0"/>
+              </a:spcAft>
+              <a:buNone/>
+            </a:pPr>
+            <a:r>
+              <a:t/>
+            </a:r>
+            <a:endParaRPr sz="1800">
+              <a:solidFill>
+                <a:srgbClr val="595959"/>
+              </a:solidFill>
+            </a:endParaRPr>
+          </a:p>
+        </p:txBody>
+      </p:sp>
       <p:pic>
         <p:nvPicPr>
-          <p:cNvPr id="54" name="Google Shape;54;p13" title="n_per_rep.jpg"/>
+          <p:cNvPr id="55" name="Google Shape;55;p13"/>
+          <p:cNvPicPr preferRelativeResize="0"/>
+          <p:nvPr/>
+        </p:nvPicPr>
+        <p:blipFill>
+          <a:blip r:embed="rId3">
+            <a:alphaModFix/>
+          </a:blip>
+          <a:stretch>
+            <a:fillRect/>
+          </a:stretch>
+        </p:blipFill>
+        <p:spPr>
+          <a:xfrm>
+            <a:off x="152400" y="152400"/>
+            <a:ext cx="7473959" cy="4139424"/>
+          </a:xfrm>
+          <a:prstGeom prst="rect">
+            <a:avLst/>
+          </a:prstGeom>
+          <a:noFill/>
+          <a:ln>
+            <a:noFill/>
+          </a:ln>
+        </p:spPr>
+      </p:pic>
+    </p:spTree>
+  </p:cSld>
+  <p:clrMapOvr>
+    <a:masterClrMapping/>
+  </p:clrMapOvr>
+</p:sld>
+</file>
+
+<file path=ppt/slides/slide2.xml><?xml version="1.0" encoding="utf-8"?>
+<p:sld xmlns:a="http://schemas.openxmlformats.org/drawingml/2006/main" xmlns:r="http://schemas.openxmlformats.org/officeDocument/2006/relationships" xmlns:mc="http://schemas.openxmlformats.org/markup-compatibility/2006" xmlns:mv="urn:schemas-microsoft-com:mac:vml" xmlns:p="http://schemas.openxmlformats.org/presentationml/2006/main" xmlns:c="http://schemas.openxmlformats.org/drawingml/2006/chart" xmlns:dgm="http://schemas.openxmlformats.org/drawingml/2006/diagram" xmlns:o="urn:schemas-microsoft-com:office:office" xmlns:v="urn:schemas-microsoft-com:vml" xmlns:pvml="urn:schemas-microsoft-com:office:powerpoint" xmlns:com="http://schemas.openxmlformats.org/drawingml/2006/compatibility" xmlns:p14="http://schemas.microsoft.com/office/powerpoint/2010/main" xmlns:p15="http://schemas.microsoft.com/office/powerpoint/2012/main" xmlns:ahyp="http://schemas.microsoft.com/office/drawing/2018/hyperlinkcolor">
+  <p:cSld>
+    <p:spTree>
+      <p:nvGrpSpPr>
+        <p:cNvPr id="59" name="Shape 59"/>
+        <p:cNvGrpSpPr/>
+        <p:nvPr/>
+      </p:nvGrpSpPr>
+      <p:grpSpPr>
+        <a:xfrm>
+          <a:off x="0" y="0"/>
+          <a:ext cx="0" cy="0"/>
+          <a:chOff x="0" y="0"/>
+          <a:chExt cx="0" cy="0"/>
+        </a:xfrm>
+      </p:grpSpPr>
+      <p:pic>
+        <p:nvPicPr>
+          <p:cNvPr id="60" name="Google Shape;60;p14" title="n_per_rep.jpg"/>
           <p:cNvPicPr preferRelativeResize="0"/>
           <p:nvPr/>
         </p:nvPicPr>
@@ -6090,7 +6328,7 @@
       </p:pic>
       <p:sp>
         <p:nvSpPr>
-          <p:cNvPr id="55" name="Google Shape;55;p13"/>
+          <p:cNvPr id="61" name="Google Shape;61;p14"/>
           <p:cNvSpPr txBox="1"/>
           <p:nvPr/>
         </p:nvSpPr>
@@ -6140,7 +6378,7 @@
       </p:sp>
       <p:sp>
         <p:nvSpPr>
-          <p:cNvPr id="56" name="Google Shape;56;p13"/>
+          <p:cNvPr id="62" name="Google Shape;62;p14"/>
           <p:cNvSpPr txBox="1"/>
           <p:nvPr/>
         </p:nvSpPr>
@@ -6246,7 +6484,7 @@
       </p:sp>
       <p:grpSp>
         <p:nvGrpSpPr>
-          <p:cNvPr id="57" name="Google Shape;57;p13"/>
+          <p:cNvPr id="63" name="Google Shape;63;p14"/>
           <p:cNvGrpSpPr/>
           <p:nvPr/>
         </p:nvGrpSpPr>
@@ -6260,7 +6498,7 @@
         </p:grpSpPr>
         <p:pic>
           <p:nvPicPr>
-            <p:cNvPr id="58" name="Google Shape;58;p13"/>
+            <p:cNvPr id="64" name="Google Shape;64;p14"/>
             <p:cNvPicPr preferRelativeResize="0"/>
             <p:nvPr/>
           </p:nvPicPr>
@@ -6287,7 +6525,7 @@
         </p:pic>
         <p:sp>
           <p:nvSpPr>
-            <p:cNvPr id="59" name="Google Shape;59;p13"/>
+            <p:cNvPr id="65" name="Google Shape;65;p14"/>
             <p:cNvSpPr txBox="1"/>
             <p:nvPr/>
           </p:nvSpPr>
@@ -6339,7 +6577,7 @@
         </p:sp>
         <p:sp>
           <p:nvSpPr>
-            <p:cNvPr id="60" name="Google Shape;60;p13"/>
+            <p:cNvPr id="66" name="Google Shape;66;p14"/>
             <p:cNvSpPr txBox="1"/>
             <p:nvPr/>
           </p:nvSpPr>
@@ -6389,7 +6627,7 @@
         </p:sp>
         <p:sp>
           <p:nvSpPr>
-            <p:cNvPr id="61" name="Google Shape;61;p13"/>
+            <p:cNvPr id="67" name="Google Shape;67;p14"/>
             <p:cNvSpPr txBox="1"/>
             <p:nvPr/>
           </p:nvSpPr>
@@ -6439,7 +6677,7 @@
         </p:sp>
         <p:sp>
           <p:nvSpPr>
-            <p:cNvPr id="62" name="Google Shape;62;p13"/>
+            <p:cNvPr id="68" name="Google Shape;68;p14"/>
             <p:cNvSpPr txBox="1"/>
             <p:nvPr/>
           </p:nvSpPr>
@@ -6489,7 +6727,7 @@
         </p:sp>
         <p:sp>
           <p:nvSpPr>
-            <p:cNvPr id="63" name="Google Shape;63;p13"/>
+            <p:cNvPr id="69" name="Google Shape;69;p14"/>
             <p:cNvSpPr txBox="1"/>
             <p:nvPr/>
           </p:nvSpPr>
@@ -6541,7 +6779,7 @@
         </p:sp>
         <p:sp>
           <p:nvSpPr>
-            <p:cNvPr id="64" name="Google Shape;64;p13"/>
+            <p:cNvPr id="70" name="Google Shape;70;p14"/>
             <p:cNvSpPr txBox="1"/>
             <p:nvPr/>
           </p:nvSpPr>
@@ -6593,7 +6831,7 @@
         </p:sp>
         <p:sp>
           <p:nvSpPr>
-            <p:cNvPr id="65" name="Google Shape;65;p13"/>
+            <p:cNvPr id="71" name="Google Shape;71;p14"/>
             <p:cNvSpPr txBox="1"/>
             <p:nvPr/>
           </p:nvSpPr>
@@ -6652,12 +6890,12 @@
 </p:sld>
 </file>
 
-<file path=ppt/slides/slide2.xml><?xml version="1.0" encoding="utf-8"?>
+<file path=ppt/slides/slide3.xml><?xml version="1.0" encoding="utf-8"?>
 <p:sld xmlns:a="http://schemas.openxmlformats.org/drawingml/2006/main" xmlns:r="http://schemas.openxmlformats.org/officeDocument/2006/relationships" xmlns:mc="http://schemas.openxmlformats.org/markup-compatibility/2006" xmlns:mv="urn:schemas-microsoft-com:mac:vml" xmlns:p="http://schemas.openxmlformats.org/presentationml/2006/main" xmlns:c="http://schemas.openxmlformats.org/drawingml/2006/chart" xmlns:dgm="http://schemas.openxmlformats.org/drawingml/2006/diagram" xmlns:o="urn:schemas-microsoft-com:office:office" xmlns:v="urn:schemas-microsoft-com:vml" xmlns:pvml="urn:schemas-microsoft-com:office:powerpoint" xmlns:com="http://schemas.openxmlformats.org/drawingml/2006/compatibility" xmlns:p14="http://schemas.microsoft.com/office/powerpoint/2010/main" xmlns:p15="http://schemas.microsoft.com/office/powerpoint/2012/main" xmlns:ahyp="http://schemas.microsoft.com/office/drawing/2018/hyperlinkcolor">
   <p:cSld>
     <p:spTree>
       <p:nvGrpSpPr>
-        <p:cNvPr id="69" name="Shape 69"/>
+        <p:cNvPr id="75" name="Shape 75"/>
         <p:cNvGrpSpPr/>
         <p:nvPr/>
       </p:nvGrpSpPr>
@@ -6671,7 +6909,7 @@
       </p:grpSpPr>
       <p:sp>
         <p:nvSpPr>
-          <p:cNvPr id="70" name="Google Shape;70;p14"/>
+          <p:cNvPr id="76" name="Google Shape;76;p15"/>
           <p:cNvSpPr txBox="1"/>
           <p:nvPr/>
         </p:nvSpPr>
@@ -6753,7 +6991,7 @@
       </p:sp>
       <p:pic>
         <p:nvPicPr>
-          <p:cNvPr id="71" name="Google Shape;71;p14"/>
+          <p:cNvPr id="77" name="Google Shape;77;p15"/>
           <p:cNvPicPr preferRelativeResize="0"/>
           <p:nvPr/>
         </p:nvPicPr>
@@ -6780,7 +7018,7 @@
       </p:pic>
       <p:sp>
         <p:nvSpPr>
-          <p:cNvPr id="72" name="Google Shape;72;p14"/>
+          <p:cNvPr id="78" name="Google Shape;78;p15"/>
           <p:cNvSpPr txBox="1"/>
           <p:nvPr/>
         </p:nvSpPr>
@@ -6832,7 +7070,7 @@
       </p:sp>
       <p:sp>
         <p:nvSpPr>
-          <p:cNvPr id="73" name="Google Shape;73;p14"/>
+          <p:cNvPr id="79" name="Google Shape;79;p15"/>
           <p:cNvSpPr txBox="1"/>
           <p:nvPr/>
         </p:nvSpPr>
@@ -6882,7 +7120,7 @@
       </p:sp>
       <p:sp>
         <p:nvSpPr>
-          <p:cNvPr id="74" name="Google Shape;74;p14"/>
+          <p:cNvPr id="80" name="Google Shape;80;p15"/>
           <p:cNvSpPr txBox="1"/>
           <p:nvPr/>
         </p:nvSpPr>
@@ -6934,7 +7172,7 @@
       </p:sp>
       <p:sp>
         <p:nvSpPr>
-          <p:cNvPr id="75" name="Google Shape;75;p14"/>
+          <p:cNvPr id="81" name="Google Shape;81;p15"/>
           <p:cNvSpPr txBox="1"/>
           <p:nvPr/>
         </p:nvSpPr>
@@ -6986,7 +7224,7 @@
       </p:sp>
       <p:sp>
         <p:nvSpPr>
-          <p:cNvPr id="76" name="Google Shape;76;p14"/>
+          <p:cNvPr id="82" name="Google Shape;82;p15"/>
           <p:cNvSpPr txBox="1"/>
           <p:nvPr/>
         </p:nvSpPr>
@@ -7038,7 +7276,7 @@
       </p:sp>
       <p:sp>
         <p:nvSpPr>
-          <p:cNvPr id="77" name="Google Shape;77;p14"/>
+          <p:cNvPr id="83" name="Google Shape;83;p15"/>
           <p:cNvSpPr txBox="1"/>
           <p:nvPr/>
         </p:nvSpPr>
@@ -7096,7 +7334,7 @@
       </p:sp>
       <p:sp>
         <p:nvSpPr>
-          <p:cNvPr id="78" name="Google Shape;78;p14"/>
+          <p:cNvPr id="84" name="Google Shape;84;p15"/>
           <p:cNvSpPr txBox="1"/>
           <p:nvPr/>
         </p:nvSpPr>
@@ -7146,7 +7384,7 @@
       </p:sp>
       <p:grpSp>
         <p:nvGrpSpPr>
-          <p:cNvPr id="79" name="Google Shape;79;p14"/>
+          <p:cNvPr id="85" name="Google Shape;85;p15"/>
           <p:cNvGrpSpPr/>
           <p:nvPr/>
         </p:nvGrpSpPr>
@@ -7160,7 +7398,7 @@
         </p:grpSpPr>
         <p:grpSp>
           <p:nvGrpSpPr>
-            <p:cNvPr id="80" name="Google Shape;80;p14"/>
+            <p:cNvPr id="86" name="Google Shape;86;p15"/>
             <p:cNvGrpSpPr/>
             <p:nvPr/>
           </p:nvGrpSpPr>
@@ -7174,7 +7412,7 @@
           </p:grpSpPr>
           <p:pic>
             <p:nvPicPr>
-              <p:cNvPr id="81" name="Google Shape;81;p14" title="gc_bias_bars.jpg"/>
+              <p:cNvPr id="87" name="Google Shape;87;p15" title="gc_bias_bars.jpg"/>
               <p:cNvPicPr preferRelativeResize="0"/>
               <p:nvPr/>
             </p:nvPicPr>
@@ -7202,7 +7440,7 @@
           </p:pic>
           <p:sp>
             <p:nvSpPr>
-              <p:cNvPr id="82" name="Google Shape;82;p14"/>
+              <p:cNvPr id="88" name="Google Shape;88;p15"/>
               <p:cNvSpPr txBox="1"/>
               <p:nvPr/>
             </p:nvSpPr>
@@ -7252,7 +7490,7 @@
           </p:sp>
           <p:sp>
             <p:nvSpPr>
-              <p:cNvPr id="83" name="Google Shape;83;p14"/>
+              <p:cNvPr id="89" name="Google Shape;89;p15"/>
               <p:cNvSpPr txBox="1"/>
               <p:nvPr/>
             </p:nvSpPr>
@@ -7303,7 +7541,7 @@
         </p:grpSp>
         <p:sp>
           <p:nvSpPr>
-            <p:cNvPr id="84" name="Google Shape;84;p14"/>
+            <p:cNvPr id="90" name="Google Shape;90;p15"/>
             <p:cNvSpPr/>
             <p:nvPr/>
           </p:nvSpPr>
@@ -7352,7 +7590,7 @@
         </p:sp>
         <p:sp>
           <p:nvSpPr>
-            <p:cNvPr id="85" name="Google Shape;85;p14"/>
+            <p:cNvPr id="91" name="Google Shape;91;p15"/>
             <p:cNvSpPr/>
             <p:nvPr/>
           </p:nvSpPr>
@@ -7402,7 +7640,7 @@
       </p:grpSp>
       <p:pic>
         <p:nvPicPr>
-          <p:cNvPr id="86" name="Google Shape;86;p14" title="gc_bias_violin.jpg"/>
+          <p:cNvPr id="92" name="Google Shape;92;p15" title="gc_bias_violin.jpg"/>
           <p:cNvPicPr preferRelativeResize="0"/>
           <p:nvPr/>
         </p:nvPicPr>
@@ -7429,7 +7667,7 @@
       </p:pic>
       <p:sp>
         <p:nvSpPr>
-          <p:cNvPr id="87" name="Google Shape;87;p14"/>
+          <p:cNvPr id="93" name="Google Shape;93;p15"/>
           <p:cNvSpPr txBox="1"/>
           <p:nvPr/>
         </p:nvSpPr>
@@ -7503,7 +7741,7 @@
       </p:sp>
       <p:sp>
         <p:nvSpPr>
-          <p:cNvPr id="88" name="Google Shape;88;p14"/>
+          <p:cNvPr id="94" name="Google Shape;94;p15"/>
           <p:cNvSpPr txBox="1"/>
           <p:nvPr/>
         </p:nvSpPr>
@@ -7552,200 +7790,6 @@
               <a:t>etectados</a:t>
             </a:r>
             <a:endParaRPr sz="1100">
-              <a:solidFill>
-                <a:schemeClr val="dk2"/>
-              </a:solidFill>
-            </a:endParaRPr>
-          </a:p>
-        </p:txBody>
-      </p:sp>
-    </p:spTree>
-  </p:cSld>
-  <p:clrMapOvr>
-    <a:masterClrMapping/>
-  </p:clrMapOvr>
-</p:sld>
-</file>
-
-<file path=ppt/slides/slide3.xml><?xml version="1.0" encoding="utf-8"?>
-<p:sld xmlns:a="http://schemas.openxmlformats.org/drawingml/2006/main" xmlns:r="http://schemas.openxmlformats.org/officeDocument/2006/relationships" xmlns:mc="http://schemas.openxmlformats.org/markup-compatibility/2006" xmlns:mv="urn:schemas-microsoft-com:mac:vml" xmlns:p="http://schemas.openxmlformats.org/presentationml/2006/main" xmlns:c="http://schemas.openxmlformats.org/drawingml/2006/chart" xmlns:dgm="http://schemas.openxmlformats.org/drawingml/2006/diagram" xmlns:o="urn:schemas-microsoft-com:office:office" xmlns:v="urn:schemas-microsoft-com:vml" xmlns:pvml="urn:schemas-microsoft-com:office:powerpoint" xmlns:com="http://schemas.openxmlformats.org/drawingml/2006/compatibility" xmlns:p14="http://schemas.microsoft.com/office/powerpoint/2010/main" xmlns:p15="http://schemas.microsoft.com/office/powerpoint/2012/main" xmlns:ahyp="http://schemas.microsoft.com/office/drawing/2018/hyperlinkcolor">
-  <p:cSld>
-    <p:spTree>
-      <p:nvGrpSpPr>
-        <p:cNvPr id="92" name="Shape 92"/>
-        <p:cNvGrpSpPr/>
-        <p:nvPr/>
-      </p:nvGrpSpPr>
-      <p:grpSpPr>
-        <a:xfrm>
-          <a:off x="0" y="0"/>
-          <a:ext cx="0" cy="0"/>
-          <a:chOff x="0" y="0"/>
-          <a:chExt cx="0" cy="0"/>
-        </a:xfrm>
-      </p:grpSpPr>
-      <p:pic>
-        <p:nvPicPr>
-          <p:cNvPr id="93" name="Google Shape;93;p15"/>
-          <p:cNvPicPr preferRelativeResize="0"/>
-          <p:nvPr/>
-        </p:nvPicPr>
-        <p:blipFill>
-          <a:blip r:embed="rId3">
-            <a:alphaModFix/>
-          </a:blip>
-          <a:stretch>
-            <a:fillRect/>
-          </a:stretch>
-        </p:blipFill>
-        <p:spPr>
-          <a:xfrm>
-            <a:off x="884425" y="152400"/>
-            <a:ext cx="5012300" cy="3762750"/>
-          </a:xfrm>
-          <a:prstGeom prst="rect">
-            <a:avLst/>
-          </a:prstGeom>
-          <a:noFill/>
-          <a:ln>
-            <a:noFill/>
-          </a:ln>
-        </p:spPr>
-      </p:pic>
-      <p:sp>
-        <p:nvSpPr>
-          <p:cNvPr id="94" name="Google Shape;94;p15"/>
-          <p:cNvSpPr txBox="1"/>
-          <p:nvPr/>
-        </p:nvSpPr>
-        <p:spPr>
-          <a:xfrm>
-            <a:off x="242725" y="4030035"/>
-            <a:ext cx="9044400" cy="1006500"/>
-          </a:xfrm>
-          <a:prstGeom prst="rect">
-            <a:avLst/>
-          </a:prstGeom>
-          <a:noFill/>
-          <a:ln>
-            <a:noFill/>
-          </a:ln>
-        </p:spPr>
-        <p:txBody>
-          <a:bodyPr anchorCtr="0" anchor="t" bIns="91425" lIns="91425" spcFirstLastPara="1" rIns="91425" wrap="square" tIns="91425">
-            <a:spAutoFit/>
-          </a:bodyPr>
-          <a:lstStyle/>
-          <a:p>
-            <a:pPr indent="0" lvl="0" marL="0" rtl="0" algn="l">
-              <a:lnSpc>
-                <a:spcPct val="115000"/>
-              </a:lnSpc>
-              <a:spcBef>
-                <a:spcPts val="0"/>
-              </a:spcBef>
-              <a:spcAft>
-                <a:spcPts val="1200"/>
-              </a:spcAft>
-              <a:buNone/>
-            </a:pPr>
-            <a:r>
-              <a:rPr b="1" lang="es-419" sz="1200">
-                <a:solidFill>
-                  <a:schemeClr val="dk2"/>
-                </a:solidFill>
-              </a:rPr>
-              <a:t>Robustez de los controles celulares internos de spike-in.</a:t>
-            </a:r>
-            <a:r>
-              <a:rPr lang="es-419" sz="1200">
-                <a:solidFill>
-                  <a:schemeClr val="dk2"/>
-                </a:solidFill>
-              </a:rPr>
-              <a:t> 30, 300 o 3000 células fueron añadidas en forma de </a:t>
-            </a:r>
-            <a:r>
-              <a:rPr lang="es-419" sz="1200">
-                <a:solidFill>
-                  <a:schemeClr val="dk2"/>
-                </a:solidFill>
-              </a:rPr>
-              <a:t>estándar</a:t>
-            </a:r>
-            <a:r>
-              <a:rPr lang="es-419" sz="1200">
-                <a:solidFill>
-                  <a:schemeClr val="dk2"/>
-                </a:solidFill>
-              </a:rPr>
-              <a:t> interno a cada muestra. Los counts corregidos de cada una de las tres líneas celulares usadas como </a:t>
-            </a:r>
-            <a:r>
-              <a:rPr lang="es-419" sz="1200">
-                <a:solidFill>
-                  <a:schemeClr val="dk2"/>
-                </a:solidFill>
-              </a:rPr>
-              <a:t>estándar</a:t>
-            </a:r>
-            <a:r>
-              <a:rPr lang="es-419" sz="1200">
-                <a:solidFill>
-                  <a:schemeClr val="dk2"/>
-                </a:solidFill>
-              </a:rPr>
-              <a:t> fueron normalizadas al de aquella con representación intermedia (Spike-in 2). Los valores para cada fracción de </a:t>
-            </a:r>
-            <a:r>
-              <a:rPr lang="es-419" sz="1200">
-                <a:solidFill>
-                  <a:schemeClr val="dk2"/>
-                </a:solidFill>
-              </a:rPr>
-              <a:t>células</a:t>
-            </a:r>
-            <a:r>
-              <a:rPr lang="es-419" sz="1200">
-                <a:solidFill>
-                  <a:schemeClr val="dk2"/>
-                </a:solidFill>
-              </a:rPr>
-              <a:t> se muestran para ambas </a:t>
-            </a:r>
-            <a:r>
-              <a:rPr lang="es-419" sz="1200">
-                <a:solidFill>
-                  <a:schemeClr val="dk2"/>
-                </a:solidFill>
-              </a:rPr>
-              <a:t>réplicas</a:t>
-            </a:r>
-            <a:r>
-              <a:rPr lang="es-419" sz="1200">
-                <a:solidFill>
-                  <a:schemeClr val="dk2"/>
-                </a:solidFill>
-              </a:rPr>
-              <a:t>, y muestran la ausencia de sesgos técnicos relevantes entre las muestras en la </a:t>
-            </a:r>
-            <a:r>
-              <a:rPr lang="es-419" sz="1200">
-                <a:solidFill>
-                  <a:schemeClr val="dk2"/>
-                </a:solidFill>
-              </a:rPr>
-              <a:t>cuantificación</a:t>
-            </a:r>
-            <a:r>
-              <a:rPr lang="es-419" sz="1200">
-                <a:solidFill>
-                  <a:schemeClr val="dk2"/>
-                </a:solidFill>
-              </a:rPr>
-              <a:t> en escala masiva.</a:t>
-            </a:r>
-            <a:endParaRPr sz="1800">
               <a:solidFill>
                 <a:schemeClr val="dk2"/>
               </a:solidFill>
@@ -7778,9 +7822,203 @@
           <a:chExt cx="0" cy="0"/>
         </a:xfrm>
       </p:grpSpPr>
+      <p:pic>
+        <p:nvPicPr>
+          <p:cNvPr id="99" name="Google Shape;99;p16"/>
+          <p:cNvPicPr preferRelativeResize="0"/>
+          <p:nvPr/>
+        </p:nvPicPr>
+        <p:blipFill>
+          <a:blip r:embed="rId3">
+            <a:alphaModFix/>
+          </a:blip>
+          <a:stretch>
+            <a:fillRect/>
+          </a:stretch>
+        </p:blipFill>
+        <p:spPr>
+          <a:xfrm>
+            <a:off x="884425" y="152400"/>
+            <a:ext cx="5012300" cy="3762750"/>
+          </a:xfrm>
+          <a:prstGeom prst="rect">
+            <a:avLst/>
+          </a:prstGeom>
+          <a:noFill/>
+          <a:ln>
+            <a:noFill/>
+          </a:ln>
+        </p:spPr>
+      </p:pic>
       <p:sp>
         <p:nvSpPr>
-          <p:cNvPr id="99" name="Google Shape;99;p16"/>
+          <p:cNvPr id="100" name="Google Shape;100;p16"/>
+          <p:cNvSpPr txBox="1"/>
+          <p:nvPr/>
+        </p:nvSpPr>
+        <p:spPr>
+          <a:xfrm>
+            <a:off x="242725" y="4030035"/>
+            <a:ext cx="9044400" cy="1006500"/>
+          </a:xfrm>
+          <a:prstGeom prst="rect">
+            <a:avLst/>
+          </a:prstGeom>
+          <a:noFill/>
+          <a:ln>
+            <a:noFill/>
+          </a:ln>
+        </p:spPr>
+        <p:txBody>
+          <a:bodyPr anchorCtr="0" anchor="t" bIns="91425" lIns="91425" spcFirstLastPara="1" rIns="91425" wrap="square" tIns="91425">
+            <a:spAutoFit/>
+          </a:bodyPr>
+          <a:lstStyle/>
+          <a:p>
+            <a:pPr indent="0" lvl="0" marL="0" rtl="0" algn="l">
+              <a:lnSpc>
+                <a:spcPct val="115000"/>
+              </a:lnSpc>
+              <a:spcBef>
+                <a:spcPts val="0"/>
+              </a:spcBef>
+              <a:spcAft>
+                <a:spcPts val="1200"/>
+              </a:spcAft>
+              <a:buNone/>
+            </a:pPr>
+            <a:r>
+              <a:rPr b="1" lang="es-419" sz="1200">
+                <a:solidFill>
+                  <a:schemeClr val="dk2"/>
+                </a:solidFill>
+              </a:rPr>
+              <a:t>Robustez de los controles celulares internos de spike-in.</a:t>
+            </a:r>
+            <a:r>
+              <a:rPr lang="es-419" sz="1200">
+                <a:solidFill>
+                  <a:schemeClr val="dk2"/>
+                </a:solidFill>
+              </a:rPr>
+              <a:t> 30, 300 o 3000 células fueron añadidas en forma de </a:t>
+            </a:r>
+            <a:r>
+              <a:rPr lang="es-419" sz="1200">
+                <a:solidFill>
+                  <a:schemeClr val="dk2"/>
+                </a:solidFill>
+              </a:rPr>
+              <a:t>estándar</a:t>
+            </a:r>
+            <a:r>
+              <a:rPr lang="es-419" sz="1200">
+                <a:solidFill>
+                  <a:schemeClr val="dk2"/>
+                </a:solidFill>
+              </a:rPr>
+              <a:t> interno a cada muestra. Los counts corregidos de cada una de las tres líneas celulares usadas como </a:t>
+            </a:r>
+            <a:r>
+              <a:rPr lang="es-419" sz="1200">
+                <a:solidFill>
+                  <a:schemeClr val="dk2"/>
+                </a:solidFill>
+              </a:rPr>
+              <a:t>estándar</a:t>
+            </a:r>
+            <a:r>
+              <a:rPr lang="es-419" sz="1200">
+                <a:solidFill>
+                  <a:schemeClr val="dk2"/>
+                </a:solidFill>
+              </a:rPr>
+              <a:t> fueron normalizadas al de aquella con representación intermedia (Spike-in 2). Los valores para cada fracción de </a:t>
+            </a:r>
+            <a:r>
+              <a:rPr lang="es-419" sz="1200">
+                <a:solidFill>
+                  <a:schemeClr val="dk2"/>
+                </a:solidFill>
+              </a:rPr>
+              <a:t>células</a:t>
+            </a:r>
+            <a:r>
+              <a:rPr lang="es-419" sz="1200">
+                <a:solidFill>
+                  <a:schemeClr val="dk2"/>
+                </a:solidFill>
+              </a:rPr>
+              <a:t> se muestran para ambas </a:t>
+            </a:r>
+            <a:r>
+              <a:rPr lang="es-419" sz="1200">
+                <a:solidFill>
+                  <a:schemeClr val="dk2"/>
+                </a:solidFill>
+              </a:rPr>
+              <a:t>réplicas</a:t>
+            </a:r>
+            <a:r>
+              <a:rPr lang="es-419" sz="1200">
+                <a:solidFill>
+                  <a:schemeClr val="dk2"/>
+                </a:solidFill>
+              </a:rPr>
+              <a:t>, y muestran la ausencia de sesgos técnicos relevantes entre las muestras en la </a:t>
+            </a:r>
+            <a:r>
+              <a:rPr lang="es-419" sz="1200">
+                <a:solidFill>
+                  <a:schemeClr val="dk2"/>
+                </a:solidFill>
+              </a:rPr>
+              <a:t>cuantificación</a:t>
+            </a:r>
+            <a:r>
+              <a:rPr lang="es-419" sz="1200">
+                <a:solidFill>
+                  <a:schemeClr val="dk2"/>
+                </a:solidFill>
+              </a:rPr>
+              <a:t> en escala masiva.</a:t>
+            </a:r>
+            <a:endParaRPr sz="1800">
+              <a:solidFill>
+                <a:schemeClr val="dk2"/>
+              </a:solidFill>
+            </a:endParaRPr>
+          </a:p>
+        </p:txBody>
+      </p:sp>
+    </p:spTree>
+  </p:cSld>
+  <p:clrMapOvr>
+    <a:masterClrMapping/>
+  </p:clrMapOvr>
+</p:sld>
+</file>
+
+<file path=ppt/slides/slide5.xml><?xml version="1.0" encoding="utf-8"?>
+<p:sld xmlns:a="http://schemas.openxmlformats.org/drawingml/2006/main" xmlns:r="http://schemas.openxmlformats.org/officeDocument/2006/relationships" xmlns:mc="http://schemas.openxmlformats.org/markup-compatibility/2006" xmlns:mv="urn:schemas-microsoft-com:mac:vml" xmlns:p="http://schemas.openxmlformats.org/presentationml/2006/main" xmlns:c="http://schemas.openxmlformats.org/drawingml/2006/chart" xmlns:dgm="http://schemas.openxmlformats.org/drawingml/2006/diagram" xmlns:o="urn:schemas-microsoft-com:office:office" xmlns:v="urn:schemas-microsoft-com:vml" xmlns:pvml="urn:schemas-microsoft-com:office:powerpoint" xmlns:com="http://schemas.openxmlformats.org/drawingml/2006/compatibility" xmlns:p14="http://schemas.microsoft.com/office/powerpoint/2010/main" xmlns:p15="http://schemas.microsoft.com/office/powerpoint/2012/main" xmlns:ahyp="http://schemas.microsoft.com/office/drawing/2018/hyperlinkcolor">
+  <p:cSld>
+    <p:spTree>
+      <p:nvGrpSpPr>
+        <p:cNvPr id="104" name="Shape 104"/>
+        <p:cNvGrpSpPr/>
+        <p:nvPr/>
+      </p:nvGrpSpPr>
+      <p:grpSpPr>
+        <a:xfrm>
+          <a:off x="0" y="0"/>
+          <a:ext cx="0" cy="0"/>
+          <a:chOff x="0" y="0"/>
+          <a:chExt cx="0" cy="0"/>
+        </a:xfrm>
+      </p:grpSpPr>
+      <p:sp>
+        <p:nvSpPr>
+          <p:cNvPr id="105" name="Google Shape;105;p17"/>
           <p:cNvSpPr txBox="1"/>
           <p:nvPr/>
         </p:nvSpPr>
@@ -7886,7 +8124,7 @@
       </p:sp>
       <p:pic>
         <p:nvPicPr>
-          <p:cNvPr id="100" name="Google Shape;100;p16" title="histograma_gates_KIAA0753.jpg"/>
+          <p:cNvPr id="106" name="Google Shape;106;p17" title="histograma_gates_KIAA0753.jpg"/>
           <p:cNvPicPr preferRelativeResize="0"/>
           <p:nvPr/>
         </p:nvPicPr>
@@ -7920,12 +8158,12 @@
 </p:sld>
 </file>
 
-<file path=ppt/slides/slide5.xml><?xml version="1.0" encoding="utf-8"?>
+<file path=ppt/slides/slide6.xml><?xml version="1.0" encoding="utf-8"?>
 <p:sld xmlns:a="http://schemas.openxmlformats.org/drawingml/2006/main" xmlns:r="http://schemas.openxmlformats.org/officeDocument/2006/relationships" xmlns:mc="http://schemas.openxmlformats.org/markup-compatibility/2006" xmlns:mv="urn:schemas-microsoft-com:mac:vml" xmlns:p="http://schemas.openxmlformats.org/presentationml/2006/main" xmlns:c="http://schemas.openxmlformats.org/drawingml/2006/chart" xmlns:dgm="http://schemas.openxmlformats.org/drawingml/2006/diagram" xmlns:o="urn:schemas-microsoft-com:office:office" xmlns:v="urn:schemas-microsoft-com:vml" xmlns:pvml="urn:schemas-microsoft-com:office:powerpoint" xmlns:com="http://schemas.openxmlformats.org/drawingml/2006/compatibility" xmlns:p14="http://schemas.microsoft.com/office/powerpoint/2010/main" xmlns:p15="http://schemas.microsoft.com/office/powerpoint/2012/main" xmlns:ahyp="http://schemas.microsoft.com/office/drawing/2018/hyperlinkcolor">
   <p:cSld>
     <p:spTree>
       <p:nvGrpSpPr>
-        <p:cNvPr id="104" name="Shape 104"/>
+        <p:cNvPr id="110" name="Shape 110"/>
         <p:cNvGrpSpPr/>
         <p:nvPr/>
       </p:nvGrpSpPr>
@@ -7939,7 +8177,7 @@
       </p:grpSpPr>
       <p:pic>
         <p:nvPicPr>
-          <p:cNvPr id="105" name="Google Shape;105;p17" title="extra_densidad_individual.jpg"/>
+          <p:cNvPr id="111" name="Google Shape;111;p18" title="extra_densidad_individual.jpg"/>
           <p:cNvPicPr preferRelativeResize="0"/>
           <p:nvPr/>
         </p:nvPicPr>
@@ -7967,7 +8205,7 @@
       </p:pic>
       <p:sp>
         <p:nvSpPr>
-          <p:cNvPr id="106" name="Google Shape;106;p17"/>
+          <p:cNvPr id="112" name="Google Shape;112;p18"/>
           <p:cNvSpPr txBox="1"/>
           <p:nvPr/>
         </p:nvSpPr>
@@ -8083,12 +8321,12 @@
 </p:sld>
 </file>
 
-<file path=ppt/slides/slide6.xml><?xml version="1.0" encoding="utf-8"?>
+<file path=ppt/slides/slide7.xml><?xml version="1.0" encoding="utf-8"?>
 <p:sld xmlns:a="http://schemas.openxmlformats.org/drawingml/2006/main" xmlns:r="http://schemas.openxmlformats.org/officeDocument/2006/relationships" xmlns:mc="http://schemas.openxmlformats.org/markup-compatibility/2006" xmlns:mv="urn:schemas-microsoft-com:mac:vml" xmlns:p="http://schemas.openxmlformats.org/presentationml/2006/main" xmlns:c="http://schemas.openxmlformats.org/drawingml/2006/chart" xmlns:dgm="http://schemas.openxmlformats.org/drawingml/2006/diagram" xmlns:o="urn:schemas-microsoft-com:office:office" xmlns:v="urn:schemas-microsoft-com:vml" xmlns:pvml="urn:schemas-microsoft-com:office:powerpoint" xmlns:com="http://schemas.openxmlformats.org/drawingml/2006/compatibility" xmlns:p14="http://schemas.microsoft.com/office/powerpoint/2010/main" xmlns:p15="http://schemas.microsoft.com/office/powerpoint/2012/main" xmlns:ahyp="http://schemas.microsoft.com/office/drawing/2018/hyperlinkcolor">
   <p:cSld>
     <p:spTree>
       <p:nvGrpSpPr>
-        <p:cNvPr id="110" name="Shape 110"/>
+        <p:cNvPr id="116" name="Shape 116"/>
         <p:cNvGrpSpPr/>
         <p:nvPr/>
       </p:nvGrpSpPr>
@@ -8102,7 +8340,7 @@
       </p:grpSpPr>
       <p:pic>
         <p:nvPicPr>
-          <p:cNvPr id="111" name="Google Shape;111;p18"/>
+          <p:cNvPr id="117" name="Google Shape;117;p19"/>
           <p:cNvPicPr preferRelativeResize="0"/>
           <p:nvPr/>
         </p:nvPicPr>
@@ -8130,7 +8368,7 @@
       </p:pic>
       <p:pic>
         <p:nvPicPr>
-          <p:cNvPr id="112" name="Google Shape;112;p18"/>
+          <p:cNvPr id="118" name="Google Shape;118;p19"/>
           <p:cNvPicPr preferRelativeResize="0"/>
           <p:nvPr/>
         </p:nvPicPr>
@@ -8158,7 +8396,7 @@
       </p:pic>
       <p:sp>
         <p:nvSpPr>
-          <p:cNvPr id="113" name="Google Shape;113;p18"/>
+          <p:cNvPr id="119" name="Google Shape;119;p19"/>
           <p:cNvSpPr txBox="1"/>
           <p:nvPr/>
         </p:nvSpPr>
@@ -8264,7 +8502,7 @@
       </p:sp>
       <p:pic>
         <p:nvPicPr>
-          <p:cNvPr id="114" name="Google Shape;114;p18" title="panel_b_histograma_gates_ejemplo.jpg"/>
+          <p:cNvPr id="120" name="Google Shape;120;p19" title="panel_b_histograma_gates_ejemplo.jpg"/>
           <p:cNvPicPr preferRelativeResize="0"/>
           <p:nvPr/>
         </p:nvPicPr>
@@ -8298,12 +8536,12 @@
 </p:sld>
 </file>
 
-<file path=ppt/slides/slide7.xml><?xml version="1.0" encoding="utf-8"?>
+<file path=ppt/slides/slide8.xml><?xml version="1.0" encoding="utf-8"?>
 <p:sld xmlns:a="http://schemas.openxmlformats.org/drawingml/2006/main" xmlns:r="http://schemas.openxmlformats.org/officeDocument/2006/relationships" xmlns:mc="http://schemas.openxmlformats.org/markup-compatibility/2006" xmlns:mv="urn:schemas-microsoft-com:mac:vml" xmlns:p="http://schemas.openxmlformats.org/presentationml/2006/main" xmlns:c="http://schemas.openxmlformats.org/drawingml/2006/chart" xmlns:dgm="http://schemas.openxmlformats.org/drawingml/2006/diagram" xmlns:o="urn:schemas-microsoft-com:office:office" xmlns:v="urn:schemas-microsoft-com:vml" xmlns:pvml="urn:schemas-microsoft-com:office:powerpoint" xmlns:com="http://schemas.openxmlformats.org/drawingml/2006/compatibility" xmlns:p14="http://schemas.microsoft.com/office/powerpoint/2010/main" xmlns:p15="http://schemas.microsoft.com/office/powerpoint/2012/main" xmlns:ahyp="http://schemas.microsoft.com/office/drawing/2018/hyperlinkcolor">
   <p:cSld>
     <p:spTree>
       <p:nvGrpSpPr>
-        <p:cNvPr id="118" name="Shape 118"/>
+        <p:cNvPr id="124" name="Shape 124"/>
         <p:cNvGrpSpPr/>
         <p:nvPr/>
       </p:nvGrpSpPr>
@@ -8317,7 +8555,7 @@
       </p:grpSpPr>
       <p:grpSp>
         <p:nvGrpSpPr>
-          <p:cNvPr id="119" name="Google Shape;119;p19"/>
+          <p:cNvPr id="125" name="Google Shape;125;p20"/>
           <p:cNvGrpSpPr/>
           <p:nvPr/>
         </p:nvGrpSpPr>
@@ -8331,7 +8569,7 @@
         </p:grpSpPr>
         <p:pic>
           <p:nvPicPr>
-            <p:cNvPr id="120" name="Google Shape;120;p19"/>
+            <p:cNvPr id="126" name="Google Shape;126;p20"/>
             <p:cNvPicPr preferRelativeResize="0"/>
             <p:nvPr/>
           </p:nvPicPr>
@@ -8358,7 +8596,7 @@
         </p:pic>
         <p:sp>
           <p:nvSpPr>
-            <p:cNvPr id="121" name="Google Shape;121;p19"/>
+            <p:cNvPr id="127" name="Google Shape;127;p20"/>
             <p:cNvSpPr txBox="1"/>
             <p:nvPr/>
           </p:nvSpPr>
@@ -8410,7 +8648,7 @@
         </p:sp>
         <p:sp>
           <p:nvSpPr>
-            <p:cNvPr id="122" name="Google Shape;122;p19"/>
+            <p:cNvPr id="128" name="Google Shape;128;p20"/>
             <p:cNvSpPr txBox="1"/>
             <p:nvPr/>
           </p:nvSpPr>
@@ -8460,7 +8698,7 @@
         </p:sp>
         <p:sp>
           <p:nvSpPr>
-            <p:cNvPr id="123" name="Google Shape;123;p19"/>
+            <p:cNvPr id="129" name="Google Shape;129;p20"/>
             <p:cNvSpPr txBox="1"/>
             <p:nvPr/>
           </p:nvSpPr>
@@ -8510,7 +8748,7 @@
         </p:sp>
         <p:sp>
           <p:nvSpPr>
-            <p:cNvPr id="124" name="Google Shape;124;p19"/>
+            <p:cNvPr id="130" name="Google Shape;130;p20"/>
             <p:cNvSpPr txBox="1"/>
             <p:nvPr/>
           </p:nvSpPr>
@@ -8560,7 +8798,7 @@
         </p:sp>
         <p:sp>
           <p:nvSpPr>
-            <p:cNvPr id="125" name="Google Shape;125;p19"/>
+            <p:cNvPr id="131" name="Google Shape;131;p20"/>
             <p:cNvSpPr txBox="1"/>
             <p:nvPr/>
           </p:nvSpPr>
@@ -8612,7 +8850,7 @@
         </p:sp>
         <p:sp>
           <p:nvSpPr>
-            <p:cNvPr id="126" name="Google Shape;126;p19"/>
+            <p:cNvPr id="132" name="Google Shape;132;p20"/>
             <p:cNvSpPr txBox="1"/>
             <p:nvPr/>
           </p:nvSpPr>
@@ -8664,7 +8902,7 @@
         </p:sp>
         <p:sp>
           <p:nvSpPr>
-            <p:cNvPr id="127" name="Google Shape;127;p19"/>
+            <p:cNvPr id="133" name="Google Shape;133;p20"/>
             <p:cNvSpPr txBox="1"/>
             <p:nvPr/>
           </p:nvSpPr>
@@ -8722,7 +8960,7 @@
       </p:grpSp>
       <p:sp>
         <p:nvSpPr>
-          <p:cNvPr id="128" name="Google Shape;128;p19"/>
+          <p:cNvPr id="134" name="Google Shape;134;p20"/>
           <p:cNvSpPr txBox="1"/>
           <p:nvPr/>
         </p:nvSpPr>
@@ -8899,7 +9137,7 @@
       </p:sp>
       <p:grpSp>
         <p:nvGrpSpPr>
-          <p:cNvPr id="129" name="Google Shape;129;p19"/>
+          <p:cNvPr id="135" name="Google Shape;135;p20"/>
           <p:cNvGrpSpPr/>
           <p:nvPr/>
         </p:nvGrpSpPr>
@@ -8913,7 +9151,7 @@
         </p:grpSpPr>
         <p:pic>
           <p:nvPicPr>
-            <p:cNvPr id="130" name="Google Shape;130;p19" title="mean_replicates_prefilter.jpg"/>
+            <p:cNvPr id="136" name="Google Shape;136;p20" title="mean_replicates_prefilter.jpg"/>
             <p:cNvPicPr preferRelativeResize="0"/>
             <p:nvPr/>
           </p:nvPicPr>
@@ -8940,7 +9178,7 @@
         </p:pic>
         <p:pic>
           <p:nvPicPr>
-            <p:cNvPr id="131" name="Google Shape;131;p19" title="mean_replicates_prefilter.jpg"/>
+            <p:cNvPr id="137" name="Google Shape;137;p20" title="mean_replicates_prefilter.jpg"/>
             <p:cNvPicPr preferRelativeResize="0"/>
             <p:nvPr/>
           </p:nvPicPr>
@@ -8967,7 +9205,7 @@
         </p:pic>
         <p:pic>
           <p:nvPicPr>
-            <p:cNvPr id="132" name="Google Shape;132;p19" title="mean_replicates_prefilter.jpg"/>
+            <p:cNvPr id="138" name="Google Shape;138;p20" title="mean_replicates_prefilter.jpg"/>
             <p:cNvPicPr preferRelativeResize="0"/>
             <p:nvPr/>
           </p:nvPicPr>
@@ -8995,7 +9233,7 @@
       </p:grpSp>
       <p:pic>
         <p:nvPicPr>
-          <p:cNvPr id="133" name="Google Shape;133;p19" title="mean_replicates_postfilter.jpg"/>
+          <p:cNvPr id="139" name="Google Shape;139;p20" title="mean_replicates_postfilter.jpg"/>
           <p:cNvPicPr preferRelativeResize="0"/>
           <p:nvPr/>
         </p:nvPicPr>
@@ -9023,7 +9261,7 @@
       </p:pic>
       <p:pic>
         <p:nvPicPr>
-          <p:cNvPr id="134" name="Google Shape;134;p19" title="panel_d_var_replicates.jpg"/>
+          <p:cNvPr id="140" name="Google Shape;140;p20" title="panel_d_var_replicates.jpg"/>
           <p:cNvPicPr preferRelativeResize="0"/>
           <p:nvPr/>
         </p:nvPicPr>

--- a/docs/Fig R1.pptx
+++ b/docs/Fig R1.pptx
@@ -1004,7 +1004,7 @@
   <p:cSld>
     <p:spTree>
       <p:nvGrpSpPr>
-        <p:cNvPr id="95" name="Shape 95"/>
+        <p:cNvPr id="99" name="Shape 99"/>
         <p:cNvGrpSpPr/>
         <p:nvPr/>
       </p:nvGrpSpPr>
@@ -1018,7 +1018,7 @@
       </p:grpSpPr>
       <p:sp>
         <p:nvSpPr>
-          <p:cNvPr id="96" name="Google Shape;96;g396169342f1_0_0:notes"/>
+          <p:cNvPr id="100" name="Google Shape;100;g396169342f1_0_0:notes"/>
           <p:cNvSpPr/>
           <p:nvPr>
             <p:ph idx="2" type="sldImg"/>
@@ -1053,7 +1053,7 @@
       </p:sp>
       <p:sp>
         <p:nvSpPr>
-          <p:cNvPr id="97" name="Google Shape;97;g396169342f1_0_0:notes"/>
+          <p:cNvPr id="101" name="Google Shape;101;g396169342f1_0_0:notes"/>
           <p:cNvSpPr txBox="1"/>
           <p:nvPr>
             <p:ph idx="1" type="body"/>
@@ -1103,7 +1103,7 @@
   <p:cSld>
     <p:spTree>
       <p:nvGrpSpPr>
-        <p:cNvPr id="101" name="Shape 101"/>
+        <p:cNvPr id="105" name="Shape 105"/>
         <p:cNvGrpSpPr/>
         <p:nvPr/>
       </p:nvGrpSpPr>
@@ -1117,7 +1117,7 @@
       </p:grpSpPr>
       <p:sp>
         <p:nvSpPr>
-          <p:cNvPr id="102" name="Google Shape;102;g3f5e045cd8f_0_8:notes"/>
+          <p:cNvPr id="106" name="Google Shape;106;g3f5e045cd8f_0_8:notes"/>
           <p:cNvSpPr/>
           <p:nvPr>
             <p:ph idx="2" type="sldImg"/>
@@ -1152,7 +1152,7 @@
       </p:sp>
       <p:sp>
         <p:nvSpPr>
-          <p:cNvPr id="103" name="Google Shape;103;g3f5e045cd8f_0_8:notes"/>
+          <p:cNvPr id="107" name="Google Shape;107;g3f5e045cd8f_0_8:notes"/>
           <p:cNvSpPr txBox="1"/>
           <p:nvPr>
             <p:ph idx="1" type="body"/>
@@ -1202,7 +1202,7 @@
   <p:cSld>
     <p:spTree>
       <p:nvGrpSpPr>
-        <p:cNvPr id="107" name="Shape 107"/>
+        <p:cNvPr id="111" name="Shape 111"/>
         <p:cNvGrpSpPr/>
         <p:nvPr/>
       </p:nvGrpSpPr>
@@ -1216,7 +1216,7 @@
       </p:grpSpPr>
       <p:sp>
         <p:nvSpPr>
-          <p:cNvPr id="108" name="Google Shape;108;g3f5e045cd8f_0_2:notes"/>
+          <p:cNvPr id="112" name="Google Shape;112;g3f5e045cd8f_0_2:notes"/>
           <p:cNvSpPr/>
           <p:nvPr>
             <p:ph idx="2" type="sldImg"/>
@@ -1251,7 +1251,7 @@
       </p:sp>
       <p:sp>
         <p:nvSpPr>
-          <p:cNvPr id="109" name="Google Shape;109;g3f5e045cd8f_0_2:notes"/>
+          <p:cNvPr id="113" name="Google Shape;113;g3f5e045cd8f_0_2:notes"/>
           <p:cNvSpPr txBox="1"/>
           <p:nvPr>
             <p:ph idx="1" type="body"/>
@@ -1301,7 +1301,7 @@
   <p:cSld>
     <p:spTree>
       <p:nvGrpSpPr>
-        <p:cNvPr id="113" name="Shape 113"/>
+        <p:cNvPr id="117" name="Shape 117"/>
         <p:cNvGrpSpPr/>
         <p:nvPr/>
       </p:nvGrpSpPr>
@@ -1315,7 +1315,7 @@
       </p:grpSpPr>
       <p:sp>
         <p:nvSpPr>
-          <p:cNvPr id="114" name="Google Shape;114;g3d678bf7346_0_23:notes"/>
+          <p:cNvPr id="118" name="Google Shape;118;g3d678bf7346_0_23:notes"/>
           <p:cNvSpPr/>
           <p:nvPr>
             <p:ph idx="2" type="sldImg"/>
@@ -1350,7 +1350,7 @@
       </p:sp>
       <p:sp>
         <p:nvSpPr>
-          <p:cNvPr id="115" name="Google Shape;115;g3d678bf7346_0_23:notes"/>
+          <p:cNvPr id="119" name="Google Shape;119;g3d678bf7346_0_23:notes"/>
           <p:cNvSpPr txBox="1"/>
           <p:nvPr>
             <p:ph idx="1" type="body"/>
@@ -1400,7 +1400,7 @@
   <p:cSld>
     <p:spTree>
       <p:nvGrpSpPr>
-        <p:cNvPr id="121" name="Shape 121"/>
+        <p:cNvPr id="125" name="Shape 125"/>
         <p:cNvGrpSpPr/>
         <p:nvPr/>
       </p:nvGrpSpPr>
@@ -1414,7 +1414,7 @@
       </p:grpSpPr>
       <p:sp>
         <p:nvSpPr>
-          <p:cNvPr id="122" name="Google Shape;122;g3d678bf7346_0_17:notes"/>
+          <p:cNvPr id="126" name="Google Shape;126;g3d678bf7346_0_17:notes"/>
           <p:cNvSpPr/>
           <p:nvPr>
             <p:ph idx="2" type="sldImg"/>
@@ -1449,7 +1449,7 @@
       </p:sp>
       <p:sp>
         <p:nvSpPr>
-          <p:cNvPr id="123" name="Google Shape;123;g3d678bf7346_0_17:notes"/>
+          <p:cNvPr id="127" name="Google Shape;127;g3d678bf7346_0_17:notes"/>
           <p:cNvSpPr txBox="1"/>
           <p:nvPr>
             <p:ph idx="1" type="body"/>
@@ -6915,8 +6915,8 @@
         </p:nvSpPr>
         <p:spPr>
           <a:xfrm>
-            <a:off x="2314025" y="3568500"/>
-            <a:ext cx="5866500" cy="1554600"/>
+            <a:off x="0" y="2505952"/>
+            <a:ext cx="4275600" cy="1133100"/>
           </a:xfrm>
           <a:prstGeom prst="rect">
             <a:avLst/>
@@ -6927,7 +6927,7 @@
           </a:ln>
         </p:spPr>
         <p:txBody>
-          <a:bodyPr anchorCtr="0" anchor="t" bIns="91425" lIns="91425" spcFirstLastPara="1" rIns="91425" wrap="square" tIns="91425">
+          <a:bodyPr anchorCtr="0" anchor="t" bIns="66625" lIns="66625" spcFirstLastPara="1" rIns="66625" wrap="square" tIns="66625">
             <a:spAutoFit/>
           </a:bodyPr>
           <a:lstStyle/>
@@ -6942,7 +6942,7 @@
               <a:buNone/>
             </a:pPr>
             <a:r>
-              <a:rPr b="1" lang="es-419" sz="1200">
+              <a:rPr b="1" lang="es-419" sz="875">
                 <a:solidFill>
                   <a:schemeClr val="dk2"/>
                 </a:solidFill>
@@ -6950,7 +6950,7 @@
               <a:t>Análisis de sesgos sistemáticos en la representatividad de la library.</a:t>
             </a:r>
             <a:r>
-              <a:rPr lang="es-419" sz="1200">
+              <a:rPr lang="es-419" sz="875">
                 <a:solidFill>
                   <a:schemeClr val="dk2"/>
                 </a:solidFill>
@@ -6958,7 +6958,7 @@
               <a:t> A) </a:t>
             </a:r>
             <a:r>
-              <a:rPr lang="es-419" sz="1100">
+              <a:rPr lang="es-419" sz="802">
                 <a:solidFill>
                   <a:schemeClr val="dk1"/>
                 </a:solidFill>
@@ -6966,7 +6966,7 @@
               <a:t>Diagrama de </a:t>
             </a:r>
             <a:r>
-              <a:rPr i="1" lang="es-419" sz="1100">
+              <a:rPr i="1" lang="es-419" sz="802">
                 <a:solidFill>
                   <a:schemeClr val="dk1"/>
                 </a:solidFill>
@@ -6974,407 +6974,14 @@
               <a:t>Venn</a:t>
             </a:r>
             <a:r>
-              <a:rPr lang="es-419" sz="1100">
+              <a:rPr lang="es-419" sz="802">
                 <a:solidFill>
                   <a:schemeClr val="dk1"/>
                 </a:solidFill>
               </a:rPr>
               <a:t> indicando el número de secuencias detectadas en la secuenciación de células integradas con el reportero para el proyecto de splicing (previo a cualquier selección por expresión), en comparación con la secuenciación del proyecto actual, en al menos una réplica. B) Gráfico de violin representando el contenido de GC de los promotores detectados y en los no detectados durante el presente ensayo reportero. C) Distribución del contenido del contenido de GC de las lecturas obtenidas, en ambas réplicas.</a:t>
             </a:r>
-            <a:endParaRPr sz="1200">
-              <a:solidFill>
-                <a:schemeClr val="dk2"/>
-              </a:solidFill>
-            </a:endParaRPr>
-          </a:p>
-        </p:txBody>
-      </p:sp>
-      <p:pic>
-        <p:nvPicPr>
-          <p:cNvPr id="77" name="Google Shape;77;p15"/>
-          <p:cNvPicPr preferRelativeResize="0"/>
-          <p:nvPr/>
-        </p:nvPicPr>
-        <p:blipFill rotWithShape="1">
-          <a:blip r:embed="rId3">
-            <a:alphaModFix/>
-          </a:blip>
-          <a:srcRect b="0" l="744" r="0" t="970"/>
-          <a:stretch/>
-        </p:blipFill>
-        <p:spPr>
-          <a:xfrm>
-            <a:off x="86225" y="82225"/>
-            <a:ext cx="3256551" cy="3242825"/>
-          </a:xfrm>
-          <a:prstGeom prst="rect">
-            <a:avLst/>
-          </a:prstGeom>
-          <a:noFill/>
-          <a:ln>
-            <a:noFill/>
-          </a:ln>
-        </p:spPr>
-      </p:pic>
-      <p:sp>
-        <p:nvSpPr>
-          <p:cNvPr id="78" name="Google Shape;78;p15"/>
-          <p:cNvSpPr txBox="1"/>
-          <p:nvPr/>
-        </p:nvSpPr>
-        <p:spPr>
-          <a:xfrm>
-            <a:off x="1446789" y="374911"/>
-            <a:ext cx="721500" cy="354000"/>
-          </a:xfrm>
-          <a:prstGeom prst="rect">
-            <a:avLst/>
-          </a:prstGeom>
-          <a:solidFill>
-            <a:srgbClr val="EFF6FB"/>
-          </a:solidFill>
-          <a:ln>
-            <a:noFill/>
-          </a:ln>
-        </p:spPr>
-        <p:txBody>
-          <a:bodyPr anchorCtr="0" anchor="t" bIns="91425" lIns="91425" spcFirstLastPara="1" rIns="91425" wrap="square" tIns="91425">
-            <a:spAutoFit/>
-          </a:bodyPr>
-          <a:lstStyle/>
-          <a:p>
-            <a:pPr indent="0" lvl="0" marL="0" rtl="0" algn="l">
-              <a:spcBef>
-                <a:spcPts val="0"/>
-              </a:spcBef>
-              <a:spcAft>
-                <a:spcPts val="0"/>
-              </a:spcAft>
-              <a:buNone/>
-            </a:pPr>
-            <a:r>
-              <a:rPr lang="es-419" sz="1100">
-                <a:solidFill>
-                  <a:schemeClr val="dk2"/>
-                </a:solidFill>
-              </a:rPr>
-              <a:t>2012</a:t>
-            </a:r>
-            <a:endParaRPr sz="1100">
-              <a:solidFill>
-                <a:schemeClr val="dk2"/>
-              </a:solidFill>
-            </a:endParaRPr>
-          </a:p>
-        </p:txBody>
-      </p:sp>
-      <p:sp>
-        <p:nvSpPr>
-          <p:cNvPr id="79" name="Google Shape;79;p15"/>
-          <p:cNvSpPr txBox="1"/>
-          <p:nvPr/>
-        </p:nvSpPr>
-        <p:spPr>
-          <a:xfrm>
-            <a:off x="1370694" y="185978"/>
-            <a:ext cx="806100" cy="369300"/>
-          </a:xfrm>
-          <a:prstGeom prst="rect">
-            <a:avLst/>
-          </a:prstGeom>
-          <a:noFill/>
-          <a:ln>
-            <a:noFill/>
-          </a:ln>
-        </p:spPr>
-        <p:txBody>
-          <a:bodyPr anchorCtr="0" anchor="t" bIns="91425" lIns="91425" spcFirstLastPara="1" rIns="91425" wrap="square" tIns="91425">
-            <a:spAutoFit/>
-          </a:bodyPr>
-          <a:lstStyle/>
-          <a:p>
-            <a:pPr indent="0" lvl="0" marL="0" rtl="0" algn="l">
-              <a:spcBef>
-                <a:spcPts val="0"/>
-              </a:spcBef>
-              <a:spcAft>
-                <a:spcPts val="0"/>
-              </a:spcAft>
-              <a:buNone/>
-            </a:pPr>
-            <a:r>
-              <a:rPr lang="es-419" sz="1200">
-                <a:solidFill>
-                  <a:schemeClr val="dk2"/>
-                </a:solidFill>
-              </a:rPr>
-              <a:t>Library</a:t>
-            </a:r>
-            <a:endParaRPr sz="1200">
-              <a:solidFill>
-                <a:schemeClr val="dk2"/>
-              </a:solidFill>
-            </a:endParaRPr>
-          </a:p>
-        </p:txBody>
-      </p:sp>
-      <p:sp>
-        <p:nvSpPr>
-          <p:cNvPr id="80" name="Google Shape;80;p15"/>
-          <p:cNvSpPr txBox="1"/>
-          <p:nvPr/>
-        </p:nvSpPr>
-        <p:spPr>
-          <a:xfrm>
-            <a:off x="561071" y="1510800"/>
-            <a:ext cx="540900" cy="354000"/>
-          </a:xfrm>
-          <a:prstGeom prst="rect">
-            <a:avLst/>
-          </a:prstGeom>
-          <a:solidFill>
-            <a:srgbClr val="BCD9E5"/>
-          </a:solidFill>
-          <a:ln>
-            <a:noFill/>
-          </a:ln>
-        </p:spPr>
-        <p:txBody>
-          <a:bodyPr anchorCtr="0" anchor="t" bIns="91425" lIns="91425" spcFirstLastPara="1" rIns="91425" wrap="square" tIns="91425">
-            <a:spAutoFit/>
-          </a:bodyPr>
-          <a:lstStyle/>
-          <a:p>
-            <a:pPr indent="0" lvl="0" marL="0" rtl="0" algn="l">
-              <a:spcBef>
-                <a:spcPts val="0"/>
-              </a:spcBef>
-              <a:spcAft>
-                <a:spcPts val="0"/>
-              </a:spcAft>
-              <a:buNone/>
-            </a:pPr>
-            <a:r>
-              <a:rPr lang="es-419" sz="1100">
-                <a:solidFill>
-                  <a:schemeClr val="dk2"/>
-                </a:solidFill>
-              </a:rPr>
-              <a:t>1047</a:t>
-            </a:r>
-            <a:endParaRPr sz="1100">
-              <a:solidFill>
-                <a:schemeClr val="dk2"/>
-              </a:solidFill>
-            </a:endParaRPr>
-          </a:p>
-        </p:txBody>
-      </p:sp>
-      <p:sp>
-        <p:nvSpPr>
-          <p:cNvPr id="81" name="Google Shape;81;p15"/>
-          <p:cNvSpPr txBox="1"/>
-          <p:nvPr/>
-        </p:nvSpPr>
-        <p:spPr>
-          <a:xfrm>
-            <a:off x="1414623" y="1510788"/>
-            <a:ext cx="645000" cy="354000"/>
-          </a:xfrm>
-          <a:prstGeom prst="rect">
-            <a:avLst/>
-          </a:prstGeom>
-          <a:solidFill>
-            <a:srgbClr val="B3D9DD"/>
-          </a:solidFill>
-          <a:ln>
-            <a:noFill/>
-          </a:ln>
-        </p:spPr>
-        <p:txBody>
-          <a:bodyPr anchorCtr="0" anchor="t" bIns="91425" lIns="91425" spcFirstLastPara="1" rIns="91425" wrap="square" tIns="91425">
-            <a:spAutoFit/>
-          </a:bodyPr>
-          <a:lstStyle/>
-          <a:p>
-            <a:pPr indent="0" lvl="0" marL="0" rtl="0" algn="l">
-              <a:spcBef>
-                <a:spcPts val="0"/>
-              </a:spcBef>
-              <a:spcAft>
-                <a:spcPts val="0"/>
-              </a:spcAft>
-              <a:buNone/>
-            </a:pPr>
-            <a:r>
-              <a:rPr lang="es-419" sz="1100">
-                <a:solidFill>
-                  <a:schemeClr val="dk2"/>
-                </a:solidFill>
-              </a:rPr>
-              <a:t>18292</a:t>
-            </a:r>
-            <a:endParaRPr sz="1100">
-              <a:solidFill>
-                <a:schemeClr val="dk2"/>
-              </a:solidFill>
-            </a:endParaRPr>
-          </a:p>
-        </p:txBody>
-      </p:sp>
-      <p:sp>
-        <p:nvSpPr>
-          <p:cNvPr id="82" name="Google Shape;82;p15"/>
-          <p:cNvSpPr txBox="1"/>
-          <p:nvPr/>
-        </p:nvSpPr>
-        <p:spPr>
-          <a:xfrm>
-            <a:off x="2326403" y="1510788"/>
-            <a:ext cx="645000" cy="354000"/>
-          </a:xfrm>
-          <a:prstGeom prst="rect">
-            <a:avLst/>
-          </a:prstGeom>
-          <a:solidFill>
-            <a:srgbClr val="CDE8E8"/>
-          </a:solidFill>
-          <a:ln>
-            <a:noFill/>
-          </a:ln>
-        </p:spPr>
-        <p:txBody>
-          <a:bodyPr anchorCtr="0" anchor="t" bIns="91425" lIns="91425" spcFirstLastPara="1" rIns="91425" wrap="square" tIns="91425">
-            <a:spAutoFit/>
-          </a:bodyPr>
-          <a:lstStyle/>
-          <a:p>
-            <a:pPr indent="0" lvl="0" marL="0" rtl="0" algn="l">
-              <a:spcBef>
-                <a:spcPts val="0"/>
-              </a:spcBef>
-              <a:spcAft>
-                <a:spcPts val="0"/>
-              </a:spcAft>
-              <a:buNone/>
-            </a:pPr>
-            <a:r>
-              <a:rPr lang="es-419" sz="1100">
-                <a:solidFill>
-                  <a:schemeClr val="dk2"/>
-                </a:solidFill>
-              </a:rPr>
-              <a:t>2560</a:t>
-            </a:r>
-            <a:endParaRPr sz="1100">
-              <a:solidFill>
-                <a:schemeClr val="dk2"/>
-              </a:solidFill>
-            </a:endParaRPr>
-          </a:p>
-        </p:txBody>
-      </p:sp>
-      <p:sp>
-        <p:nvSpPr>
-          <p:cNvPr id="83" name="Google Shape;83;p15"/>
-          <p:cNvSpPr txBox="1"/>
-          <p:nvPr/>
-        </p:nvSpPr>
-        <p:spPr>
-          <a:xfrm>
-            <a:off x="247452" y="1107025"/>
-            <a:ext cx="1150200" cy="554100"/>
-          </a:xfrm>
-          <a:prstGeom prst="rect">
-            <a:avLst/>
-          </a:prstGeom>
-          <a:noFill/>
-          <a:ln>
-            <a:noFill/>
-          </a:ln>
-        </p:spPr>
-        <p:txBody>
-          <a:bodyPr anchorCtr="0" anchor="t" bIns="91425" lIns="91425" spcFirstLastPara="1" rIns="91425" wrap="square" tIns="91425">
-            <a:spAutoFit/>
-          </a:bodyPr>
-          <a:lstStyle/>
-          <a:p>
-            <a:pPr indent="0" lvl="0" marL="0" rtl="0" algn="ctr">
-              <a:spcBef>
-                <a:spcPts val="0"/>
-              </a:spcBef>
-              <a:spcAft>
-                <a:spcPts val="0"/>
-              </a:spcAft>
-              <a:buNone/>
-            </a:pPr>
-            <a:r>
-              <a:rPr lang="es-419" sz="1200">
-                <a:solidFill>
-                  <a:schemeClr val="dk2"/>
-                </a:solidFill>
-              </a:rPr>
-              <a:t>MPRA </a:t>
-            </a:r>
-            <a:r>
-              <a:rPr lang="es-419" sz="1200">
-                <a:solidFill>
-                  <a:schemeClr val="dk2"/>
-                </a:solidFill>
-              </a:rPr>
-              <a:t>transcripción</a:t>
-            </a:r>
-            <a:endParaRPr sz="1200">
-              <a:solidFill>
-                <a:schemeClr val="dk2"/>
-              </a:solidFill>
-            </a:endParaRPr>
-          </a:p>
-        </p:txBody>
-      </p:sp>
-      <p:sp>
-        <p:nvSpPr>
-          <p:cNvPr id="84" name="Google Shape;84;p15"/>
-          <p:cNvSpPr txBox="1"/>
-          <p:nvPr/>
-        </p:nvSpPr>
-        <p:spPr>
-          <a:xfrm>
-            <a:off x="2063844" y="1107021"/>
-            <a:ext cx="1071900" cy="554100"/>
-          </a:xfrm>
-          <a:prstGeom prst="rect">
-            <a:avLst/>
-          </a:prstGeom>
-          <a:noFill/>
-          <a:ln>
-            <a:noFill/>
-          </a:ln>
-        </p:spPr>
-        <p:txBody>
-          <a:bodyPr anchorCtr="0" anchor="t" bIns="91425" lIns="91425" spcFirstLastPara="1" rIns="91425" wrap="square" tIns="91425">
-            <a:spAutoFit/>
-          </a:bodyPr>
-          <a:lstStyle/>
-          <a:p>
-            <a:pPr indent="0" lvl="0" marL="0" rtl="0" algn="ctr">
-              <a:spcBef>
-                <a:spcPts val="0"/>
-              </a:spcBef>
-              <a:spcAft>
-                <a:spcPts val="0"/>
-              </a:spcAft>
-              <a:buNone/>
-            </a:pPr>
-            <a:r>
-              <a:rPr lang="es-419" sz="1200">
-                <a:solidFill>
-                  <a:schemeClr val="dk2"/>
-                </a:solidFill>
-              </a:rPr>
-              <a:t>MPRA splicing</a:t>
-            </a:r>
-            <a:endParaRPr sz="1200">
+            <a:endParaRPr sz="875">
               <a:solidFill>
                 <a:schemeClr val="dk2"/>
               </a:solidFill>
@@ -7384,21 +6991,429 @@
       </p:sp>
       <p:grpSp>
         <p:nvGrpSpPr>
-          <p:cNvPr id="85" name="Google Shape;85;p15"/>
+          <p:cNvPr id="77" name="Google Shape;77;p15"/>
           <p:cNvGrpSpPr/>
           <p:nvPr/>
         </p:nvGrpSpPr>
         <p:grpSpPr>
           <a:xfrm>
-            <a:off x="5506445" y="266008"/>
-            <a:ext cx="3568830" cy="2626092"/>
+            <a:off x="62841" y="82223"/>
+            <a:ext cx="2373374" cy="2363371"/>
+            <a:chOff x="86225" y="82225"/>
+            <a:chExt cx="3256551" cy="3242825"/>
+          </a:xfrm>
+        </p:grpSpPr>
+        <p:pic>
+          <p:nvPicPr>
+            <p:cNvPr id="78" name="Google Shape;78;p15"/>
+            <p:cNvPicPr preferRelativeResize="0"/>
+            <p:nvPr/>
+          </p:nvPicPr>
+          <p:blipFill rotWithShape="1">
+            <a:blip r:embed="rId3">
+              <a:alphaModFix/>
+            </a:blip>
+            <a:srcRect b="0" l="744" r="0" t="970"/>
+            <a:stretch/>
+          </p:blipFill>
+          <p:spPr>
+            <a:xfrm>
+              <a:off x="86225" y="82225"/>
+              <a:ext cx="3256551" cy="3242825"/>
+            </a:xfrm>
+            <a:prstGeom prst="rect">
+              <a:avLst/>
+            </a:prstGeom>
+            <a:noFill/>
+            <a:ln>
+              <a:noFill/>
+            </a:ln>
+          </p:spPr>
+        </p:pic>
+        <p:sp>
+          <p:nvSpPr>
+            <p:cNvPr id="79" name="Google Shape;79;p15"/>
+            <p:cNvSpPr txBox="1"/>
+            <p:nvPr/>
+          </p:nvSpPr>
+          <p:spPr>
+            <a:xfrm>
+              <a:off x="1446789" y="374911"/>
+              <a:ext cx="721500" cy="354000"/>
+            </a:xfrm>
+            <a:prstGeom prst="rect">
+              <a:avLst/>
+            </a:prstGeom>
+            <a:solidFill>
+              <a:srgbClr val="EFF6FB"/>
+            </a:solidFill>
+            <a:ln>
+              <a:noFill/>
+            </a:ln>
+          </p:spPr>
+          <p:txBody>
+            <a:bodyPr anchorCtr="0" anchor="t" bIns="66625" lIns="66625" spcFirstLastPara="1" rIns="66625" wrap="square" tIns="66625">
+              <a:spAutoFit/>
+            </a:bodyPr>
+            <a:lstStyle/>
+            <a:p>
+              <a:pPr indent="0" lvl="0" marL="0" rtl="0" algn="l">
+                <a:spcBef>
+                  <a:spcPts val="0"/>
+                </a:spcBef>
+                <a:spcAft>
+                  <a:spcPts val="0"/>
+                </a:spcAft>
+                <a:buNone/>
+              </a:pPr>
+              <a:r>
+                <a:rPr lang="es-419" sz="802">
+                  <a:solidFill>
+                    <a:schemeClr val="dk2"/>
+                  </a:solidFill>
+                </a:rPr>
+                <a:t>2012</a:t>
+              </a:r>
+              <a:endParaRPr sz="802">
+                <a:solidFill>
+                  <a:schemeClr val="dk2"/>
+                </a:solidFill>
+              </a:endParaRPr>
+            </a:p>
+          </p:txBody>
+        </p:sp>
+        <p:sp>
+          <p:nvSpPr>
+            <p:cNvPr id="80" name="Google Shape;80;p15"/>
+            <p:cNvSpPr txBox="1"/>
+            <p:nvPr/>
+          </p:nvSpPr>
+          <p:spPr>
+            <a:xfrm>
+              <a:off x="1370694" y="185978"/>
+              <a:ext cx="806100" cy="369300"/>
+            </a:xfrm>
+            <a:prstGeom prst="rect">
+              <a:avLst/>
+            </a:prstGeom>
+            <a:noFill/>
+            <a:ln>
+              <a:noFill/>
+            </a:ln>
+          </p:spPr>
+          <p:txBody>
+            <a:bodyPr anchorCtr="0" anchor="t" bIns="66625" lIns="66625" spcFirstLastPara="1" rIns="66625" wrap="square" tIns="66625">
+              <a:spAutoFit/>
+            </a:bodyPr>
+            <a:lstStyle/>
+            <a:p>
+              <a:pPr indent="0" lvl="0" marL="0" rtl="0" algn="l">
+                <a:spcBef>
+                  <a:spcPts val="0"/>
+                </a:spcBef>
+                <a:spcAft>
+                  <a:spcPts val="0"/>
+                </a:spcAft>
+                <a:buNone/>
+              </a:pPr>
+              <a:r>
+                <a:rPr lang="es-419" sz="875">
+                  <a:solidFill>
+                    <a:schemeClr val="dk2"/>
+                  </a:solidFill>
+                </a:rPr>
+                <a:t>Library</a:t>
+              </a:r>
+              <a:endParaRPr sz="875">
+                <a:solidFill>
+                  <a:schemeClr val="dk2"/>
+                </a:solidFill>
+              </a:endParaRPr>
+            </a:p>
+          </p:txBody>
+        </p:sp>
+        <p:sp>
+          <p:nvSpPr>
+            <p:cNvPr id="81" name="Google Shape;81;p15"/>
+            <p:cNvSpPr txBox="1"/>
+            <p:nvPr/>
+          </p:nvSpPr>
+          <p:spPr>
+            <a:xfrm>
+              <a:off x="561071" y="1510800"/>
+              <a:ext cx="540900" cy="354000"/>
+            </a:xfrm>
+            <a:prstGeom prst="rect">
+              <a:avLst/>
+            </a:prstGeom>
+            <a:solidFill>
+              <a:srgbClr val="BCD9E5"/>
+            </a:solidFill>
+            <a:ln>
+              <a:noFill/>
+            </a:ln>
+          </p:spPr>
+          <p:txBody>
+            <a:bodyPr anchorCtr="0" anchor="t" bIns="66625" lIns="66625" spcFirstLastPara="1" rIns="66625" wrap="square" tIns="66625">
+              <a:spAutoFit/>
+            </a:bodyPr>
+            <a:lstStyle/>
+            <a:p>
+              <a:pPr indent="0" lvl="0" marL="0" rtl="0" algn="l">
+                <a:spcBef>
+                  <a:spcPts val="0"/>
+                </a:spcBef>
+                <a:spcAft>
+                  <a:spcPts val="0"/>
+                </a:spcAft>
+                <a:buNone/>
+              </a:pPr>
+              <a:r>
+                <a:rPr lang="es-419" sz="802">
+                  <a:solidFill>
+                    <a:schemeClr val="dk2"/>
+                  </a:solidFill>
+                </a:rPr>
+                <a:t>1047</a:t>
+              </a:r>
+              <a:endParaRPr sz="802">
+                <a:solidFill>
+                  <a:schemeClr val="dk2"/>
+                </a:solidFill>
+              </a:endParaRPr>
+            </a:p>
+          </p:txBody>
+        </p:sp>
+        <p:sp>
+          <p:nvSpPr>
+            <p:cNvPr id="82" name="Google Shape;82;p15"/>
+            <p:cNvSpPr txBox="1"/>
+            <p:nvPr/>
+          </p:nvSpPr>
+          <p:spPr>
+            <a:xfrm>
+              <a:off x="1414623" y="1510788"/>
+              <a:ext cx="645000" cy="354000"/>
+            </a:xfrm>
+            <a:prstGeom prst="rect">
+              <a:avLst/>
+            </a:prstGeom>
+            <a:solidFill>
+              <a:srgbClr val="B3D9DD"/>
+            </a:solidFill>
+            <a:ln>
+              <a:noFill/>
+            </a:ln>
+          </p:spPr>
+          <p:txBody>
+            <a:bodyPr anchorCtr="0" anchor="t" bIns="66625" lIns="66625" spcFirstLastPara="1" rIns="66625" wrap="square" tIns="66625">
+              <a:spAutoFit/>
+            </a:bodyPr>
+            <a:lstStyle/>
+            <a:p>
+              <a:pPr indent="0" lvl="0" marL="0" rtl="0" algn="l">
+                <a:spcBef>
+                  <a:spcPts val="0"/>
+                </a:spcBef>
+                <a:spcAft>
+                  <a:spcPts val="0"/>
+                </a:spcAft>
+                <a:buNone/>
+              </a:pPr>
+              <a:r>
+                <a:rPr lang="es-419" sz="802">
+                  <a:solidFill>
+                    <a:schemeClr val="dk2"/>
+                  </a:solidFill>
+                </a:rPr>
+                <a:t>18292</a:t>
+              </a:r>
+              <a:endParaRPr sz="802">
+                <a:solidFill>
+                  <a:schemeClr val="dk2"/>
+                </a:solidFill>
+              </a:endParaRPr>
+            </a:p>
+          </p:txBody>
+        </p:sp>
+        <p:sp>
+          <p:nvSpPr>
+            <p:cNvPr id="83" name="Google Shape;83;p15"/>
+            <p:cNvSpPr txBox="1"/>
+            <p:nvPr/>
+          </p:nvSpPr>
+          <p:spPr>
+            <a:xfrm>
+              <a:off x="2326403" y="1510788"/>
+              <a:ext cx="645000" cy="354000"/>
+            </a:xfrm>
+            <a:prstGeom prst="rect">
+              <a:avLst/>
+            </a:prstGeom>
+            <a:solidFill>
+              <a:srgbClr val="CDE8E8"/>
+            </a:solidFill>
+            <a:ln>
+              <a:noFill/>
+            </a:ln>
+          </p:spPr>
+          <p:txBody>
+            <a:bodyPr anchorCtr="0" anchor="t" bIns="66625" lIns="66625" spcFirstLastPara="1" rIns="66625" wrap="square" tIns="66625">
+              <a:spAutoFit/>
+            </a:bodyPr>
+            <a:lstStyle/>
+            <a:p>
+              <a:pPr indent="0" lvl="0" marL="0" rtl="0" algn="l">
+                <a:spcBef>
+                  <a:spcPts val="0"/>
+                </a:spcBef>
+                <a:spcAft>
+                  <a:spcPts val="0"/>
+                </a:spcAft>
+                <a:buNone/>
+              </a:pPr>
+              <a:r>
+                <a:rPr lang="es-419" sz="802">
+                  <a:solidFill>
+                    <a:schemeClr val="dk2"/>
+                  </a:solidFill>
+                </a:rPr>
+                <a:t>2560</a:t>
+              </a:r>
+              <a:endParaRPr sz="802">
+                <a:solidFill>
+                  <a:schemeClr val="dk2"/>
+                </a:solidFill>
+              </a:endParaRPr>
+            </a:p>
+          </p:txBody>
+        </p:sp>
+        <p:sp>
+          <p:nvSpPr>
+            <p:cNvPr id="84" name="Google Shape;84;p15"/>
+            <p:cNvSpPr txBox="1"/>
+            <p:nvPr/>
+          </p:nvSpPr>
+          <p:spPr>
+            <a:xfrm>
+              <a:off x="247452" y="1107025"/>
+              <a:ext cx="1150200" cy="554100"/>
+            </a:xfrm>
+            <a:prstGeom prst="rect">
+              <a:avLst/>
+            </a:prstGeom>
+            <a:noFill/>
+            <a:ln>
+              <a:noFill/>
+            </a:ln>
+          </p:spPr>
+          <p:txBody>
+            <a:bodyPr anchorCtr="0" anchor="t" bIns="66625" lIns="66625" spcFirstLastPara="1" rIns="66625" wrap="square" tIns="66625">
+              <a:spAutoFit/>
+            </a:bodyPr>
+            <a:lstStyle/>
+            <a:p>
+              <a:pPr indent="0" lvl="0" marL="0" rtl="0" algn="ctr">
+                <a:spcBef>
+                  <a:spcPts val="0"/>
+                </a:spcBef>
+                <a:spcAft>
+                  <a:spcPts val="0"/>
+                </a:spcAft>
+                <a:buNone/>
+              </a:pPr>
+              <a:r>
+                <a:rPr lang="es-419" sz="875">
+                  <a:solidFill>
+                    <a:schemeClr val="dk2"/>
+                  </a:solidFill>
+                </a:rPr>
+                <a:t>MPRA </a:t>
+              </a:r>
+              <a:r>
+                <a:rPr lang="es-419" sz="875">
+                  <a:solidFill>
+                    <a:schemeClr val="dk2"/>
+                  </a:solidFill>
+                </a:rPr>
+                <a:t>transcripción</a:t>
+              </a:r>
+              <a:endParaRPr sz="875">
+                <a:solidFill>
+                  <a:schemeClr val="dk2"/>
+                </a:solidFill>
+              </a:endParaRPr>
+            </a:p>
+          </p:txBody>
+        </p:sp>
+        <p:sp>
+          <p:nvSpPr>
+            <p:cNvPr id="85" name="Google Shape;85;p15"/>
+            <p:cNvSpPr txBox="1"/>
+            <p:nvPr/>
+          </p:nvSpPr>
+          <p:spPr>
+            <a:xfrm>
+              <a:off x="2063844" y="1107021"/>
+              <a:ext cx="1071900" cy="554100"/>
+            </a:xfrm>
+            <a:prstGeom prst="rect">
+              <a:avLst/>
+            </a:prstGeom>
+            <a:noFill/>
+            <a:ln>
+              <a:noFill/>
+            </a:ln>
+          </p:spPr>
+          <p:txBody>
+            <a:bodyPr anchorCtr="0" anchor="t" bIns="66625" lIns="66625" spcFirstLastPara="1" rIns="66625" wrap="square" tIns="66625">
+              <a:spAutoFit/>
+            </a:bodyPr>
+            <a:lstStyle/>
+            <a:p>
+              <a:pPr indent="0" lvl="0" marL="0" rtl="0" algn="ctr">
+                <a:spcBef>
+                  <a:spcPts val="0"/>
+                </a:spcBef>
+                <a:spcAft>
+                  <a:spcPts val="0"/>
+                </a:spcAft>
+                <a:buNone/>
+              </a:pPr>
+              <a:r>
+                <a:rPr lang="es-419" sz="875">
+                  <a:solidFill>
+                    <a:schemeClr val="dk2"/>
+                  </a:solidFill>
+                </a:rPr>
+                <a:t>MPRA splicing</a:t>
+              </a:r>
+              <a:endParaRPr sz="875">
+                <a:solidFill>
+                  <a:schemeClr val="dk2"/>
+                </a:solidFill>
+              </a:endParaRPr>
+            </a:p>
+          </p:txBody>
+        </p:sp>
+      </p:grpSp>
+      <p:grpSp>
+        <p:nvGrpSpPr>
+          <p:cNvPr id="86" name="Google Shape;86;p15"/>
+          <p:cNvGrpSpPr/>
+          <p:nvPr/>
+        </p:nvGrpSpPr>
+        <p:grpSpPr>
+          <a:xfrm>
+            <a:off x="4013097" y="216164"/>
+            <a:ext cx="2600964" cy="1913895"/>
             <a:chOff x="5506445" y="266008"/>
             <a:chExt cx="3568830" cy="2626092"/>
           </a:xfrm>
         </p:grpSpPr>
         <p:grpSp>
           <p:nvGrpSpPr>
-            <p:cNvPr id="86" name="Google Shape;86;p15"/>
+            <p:cNvPr id="87" name="Google Shape;87;p15"/>
             <p:cNvGrpSpPr/>
             <p:nvPr/>
           </p:nvGrpSpPr>
@@ -7412,7 +7427,7 @@
           </p:grpSpPr>
           <p:pic>
             <p:nvPicPr>
-              <p:cNvPr id="87" name="Google Shape;87;p15" title="gc_bias_bars.jpg"/>
+              <p:cNvPr id="88" name="Google Shape;88;p15" title="gc_bias_bars.jpg"/>
               <p:cNvPicPr preferRelativeResize="0"/>
               <p:nvPr/>
             </p:nvPicPr>
@@ -7440,7 +7455,7 @@
           </p:pic>
           <p:sp>
             <p:nvSpPr>
-              <p:cNvPr id="88" name="Google Shape;88;p15"/>
+              <p:cNvPr id="89" name="Google Shape;89;p15"/>
               <p:cNvSpPr txBox="1"/>
               <p:nvPr/>
             </p:nvSpPr>
@@ -7458,7 +7473,7 @@
               </a:ln>
             </p:spPr>
             <p:txBody>
-              <a:bodyPr anchorCtr="0" anchor="t" bIns="91425" lIns="91425" spcFirstLastPara="1" rIns="91425" wrap="square" tIns="91425">
+              <a:bodyPr anchorCtr="0" anchor="t" bIns="66625" lIns="66625" spcFirstLastPara="1" rIns="66625" wrap="square" tIns="66625">
                 <a:spAutoFit/>
               </a:bodyPr>
               <a:lstStyle/>
@@ -7473,14 +7488,14 @@
                   <a:buNone/>
                 </a:pPr>
                 <a:r>
-                  <a:rPr lang="es-419" sz="900">
+                  <a:rPr lang="es-419" sz="656">
                     <a:solidFill>
                       <a:schemeClr val="dk2"/>
                     </a:solidFill>
                   </a:rPr>
                   <a:t>Distribución uniforme</a:t>
                 </a:r>
-                <a:endParaRPr sz="900">
+                <a:endParaRPr sz="656">
                   <a:solidFill>
                     <a:schemeClr val="dk2"/>
                   </a:solidFill>
@@ -7490,7 +7505,7 @@
           </p:sp>
           <p:sp>
             <p:nvSpPr>
-              <p:cNvPr id="89" name="Google Shape;89;p15"/>
+              <p:cNvPr id="90" name="Google Shape;90;p15"/>
               <p:cNvSpPr txBox="1"/>
               <p:nvPr/>
             </p:nvSpPr>
@@ -7508,7 +7523,7 @@
               </a:ln>
             </p:spPr>
             <p:txBody>
-              <a:bodyPr anchorCtr="0" anchor="t" bIns="91425" lIns="91425" spcFirstLastPara="1" rIns="91425" wrap="square" tIns="91425">
+              <a:bodyPr anchorCtr="0" anchor="t" bIns="66625" lIns="66625" spcFirstLastPara="1" rIns="66625" wrap="square" tIns="66625">
                 <a:spAutoFit/>
               </a:bodyPr>
               <a:lstStyle/>
@@ -7523,14 +7538,14 @@
                   <a:buNone/>
                 </a:pPr>
                 <a:r>
-                  <a:rPr lang="es-419" sz="900">
+                  <a:rPr lang="es-419" sz="656">
                     <a:solidFill>
                       <a:schemeClr val="dk2"/>
                     </a:solidFill>
                   </a:rPr>
                   <a:t>Distribución observada</a:t>
                 </a:r>
-                <a:endParaRPr sz="900">
+                <a:endParaRPr sz="656">
                   <a:solidFill>
                     <a:schemeClr val="dk2"/>
                   </a:solidFill>
@@ -7541,7 +7556,7 @@
         </p:grpSp>
         <p:sp>
           <p:nvSpPr>
-            <p:cNvPr id="90" name="Google Shape;90;p15"/>
+            <p:cNvPr id="91" name="Google Shape;91;p15"/>
             <p:cNvSpPr/>
             <p:nvPr/>
           </p:nvSpPr>
@@ -7556,7 +7571,7 @@
             <a:solidFill>
               <a:srgbClr val="ACDAD6"/>
             </a:solidFill>
-            <a:ln cap="flat" cmpd="sng" w="9525">
+            <a:ln cap="flat" cmpd="sng" w="6950">
               <a:solidFill>
                 <a:schemeClr val="dk2"/>
               </a:solidFill>
@@ -7567,7 +7582,7 @@
             </a:ln>
           </p:spPr>
           <p:txBody>
-            <a:bodyPr anchorCtr="0" anchor="ctr" bIns="91425" lIns="91425" spcFirstLastPara="1" rIns="91425" wrap="square" tIns="91425">
+            <a:bodyPr anchorCtr="0" anchor="ctr" bIns="66625" lIns="66625" spcFirstLastPara="1" rIns="66625" wrap="square" tIns="66625">
               <a:noAutofit/>
             </a:bodyPr>
             <a:lstStyle/>
@@ -7584,13 +7599,13 @@
               <a:r>
                 <a:t/>
               </a:r>
-              <a:endParaRPr/>
+              <a:endParaRPr sz="1020"/>
             </a:p>
           </p:txBody>
         </p:sp>
         <p:sp>
           <p:nvSpPr>
-            <p:cNvPr id="91" name="Google Shape;91;p15"/>
+            <p:cNvPr id="92" name="Google Shape;92;p15"/>
             <p:cNvSpPr/>
             <p:nvPr/>
           </p:nvSpPr>
@@ -7605,7 +7620,7 @@
             <a:solidFill>
               <a:srgbClr val="98C5D5"/>
             </a:solidFill>
-            <a:ln cap="flat" cmpd="sng" w="9525">
+            <a:ln cap="flat" cmpd="sng" w="6950">
               <a:solidFill>
                 <a:schemeClr val="dk2"/>
               </a:solidFill>
@@ -7616,7 +7631,7 @@
             </a:ln>
           </p:spPr>
           <p:txBody>
-            <a:bodyPr anchorCtr="0" anchor="ctr" bIns="91425" lIns="91425" spcFirstLastPara="1" rIns="91425" wrap="square" tIns="91425">
+            <a:bodyPr anchorCtr="0" anchor="ctr" bIns="66625" lIns="66625" spcFirstLastPara="1" rIns="66625" wrap="square" tIns="66625">
               <a:noAutofit/>
             </a:bodyPr>
             <a:lstStyle/>
@@ -7633,28 +7648,203 @@
               <a:r>
                 <a:t/>
               </a:r>
-              <a:endParaRPr/>
+              <a:endParaRPr sz="1020"/>
+            </a:p>
+          </p:txBody>
+        </p:sp>
+      </p:grpSp>
+      <p:grpSp>
+        <p:nvGrpSpPr>
+          <p:cNvPr id="93" name="Google Shape;93;p15"/>
+          <p:cNvGrpSpPr/>
+          <p:nvPr/>
+        </p:nvGrpSpPr>
+        <p:grpSpPr>
+          <a:xfrm>
+            <a:off x="2303549" y="141569"/>
+            <a:ext cx="1687746" cy="2175453"/>
+            <a:chOff x="3160742" y="163655"/>
+            <a:chExt cx="2315787" cy="2984979"/>
+          </a:xfrm>
+        </p:grpSpPr>
+        <p:pic>
+          <p:nvPicPr>
+            <p:cNvPr id="94" name="Google Shape;94;p15" title="gc_bias_violin.jpg"/>
+            <p:cNvPicPr preferRelativeResize="0"/>
+            <p:nvPr/>
+          </p:nvPicPr>
+          <p:blipFill rotWithShape="1">
+            <a:blip r:embed="rId5">
+              <a:alphaModFix/>
+            </a:blip>
+            <a:srcRect b="11708" l="0" r="0" t="0"/>
+            <a:stretch/>
+          </p:blipFill>
+          <p:spPr>
+            <a:xfrm>
+              <a:off x="3438900" y="163655"/>
+              <a:ext cx="1858876" cy="2461777"/>
+            </a:xfrm>
+            <a:prstGeom prst="rect">
+              <a:avLst/>
+            </a:prstGeom>
+            <a:noFill/>
+            <a:ln>
+              <a:noFill/>
+            </a:ln>
+          </p:spPr>
+        </p:pic>
+        <p:sp>
+          <p:nvSpPr>
+            <p:cNvPr id="95" name="Google Shape;95;p15"/>
+            <p:cNvSpPr txBox="1"/>
+            <p:nvPr/>
+          </p:nvSpPr>
+          <p:spPr>
+            <a:xfrm>
+              <a:off x="3160742" y="2609422"/>
+              <a:ext cx="2073000" cy="523200"/>
+            </a:xfrm>
+            <a:prstGeom prst="rect">
+              <a:avLst/>
+            </a:prstGeom>
+            <a:noFill/>
+            <a:ln>
+              <a:noFill/>
+            </a:ln>
+          </p:spPr>
+          <p:txBody>
+            <a:bodyPr anchorCtr="0" anchor="t" bIns="66625" lIns="66625" spcFirstLastPara="1" rIns="66625" wrap="square" tIns="66625">
+              <a:spAutoFit/>
+            </a:bodyPr>
+            <a:lstStyle/>
+            <a:p>
+              <a:pPr indent="0" lvl="0" marL="0" rtl="0" algn="ctr">
+                <a:spcBef>
+                  <a:spcPts val="0"/>
+                </a:spcBef>
+                <a:spcAft>
+                  <a:spcPts val="0"/>
+                </a:spcAft>
+                <a:buNone/>
+              </a:pPr>
+              <a:r>
+                <a:rPr lang="es-419" sz="802">
+                  <a:solidFill>
+                    <a:schemeClr val="dk2"/>
+                  </a:solidFill>
+                </a:rPr>
+                <a:t>Promotores </a:t>
+              </a:r>
+              <a:endParaRPr sz="802">
+                <a:solidFill>
+                  <a:schemeClr val="dk2"/>
+                </a:solidFill>
+              </a:endParaRPr>
+            </a:p>
+            <a:p>
+              <a:pPr indent="0" lvl="0" marL="0" rtl="0" algn="ctr">
+                <a:spcBef>
+                  <a:spcPts val="0"/>
+                </a:spcBef>
+                <a:spcAft>
+                  <a:spcPts val="0"/>
+                </a:spcAft>
+                <a:buNone/>
+              </a:pPr>
+              <a:r>
+                <a:rPr lang="es-419" sz="802">
+                  <a:solidFill>
+                    <a:schemeClr val="dk2"/>
+                  </a:solidFill>
+                </a:rPr>
+                <a:t>no detectado</a:t>
+              </a:r>
+              <a:endParaRPr sz="802">
+                <a:solidFill>
+                  <a:schemeClr val="dk2"/>
+                </a:solidFill>
+              </a:endParaRPr>
+            </a:p>
+          </p:txBody>
+        </p:sp>
+        <p:sp>
+          <p:nvSpPr>
+            <p:cNvPr id="96" name="Google Shape;96;p15"/>
+            <p:cNvSpPr txBox="1"/>
+            <p:nvPr/>
+          </p:nvSpPr>
+          <p:spPr>
+            <a:xfrm>
+              <a:off x="4548029" y="2625434"/>
+              <a:ext cx="928500" cy="523200"/>
+            </a:xfrm>
+            <a:prstGeom prst="rect">
+              <a:avLst/>
+            </a:prstGeom>
+            <a:noFill/>
+            <a:ln>
+              <a:noFill/>
+            </a:ln>
+          </p:spPr>
+          <p:txBody>
+            <a:bodyPr anchorCtr="0" anchor="t" bIns="66625" lIns="66625" spcFirstLastPara="1" rIns="66625" wrap="square" tIns="66625">
+              <a:spAutoFit/>
+            </a:bodyPr>
+            <a:lstStyle/>
+            <a:p>
+              <a:pPr indent="0" lvl="0" marL="0" rtl="0" algn="ctr">
+                <a:spcBef>
+                  <a:spcPts val="0"/>
+                </a:spcBef>
+                <a:spcAft>
+                  <a:spcPts val="0"/>
+                </a:spcAft>
+                <a:buNone/>
+              </a:pPr>
+              <a:r>
+                <a:rPr lang="es-419" sz="802">
+                  <a:solidFill>
+                    <a:schemeClr val="dk2"/>
+                  </a:solidFill>
+                </a:rPr>
+                <a:t>Promotores d</a:t>
+              </a:r>
+              <a:r>
+                <a:rPr lang="es-419" sz="802">
+                  <a:solidFill>
+                    <a:schemeClr val="dk2"/>
+                  </a:solidFill>
+                </a:rPr>
+                <a:t>etectados</a:t>
+              </a:r>
+              <a:endParaRPr sz="802">
+                <a:solidFill>
+                  <a:schemeClr val="dk2"/>
+                </a:solidFill>
+              </a:endParaRPr>
             </a:p>
           </p:txBody>
         </p:sp>
       </p:grpSp>
       <p:pic>
         <p:nvPicPr>
-          <p:cNvPr id="92" name="Google Shape;92;p15" title="gc_bias_violin.jpg"/>
+          <p:cNvPr id="97" name="Google Shape;97;p15" title="g4_retencion_por_gc.jpg"/>
           <p:cNvPicPr preferRelativeResize="0"/>
           <p:nvPr/>
         </p:nvPicPr>
-        <p:blipFill rotWithShape="1">
-          <a:blip r:embed="rId5">
+        <p:blipFill>
+          <a:blip r:embed="rId6">
             <a:alphaModFix/>
           </a:blip>
-          <a:srcRect b="11708" l="0" r="0" t="0"/>
-          <a:stretch/>
+          <a:stretch>
+            <a:fillRect/>
+          </a:stretch>
         </p:blipFill>
         <p:spPr>
           <a:xfrm>
-            <a:off x="3438900" y="163655"/>
-            <a:ext cx="1858876" cy="2461777"/>
+            <a:off x="4655476" y="2445601"/>
+            <a:ext cx="4137446" cy="2545499"/>
           </a:xfrm>
           <a:prstGeom prst="rect">
             <a:avLst/>
@@ -7667,14 +7857,14 @@
       </p:pic>
       <p:sp>
         <p:nvSpPr>
-          <p:cNvPr id="93" name="Google Shape;93;p15"/>
+          <p:cNvPr id="98" name="Google Shape;98;p15"/>
           <p:cNvSpPr txBox="1"/>
           <p:nvPr/>
         </p:nvSpPr>
         <p:spPr>
           <a:xfrm>
-            <a:off x="3160742" y="2609422"/>
-            <a:ext cx="2073000" cy="523200"/>
+            <a:off x="1366125" y="4014950"/>
+            <a:ext cx="3000000" cy="1046700"/>
           </a:xfrm>
           <a:prstGeom prst="rect">
             <a:avLst/>
@@ -7690,7 +7880,7 @@
           </a:bodyPr>
           <a:lstStyle/>
           <a:p>
-            <a:pPr indent="0" lvl="0" marL="0" rtl="0" algn="ctr">
+            <a:pPr indent="0" lvl="0" marL="0" rtl="0" algn="l">
               <a:spcBef>
                 <a:spcPts val="0"/>
               </a:spcBef>
@@ -7700,100 +7890,78 @@
               <a:buNone/>
             </a:pPr>
             <a:r>
-              <a:rPr lang="es-419" sz="1100">
-                <a:solidFill>
-                  <a:schemeClr val="dk2"/>
+              <a:rPr lang="es-419" sz="700">
+                <a:solidFill>
+                  <a:schemeClr val="dk1"/>
                 </a:solidFill>
               </a:rPr>
-              <a:t>Promotores </a:t>
-            </a:r>
-            <a:endParaRPr sz="1100">
-              <a:solidFill>
-                <a:schemeClr val="dk2"/>
-              </a:solidFill>
-            </a:endParaRPr>
-          </a:p>
-          <a:p>
-            <a:pPr indent="0" lvl="0" marL="0" rtl="0" algn="ctr">
-              <a:spcBef>
-                <a:spcPts val="0"/>
-              </a:spcBef>
-              <a:spcAft>
-                <a:spcPts val="0"/>
-              </a:spcAft>
-              <a:buNone/>
-            </a:pPr>
-            <a:r>
-              <a:rPr lang="es-419" sz="1100">
-                <a:solidFill>
-                  <a:schemeClr val="dk2"/>
-                </a:solidFill>
-              </a:rPr>
-              <a:t>no detectado</a:t>
-            </a:r>
-            <a:endParaRPr sz="1100">
-              <a:solidFill>
-                <a:schemeClr val="dk2"/>
-              </a:solidFill>
-            </a:endParaRPr>
-          </a:p>
-        </p:txBody>
-      </p:sp>
-      <p:sp>
-        <p:nvSpPr>
-          <p:cNvPr id="94" name="Google Shape;94;p15"/>
-          <p:cNvSpPr txBox="1"/>
-          <p:nvPr/>
-        </p:nvSpPr>
-        <p:spPr>
-          <a:xfrm>
-            <a:off x="4548029" y="2625434"/>
-            <a:ext cx="928500" cy="523200"/>
-          </a:xfrm>
-          <a:prstGeom prst="rect">
-            <a:avLst/>
-          </a:prstGeom>
-          <a:noFill/>
-          <a:ln>
-            <a:noFill/>
-          </a:ln>
-        </p:spPr>
-        <p:txBody>
-          <a:bodyPr anchorCtr="0" anchor="t" bIns="91425" lIns="91425" spcFirstLastPara="1" rIns="91425" wrap="square" tIns="91425">
-            <a:spAutoFit/>
-          </a:bodyPr>
-          <a:lstStyle/>
-          <a:p>
-            <a:pPr indent="0" lvl="0" marL="0" rtl="0" algn="ctr">
-              <a:spcBef>
-                <a:spcPts val="0"/>
-              </a:spcBef>
-              <a:spcAft>
-                <a:spcPts val="0"/>
-              </a:spcAft>
-              <a:buNone/>
-            </a:pPr>
-            <a:r>
-              <a:rPr lang="es-419" sz="1100">
-                <a:solidFill>
-                  <a:schemeClr val="dk2"/>
-                </a:solidFill>
-              </a:rPr>
-              <a:t>Promotores d</a:t>
+              <a:t>(D) Porcentaje de los promotores de la </a:t>
             </a:r>
             <a:r>
-              <a:rPr lang="es-419" sz="1100">
-                <a:solidFill>
-                  <a:schemeClr val="dk2"/>
+              <a:rPr i="1" lang="es-419" sz="700">
+                <a:solidFill>
+                  <a:schemeClr val="dk1"/>
                 </a:solidFill>
               </a:rPr>
-              <a:t>etectados</a:t>
+              <a:t>library</a:t>
             </a:r>
-            <a:endParaRPr sz="1100">
-              <a:solidFill>
-                <a:schemeClr val="dk2"/>
-              </a:solidFill>
-            </a:endParaRPr>
+            <a:r>
+              <a:rPr lang="es-419" sz="700">
+                <a:solidFill>
+                  <a:schemeClr val="dk1"/>
+                </a:solidFill>
+              </a:rPr>
+              <a:t> que se recupera en cada etapa del ensayo (</a:t>
+            </a:r>
+            <a:r>
+              <a:rPr i="1" lang="es-419" sz="700">
+                <a:solidFill>
+                  <a:schemeClr val="dk1"/>
+                </a:solidFill>
+              </a:rPr>
+              <a:t>pool</a:t>
+            </a:r>
+            <a:r>
+              <a:rPr lang="es-419" sz="700">
+                <a:solidFill>
+                  <a:schemeClr val="dk1"/>
+                </a:solidFill>
+              </a:rPr>
+              <a:t> previo al </a:t>
+            </a:r>
+            <a:r>
+              <a:rPr i="1" lang="es-419" sz="700">
+                <a:solidFill>
+                  <a:schemeClr val="dk1"/>
+                </a:solidFill>
+              </a:rPr>
+              <a:t>sorting </a:t>
+            </a:r>
+            <a:r>
+              <a:rPr lang="es-419" sz="700">
+                <a:solidFill>
+                  <a:schemeClr val="dk1"/>
+                </a:solidFill>
+              </a:rPr>
+              <a:t>en el MPRA de splicing, detección en el </a:t>
+            </a:r>
+            <a:r>
+              <a:rPr i="1" lang="es-419" sz="700">
+                <a:solidFill>
+                  <a:schemeClr val="dk1"/>
+                </a:solidFill>
+              </a:rPr>
+              <a:t>sorting</a:t>
+            </a:r>
+            <a:r>
+              <a:rPr lang="es-419" sz="700">
+                <a:solidFill>
+                  <a:schemeClr val="dk1"/>
+                </a:solidFill>
+              </a:rPr>
+              <a:t> y alta confianza) según el contenido de G+C del fragmento (intervalos de 0,05), para promotores sin G4 (gris), con G4 solo en la hebra codificante (rojo) o solo en la hebra molde (azul). Línea continua: réplica 1; línea discontinua: réplica 2. El tamaño del punto indica el número de promotores en el intervalo; se muestran los intervalos con al menos 20 promotores de cada grupo. </a:t>
+            </a:r>
+            <a:endParaRPr sz="1000"/>
           </a:p>
         </p:txBody>
       </p:sp>
@@ -7810,7 +7978,7 @@
   <p:cSld>
     <p:spTree>
       <p:nvGrpSpPr>
-        <p:cNvPr id="98" name="Shape 98"/>
+        <p:cNvPr id="102" name="Shape 102"/>
         <p:cNvGrpSpPr/>
         <p:nvPr/>
       </p:nvGrpSpPr>
@@ -7824,7 +7992,7 @@
       </p:grpSpPr>
       <p:pic>
         <p:nvPicPr>
-          <p:cNvPr id="99" name="Google Shape;99;p16"/>
+          <p:cNvPr id="103" name="Google Shape;103;p16"/>
           <p:cNvPicPr preferRelativeResize="0"/>
           <p:nvPr/>
         </p:nvPicPr>
@@ -7852,7 +8020,7 @@
       </p:pic>
       <p:sp>
         <p:nvSpPr>
-          <p:cNvPr id="100" name="Google Shape;100;p16"/>
+          <p:cNvPr id="104" name="Google Shape;104;p16"/>
           <p:cNvSpPr txBox="1"/>
           <p:nvPr/>
         </p:nvSpPr>
@@ -8004,7 +8172,7 @@
   <p:cSld>
     <p:spTree>
       <p:nvGrpSpPr>
-        <p:cNvPr id="104" name="Shape 104"/>
+        <p:cNvPr id="108" name="Shape 108"/>
         <p:cNvGrpSpPr/>
         <p:nvPr/>
       </p:nvGrpSpPr>
@@ -8018,7 +8186,7 @@
       </p:grpSpPr>
       <p:sp>
         <p:nvSpPr>
-          <p:cNvPr id="105" name="Google Shape;105;p17"/>
+          <p:cNvPr id="109" name="Google Shape;109;p17"/>
           <p:cNvSpPr txBox="1"/>
           <p:nvPr/>
         </p:nvSpPr>
@@ -8124,7 +8292,7 @@
       </p:sp>
       <p:pic>
         <p:nvPicPr>
-          <p:cNvPr id="106" name="Google Shape;106;p17" title="histograma_gates_KIAA0753.jpg"/>
+          <p:cNvPr id="110" name="Google Shape;110;p17" title="histograma_gates_KIAA0753.jpg"/>
           <p:cNvPicPr preferRelativeResize="0"/>
           <p:nvPr/>
         </p:nvPicPr>
@@ -8163,7 +8331,7 @@
   <p:cSld>
     <p:spTree>
       <p:nvGrpSpPr>
-        <p:cNvPr id="110" name="Shape 110"/>
+        <p:cNvPr id="114" name="Shape 114"/>
         <p:cNvGrpSpPr/>
         <p:nvPr/>
       </p:nvGrpSpPr>
@@ -8177,7 +8345,7 @@
       </p:grpSpPr>
       <p:pic>
         <p:nvPicPr>
-          <p:cNvPr id="111" name="Google Shape;111;p18" title="extra_densidad_individual.jpg"/>
+          <p:cNvPr id="115" name="Google Shape;115;p18" title="extra_densidad_individual.jpg"/>
           <p:cNvPicPr preferRelativeResize="0"/>
           <p:nvPr/>
         </p:nvPicPr>
@@ -8205,7 +8373,7 @@
       </p:pic>
       <p:sp>
         <p:nvSpPr>
-          <p:cNvPr id="112" name="Google Shape;112;p18"/>
+          <p:cNvPr id="116" name="Google Shape;116;p18"/>
           <p:cNvSpPr txBox="1"/>
           <p:nvPr/>
         </p:nvSpPr>
@@ -8326,7 +8494,7 @@
   <p:cSld>
     <p:spTree>
       <p:nvGrpSpPr>
-        <p:cNvPr id="116" name="Shape 116"/>
+        <p:cNvPr id="120" name="Shape 120"/>
         <p:cNvGrpSpPr/>
         <p:nvPr/>
       </p:nvGrpSpPr>
@@ -8340,7 +8508,7 @@
       </p:grpSpPr>
       <p:pic>
         <p:nvPicPr>
-          <p:cNvPr id="117" name="Google Shape;117;p19"/>
+          <p:cNvPr id="121" name="Google Shape;121;p19"/>
           <p:cNvPicPr preferRelativeResize="0"/>
           <p:nvPr/>
         </p:nvPicPr>
@@ -8368,7 +8536,7 @@
       </p:pic>
       <p:pic>
         <p:nvPicPr>
-          <p:cNvPr id="118" name="Google Shape;118;p19"/>
+          <p:cNvPr id="122" name="Google Shape;122;p19"/>
           <p:cNvPicPr preferRelativeResize="0"/>
           <p:nvPr/>
         </p:nvPicPr>
@@ -8396,7 +8564,7 @@
       </p:pic>
       <p:sp>
         <p:nvSpPr>
-          <p:cNvPr id="119" name="Google Shape;119;p19"/>
+          <p:cNvPr id="123" name="Google Shape;123;p19"/>
           <p:cNvSpPr txBox="1"/>
           <p:nvPr/>
         </p:nvSpPr>
@@ -8502,7 +8670,7 @@
       </p:sp>
       <p:pic>
         <p:nvPicPr>
-          <p:cNvPr id="120" name="Google Shape;120;p19" title="panel_b_histograma_gates_ejemplo.jpg"/>
+          <p:cNvPr id="124" name="Google Shape;124;p19" title="panel_b_histograma_gates_ejemplo.jpg"/>
           <p:cNvPicPr preferRelativeResize="0"/>
           <p:nvPr/>
         </p:nvPicPr>
@@ -8541,7 +8709,7 @@
   <p:cSld>
     <p:spTree>
       <p:nvGrpSpPr>
-        <p:cNvPr id="124" name="Shape 124"/>
+        <p:cNvPr id="128" name="Shape 128"/>
         <p:cNvGrpSpPr/>
         <p:nvPr/>
       </p:nvGrpSpPr>
@@ -8555,7 +8723,7 @@
       </p:grpSpPr>
       <p:grpSp>
         <p:nvGrpSpPr>
-          <p:cNvPr id="125" name="Google Shape;125;p20"/>
+          <p:cNvPr id="129" name="Google Shape;129;p20"/>
           <p:cNvGrpSpPr/>
           <p:nvPr/>
         </p:nvGrpSpPr>
@@ -8569,7 +8737,7 @@
         </p:grpSpPr>
         <p:pic>
           <p:nvPicPr>
-            <p:cNvPr id="126" name="Google Shape;126;p20"/>
+            <p:cNvPr id="130" name="Google Shape;130;p20"/>
             <p:cNvPicPr preferRelativeResize="0"/>
             <p:nvPr/>
           </p:nvPicPr>
@@ -8596,7 +8764,7 @@
         </p:pic>
         <p:sp>
           <p:nvSpPr>
-            <p:cNvPr id="127" name="Google Shape;127;p20"/>
+            <p:cNvPr id="131" name="Google Shape;131;p20"/>
             <p:cNvSpPr txBox="1"/>
             <p:nvPr/>
           </p:nvSpPr>
@@ -8648,7 +8816,7 @@
         </p:sp>
         <p:sp>
           <p:nvSpPr>
-            <p:cNvPr id="128" name="Google Shape;128;p20"/>
+            <p:cNvPr id="132" name="Google Shape;132;p20"/>
             <p:cNvSpPr txBox="1"/>
             <p:nvPr/>
           </p:nvSpPr>
@@ -8698,7 +8866,7 @@
         </p:sp>
         <p:sp>
           <p:nvSpPr>
-            <p:cNvPr id="129" name="Google Shape;129;p20"/>
+            <p:cNvPr id="133" name="Google Shape;133;p20"/>
             <p:cNvSpPr txBox="1"/>
             <p:nvPr/>
           </p:nvSpPr>
@@ -8748,7 +8916,7 @@
         </p:sp>
         <p:sp>
           <p:nvSpPr>
-            <p:cNvPr id="130" name="Google Shape;130;p20"/>
+            <p:cNvPr id="134" name="Google Shape;134;p20"/>
             <p:cNvSpPr txBox="1"/>
             <p:nvPr/>
           </p:nvSpPr>
@@ -8798,7 +8966,7 @@
         </p:sp>
         <p:sp>
           <p:nvSpPr>
-            <p:cNvPr id="131" name="Google Shape;131;p20"/>
+            <p:cNvPr id="135" name="Google Shape;135;p20"/>
             <p:cNvSpPr txBox="1"/>
             <p:nvPr/>
           </p:nvSpPr>
@@ -8850,7 +9018,7 @@
         </p:sp>
         <p:sp>
           <p:nvSpPr>
-            <p:cNvPr id="132" name="Google Shape;132;p20"/>
+            <p:cNvPr id="136" name="Google Shape;136;p20"/>
             <p:cNvSpPr txBox="1"/>
             <p:nvPr/>
           </p:nvSpPr>
@@ -8902,7 +9070,7 @@
         </p:sp>
         <p:sp>
           <p:nvSpPr>
-            <p:cNvPr id="133" name="Google Shape;133;p20"/>
+            <p:cNvPr id="137" name="Google Shape;137;p20"/>
             <p:cNvSpPr txBox="1"/>
             <p:nvPr/>
           </p:nvSpPr>
@@ -8960,7 +9128,7 @@
       </p:grpSp>
       <p:sp>
         <p:nvSpPr>
-          <p:cNvPr id="134" name="Google Shape;134;p20"/>
+          <p:cNvPr id="138" name="Google Shape;138;p20"/>
           <p:cNvSpPr txBox="1"/>
           <p:nvPr/>
         </p:nvSpPr>
@@ -9137,7 +9305,7 @@
       </p:sp>
       <p:grpSp>
         <p:nvGrpSpPr>
-          <p:cNvPr id="135" name="Google Shape;135;p20"/>
+          <p:cNvPr id="139" name="Google Shape;139;p20"/>
           <p:cNvGrpSpPr/>
           <p:nvPr/>
         </p:nvGrpSpPr>
@@ -9151,7 +9319,7 @@
         </p:grpSpPr>
         <p:pic>
           <p:nvPicPr>
-            <p:cNvPr id="136" name="Google Shape;136;p20" title="mean_replicates_prefilter.jpg"/>
+            <p:cNvPr id="140" name="Google Shape;140;p20" title="mean_replicates_prefilter.jpg"/>
             <p:cNvPicPr preferRelativeResize="0"/>
             <p:nvPr/>
           </p:nvPicPr>
@@ -9178,7 +9346,7 @@
         </p:pic>
         <p:pic>
           <p:nvPicPr>
-            <p:cNvPr id="137" name="Google Shape;137;p20" title="mean_replicates_prefilter.jpg"/>
+            <p:cNvPr id="141" name="Google Shape;141;p20" title="mean_replicates_prefilter.jpg"/>
             <p:cNvPicPr preferRelativeResize="0"/>
             <p:nvPr/>
           </p:nvPicPr>
@@ -9205,7 +9373,7 @@
         </p:pic>
         <p:pic>
           <p:nvPicPr>
-            <p:cNvPr id="138" name="Google Shape;138;p20" title="mean_replicates_prefilter.jpg"/>
+            <p:cNvPr id="142" name="Google Shape;142;p20" title="mean_replicates_prefilter.jpg"/>
             <p:cNvPicPr preferRelativeResize="0"/>
             <p:nvPr/>
           </p:nvPicPr>
@@ -9233,7 +9401,7 @@
       </p:grpSp>
       <p:pic>
         <p:nvPicPr>
-          <p:cNvPr id="139" name="Google Shape;139;p20" title="mean_replicates_postfilter.jpg"/>
+          <p:cNvPr id="143" name="Google Shape;143;p20" title="mean_replicates_postfilter.jpg"/>
           <p:cNvPicPr preferRelativeResize="0"/>
           <p:nvPr/>
         </p:nvPicPr>
@@ -9261,7 +9429,7 @@
       </p:pic>
       <p:pic>
         <p:nvPicPr>
-          <p:cNvPr id="140" name="Google Shape;140;p20" title="panel_d_var_replicates.jpg"/>
+          <p:cNvPr id="144" name="Google Shape;144;p20" title="panel_d_var_replicates.jpg"/>
           <p:cNvPicPr preferRelativeResize="0"/>
           <p:nvPr/>
         </p:nvPicPr>

--- a/docs/Fig R1.pptx
+++ b/docs/Fig R1.pptx
@@ -905,7 +905,7 @@
   <p:cSld>
     <p:spTree>
       <p:nvGrpSpPr>
-        <p:cNvPr id="72" name="Shape 72"/>
+        <p:cNvPr id="70" name="Shape 70"/>
         <p:cNvGrpSpPr/>
         <p:nvPr/>
       </p:nvGrpSpPr>
@@ -919,7 +919,7 @@
       </p:grpSpPr>
       <p:sp>
         <p:nvSpPr>
-          <p:cNvPr id="73" name="Google Shape;73;g3d678bf7346_0_8:notes"/>
+          <p:cNvPr id="71" name="Google Shape;71;g3d678bf7346_0_8:notes"/>
           <p:cNvSpPr/>
           <p:nvPr>
             <p:ph idx="2" type="sldImg"/>
@@ -954,7 +954,7 @@
       </p:sp>
       <p:sp>
         <p:nvSpPr>
-          <p:cNvPr id="74" name="Google Shape;74;g3d678bf7346_0_8:notes"/>
+          <p:cNvPr id="72" name="Google Shape;72;g3d678bf7346_0_8:notes"/>
           <p:cNvSpPr txBox="1"/>
           <p:nvPr>
             <p:ph idx="1" type="body"/>
@@ -1004,7 +1004,7 @@
   <p:cSld>
     <p:spTree>
       <p:nvGrpSpPr>
-        <p:cNvPr id="99" name="Shape 99"/>
+        <p:cNvPr id="97" name="Shape 97"/>
         <p:cNvGrpSpPr/>
         <p:nvPr/>
       </p:nvGrpSpPr>
@@ -1018,7 +1018,7 @@
       </p:grpSpPr>
       <p:sp>
         <p:nvSpPr>
-          <p:cNvPr id="100" name="Google Shape;100;g396169342f1_0_0:notes"/>
+          <p:cNvPr id="98" name="Google Shape;98;g396169342f1_0_0:notes"/>
           <p:cNvSpPr/>
           <p:nvPr>
             <p:ph idx="2" type="sldImg"/>
@@ -1053,7 +1053,7 @@
       </p:sp>
       <p:sp>
         <p:nvSpPr>
-          <p:cNvPr id="101" name="Google Shape;101;g396169342f1_0_0:notes"/>
+          <p:cNvPr id="99" name="Google Shape;99;g396169342f1_0_0:notes"/>
           <p:cNvSpPr txBox="1"/>
           <p:nvPr>
             <p:ph idx="1" type="body"/>
@@ -1103,7 +1103,7 @@
   <p:cSld>
     <p:spTree>
       <p:nvGrpSpPr>
-        <p:cNvPr id="105" name="Shape 105"/>
+        <p:cNvPr id="103" name="Shape 103"/>
         <p:cNvGrpSpPr/>
         <p:nvPr/>
       </p:nvGrpSpPr>
@@ -1117,7 +1117,7 @@
       </p:grpSpPr>
       <p:sp>
         <p:nvSpPr>
-          <p:cNvPr id="106" name="Google Shape;106;g3f5e045cd8f_0_8:notes"/>
+          <p:cNvPr id="104" name="Google Shape;104;g3f5e045cd8f_0_8:notes"/>
           <p:cNvSpPr/>
           <p:nvPr>
             <p:ph idx="2" type="sldImg"/>
@@ -1152,7 +1152,7 @@
       </p:sp>
       <p:sp>
         <p:nvSpPr>
-          <p:cNvPr id="107" name="Google Shape;107;g3f5e045cd8f_0_8:notes"/>
+          <p:cNvPr id="105" name="Google Shape;105;g3f5e045cd8f_0_8:notes"/>
           <p:cNvSpPr txBox="1"/>
           <p:nvPr>
             <p:ph idx="1" type="body"/>
@@ -1202,7 +1202,7 @@
   <p:cSld>
     <p:spTree>
       <p:nvGrpSpPr>
-        <p:cNvPr id="111" name="Shape 111"/>
+        <p:cNvPr id="109" name="Shape 109"/>
         <p:cNvGrpSpPr/>
         <p:nvPr/>
       </p:nvGrpSpPr>
@@ -1216,7 +1216,7 @@
       </p:grpSpPr>
       <p:sp>
         <p:nvSpPr>
-          <p:cNvPr id="112" name="Google Shape;112;g3f5e045cd8f_0_2:notes"/>
+          <p:cNvPr id="110" name="Google Shape;110;g3f5e045cd8f_0_2:notes"/>
           <p:cNvSpPr/>
           <p:nvPr>
             <p:ph idx="2" type="sldImg"/>
@@ -1251,7 +1251,7 @@
       </p:sp>
       <p:sp>
         <p:nvSpPr>
-          <p:cNvPr id="113" name="Google Shape;113;g3f5e045cd8f_0_2:notes"/>
+          <p:cNvPr id="111" name="Google Shape;111;g3f5e045cd8f_0_2:notes"/>
           <p:cNvSpPr txBox="1"/>
           <p:nvPr>
             <p:ph idx="1" type="body"/>
@@ -1301,7 +1301,7 @@
   <p:cSld>
     <p:spTree>
       <p:nvGrpSpPr>
-        <p:cNvPr id="117" name="Shape 117"/>
+        <p:cNvPr id="115" name="Shape 115"/>
         <p:cNvGrpSpPr/>
         <p:nvPr/>
       </p:nvGrpSpPr>
@@ -1315,7 +1315,7 @@
       </p:grpSpPr>
       <p:sp>
         <p:nvSpPr>
-          <p:cNvPr id="118" name="Google Shape;118;g3d678bf7346_0_23:notes"/>
+          <p:cNvPr id="116" name="Google Shape;116;g3d678bf7346_0_23:notes"/>
           <p:cNvSpPr/>
           <p:nvPr>
             <p:ph idx="2" type="sldImg"/>
@@ -1350,7 +1350,7 @@
       </p:sp>
       <p:sp>
         <p:nvSpPr>
-          <p:cNvPr id="119" name="Google Shape;119;g3d678bf7346_0_23:notes"/>
+          <p:cNvPr id="117" name="Google Shape;117;g3d678bf7346_0_23:notes"/>
           <p:cNvSpPr txBox="1"/>
           <p:nvPr>
             <p:ph idx="1" type="body"/>
@@ -1400,7 +1400,7 @@
   <p:cSld>
     <p:spTree>
       <p:nvGrpSpPr>
-        <p:cNvPr id="125" name="Shape 125"/>
+        <p:cNvPr id="123" name="Shape 123"/>
         <p:cNvGrpSpPr/>
         <p:nvPr/>
       </p:nvGrpSpPr>
@@ -1414,7 +1414,7 @@
       </p:grpSpPr>
       <p:sp>
         <p:nvSpPr>
-          <p:cNvPr id="126" name="Google Shape;126;g3d678bf7346_0_17:notes"/>
+          <p:cNvPr id="124" name="Google Shape;124;g3d678bf7346_0_17:notes"/>
           <p:cNvSpPr/>
           <p:nvPr>
             <p:ph idx="2" type="sldImg"/>
@@ -1449,7 +1449,7 @@
       </p:sp>
       <p:sp>
         <p:nvSpPr>
-          <p:cNvPr id="127" name="Google Shape;127;g3d678bf7346_0_17:notes"/>
+          <p:cNvPr id="125" name="Google Shape;125;g3d678bf7346_0_17:notes"/>
           <p:cNvSpPr txBox="1"/>
           <p:nvPr>
             <p:ph idx="1" type="body"/>
@@ -6298,87 +6298,9 @@
           <a:chExt cx="0" cy="0"/>
         </a:xfrm>
       </p:grpSpPr>
-      <p:pic>
-        <p:nvPicPr>
-          <p:cNvPr id="60" name="Google Shape;60;p14" title="n_per_rep.jpg"/>
-          <p:cNvPicPr preferRelativeResize="0"/>
-          <p:nvPr/>
-        </p:nvPicPr>
-        <p:blipFill>
-          <a:blip r:embed="rId3">
-            <a:alphaModFix/>
-          </a:blip>
-          <a:stretch>
-            <a:fillRect/>
-          </a:stretch>
-        </p:blipFill>
-        <p:spPr>
-          <a:xfrm>
-            <a:off x="5728773" y="2660399"/>
-            <a:ext cx="2973952" cy="2230476"/>
-          </a:xfrm>
-          <a:prstGeom prst="rect">
-            <a:avLst/>
-          </a:prstGeom>
-          <a:noFill/>
-          <a:ln>
-            <a:noFill/>
-          </a:ln>
-        </p:spPr>
-      </p:pic>
       <p:sp>
         <p:nvSpPr>
-          <p:cNvPr id="61" name="Google Shape;61;p14"/>
-          <p:cNvSpPr txBox="1"/>
-          <p:nvPr/>
-        </p:nvSpPr>
-        <p:spPr>
-          <a:xfrm>
-            <a:off x="3087175" y="4033700"/>
-            <a:ext cx="3532200" cy="461700"/>
-          </a:xfrm>
-          <a:prstGeom prst="rect">
-            <a:avLst/>
-          </a:prstGeom>
-          <a:noFill/>
-          <a:ln>
-            <a:noFill/>
-          </a:ln>
-        </p:spPr>
-        <p:txBody>
-          <a:bodyPr anchorCtr="0" anchor="t" bIns="91425" lIns="91425" spcFirstLastPara="1" rIns="91425" wrap="square" tIns="91425">
-            <a:spAutoFit/>
-          </a:bodyPr>
-          <a:lstStyle/>
-          <a:p>
-            <a:pPr indent="0" lvl="0" marL="0" rtl="0" algn="l">
-              <a:spcBef>
-                <a:spcPts val="0"/>
-              </a:spcBef>
-              <a:spcAft>
-                <a:spcPts val="0"/>
-              </a:spcAft>
-              <a:buNone/>
-            </a:pPr>
-            <a:r>
-              <a:rPr lang="es-419" sz="1800">
-                <a:solidFill>
-                  <a:schemeClr val="dk2"/>
-                </a:solidFill>
-              </a:rPr>
-              <a:t>opcion B de grafico</a:t>
-            </a:r>
-            <a:endParaRPr sz="1800">
-              <a:solidFill>
-                <a:schemeClr val="dk2"/>
-              </a:solidFill>
-            </a:endParaRPr>
-          </a:p>
-        </p:txBody>
-      </p:sp>
-      <p:sp>
-        <p:nvSpPr>
-          <p:cNvPr id="62" name="Google Shape;62;p14"/>
+          <p:cNvPr id="60" name="Google Shape;60;p14"/>
           <p:cNvSpPr txBox="1"/>
           <p:nvPr/>
         </p:nvSpPr>
@@ -6484,7 +6406,7 @@
       </p:sp>
       <p:grpSp>
         <p:nvGrpSpPr>
-          <p:cNvPr id="63" name="Google Shape;63;p14"/>
+          <p:cNvPr id="61" name="Google Shape;61;p14"/>
           <p:cNvGrpSpPr/>
           <p:nvPr/>
         </p:nvGrpSpPr>
@@ -6498,12 +6420,12 @@
         </p:grpSpPr>
         <p:pic>
           <p:nvPicPr>
-            <p:cNvPr id="64" name="Google Shape;64;p14"/>
+            <p:cNvPr id="62" name="Google Shape;62;p14"/>
             <p:cNvPicPr preferRelativeResize="0"/>
             <p:nvPr/>
           </p:nvPicPr>
           <p:blipFill rotWithShape="1">
-            <a:blip r:embed="rId4">
+            <a:blip r:embed="rId3">
               <a:alphaModFix/>
             </a:blip>
             <a:srcRect b="0" l="744" r="0" t="970"/>
@@ -6525,7 +6447,7 @@
         </p:pic>
         <p:sp>
           <p:nvSpPr>
-            <p:cNvPr id="65" name="Google Shape;65;p14"/>
+            <p:cNvPr id="63" name="Google Shape;63;p14"/>
             <p:cNvSpPr txBox="1"/>
             <p:nvPr/>
           </p:nvSpPr>
@@ -6577,7 +6499,7 @@
         </p:sp>
         <p:sp>
           <p:nvSpPr>
-            <p:cNvPr id="66" name="Google Shape;66;p14"/>
+            <p:cNvPr id="64" name="Google Shape;64;p14"/>
             <p:cNvSpPr txBox="1"/>
             <p:nvPr/>
           </p:nvSpPr>
@@ -6627,7 +6549,7 @@
         </p:sp>
         <p:sp>
           <p:nvSpPr>
-            <p:cNvPr id="67" name="Google Shape;67;p14"/>
+            <p:cNvPr id="65" name="Google Shape;65;p14"/>
             <p:cNvSpPr txBox="1"/>
             <p:nvPr/>
           </p:nvSpPr>
@@ -6677,7 +6599,7 @@
         </p:sp>
         <p:sp>
           <p:nvSpPr>
-            <p:cNvPr id="68" name="Google Shape;68;p14"/>
+            <p:cNvPr id="66" name="Google Shape;66;p14"/>
             <p:cNvSpPr txBox="1"/>
             <p:nvPr/>
           </p:nvSpPr>
@@ -6727,7 +6649,7 @@
         </p:sp>
         <p:sp>
           <p:nvSpPr>
-            <p:cNvPr id="69" name="Google Shape;69;p14"/>
+            <p:cNvPr id="67" name="Google Shape;67;p14"/>
             <p:cNvSpPr txBox="1"/>
             <p:nvPr/>
           </p:nvSpPr>
@@ -6779,7 +6701,7 @@
         </p:sp>
         <p:sp>
           <p:nvSpPr>
-            <p:cNvPr id="70" name="Google Shape;70;p14"/>
+            <p:cNvPr id="68" name="Google Shape;68;p14"/>
             <p:cNvSpPr txBox="1"/>
             <p:nvPr/>
           </p:nvSpPr>
@@ -6831,7 +6753,7 @@
         </p:sp>
         <p:sp>
           <p:nvSpPr>
-            <p:cNvPr id="71" name="Google Shape;71;p14"/>
+            <p:cNvPr id="69" name="Google Shape;69;p14"/>
             <p:cNvSpPr txBox="1"/>
             <p:nvPr/>
           </p:nvSpPr>
@@ -6895,7 +6817,7 @@
   <p:cSld>
     <p:spTree>
       <p:nvGrpSpPr>
-        <p:cNvPr id="75" name="Shape 75"/>
+        <p:cNvPr id="73" name="Shape 73"/>
         <p:cNvGrpSpPr/>
         <p:nvPr/>
       </p:nvGrpSpPr>
@@ -6909,7 +6831,7 @@
       </p:grpSpPr>
       <p:sp>
         <p:nvSpPr>
-          <p:cNvPr id="76" name="Google Shape;76;p15"/>
+          <p:cNvPr id="74" name="Google Shape;74;p15"/>
           <p:cNvSpPr txBox="1"/>
           <p:nvPr/>
         </p:nvSpPr>
@@ -6991,7 +6913,7 @@
       </p:sp>
       <p:grpSp>
         <p:nvGrpSpPr>
-          <p:cNvPr id="77" name="Google Shape;77;p15"/>
+          <p:cNvPr id="75" name="Google Shape;75;p15"/>
           <p:cNvGrpSpPr/>
           <p:nvPr/>
         </p:nvGrpSpPr>
@@ -7005,7 +6927,7 @@
         </p:grpSpPr>
         <p:pic>
           <p:nvPicPr>
-            <p:cNvPr id="78" name="Google Shape;78;p15"/>
+            <p:cNvPr id="76" name="Google Shape;76;p15"/>
             <p:cNvPicPr preferRelativeResize="0"/>
             <p:nvPr/>
           </p:nvPicPr>
@@ -7032,7 +6954,7 @@
         </p:pic>
         <p:sp>
           <p:nvSpPr>
-            <p:cNvPr id="79" name="Google Shape;79;p15"/>
+            <p:cNvPr id="77" name="Google Shape;77;p15"/>
             <p:cNvSpPr txBox="1"/>
             <p:nvPr/>
           </p:nvSpPr>
@@ -7084,7 +7006,7 @@
         </p:sp>
         <p:sp>
           <p:nvSpPr>
-            <p:cNvPr id="80" name="Google Shape;80;p15"/>
+            <p:cNvPr id="78" name="Google Shape;78;p15"/>
             <p:cNvSpPr txBox="1"/>
             <p:nvPr/>
           </p:nvSpPr>
@@ -7134,7 +7056,7 @@
         </p:sp>
         <p:sp>
           <p:nvSpPr>
-            <p:cNvPr id="81" name="Google Shape;81;p15"/>
+            <p:cNvPr id="79" name="Google Shape;79;p15"/>
             <p:cNvSpPr txBox="1"/>
             <p:nvPr/>
           </p:nvSpPr>
@@ -7186,7 +7108,7 @@
         </p:sp>
         <p:sp>
           <p:nvSpPr>
-            <p:cNvPr id="82" name="Google Shape;82;p15"/>
+            <p:cNvPr id="80" name="Google Shape;80;p15"/>
             <p:cNvSpPr txBox="1"/>
             <p:nvPr/>
           </p:nvSpPr>
@@ -7238,7 +7160,7 @@
         </p:sp>
         <p:sp>
           <p:nvSpPr>
-            <p:cNvPr id="83" name="Google Shape;83;p15"/>
+            <p:cNvPr id="81" name="Google Shape;81;p15"/>
             <p:cNvSpPr txBox="1"/>
             <p:nvPr/>
           </p:nvSpPr>
@@ -7290,7 +7212,7 @@
         </p:sp>
         <p:sp>
           <p:nvSpPr>
-            <p:cNvPr id="84" name="Google Shape;84;p15"/>
+            <p:cNvPr id="82" name="Google Shape;82;p15"/>
             <p:cNvSpPr txBox="1"/>
             <p:nvPr/>
           </p:nvSpPr>
@@ -7348,7 +7270,7 @@
         </p:sp>
         <p:sp>
           <p:nvSpPr>
-            <p:cNvPr id="85" name="Google Shape;85;p15"/>
+            <p:cNvPr id="83" name="Google Shape;83;p15"/>
             <p:cNvSpPr txBox="1"/>
             <p:nvPr/>
           </p:nvSpPr>
@@ -7399,7 +7321,7 @@
       </p:grpSp>
       <p:grpSp>
         <p:nvGrpSpPr>
-          <p:cNvPr id="86" name="Google Shape;86;p15"/>
+          <p:cNvPr id="84" name="Google Shape;84;p15"/>
           <p:cNvGrpSpPr/>
           <p:nvPr/>
         </p:nvGrpSpPr>
@@ -7413,7 +7335,7 @@
         </p:grpSpPr>
         <p:grpSp>
           <p:nvGrpSpPr>
-            <p:cNvPr id="87" name="Google Shape;87;p15"/>
+            <p:cNvPr id="85" name="Google Shape;85;p15"/>
             <p:cNvGrpSpPr/>
             <p:nvPr/>
           </p:nvGrpSpPr>
@@ -7427,7 +7349,7 @@
           </p:grpSpPr>
           <p:pic>
             <p:nvPicPr>
-              <p:cNvPr id="88" name="Google Shape;88;p15" title="gc_bias_bars.jpg"/>
+              <p:cNvPr id="86" name="Google Shape;86;p15" title="gc_bias_bars.jpg"/>
               <p:cNvPicPr preferRelativeResize="0"/>
               <p:nvPr/>
             </p:nvPicPr>
@@ -7455,7 +7377,7 @@
           </p:pic>
           <p:sp>
             <p:nvSpPr>
-              <p:cNvPr id="89" name="Google Shape;89;p15"/>
+              <p:cNvPr id="87" name="Google Shape;87;p15"/>
               <p:cNvSpPr txBox="1"/>
               <p:nvPr/>
             </p:nvSpPr>
@@ -7505,7 +7427,7 @@
           </p:sp>
           <p:sp>
             <p:nvSpPr>
-              <p:cNvPr id="90" name="Google Shape;90;p15"/>
+              <p:cNvPr id="88" name="Google Shape;88;p15"/>
               <p:cNvSpPr txBox="1"/>
               <p:nvPr/>
             </p:nvSpPr>
@@ -7556,7 +7478,7 @@
         </p:grpSp>
         <p:sp>
           <p:nvSpPr>
-            <p:cNvPr id="91" name="Google Shape;91;p15"/>
+            <p:cNvPr id="89" name="Google Shape;89;p15"/>
             <p:cNvSpPr/>
             <p:nvPr/>
           </p:nvSpPr>
@@ -7605,7 +7527,7 @@
         </p:sp>
         <p:sp>
           <p:nvSpPr>
-            <p:cNvPr id="92" name="Google Shape;92;p15"/>
+            <p:cNvPr id="90" name="Google Shape;90;p15"/>
             <p:cNvSpPr/>
             <p:nvPr/>
           </p:nvSpPr>
@@ -7655,7 +7577,7 @@
       </p:grpSp>
       <p:grpSp>
         <p:nvGrpSpPr>
-          <p:cNvPr id="93" name="Google Shape;93;p15"/>
+          <p:cNvPr id="91" name="Google Shape;91;p15"/>
           <p:cNvGrpSpPr/>
           <p:nvPr/>
         </p:nvGrpSpPr>
@@ -7669,7 +7591,7 @@
         </p:grpSpPr>
         <p:pic>
           <p:nvPicPr>
-            <p:cNvPr id="94" name="Google Shape;94;p15" title="gc_bias_violin.jpg"/>
+            <p:cNvPr id="92" name="Google Shape;92;p15" title="gc_bias_violin.jpg"/>
             <p:cNvPicPr preferRelativeResize="0"/>
             <p:nvPr/>
           </p:nvPicPr>
@@ -7696,7 +7618,7 @@
         </p:pic>
         <p:sp>
           <p:nvSpPr>
-            <p:cNvPr id="95" name="Google Shape;95;p15"/>
+            <p:cNvPr id="93" name="Google Shape;93;p15"/>
             <p:cNvSpPr txBox="1"/>
             <p:nvPr/>
           </p:nvSpPr>
@@ -7770,7 +7692,7 @@
         </p:sp>
         <p:sp>
           <p:nvSpPr>
-            <p:cNvPr id="96" name="Google Shape;96;p15"/>
+            <p:cNvPr id="94" name="Google Shape;94;p15"/>
             <p:cNvSpPr txBox="1"/>
             <p:nvPr/>
           </p:nvSpPr>
@@ -7829,7 +7751,7 @@
       </p:grpSp>
       <p:pic>
         <p:nvPicPr>
-          <p:cNvPr id="97" name="Google Shape;97;p15" title="g4_retencion_por_gc.jpg"/>
+          <p:cNvPr id="95" name="Google Shape;95;p15" title="g4_retencion_por_gc.jpg"/>
           <p:cNvPicPr preferRelativeResize="0"/>
           <p:nvPr/>
         </p:nvPicPr>
@@ -7857,7 +7779,7 @@
       </p:pic>
       <p:sp>
         <p:nvSpPr>
-          <p:cNvPr id="98" name="Google Shape;98;p15"/>
+          <p:cNvPr id="96" name="Google Shape;96;p15"/>
           <p:cNvSpPr txBox="1"/>
           <p:nvPr/>
         </p:nvSpPr>
@@ -7978,7 +7900,7 @@
   <p:cSld>
     <p:spTree>
       <p:nvGrpSpPr>
-        <p:cNvPr id="102" name="Shape 102"/>
+        <p:cNvPr id="100" name="Shape 100"/>
         <p:cNvGrpSpPr/>
         <p:nvPr/>
       </p:nvGrpSpPr>
@@ -7992,7 +7914,7 @@
       </p:grpSpPr>
       <p:pic>
         <p:nvPicPr>
-          <p:cNvPr id="103" name="Google Shape;103;p16"/>
+          <p:cNvPr id="101" name="Google Shape;101;p16"/>
           <p:cNvPicPr preferRelativeResize="0"/>
           <p:nvPr/>
         </p:nvPicPr>
@@ -8020,7 +7942,7 @@
       </p:pic>
       <p:sp>
         <p:nvSpPr>
-          <p:cNvPr id="104" name="Google Shape;104;p16"/>
+          <p:cNvPr id="102" name="Google Shape;102;p16"/>
           <p:cNvSpPr txBox="1"/>
           <p:nvPr/>
         </p:nvSpPr>
@@ -8172,7 +8094,7 @@
   <p:cSld>
     <p:spTree>
       <p:nvGrpSpPr>
-        <p:cNvPr id="108" name="Shape 108"/>
+        <p:cNvPr id="106" name="Shape 106"/>
         <p:cNvGrpSpPr/>
         <p:nvPr/>
       </p:nvGrpSpPr>
@@ -8186,7 +8108,7 @@
       </p:grpSpPr>
       <p:sp>
         <p:nvSpPr>
-          <p:cNvPr id="109" name="Google Shape;109;p17"/>
+          <p:cNvPr id="107" name="Google Shape;107;p17"/>
           <p:cNvSpPr txBox="1"/>
           <p:nvPr/>
         </p:nvSpPr>
@@ -8292,7 +8214,7 @@
       </p:sp>
       <p:pic>
         <p:nvPicPr>
-          <p:cNvPr id="110" name="Google Shape;110;p17" title="histograma_gates_KIAA0753.jpg"/>
+          <p:cNvPr id="108" name="Google Shape;108;p17" title="histograma_gates_KIAA0753.jpg"/>
           <p:cNvPicPr preferRelativeResize="0"/>
           <p:nvPr/>
         </p:nvPicPr>
@@ -8331,7 +8253,7 @@
   <p:cSld>
     <p:spTree>
       <p:nvGrpSpPr>
-        <p:cNvPr id="114" name="Shape 114"/>
+        <p:cNvPr id="112" name="Shape 112"/>
         <p:cNvGrpSpPr/>
         <p:nvPr/>
       </p:nvGrpSpPr>
@@ -8345,7 +8267,7 @@
       </p:grpSpPr>
       <p:pic>
         <p:nvPicPr>
-          <p:cNvPr id="115" name="Google Shape;115;p18" title="extra_densidad_individual.jpg"/>
+          <p:cNvPr id="113" name="Google Shape;113;p18" title="extra_densidad_individual.jpg"/>
           <p:cNvPicPr preferRelativeResize="0"/>
           <p:nvPr/>
         </p:nvPicPr>
@@ -8373,7 +8295,7 @@
       </p:pic>
       <p:sp>
         <p:nvSpPr>
-          <p:cNvPr id="116" name="Google Shape;116;p18"/>
+          <p:cNvPr id="114" name="Google Shape;114;p18"/>
           <p:cNvSpPr txBox="1"/>
           <p:nvPr/>
         </p:nvSpPr>
@@ -8494,7 +8416,7 @@
   <p:cSld>
     <p:spTree>
       <p:nvGrpSpPr>
-        <p:cNvPr id="120" name="Shape 120"/>
+        <p:cNvPr id="118" name="Shape 118"/>
         <p:cNvGrpSpPr/>
         <p:nvPr/>
       </p:nvGrpSpPr>
@@ -8508,7 +8430,7 @@
       </p:grpSpPr>
       <p:pic>
         <p:nvPicPr>
-          <p:cNvPr id="121" name="Google Shape;121;p19"/>
+          <p:cNvPr id="119" name="Google Shape;119;p19"/>
           <p:cNvPicPr preferRelativeResize="0"/>
           <p:nvPr/>
         </p:nvPicPr>
@@ -8536,7 +8458,7 @@
       </p:pic>
       <p:pic>
         <p:nvPicPr>
-          <p:cNvPr id="122" name="Google Shape;122;p19"/>
+          <p:cNvPr id="120" name="Google Shape;120;p19"/>
           <p:cNvPicPr preferRelativeResize="0"/>
           <p:nvPr/>
         </p:nvPicPr>
@@ -8564,7 +8486,7 @@
       </p:pic>
       <p:sp>
         <p:nvSpPr>
-          <p:cNvPr id="123" name="Google Shape;123;p19"/>
+          <p:cNvPr id="121" name="Google Shape;121;p19"/>
           <p:cNvSpPr txBox="1"/>
           <p:nvPr/>
         </p:nvSpPr>
@@ -8670,7 +8592,7 @@
       </p:sp>
       <p:pic>
         <p:nvPicPr>
-          <p:cNvPr id="124" name="Google Shape;124;p19" title="panel_b_histograma_gates_ejemplo.jpg"/>
+          <p:cNvPr id="122" name="Google Shape;122;p19" title="panel_b_histograma_gates_ejemplo.jpg"/>
           <p:cNvPicPr preferRelativeResize="0"/>
           <p:nvPr/>
         </p:nvPicPr>
@@ -8709,7 +8631,7 @@
   <p:cSld>
     <p:spTree>
       <p:nvGrpSpPr>
-        <p:cNvPr id="128" name="Shape 128"/>
+        <p:cNvPr id="126" name="Shape 126"/>
         <p:cNvGrpSpPr/>
         <p:nvPr/>
       </p:nvGrpSpPr>
@@ -8723,7 +8645,7 @@
       </p:grpSpPr>
       <p:grpSp>
         <p:nvGrpSpPr>
-          <p:cNvPr id="129" name="Google Shape;129;p20"/>
+          <p:cNvPr id="127" name="Google Shape;127;p20"/>
           <p:cNvGrpSpPr/>
           <p:nvPr/>
         </p:nvGrpSpPr>
@@ -8737,7 +8659,7 @@
         </p:grpSpPr>
         <p:pic>
           <p:nvPicPr>
-            <p:cNvPr id="130" name="Google Shape;130;p20"/>
+            <p:cNvPr id="128" name="Google Shape;128;p20"/>
             <p:cNvPicPr preferRelativeResize="0"/>
             <p:nvPr/>
           </p:nvPicPr>
@@ -8764,7 +8686,7 @@
         </p:pic>
         <p:sp>
           <p:nvSpPr>
-            <p:cNvPr id="131" name="Google Shape;131;p20"/>
+            <p:cNvPr id="129" name="Google Shape;129;p20"/>
             <p:cNvSpPr txBox="1"/>
             <p:nvPr/>
           </p:nvSpPr>
@@ -8816,7 +8738,7 @@
         </p:sp>
         <p:sp>
           <p:nvSpPr>
-            <p:cNvPr id="132" name="Google Shape;132;p20"/>
+            <p:cNvPr id="130" name="Google Shape;130;p20"/>
             <p:cNvSpPr txBox="1"/>
             <p:nvPr/>
           </p:nvSpPr>
@@ -8866,7 +8788,7 @@
         </p:sp>
         <p:sp>
           <p:nvSpPr>
-            <p:cNvPr id="133" name="Google Shape;133;p20"/>
+            <p:cNvPr id="131" name="Google Shape;131;p20"/>
             <p:cNvSpPr txBox="1"/>
             <p:nvPr/>
           </p:nvSpPr>
@@ -8916,7 +8838,7 @@
         </p:sp>
         <p:sp>
           <p:nvSpPr>
-            <p:cNvPr id="134" name="Google Shape;134;p20"/>
+            <p:cNvPr id="132" name="Google Shape;132;p20"/>
             <p:cNvSpPr txBox="1"/>
             <p:nvPr/>
           </p:nvSpPr>
@@ -8966,7 +8888,7 @@
         </p:sp>
         <p:sp>
           <p:nvSpPr>
-            <p:cNvPr id="135" name="Google Shape;135;p20"/>
+            <p:cNvPr id="133" name="Google Shape;133;p20"/>
             <p:cNvSpPr txBox="1"/>
             <p:nvPr/>
           </p:nvSpPr>
@@ -9018,7 +8940,7 @@
         </p:sp>
         <p:sp>
           <p:nvSpPr>
-            <p:cNvPr id="136" name="Google Shape;136;p20"/>
+            <p:cNvPr id="134" name="Google Shape;134;p20"/>
             <p:cNvSpPr txBox="1"/>
             <p:nvPr/>
           </p:nvSpPr>
@@ -9070,7 +8992,7 @@
         </p:sp>
         <p:sp>
           <p:nvSpPr>
-            <p:cNvPr id="137" name="Google Shape;137;p20"/>
+            <p:cNvPr id="135" name="Google Shape;135;p20"/>
             <p:cNvSpPr txBox="1"/>
             <p:nvPr/>
           </p:nvSpPr>
@@ -9128,7 +9050,7 @@
       </p:grpSp>
       <p:sp>
         <p:nvSpPr>
-          <p:cNvPr id="138" name="Google Shape;138;p20"/>
+          <p:cNvPr id="136" name="Google Shape;136;p20"/>
           <p:cNvSpPr txBox="1"/>
           <p:nvPr/>
         </p:nvSpPr>
@@ -9305,7 +9227,7 @@
       </p:sp>
       <p:grpSp>
         <p:nvGrpSpPr>
-          <p:cNvPr id="139" name="Google Shape;139;p20"/>
+          <p:cNvPr id="137" name="Google Shape;137;p20"/>
           <p:cNvGrpSpPr/>
           <p:nvPr/>
         </p:nvGrpSpPr>
@@ -9319,7 +9241,7 @@
         </p:grpSpPr>
         <p:pic>
           <p:nvPicPr>
-            <p:cNvPr id="140" name="Google Shape;140;p20" title="mean_replicates_prefilter.jpg"/>
+            <p:cNvPr id="138" name="Google Shape;138;p20" title="mean_replicates_prefilter.jpg"/>
             <p:cNvPicPr preferRelativeResize="0"/>
             <p:nvPr/>
           </p:nvPicPr>
@@ -9346,7 +9268,7 @@
         </p:pic>
         <p:pic>
           <p:nvPicPr>
-            <p:cNvPr id="141" name="Google Shape;141;p20" title="mean_replicates_prefilter.jpg"/>
+            <p:cNvPr id="139" name="Google Shape;139;p20" title="mean_replicates_prefilter.jpg"/>
             <p:cNvPicPr preferRelativeResize="0"/>
             <p:nvPr/>
           </p:nvPicPr>
@@ -9373,7 +9295,7 @@
         </p:pic>
         <p:pic>
           <p:nvPicPr>
-            <p:cNvPr id="142" name="Google Shape;142;p20" title="mean_replicates_prefilter.jpg"/>
+            <p:cNvPr id="140" name="Google Shape;140;p20" title="mean_replicates_prefilter.jpg"/>
             <p:cNvPicPr preferRelativeResize="0"/>
             <p:nvPr/>
           </p:nvPicPr>
@@ -9401,7 +9323,7 @@
       </p:grpSp>
       <p:pic>
         <p:nvPicPr>
-          <p:cNvPr id="143" name="Google Shape;143;p20" title="mean_replicates_postfilter.jpg"/>
+          <p:cNvPr id="141" name="Google Shape;141;p20" title="mean_replicates_postfilter.jpg"/>
           <p:cNvPicPr preferRelativeResize="0"/>
           <p:nvPr/>
         </p:nvPicPr>
@@ -9429,7 +9351,7 @@
       </p:pic>
       <p:pic>
         <p:nvPicPr>
-          <p:cNvPr id="144" name="Google Shape;144;p20" title="panel_d_var_replicates.jpg"/>
+          <p:cNvPr id="142" name="Google Shape;142;p20" title="panel_d_var_replicates.jpg"/>
           <p:cNvPicPr preferRelativeResize="0"/>
           <p:nvPr/>
         </p:nvPicPr>

--- a/docs/Fig R1.pptx
+++ b/docs/Fig R1.pptx
@@ -1,6 +1,6 @@
 
 <file path=ppt/presentation.xml><?xml version="1.0" encoding="utf-8"?>
-<p:presentation xmlns:a="http://schemas.openxmlformats.org/drawingml/2006/main" xmlns:r="http://schemas.openxmlformats.org/officeDocument/2006/relationships" xmlns:mc="http://schemas.openxmlformats.org/markup-compatibility/2006" xmlns:mv="urn:schemas-microsoft-com:mac:vml" xmlns:p="http://schemas.openxmlformats.org/presentationml/2006/main" xmlns:c="http://schemas.openxmlformats.org/drawingml/2006/chart" xmlns:dgm="http://schemas.openxmlformats.org/drawingml/2006/diagram" xmlns:o="urn:schemas-microsoft-com:office:office" xmlns:v="urn:schemas-microsoft-com:vml" xmlns:pvml="urn:schemas-microsoft-com:office:powerpoint" xmlns:com="http://schemas.openxmlformats.org/drawingml/2006/compatibility" xmlns:p14="http://schemas.microsoft.com/office/powerpoint/2010/main" xmlns:p15="http://schemas.microsoft.com/office/powerpoint/2012/main" xmlns:ahyp="http://schemas.microsoft.com/office/drawing/2018/hyperlinkcolor" autoCompressPictures="0" embedTrueTypeFonts="1" strictFirstAndLastChars="0" saveSubsetFonts="1">
+<p:presentation xmlns:a="http://schemas.openxmlformats.org/drawingml/2006/main" xmlns:r="http://schemas.openxmlformats.org/officeDocument/2006/relationships" xmlns:mc="http://schemas.openxmlformats.org/markup-compatibility/2006" xmlns:mv="urn:schemas-microsoft-com:mac:vml" xmlns:p="http://schemas.openxmlformats.org/presentationml/2006/main" xmlns:c="http://schemas.openxmlformats.org/drawingml/2006/chart" xmlns:dgm="http://schemas.openxmlformats.org/drawingml/2006/diagram" xmlns:o="urn:schemas-microsoft-com:office:office" xmlns:v="urn:schemas-microsoft-com:vml" xmlns:pvml="urn:schemas-microsoft-com:office:powerpoint" xmlns:com="http://schemas.openxmlformats.org/drawingml/2006/compatibility" xmlns:p14="http://schemas.microsoft.com/office/powerpoint/2010/main" xmlns:p15="http://schemas.microsoft.com/office/powerpoint/2012/main" xmlns:ahyp="http://schemas.microsoft.com/office/drawing/2018/hyperlinkcolor" autoCompressPictures="0" strictFirstAndLastChars="0" saveSubsetFonts="1">
   <p:sldMasterIdLst>
     <p:sldMasterId id="2147483659" r:id="rId4"/>
   </p:sldMasterIdLst>
@@ -16,18 +16,10 @@
     <p:sldId id="261" r:id="rId11"/>
     <p:sldId id="262" r:id="rId12"/>
     <p:sldId id="263" r:id="rId13"/>
+    <p:sldId id="264" r:id="rId14"/>
   </p:sldIdLst>
   <p:sldSz cy="5143500" cx="9144000"/>
   <p:notesSz cx="6858000" cy="9144000"/>
-  <p:embeddedFontLst>
-    <p:embeddedFont>
-      <p:font typeface="Roboto"/>
-      <p:regular r:id="rId14"/>
-      <p:bold r:id="rId15"/>
-      <p:italic r:id="rId16"/>
-      <p:boldItalic r:id="rId17"/>
-    </p:embeddedFont>
-  </p:embeddedFontLst>
   <p:defaultTextStyle>
     <a:defPPr lvl="0" marR="0" rtl="0" algn="l">
       <a:lnSpc>
@@ -806,7 +798,7 @@
   <p:cSld>
     <p:spTree>
       <p:nvGrpSpPr>
-        <p:cNvPr id="56" name="Shape 56"/>
+        <p:cNvPr id="55" name="Shape 55"/>
         <p:cNvGrpSpPr/>
         <p:nvPr/>
       </p:nvGrpSpPr>
@@ -820,7 +812,7 @@
       </p:grpSpPr>
       <p:sp>
         <p:nvSpPr>
-          <p:cNvPr id="57" name="Google Shape;57;g3d678bf7346_0_0:notes"/>
+          <p:cNvPr id="56" name="Google Shape;56;g3d678bf7346_0_0:notes"/>
           <p:cNvSpPr/>
           <p:nvPr>
             <p:ph idx="2" type="sldImg"/>
@@ -855,7 +847,7 @@
       </p:sp>
       <p:sp>
         <p:nvSpPr>
-          <p:cNvPr id="58" name="Google Shape;58;g3d678bf7346_0_0:notes"/>
+          <p:cNvPr id="57" name="Google Shape;57;g3d678bf7346_0_0:notes"/>
           <p:cNvSpPr txBox="1"/>
           <p:nvPr>
             <p:ph idx="1" type="body"/>
@@ -905,7 +897,7 @@
   <p:cSld>
     <p:spTree>
       <p:nvGrpSpPr>
-        <p:cNvPr id="70" name="Shape 70"/>
+        <p:cNvPr id="60" name="Shape 60"/>
         <p:cNvGrpSpPr/>
         <p:nvPr/>
       </p:nvGrpSpPr>
@@ -919,7 +911,7 @@
       </p:grpSpPr>
       <p:sp>
         <p:nvSpPr>
-          <p:cNvPr id="71" name="Google Shape;71;g3d678bf7346_0_8:notes"/>
+          <p:cNvPr id="61" name="Google Shape;61;g3d678bf7346_0_8:notes"/>
           <p:cNvSpPr/>
           <p:nvPr>
             <p:ph idx="2" type="sldImg"/>
@@ -954,7 +946,7 @@
       </p:sp>
       <p:sp>
         <p:nvSpPr>
-          <p:cNvPr id="72" name="Google Shape;72;g3d678bf7346_0_8:notes"/>
+          <p:cNvPr id="62" name="Google Shape;62;g3d678bf7346_0_8:notes"/>
           <p:cNvSpPr txBox="1"/>
           <p:nvPr>
             <p:ph idx="1" type="body"/>
@@ -1004,7 +996,7 @@
   <p:cSld>
     <p:spTree>
       <p:nvGrpSpPr>
-        <p:cNvPr id="97" name="Shape 97"/>
+        <p:cNvPr id="67" name="Shape 67"/>
         <p:cNvGrpSpPr/>
         <p:nvPr/>
       </p:nvGrpSpPr>
@@ -1018,7 +1010,7 @@
       </p:grpSpPr>
       <p:sp>
         <p:nvSpPr>
-          <p:cNvPr id="98" name="Google Shape;98;g396169342f1_0_0:notes"/>
+          <p:cNvPr id="68" name="Google Shape;68;h4a488b9c3ec7d190_0_2:notes"/>
           <p:cNvSpPr/>
           <p:nvPr>
             <p:ph idx="2" type="sldImg"/>
@@ -1053,7 +1045,7 @@
       </p:sp>
       <p:sp>
         <p:nvSpPr>
-          <p:cNvPr id="99" name="Google Shape;99;g396169342f1_0_0:notes"/>
+          <p:cNvPr id="69" name="Google Shape;69;h4a488b9c3ec7d190_0_2:notes"/>
           <p:cNvSpPr txBox="1"/>
           <p:nvPr>
             <p:ph idx="1" type="body"/>
@@ -1103,7 +1095,7 @@
   <p:cSld>
     <p:spTree>
       <p:nvGrpSpPr>
-        <p:cNvPr id="103" name="Shape 103"/>
+        <p:cNvPr id="72" name="Shape 72"/>
         <p:cNvGrpSpPr/>
         <p:nvPr/>
       </p:nvGrpSpPr>
@@ -1117,7 +1109,7 @@
       </p:grpSpPr>
       <p:sp>
         <p:nvSpPr>
-          <p:cNvPr id="104" name="Google Shape;104;g3f5e045cd8f_0_8:notes"/>
+          <p:cNvPr id="73" name="Google Shape;73;g396169342f1_0_0:notes"/>
           <p:cNvSpPr/>
           <p:nvPr>
             <p:ph idx="2" type="sldImg"/>
@@ -1152,7 +1144,7 @@
       </p:sp>
       <p:sp>
         <p:nvSpPr>
-          <p:cNvPr id="105" name="Google Shape;105;g3f5e045cd8f_0_8:notes"/>
+          <p:cNvPr id="74" name="Google Shape;74;g396169342f1_0_0:notes"/>
           <p:cNvSpPr txBox="1"/>
           <p:nvPr>
             <p:ph idx="1" type="body"/>
@@ -1202,7 +1194,7 @@
   <p:cSld>
     <p:spTree>
       <p:nvGrpSpPr>
-        <p:cNvPr id="109" name="Shape 109"/>
+        <p:cNvPr id="77" name="Shape 77"/>
         <p:cNvGrpSpPr/>
         <p:nvPr/>
       </p:nvGrpSpPr>
@@ -1216,7 +1208,7 @@
       </p:grpSpPr>
       <p:sp>
         <p:nvSpPr>
-          <p:cNvPr id="110" name="Google Shape;110;g3f5e045cd8f_0_2:notes"/>
+          <p:cNvPr id="78" name="Google Shape;78;g3f5e045cd8f_0_8:notes"/>
           <p:cNvSpPr/>
           <p:nvPr>
             <p:ph idx="2" type="sldImg"/>
@@ -1251,7 +1243,7 @@
       </p:sp>
       <p:sp>
         <p:nvSpPr>
-          <p:cNvPr id="111" name="Google Shape;111;g3f5e045cd8f_0_2:notes"/>
+          <p:cNvPr id="79" name="Google Shape;79;g3f5e045cd8f_0_8:notes"/>
           <p:cNvSpPr txBox="1"/>
           <p:nvPr>
             <p:ph idx="1" type="body"/>
@@ -1301,7 +1293,7 @@
   <p:cSld>
     <p:spTree>
       <p:nvGrpSpPr>
-        <p:cNvPr id="115" name="Shape 115"/>
+        <p:cNvPr id="82" name="Shape 82"/>
         <p:cNvGrpSpPr/>
         <p:nvPr/>
       </p:nvGrpSpPr>
@@ -1315,7 +1307,7 @@
       </p:grpSpPr>
       <p:sp>
         <p:nvSpPr>
-          <p:cNvPr id="116" name="Google Shape;116;g3d678bf7346_0_23:notes"/>
+          <p:cNvPr id="83" name="Google Shape;83;g3f5e045cd8f_0_2:notes"/>
           <p:cNvSpPr/>
           <p:nvPr>
             <p:ph idx="2" type="sldImg"/>
@@ -1350,7 +1342,7 @@
       </p:sp>
       <p:sp>
         <p:nvSpPr>
-          <p:cNvPr id="117" name="Google Shape;117;g3d678bf7346_0_23:notes"/>
+          <p:cNvPr id="84" name="Google Shape;84;g3f5e045cd8f_0_2:notes"/>
           <p:cNvSpPr txBox="1"/>
           <p:nvPr>
             <p:ph idx="1" type="body"/>
@@ -1400,7 +1392,7 @@
   <p:cSld>
     <p:spTree>
       <p:nvGrpSpPr>
-        <p:cNvPr id="123" name="Shape 123"/>
+        <p:cNvPr id="87" name="Shape 87"/>
         <p:cNvGrpSpPr/>
         <p:nvPr/>
       </p:nvGrpSpPr>
@@ -1414,7 +1406,7 @@
       </p:grpSpPr>
       <p:sp>
         <p:nvSpPr>
-          <p:cNvPr id="124" name="Google Shape;124;g3d678bf7346_0_17:notes"/>
+          <p:cNvPr id="88" name="Google Shape;88;g3d678bf7346_0_23:notes"/>
           <p:cNvSpPr/>
           <p:nvPr>
             <p:ph idx="2" type="sldImg"/>
@@ -1449,7 +1441,106 @@
       </p:sp>
       <p:sp>
         <p:nvSpPr>
-          <p:cNvPr id="125" name="Google Shape;125;g3d678bf7346_0_17:notes"/>
+          <p:cNvPr id="89" name="Google Shape;89;g3d678bf7346_0_23:notes"/>
+          <p:cNvSpPr txBox="1"/>
+          <p:nvPr>
+            <p:ph idx="1" type="body"/>
+          </p:nvPr>
+        </p:nvSpPr>
+        <p:spPr>
+          <a:xfrm>
+            <a:off x="685800" y="4343400"/>
+            <a:ext cx="5486400" cy="4114800"/>
+          </a:xfrm>
+          <a:prstGeom prst="rect">
+            <a:avLst/>
+          </a:prstGeom>
+        </p:spPr>
+        <p:txBody>
+          <a:bodyPr anchorCtr="0" anchor="t" bIns="91425" lIns="91425" spcFirstLastPara="1" rIns="91425" wrap="square" tIns="91425">
+            <a:noAutofit/>
+          </a:bodyPr>
+          <a:lstStyle/>
+          <a:p>
+            <a:pPr indent="0" lvl="0" marL="0" rtl="0" algn="l">
+              <a:spcBef>
+                <a:spcPts val="0"/>
+              </a:spcBef>
+              <a:spcAft>
+                <a:spcPts val="0"/>
+              </a:spcAft>
+              <a:buNone/>
+            </a:pPr>
+            <a:r>
+              <a:t/>
+            </a:r>
+            <a:endParaRPr/>
+          </a:p>
+        </p:txBody>
+      </p:sp>
+    </p:spTree>
+  </p:cSld>
+  <p:clrMapOvr>
+    <a:masterClrMapping/>
+  </p:clrMapOvr>
+</p:notes>
+</file>
+
+<file path=ppt/notesSlides/notesSlide9.xml><?xml version="1.0" encoding="utf-8"?>
+<p:notes xmlns:a="http://schemas.openxmlformats.org/drawingml/2006/main" xmlns:r="http://schemas.openxmlformats.org/officeDocument/2006/relationships" xmlns:mc="http://schemas.openxmlformats.org/markup-compatibility/2006" xmlns:mv="urn:schemas-microsoft-com:mac:vml" xmlns:p="http://schemas.openxmlformats.org/presentationml/2006/main" xmlns:c="http://schemas.openxmlformats.org/drawingml/2006/chart" xmlns:dgm="http://schemas.openxmlformats.org/drawingml/2006/diagram" xmlns:o="urn:schemas-microsoft-com:office:office" xmlns:v="urn:schemas-microsoft-com:vml" xmlns:pvml="urn:schemas-microsoft-com:office:powerpoint" xmlns:com="http://schemas.openxmlformats.org/drawingml/2006/compatibility" xmlns:p14="http://schemas.microsoft.com/office/powerpoint/2010/main" xmlns:p15="http://schemas.microsoft.com/office/powerpoint/2012/main" xmlns:ahyp="http://schemas.microsoft.com/office/drawing/2018/hyperlinkcolor" showMasterPhAnim="0" showMasterSp="0">
+  <p:cSld>
+    <p:spTree>
+      <p:nvGrpSpPr>
+        <p:cNvPr id="95" name="Shape 95"/>
+        <p:cNvGrpSpPr/>
+        <p:nvPr/>
+      </p:nvGrpSpPr>
+      <p:grpSpPr>
+        <a:xfrm>
+          <a:off x="0" y="0"/>
+          <a:ext cx="0" cy="0"/>
+          <a:chOff x="0" y="0"/>
+          <a:chExt cx="0" cy="0"/>
+        </a:xfrm>
+      </p:grpSpPr>
+      <p:sp>
+        <p:nvSpPr>
+          <p:cNvPr id="96" name="Google Shape;96;g3d678bf7346_0_17:notes"/>
+          <p:cNvSpPr/>
+          <p:nvPr>
+            <p:ph idx="2" type="sldImg"/>
+          </p:nvPr>
+        </p:nvSpPr>
+        <p:spPr>
+          <a:xfrm>
+            <a:off x="381300" y="685800"/>
+            <a:ext cx="6096000" cy="3429000"/>
+          </a:xfrm>
+          <a:custGeom>
+            <a:rect b="b" l="l" r="r" t="t"/>
+            <a:pathLst>
+              <a:path extrusionOk="0" h="120000" w="120000">
+                <a:moveTo>
+                  <a:pt x="0" y="0"/>
+                </a:moveTo>
+                <a:lnTo>
+                  <a:pt x="120000" y="0"/>
+                </a:lnTo>
+                <a:lnTo>
+                  <a:pt x="120000" y="120000"/>
+                </a:lnTo>
+                <a:lnTo>
+                  <a:pt x="0" y="120000"/>
+                </a:lnTo>
+                <a:close/>
+              </a:path>
+            </a:pathLst>
+          </a:custGeom>
+        </p:spPr>
+      </p:sp>
+      <p:sp>
+        <p:nvSpPr>
+          <p:cNvPr id="97" name="Google Shape;97;g3d678bf7346_0_17:notes"/>
           <p:cNvSpPr txBox="1"/>
           <p:nvPr>
             <p:ph idx="1" type="body"/>
@@ -6160,94 +6251,9 @@
           <a:chExt cx="0" cy="0"/>
         </a:xfrm>
       </p:grpSpPr>
-      <p:sp>
-        <p:nvSpPr>
-          <p:cNvPr id="54" name="Google Shape;54;p13"/>
-          <p:cNvSpPr txBox="1"/>
-          <p:nvPr/>
-        </p:nvSpPr>
-        <p:spPr>
-          <a:xfrm>
-            <a:off x="242725" y="4444225"/>
-            <a:ext cx="8832600" cy="1040400"/>
-          </a:xfrm>
-          <a:prstGeom prst="rect">
-            <a:avLst/>
-          </a:prstGeom>
-          <a:noFill/>
-          <a:ln>
-            <a:noFill/>
-          </a:ln>
-        </p:spPr>
-        <p:txBody>
-          <a:bodyPr anchorCtr="0" anchor="t" bIns="91425" lIns="91425" spcFirstLastPara="1" rIns="91425" wrap="square" tIns="91425">
-            <a:spAutoFit/>
-          </a:bodyPr>
-          <a:lstStyle/>
-          <a:p>
-            <a:pPr indent="0" lvl="0" marL="0" rtl="0" algn="l">
-              <a:lnSpc>
-                <a:spcPct val="115000"/>
-              </a:lnSpc>
-              <a:spcBef>
-                <a:spcPts val="0"/>
-              </a:spcBef>
-              <a:spcAft>
-                <a:spcPts val="0"/>
-              </a:spcAft>
-              <a:buClr>
-                <a:srgbClr val="000000"/>
-              </a:buClr>
-              <a:buSzPts val="1100"/>
-              <a:buFont typeface="Arial"/>
-              <a:buNone/>
-            </a:pPr>
-            <a:r>
-              <a:rPr b="1" lang="es-419" sz="1200">
-                <a:solidFill>
-                  <a:srgbClr val="595959"/>
-                </a:solidFill>
-              </a:rPr>
-              <a:t>Los niveles de ARN del reportero son consistentes con la fluorescencia de EGFP</a:t>
-            </a:r>
-            <a:r>
-              <a:rPr lang="es-419" sz="1200">
-                <a:solidFill>
-                  <a:srgbClr val="595959"/>
-                </a:solidFill>
-              </a:rPr>
-              <a:t>. Cuantificación por RT-qPCR del ARNm de EGFP en cada réplica. Cada punto representa una réplica técnica de la qPCR. </a:t>
-            </a:r>
-            <a:endParaRPr sz="1800">
-              <a:solidFill>
-                <a:srgbClr val="595959"/>
-              </a:solidFill>
-            </a:endParaRPr>
-          </a:p>
-          <a:p>
-            <a:pPr indent="0" lvl="0" marL="0" rtl="0" algn="l">
-              <a:spcBef>
-                <a:spcPts val="1200"/>
-              </a:spcBef>
-              <a:spcAft>
-                <a:spcPts val="0"/>
-              </a:spcAft>
-              <a:buNone/>
-            </a:pPr>
-            <a:r>
-              <a:t/>
-            </a:r>
-            <a:endParaRPr sz="1800">
-              <a:solidFill>
-                <a:srgbClr val="595959"/>
-              </a:solidFill>
-            </a:endParaRPr>
-          </a:p>
-        </p:txBody>
-      </p:sp>
       <p:pic>
         <p:nvPicPr>
-          <p:cNvPr id="55" name="Google Shape;55;p13"/>
+          <p:cNvPr id="54" name="Google Shape;54;p13" title="validacion_rtqpcr_egfp.jpg"/>
           <p:cNvPicPr preferRelativeResize="0"/>
           <p:nvPr/>
         </p:nvPicPr>
@@ -6262,7 +6268,7 @@
         <p:spPr>
           <a:xfrm>
             <a:off x="152400" y="152400"/>
-            <a:ext cx="7473959" cy="4139424"/>
+            <a:ext cx="8602138" cy="4838702"/>
           </a:xfrm>
           <a:prstGeom prst="rect">
             <a:avLst/>
@@ -6286,7 +6292,7 @@
   <p:cSld>
     <p:spTree>
       <p:nvGrpSpPr>
-        <p:cNvPr id="59" name="Shape 59"/>
+        <p:cNvPr id="58" name="Shape 58"/>
         <p:cNvGrpSpPr/>
         <p:nvPr/>
       </p:nvGrpSpPr>
@@ -6298,16 +6304,24 @@
           <a:chExt cx="0" cy="0"/>
         </a:xfrm>
       </p:grpSpPr>
-      <p:sp>
-        <p:nvSpPr>
-          <p:cNvPr id="60" name="Google Shape;60;p14"/>
-          <p:cNvSpPr txBox="1"/>
+      <p:pic>
+        <p:nvPicPr>
+          <p:cNvPr id="59" name="Google Shape;59;p14" title="representatividad_library_venn.png"/>
+          <p:cNvPicPr preferRelativeResize="0"/>
           <p:nvPr/>
-        </p:nvSpPr>
+        </p:nvPicPr>
+        <p:blipFill>
+          <a:blip r:embed="rId3">
+            <a:alphaModFix/>
+          </a:blip>
+          <a:stretch>
+            <a:fillRect/>
+          </a:stretch>
+        </p:blipFill>
         <p:spPr>
           <a:xfrm>
-            <a:off x="3404725" y="936000"/>
-            <a:ext cx="5866500" cy="861900"/>
+            <a:off x="152400" y="152400"/>
+            <a:ext cx="3271624" cy="3271624"/>
           </a:xfrm>
           <a:prstGeom prst="rect">
             <a:avLst/>
@@ -6317,493 +6331,7 @@
             <a:noFill/>
           </a:ln>
         </p:spPr>
-        <p:txBody>
-          <a:bodyPr anchorCtr="0" anchor="t" bIns="91425" lIns="91425" spcFirstLastPara="1" rIns="91425" wrap="square" tIns="91425">
-            <a:spAutoFit/>
-          </a:bodyPr>
-          <a:lstStyle/>
-          <a:p>
-            <a:pPr indent="0" lvl="0" marL="0" rtl="0" algn="l">
-              <a:spcBef>
-                <a:spcPts val="0"/>
-              </a:spcBef>
-              <a:spcAft>
-                <a:spcPts val="0"/>
-              </a:spcAft>
-              <a:buNone/>
-            </a:pPr>
-            <a:r>
-              <a:rPr b="1" lang="es-419" sz="1100">
-                <a:solidFill>
-                  <a:schemeClr val="dk1"/>
-                </a:solidFill>
-              </a:rPr>
-              <a:t>Representación de la </a:t>
-            </a:r>
-            <a:r>
-              <a:rPr b="1" i="1" lang="es-419" sz="1100">
-                <a:solidFill>
-                  <a:schemeClr val="dk1"/>
-                </a:solidFill>
-              </a:rPr>
-              <a:t>library</a:t>
-            </a:r>
-            <a:r>
-              <a:rPr b="1" lang="es-419" sz="1100">
-                <a:solidFill>
-                  <a:schemeClr val="dk1"/>
-                </a:solidFill>
-              </a:rPr>
-              <a:t> en las réplicas de secuenciación.</a:t>
-            </a:r>
-            <a:r>
-              <a:rPr lang="es-419" sz="1100">
-                <a:solidFill>
-                  <a:schemeClr val="dk1"/>
-                </a:solidFill>
-              </a:rPr>
-              <a:t> Diagrama de </a:t>
-            </a:r>
-            <a:r>
-              <a:rPr i="1" lang="es-419" sz="1100">
-                <a:solidFill>
-                  <a:schemeClr val="dk1"/>
-                </a:solidFill>
-              </a:rPr>
-              <a:t>Venn</a:t>
-            </a:r>
-            <a:r>
-              <a:rPr lang="es-419" sz="1100">
-                <a:solidFill>
-                  <a:schemeClr val="dk1"/>
-                </a:solidFill>
-              </a:rPr>
-              <a:t> que muestra el número de secuencias detectadas en cada réplica y su intersección (secuencias presentes en ambas). Se indica también la cantidad de secuencias de la </a:t>
-            </a:r>
-            <a:r>
-              <a:rPr i="1" lang="es-419" sz="1100">
-                <a:solidFill>
-                  <a:schemeClr val="dk1"/>
-                </a:solidFill>
-              </a:rPr>
-              <a:t>library</a:t>
-            </a:r>
-            <a:r>
-              <a:rPr lang="es-419" sz="1100">
-                <a:solidFill>
-                  <a:schemeClr val="dk1"/>
-                </a:solidFill>
-              </a:rPr>
-              <a:t> original que no fueron recuperadas en el proceso. </a:t>
-            </a:r>
-            <a:endParaRPr sz="1200">
-              <a:solidFill>
-                <a:schemeClr val="dk2"/>
-              </a:solidFill>
-            </a:endParaRPr>
-          </a:p>
-        </p:txBody>
-      </p:sp>
-      <p:grpSp>
-        <p:nvGrpSpPr>
-          <p:cNvPr id="61" name="Google Shape;61;p14"/>
-          <p:cNvGrpSpPr/>
-          <p:nvPr/>
-        </p:nvGrpSpPr>
-        <p:grpSpPr>
-          <a:xfrm>
-            <a:off x="86225" y="82225"/>
-            <a:ext cx="3256551" cy="3242825"/>
-            <a:chOff x="86225" y="82225"/>
-            <a:chExt cx="3256551" cy="3242825"/>
-          </a:xfrm>
-        </p:grpSpPr>
-        <p:pic>
-          <p:nvPicPr>
-            <p:cNvPr id="62" name="Google Shape;62;p14"/>
-            <p:cNvPicPr preferRelativeResize="0"/>
-            <p:nvPr/>
-          </p:nvPicPr>
-          <p:blipFill rotWithShape="1">
-            <a:blip r:embed="rId3">
-              <a:alphaModFix/>
-            </a:blip>
-            <a:srcRect b="0" l="744" r="0" t="970"/>
-            <a:stretch/>
-          </p:blipFill>
-          <p:spPr>
-            <a:xfrm>
-              <a:off x="86225" y="82225"/>
-              <a:ext cx="3256551" cy="3242825"/>
-            </a:xfrm>
-            <a:prstGeom prst="rect">
-              <a:avLst/>
-            </a:prstGeom>
-            <a:noFill/>
-            <a:ln>
-              <a:noFill/>
-            </a:ln>
-          </p:spPr>
-        </p:pic>
-        <p:sp>
-          <p:nvSpPr>
-            <p:cNvPr id="63" name="Google Shape;63;p14"/>
-            <p:cNvSpPr txBox="1"/>
-            <p:nvPr/>
-          </p:nvSpPr>
-          <p:spPr>
-            <a:xfrm>
-              <a:off x="1446789" y="374911"/>
-              <a:ext cx="721500" cy="354000"/>
-            </a:xfrm>
-            <a:prstGeom prst="rect">
-              <a:avLst/>
-            </a:prstGeom>
-            <a:solidFill>
-              <a:srgbClr val="EFF6FB"/>
-            </a:solidFill>
-            <a:ln>
-              <a:noFill/>
-            </a:ln>
-          </p:spPr>
-          <p:txBody>
-            <a:bodyPr anchorCtr="0" anchor="t" bIns="91425" lIns="91425" spcFirstLastPara="1" rIns="91425" wrap="square" tIns="91425">
-              <a:spAutoFit/>
-            </a:bodyPr>
-            <a:lstStyle/>
-            <a:p>
-              <a:pPr indent="0" lvl="0" marL="0" rtl="0" algn="l">
-                <a:spcBef>
-                  <a:spcPts val="0"/>
-                </a:spcBef>
-                <a:spcAft>
-                  <a:spcPts val="0"/>
-                </a:spcAft>
-                <a:buNone/>
-              </a:pPr>
-              <a:r>
-                <a:rPr lang="es-419" sz="1100">
-                  <a:solidFill>
-                    <a:schemeClr val="dk2"/>
-                  </a:solidFill>
-                </a:rPr>
-                <a:t>4572</a:t>
-              </a:r>
-              <a:endParaRPr sz="1100">
-                <a:solidFill>
-                  <a:schemeClr val="dk2"/>
-                </a:solidFill>
-              </a:endParaRPr>
-            </a:p>
-          </p:txBody>
-        </p:sp>
-        <p:sp>
-          <p:nvSpPr>
-            <p:cNvPr id="64" name="Google Shape;64;p14"/>
-            <p:cNvSpPr txBox="1"/>
-            <p:nvPr/>
-          </p:nvSpPr>
-          <p:spPr>
-            <a:xfrm>
-              <a:off x="1370694" y="185978"/>
-              <a:ext cx="806100" cy="369300"/>
-            </a:xfrm>
-            <a:prstGeom prst="rect">
-              <a:avLst/>
-            </a:prstGeom>
-            <a:noFill/>
-            <a:ln>
-              <a:noFill/>
-            </a:ln>
-          </p:spPr>
-          <p:txBody>
-            <a:bodyPr anchorCtr="0" anchor="t" bIns="91425" lIns="91425" spcFirstLastPara="1" rIns="91425" wrap="square" tIns="91425">
-              <a:spAutoFit/>
-            </a:bodyPr>
-            <a:lstStyle/>
-            <a:p>
-              <a:pPr indent="0" lvl="0" marL="0" rtl="0" algn="l">
-                <a:spcBef>
-                  <a:spcPts val="0"/>
-                </a:spcBef>
-                <a:spcAft>
-                  <a:spcPts val="0"/>
-                </a:spcAft>
-                <a:buNone/>
-              </a:pPr>
-              <a:r>
-                <a:rPr lang="es-419" sz="1200">
-                  <a:solidFill>
-                    <a:schemeClr val="dk2"/>
-                  </a:solidFill>
-                </a:rPr>
-                <a:t>Library</a:t>
-              </a:r>
-              <a:endParaRPr sz="1200">
-                <a:solidFill>
-                  <a:schemeClr val="dk2"/>
-                </a:solidFill>
-              </a:endParaRPr>
-            </a:p>
-          </p:txBody>
-        </p:sp>
-        <p:sp>
-          <p:nvSpPr>
-            <p:cNvPr id="65" name="Google Shape;65;p14"/>
-            <p:cNvSpPr txBox="1"/>
-            <p:nvPr/>
-          </p:nvSpPr>
-          <p:spPr>
-            <a:xfrm>
-              <a:off x="469151" y="1223250"/>
-              <a:ext cx="901500" cy="369300"/>
-            </a:xfrm>
-            <a:prstGeom prst="rect">
-              <a:avLst/>
-            </a:prstGeom>
-            <a:noFill/>
-            <a:ln>
-              <a:noFill/>
-            </a:ln>
-          </p:spPr>
-          <p:txBody>
-            <a:bodyPr anchorCtr="0" anchor="t" bIns="91425" lIns="91425" spcFirstLastPara="1" rIns="91425" wrap="square" tIns="91425">
-              <a:spAutoFit/>
-            </a:bodyPr>
-            <a:lstStyle/>
-            <a:p>
-              <a:pPr indent="0" lvl="0" marL="0" rtl="0" algn="l">
-                <a:spcBef>
-                  <a:spcPts val="0"/>
-                </a:spcBef>
-                <a:spcAft>
-                  <a:spcPts val="0"/>
-                </a:spcAft>
-                <a:buNone/>
-              </a:pPr>
-              <a:r>
-                <a:rPr lang="es-419" sz="1200">
-                  <a:solidFill>
-                    <a:schemeClr val="dk2"/>
-                  </a:solidFill>
-                </a:rPr>
-                <a:t>Réplica 1 </a:t>
-              </a:r>
-              <a:endParaRPr sz="1200">
-                <a:solidFill>
-                  <a:schemeClr val="dk2"/>
-                </a:solidFill>
-              </a:endParaRPr>
-            </a:p>
-          </p:txBody>
-        </p:sp>
-        <p:sp>
-          <p:nvSpPr>
-            <p:cNvPr id="66" name="Google Shape;66;p14"/>
-            <p:cNvSpPr txBox="1"/>
-            <p:nvPr/>
-          </p:nvSpPr>
-          <p:spPr>
-            <a:xfrm>
-              <a:off x="2182524" y="1223250"/>
-              <a:ext cx="901500" cy="369300"/>
-            </a:xfrm>
-            <a:prstGeom prst="rect">
-              <a:avLst/>
-            </a:prstGeom>
-            <a:noFill/>
-            <a:ln>
-              <a:noFill/>
-            </a:ln>
-          </p:spPr>
-          <p:txBody>
-            <a:bodyPr anchorCtr="0" anchor="t" bIns="91425" lIns="91425" spcFirstLastPara="1" rIns="91425" wrap="square" tIns="91425">
-              <a:spAutoFit/>
-            </a:bodyPr>
-            <a:lstStyle/>
-            <a:p>
-              <a:pPr indent="0" lvl="0" marL="0" rtl="0" algn="l">
-                <a:spcBef>
-                  <a:spcPts val="0"/>
-                </a:spcBef>
-                <a:spcAft>
-                  <a:spcPts val="0"/>
-                </a:spcAft>
-                <a:buNone/>
-              </a:pPr>
-              <a:r>
-                <a:rPr lang="es-419" sz="1200">
-                  <a:solidFill>
-                    <a:schemeClr val="dk2"/>
-                  </a:solidFill>
-                </a:rPr>
-                <a:t>Réplica 2 </a:t>
-              </a:r>
-              <a:endParaRPr sz="1200">
-                <a:solidFill>
-                  <a:schemeClr val="dk2"/>
-                </a:solidFill>
-              </a:endParaRPr>
-            </a:p>
-          </p:txBody>
-        </p:sp>
-        <p:sp>
-          <p:nvSpPr>
-            <p:cNvPr id="67" name="Google Shape;67;p14"/>
-            <p:cNvSpPr txBox="1"/>
-            <p:nvPr/>
-          </p:nvSpPr>
-          <p:spPr>
-            <a:xfrm>
-              <a:off x="649447" y="1510800"/>
-              <a:ext cx="540900" cy="354000"/>
-            </a:xfrm>
-            <a:prstGeom prst="rect">
-              <a:avLst/>
-            </a:prstGeom>
-            <a:solidFill>
-              <a:srgbClr val="BCD9E5"/>
-            </a:solidFill>
-            <a:ln>
-              <a:noFill/>
-            </a:ln>
-          </p:spPr>
-          <p:txBody>
-            <a:bodyPr anchorCtr="0" anchor="t" bIns="91425" lIns="91425" spcFirstLastPara="1" rIns="91425" wrap="square" tIns="91425">
-              <a:spAutoFit/>
-            </a:bodyPr>
-            <a:lstStyle/>
-            <a:p>
-              <a:pPr indent="0" lvl="0" marL="0" rtl="0" algn="l">
-                <a:spcBef>
-                  <a:spcPts val="0"/>
-                </a:spcBef>
-                <a:spcAft>
-                  <a:spcPts val="0"/>
-                </a:spcAft>
-                <a:buNone/>
-              </a:pPr>
-              <a:r>
-                <a:rPr lang="es-419" sz="1100">
-                  <a:solidFill>
-                    <a:schemeClr val="dk2"/>
-                  </a:solidFill>
-                </a:rPr>
-                <a:t>1957</a:t>
-              </a:r>
-              <a:endParaRPr sz="1100">
-                <a:solidFill>
-                  <a:schemeClr val="dk2"/>
-                </a:solidFill>
-              </a:endParaRPr>
-            </a:p>
-          </p:txBody>
-        </p:sp>
-        <p:sp>
-          <p:nvSpPr>
-            <p:cNvPr id="68" name="Google Shape;68;p14"/>
-            <p:cNvSpPr txBox="1"/>
-            <p:nvPr/>
-          </p:nvSpPr>
-          <p:spPr>
-            <a:xfrm>
-              <a:off x="1414623" y="1510788"/>
-              <a:ext cx="645000" cy="354000"/>
-            </a:xfrm>
-            <a:prstGeom prst="rect">
-              <a:avLst/>
-            </a:prstGeom>
-            <a:solidFill>
-              <a:srgbClr val="B3D9DD"/>
-            </a:solidFill>
-            <a:ln>
-              <a:noFill/>
-            </a:ln>
-          </p:spPr>
-          <p:txBody>
-            <a:bodyPr anchorCtr="0" anchor="t" bIns="91425" lIns="91425" spcFirstLastPara="1" rIns="91425" wrap="square" tIns="91425">
-              <a:spAutoFit/>
-            </a:bodyPr>
-            <a:lstStyle/>
-            <a:p>
-              <a:pPr indent="0" lvl="0" marL="0" rtl="0" algn="l">
-                <a:spcBef>
-                  <a:spcPts val="0"/>
-                </a:spcBef>
-                <a:spcAft>
-                  <a:spcPts val="0"/>
-                </a:spcAft>
-                <a:buNone/>
-              </a:pPr>
-              <a:r>
-                <a:rPr lang="es-419" sz="1100">
-                  <a:solidFill>
-                    <a:schemeClr val="dk2"/>
-                  </a:solidFill>
-                </a:rPr>
-                <a:t>16040</a:t>
-              </a:r>
-              <a:endParaRPr sz="1100">
-                <a:solidFill>
-                  <a:schemeClr val="dk2"/>
-                </a:solidFill>
-              </a:endParaRPr>
-            </a:p>
-          </p:txBody>
-        </p:sp>
-        <p:sp>
-          <p:nvSpPr>
-            <p:cNvPr id="69" name="Google Shape;69;p14"/>
-            <p:cNvSpPr txBox="1"/>
-            <p:nvPr/>
-          </p:nvSpPr>
-          <p:spPr>
-            <a:xfrm>
-              <a:off x="2355862" y="1510788"/>
-              <a:ext cx="645000" cy="354000"/>
-            </a:xfrm>
-            <a:prstGeom prst="rect">
-              <a:avLst/>
-            </a:prstGeom>
-            <a:solidFill>
-              <a:srgbClr val="CDE8E8"/>
-            </a:solidFill>
-            <a:ln>
-              <a:noFill/>
-            </a:ln>
-          </p:spPr>
-          <p:txBody>
-            <a:bodyPr anchorCtr="0" anchor="t" bIns="91425" lIns="91425" spcFirstLastPara="1" rIns="91425" wrap="square" tIns="91425">
-              <a:spAutoFit/>
-            </a:bodyPr>
-            <a:lstStyle/>
-            <a:p>
-              <a:pPr indent="0" lvl="0" marL="0" rtl="0" algn="l">
-                <a:spcBef>
-                  <a:spcPts val="0"/>
-                </a:spcBef>
-                <a:spcAft>
-                  <a:spcPts val="0"/>
-                </a:spcAft>
-                <a:buNone/>
-              </a:pPr>
-              <a:r>
-                <a:rPr lang="es-419" sz="1100">
-                  <a:solidFill>
-                    <a:schemeClr val="dk2"/>
-                  </a:solidFill>
-                </a:rPr>
-                <a:t>1342</a:t>
-              </a:r>
-              <a:endParaRPr sz="1100">
-                <a:solidFill>
-                  <a:schemeClr val="dk2"/>
-                </a:solidFill>
-              </a:endParaRPr>
-            </a:p>
-          </p:txBody>
-        </p:sp>
-      </p:grpSp>
+      </p:pic>
     </p:spTree>
   </p:cSld>
   <p:clrMapOvr>
@@ -6817,7 +6345,7 @@
   <p:cSld>
     <p:spTree>
       <p:nvGrpSpPr>
-        <p:cNvPr id="73" name="Shape 73"/>
+        <p:cNvPr id="63" name="Shape 63"/>
         <p:cNvGrpSpPr/>
         <p:nvPr/>
       </p:nvGrpSpPr>
@@ -6829,934 +6357,14 @@
           <a:chExt cx="0" cy="0"/>
         </a:xfrm>
       </p:grpSpPr>
-      <p:sp>
-        <p:nvSpPr>
-          <p:cNvPr id="74" name="Google Shape;74;p15"/>
-          <p:cNvSpPr txBox="1"/>
-          <p:nvPr/>
-        </p:nvSpPr>
-        <p:spPr>
-          <a:xfrm>
-            <a:off x="0" y="2505952"/>
-            <a:ext cx="4275600" cy="1133100"/>
-          </a:xfrm>
-          <a:prstGeom prst="rect">
-            <a:avLst/>
-          </a:prstGeom>
-          <a:noFill/>
-          <a:ln>
-            <a:noFill/>
-          </a:ln>
-        </p:spPr>
-        <p:txBody>
-          <a:bodyPr anchorCtr="0" anchor="t" bIns="66625" lIns="66625" spcFirstLastPara="1" rIns="66625" wrap="square" tIns="66625">
-            <a:spAutoFit/>
-          </a:bodyPr>
-          <a:lstStyle/>
-          <a:p>
-            <a:pPr indent="0" lvl="0" marL="0" rtl="0" algn="l">
-              <a:spcBef>
-                <a:spcPts val="0"/>
-              </a:spcBef>
-              <a:spcAft>
-                <a:spcPts val="0"/>
-              </a:spcAft>
-              <a:buNone/>
-            </a:pPr>
-            <a:r>
-              <a:rPr b="1" lang="es-419" sz="875">
-                <a:solidFill>
-                  <a:schemeClr val="dk2"/>
-                </a:solidFill>
-              </a:rPr>
-              <a:t>Análisis de sesgos sistemáticos en la representatividad de la library.</a:t>
-            </a:r>
-            <a:r>
-              <a:rPr lang="es-419" sz="875">
-                <a:solidFill>
-                  <a:schemeClr val="dk2"/>
-                </a:solidFill>
-              </a:rPr>
-              <a:t> A) </a:t>
-            </a:r>
-            <a:r>
-              <a:rPr lang="es-419" sz="802">
-                <a:solidFill>
-                  <a:schemeClr val="dk1"/>
-                </a:solidFill>
-              </a:rPr>
-              <a:t>Diagrama de </a:t>
-            </a:r>
-            <a:r>
-              <a:rPr i="1" lang="es-419" sz="802">
-                <a:solidFill>
-                  <a:schemeClr val="dk1"/>
-                </a:solidFill>
-              </a:rPr>
-              <a:t>Venn</a:t>
-            </a:r>
-            <a:r>
-              <a:rPr lang="es-419" sz="802">
-                <a:solidFill>
-                  <a:schemeClr val="dk1"/>
-                </a:solidFill>
-              </a:rPr>
-              <a:t> indicando el número de secuencias detectadas en la secuenciación de células integradas con el reportero para el proyecto de splicing (previo a cualquier selección por expresión), en comparación con la secuenciación del proyecto actual, en al menos una réplica. B) Gráfico de violin representando el contenido de GC de los promotores detectados y en los no detectados durante el presente ensayo reportero. C) Distribución del contenido del contenido de GC de las lecturas obtenidas, en ambas réplicas.</a:t>
-            </a:r>
-            <a:endParaRPr sz="875">
-              <a:solidFill>
-                <a:schemeClr val="dk2"/>
-              </a:solidFill>
-            </a:endParaRPr>
-          </a:p>
-        </p:txBody>
-      </p:sp>
-      <p:grpSp>
-        <p:nvGrpSpPr>
-          <p:cNvPr id="75" name="Google Shape;75;p15"/>
-          <p:cNvGrpSpPr/>
-          <p:nvPr/>
-        </p:nvGrpSpPr>
-        <p:grpSpPr>
-          <a:xfrm>
-            <a:off x="62841" y="82223"/>
-            <a:ext cx="2373374" cy="2363371"/>
-            <a:chOff x="86225" y="82225"/>
-            <a:chExt cx="3256551" cy="3242825"/>
-          </a:xfrm>
-        </p:grpSpPr>
-        <p:pic>
-          <p:nvPicPr>
-            <p:cNvPr id="76" name="Google Shape;76;p15"/>
-            <p:cNvPicPr preferRelativeResize="0"/>
-            <p:nvPr/>
-          </p:nvPicPr>
-          <p:blipFill rotWithShape="1">
-            <a:blip r:embed="rId3">
-              <a:alphaModFix/>
-            </a:blip>
-            <a:srcRect b="0" l="744" r="0" t="970"/>
-            <a:stretch/>
-          </p:blipFill>
-          <p:spPr>
-            <a:xfrm>
-              <a:off x="86225" y="82225"/>
-              <a:ext cx="3256551" cy="3242825"/>
-            </a:xfrm>
-            <a:prstGeom prst="rect">
-              <a:avLst/>
-            </a:prstGeom>
-            <a:noFill/>
-            <a:ln>
-              <a:noFill/>
-            </a:ln>
-          </p:spPr>
-        </p:pic>
-        <p:sp>
-          <p:nvSpPr>
-            <p:cNvPr id="77" name="Google Shape;77;p15"/>
-            <p:cNvSpPr txBox="1"/>
-            <p:nvPr/>
-          </p:nvSpPr>
-          <p:spPr>
-            <a:xfrm>
-              <a:off x="1446789" y="374911"/>
-              <a:ext cx="721500" cy="354000"/>
-            </a:xfrm>
-            <a:prstGeom prst="rect">
-              <a:avLst/>
-            </a:prstGeom>
-            <a:solidFill>
-              <a:srgbClr val="EFF6FB"/>
-            </a:solidFill>
-            <a:ln>
-              <a:noFill/>
-            </a:ln>
-          </p:spPr>
-          <p:txBody>
-            <a:bodyPr anchorCtr="0" anchor="t" bIns="66625" lIns="66625" spcFirstLastPara="1" rIns="66625" wrap="square" tIns="66625">
-              <a:spAutoFit/>
-            </a:bodyPr>
-            <a:lstStyle/>
-            <a:p>
-              <a:pPr indent="0" lvl="0" marL="0" rtl="0" algn="l">
-                <a:spcBef>
-                  <a:spcPts val="0"/>
-                </a:spcBef>
-                <a:spcAft>
-                  <a:spcPts val="0"/>
-                </a:spcAft>
-                <a:buNone/>
-              </a:pPr>
-              <a:r>
-                <a:rPr lang="es-419" sz="802">
-                  <a:solidFill>
-                    <a:schemeClr val="dk2"/>
-                  </a:solidFill>
-                </a:rPr>
-                <a:t>2012</a:t>
-              </a:r>
-              <a:endParaRPr sz="802">
-                <a:solidFill>
-                  <a:schemeClr val="dk2"/>
-                </a:solidFill>
-              </a:endParaRPr>
-            </a:p>
-          </p:txBody>
-        </p:sp>
-        <p:sp>
-          <p:nvSpPr>
-            <p:cNvPr id="78" name="Google Shape;78;p15"/>
-            <p:cNvSpPr txBox="1"/>
-            <p:nvPr/>
-          </p:nvSpPr>
-          <p:spPr>
-            <a:xfrm>
-              <a:off x="1370694" y="185978"/>
-              <a:ext cx="806100" cy="369300"/>
-            </a:xfrm>
-            <a:prstGeom prst="rect">
-              <a:avLst/>
-            </a:prstGeom>
-            <a:noFill/>
-            <a:ln>
-              <a:noFill/>
-            </a:ln>
-          </p:spPr>
-          <p:txBody>
-            <a:bodyPr anchorCtr="0" anchor="t" bIns="66625" lIns="66625" spcFirstLastPara="1" rIns="66625" wrap="square" tIns="66625">
-              <a:spAutoFit/>
-            </a:bodyPr>
-            <a:lstStyle/>
-            <a:p>
-              <a:pPr indent="0" lvl="0" marL="0" rtl="0" algn="l">
-                <a:spcBef>
-                  <a:spcPts val="0"/>
-                </a:spcBef>
-                <a:spcAft>
-                  <a:spcPts val="0"/>
-                </a:spcAft>
-                <a:buNone/>
-              </a:pPr>
-              <a:r>
-                <a:rPr lang="es-419" sz="875">
-                  <a:solidFill>
-                    <a:schemeClr val="dk2"/>
-                  </a:solidFill>
-                </a:rPr>
-                <a:t>Library</a:t>
-              </a:r>
-              <a:endParaRPr sz="875">
-                <a:solidFill>
-                  <a:schemeClr val="dk2"/>
-                </a:solidFill>
-              </a:endParaRPr>
-            </a:p>
-          </p:txBody>
-        </p:sp>
-        <p:sp>
-          <p:nvSpPr>
-            <p:cNvPr id="79" name="Google Shape;79;p15"/>
-            <p:cNvSpPr txBox="1"/>
-            <p:nvPr/>
-          </p:nvSpPr>
-          <p:spPr>
-            <a:xfrm>
-              <a:off x="561071" y="1510800"/>
-              <a:ext cx="540900" cy="354000"/>
-            </a:xfrm>
-            <a:prstGeom prst="rect">
-              <a:avLst/>
-            </a:prstGeom>
-            <a:solidFill>
-              <a:srgbClr val="BCD9E5"/>
-            </a:solidFill>
-            <a:ln>
-              <a:noFill/>
-            </a:ln>
-          </p:spPr>
-          <p:txBody>
-            <a:bodyPr anchorCtr="0" anchor="t" bIns="66625" lIns="66625" spcFirstLastPara="1" rIns="66625" wrap="square" tIns="66625">
-              <a:spAutoFit/>
-            </a:bodyPr>
-            <a:lstStyle/>
-            <a:p>
-              <a:pPr indent="0" lvl="0" marL="0" rtl="0" algn="l">
-                <a:spcBef>
-                  <a:spcPts val="0"/>
-                </a:spcBef>
-                <a:spcAft>
-                  <a:spcPts val="0"/>
-                </a:spcAft>
-                <a:buNone/>
-              </a:pPr>
-              <a:r>
-                <a:rPr lang="es-419" sz="802">
-                  <a:solidFill>
-                    <a:schemeClr val="dk2"/>
-                  </a:solidFill>
-                </a:rPr>
-                <a:t>1047</a:t>
-              </a:r>
-              <a:endParaRPr sz="802">
-                <a:solidFill>
-                  <a:schemeClr val="dk2"/>
-                </a:solidFill>
-              </a:endParaRPr>
-            </a:p>
-          </p:txBody>
-        </p:sp>
-        <p:sp>
-          <p:nvSpPr>
-            <p:cNvPr id="80" name="Google Shape;80;p15"/>
-            <p:cNvSpPr txBox="1"/>
-            <p:nvPr/>
-          </p:nvSpPr>
-          <p:spPr>
-            <a:xfrm>
-              <a:off x="1414623" y="1510788"/>
-              <a:ext cx="645000" cy="354000"/>
-            </a:xfrm>
-            <a:prstGeom prst="rect">
-              <a:avLst/>
-            </a:prstGeom>
-            <a:solidFill>
-              <a:srgbClr val="B3D9DD"/>
-            </a:solidFill>
-            <a:ln>
-              <a:noFill/>
-            </a:ln>
-          </p:spPr>
-          <p:txBody>
-            <a:bodyPr anchorCtr="0" anchor="t" bIns="66625" lIns="66625" spcFirstLastPara="1" rIns="66625" wrap="square" tIns="66625">
-              <a:spAutoFit/>
-            </a:bodyPr>
-            <a:lstStyle/>
-            <a:p>
-              <a:pPr indent="0" lvl="0" marL="0" rtl="0" algn="l">
-                <a:spcBef>
-                  <a:spcPts val="0"/>
-                </a:spcBef>
-                <a:spcAft>
-                  <a:spcPts val="0"/>
-                </a:spcAft>
-                <a:buNone/>
-              </a:pPr>
-              <a:r>
-                <a:rPr lang="es-419" sz="802">
-                  <a:solidFill>
-                    <a:schemeClr val="dk2"/>
-                  </a:solidFill>
-                </a:rPr>
-                <a:t>18292</a:t>
-              </a:r>
-              <a:endParaRPr sz="802">
-                <a:solidFill>
-                  <a:schemeClr val="dk2"/>
-                </a:solidFill>
-              </a:endParaRPr>
-            </a:p>
-          </p:txBody>
-        </p:sp>
-        <p:sp>
-          <p:nvSpPr>
-            <p:cNvPr id="81" name="Google Shape;81;p15"/>
-            <p:cNvSpPr txBox="1"/>
-            <p:nvPr/>
-          </p:nvSpPr>
-          <p:spPr>
-            <a:xfrm>
-              <a:off x="2326403" y="1510788"/>
-              <a:ext cx="645000" cy="354000"/>
-            </a:xfrm>
-            <a:prstGeom prst="rect">
-              <a:avLst/>
-            </a:prstGeom>
-            <a:solidFill>
-              <a:srgbClr val="CDE8E8"/>
-            </a:solidFill>
-            <a:ln>
-              <a:noFill/>
-            </a:ln>
-          </p:spPr>
-          <p:txBody>
-            <a:bodyPr anchorCtr="0" anchor="t" bIns="66625" lIns="66625" spcFirstLastPara="1" rIns="66625" wrap="square" tIns="66625">
-              <a:spAutoFit/>
-            </a:bodyPr>
-            <a:lstStyle/>
-            <a:p>
-              <a:pPr indent="0" lvl="0" marL="0" rtl="0" algn="l">
-                <a:spcBef>
-                  <a:spcPts val="0"/>
-                </a:spcBef>
-                <a:spcAft>
-                  <a:spcPts val="0"/>
-                </a:spcAft>
-                <a:buNone/>
-              </a:pPr>
-              <a:r>
-                <a:rPr lang="es-419" sz="802">
-                  <a:solidFill>
-                    <a:schemeClr val="dk2"/>
-                  </a:solidFill>
-                </a:rPr>
-                <a:t>2560</a:t>
-              </a:r>
-              <a:endParaRPr sz="802">
-                <a:solidFill>
-                  <a:schemeClr val="dk2"/>
-                </a:solidFill>
-              </a:endParaRPr>
-            </a:p>
-          </p:txBody>
-        </p:sp>
-        <p:sp>
-          <p:nvSpPr>
-            <p:cNvPr id="82" name="Google Shape;82;p15"/>
-            <p:cNvSpPr txBox="1"/>
-            <p:nvPr/>
-          </p:nvSpPr>
-          <p:spPr>
-            <a:xfrm>
-              <a:off x="247452" y="1107025"/>
-              <a:ext cx="1150200" cy="554100"/>
-            </a:xfrm>
-            <a:prstGeom prst="rect">
-              <a:avLst/>
-            </a:prstGeom>
-            <a:noFill/>
-            <a:ln>
-              <a:noFill/>
-            </a:ln>
-          </p:spPr>
-          <p:txBody>
-            <a:bodyPr anchorCtr="0" anchor="t" bIns="66625" lIns="66625" spcFirstLastPara="1" rIns="66625" wrap="square" tIns="66625">
-              <a:spAutoFit/>
-            </a:bodyPr>
-            <a:lstStyle/>
-            <a:p>
-              <a:pPr indent="0" lvl="0" marL="0" rtl="0" algn="ctr">
-                <a:spcBef>
-                  <a:spcPts val="0"/>
-                </a:spcBef>
-                <a:spcAft>
-                  <a:spcPts val="0"/>
-                </a:spcAft>
-                <a:buNone/>
-              </a:pPr>
-              <a:r>
-                <a:rPr lang="es-419" sz="875">
-                  <a:solidFill>
-                    <a:schemeClr val="dk2"/>
-                  </a:solidFill>
-                </a:rPr>
-                <a:t>MPRA </a:t>
-              </a:r>
-              <a:r>
-                <a:rPr lang="es-419" sz="875">
-                  <a:solidFill>
-                    <a:schemeClr val="dk2"/>
-                  </a:solidFill>
-                </a:rPr>
-                <a:t>transcripción</a:t>
-              </a:r>
-              <a:endParaRPr sz="875">
-                <a:solidFill>
-                  <a:schemeClr val="dk2"/>
-                </a:solidFill>
-              </a:endParaRPr>
-            </a:p>
-          </p:txBody>
-        </p:sp>
-        <p:sp>
-          <p:nvSpPr>
-            <p:cNvPr id="83" name="Google Shape;83;p15"/>
-            <p:cNvSpPr txBox="1"/>
-            <p:nvPr/>
-          </p:nvSpPr>
-          <p:spPr>
-            <a:xfrm>
-              <a:off x="2063844" y="1107021"/>
-              <a:ext cx="1071900" cy="554100"/>
-            </a:xfrm>
-            <a:prstGeom prst="rect">
-              <a:avLst/>
-            </a:prstGeom>
-            <a:noFill/>
-            <a:ln>
-              <a:noFill/>
-            </a:ln>
-          </p:spPr>
-          <p:txBody>
-            <a:bodyPr anchorCtr="0" anchor="t" bIns="66625" lIns="66625" spcFirstLastPara="1" rIns="66625" wrap="square" tIns="66625">
-              <a:spAutoFit/>
-            </a:bodyPr>
-            <a:lstStyle/>
-            <a:p>
-              <a:pPr indent="0" lvl="0" marL="0" rtl="0" algn="ctr">
-                <a:spcBef>
-                  <a:spcPts val="0"/>
-                </a:spcBef>
-                <a:spcAft>
-                  <a:spcPts val="0"/>
-                </a:spcAft>
-                <a:buNone/>
-              </a:pPr>
-              <a:r>
-                <a:rPr lang="es-419" sz="875">
-                  <a:solidFill>
-                    <a:schemeClr val="dk2"/>
-                  </a:solidFill>
-                </a:rPr>
-                <a:t>MPRA splicing</a:t>
-              </a:r>
-              <a:endParaRPr sz="875">
-                <a:solidFill>
-                  <a:schemeClr val="dk2"/>
-                </a:solidFill>
-              </a:endParaRPr>
-            </a:p>
-          </p:txBody>
-        </p:sp>
-      </p:grpSp>
-      <p:grpSp>
-        <p:nvGrpSpPr>
-          <p:cNvPr id="84" name="Google Shape;84;p15"/>
-          <p:cNvGrpSpPr/>
-          <p:nvPr/>
-        </p:nvGrpSpPr>
-        <p:grpSpPr>
-          <a:xfrm>
-            <a:off x="4013097" y="216164"/>
-            <a:ext cx="2600964" cy="1913895"/>
-            <a:chOff x="5506445" y="266008"/>
-            <a:chExt cx="3568830" cy="2626092"/>
-          </a:xfrm>
-        </p:grpSpPr>
-        <p:grpSp>
-          <p:nvGrpSpPr>
-            <p:cNvPr id="85" name="Google Shape;85;p15"/>
-            <p:cNvGrpSpPr/>
-            <p:nvPr/>
-          </p:nvGrpSpPr>
-          <p:grpSpPr>
-            <a:xfrm>
-              <a:off x="5506445" y="266008"/>
-              <a:ext cx="3568830" cy="2626092"/>
-              <a:chOff x="5506445" y="266008"/>
-              <a:chExt cx="3568830" cy="2626092"/>
-            </a:xfrm>
-          </p:grpSpPr>
-          <p:pic>
-            <p:nvPicPr>
-              <p:cNvPr id="86" name="Google Shape;86;p15" title="gc_bias_bars.jpg"/>
-              <p:cNvPicPr preferRelativeResize="0"/>
-              <p:nvPr/>
-            </p:nvPicPr>
-            <p:blipFill>
-              <a:blip r:embed="rId4">
-                <a:alphaModFix/>
-              </a:blip>
-              <a:stretch>
-                <a:fillRect/>
-              </a:stretch>
-            </p:blipFill>
-            <p:spPr>
-              <a:xfrm>
-                <a:off x="5506445" y="266008"/>
-                <a:ext cx="3501476" cy="2626092"/>
-              </a:xfrm>
-              <a:prstGeom prst="rect">
-                <a:avLst/>
-              </a:prstGeom>
-              <a:noFill/>
-              <a:ln>
-                <a:noFill/>
-              </a:ln>
-            </p:spPr>
-          </p:pic>
-          <p:sp>
-            <p:nvSpPr>
-              <p:cNvPr id="87" name="Google Shape;87;p15"/>
-              <p:cNvSpPr txBox="1"/>
-              <p:nvPr/>
-            </p:nvSpPr>
-            <p:spPr>
-              <a:xfrm>
-                <a:off x="7554572" y="577079"/>
-                <a:ext cx="1264500" cy="323100"/>
-              </a:xfrm>
-              <a:prstGeom prst="rect">
-                <a:avLst/>
-              </a:prstGeom>
-              <a:noFill/>
-              <a:ln>
-                <a:noFill/>
-              </a:ln>
-            </p:spPr>
-            <p:txBody>
-              <a:bodyPr anchorCtr="0" anchor="t" bIns="66625" lIns="66625" spcFirstLastPara="1" rIns="66625" wrap="square" tIns="66625">
-                <a:spAutoFit/>
-              </a:bodyPr>
-              <a:lstStyle/>
-              <a:p>
-                <a:pPr indent="0" lvl="0" marL="0" rtl="0" algn="l">
-                  <a:spcBef>
-                    <a:spcPts val="0"/>
-                  </a:spcBef>
-                  <a:spcAft>
-                    <a:spcPts val="0"/>
-                  </a:spcAft>
-                  <a:buNone/>
-                </a:pPr>
-                <a:r>
-                  <a:rPr lang="es-419" sz="656">
-                    <a:solidFill>
-                      <a:schemeClr val="dk2"/>
-                    </a:solidFill>
-                  </a:rPr>
-                  <a:t>Distribución uniforme</a:t>
-                </a:r>
-                <a:endParaRPr sz="656">
-                  <a:solidFill>
-                    <a:schemeClr val="dk2"/>
-                  </a:solidFill>
-                </a:endParaRPr>
-              </a:p>
-            </p:txBody>
-          </p:sp>
-          <p:sp>
-            <p:nvSpPr>
-              <p:cNvPr id="88" name="Google Shape;88;p15"/>
-              <p:cNvSpPr txBox="1"/>
-              <p:nvPr/>
-            </p:nvSpPr>
-            <p:spPr>
-              <a:xfrm>
-                <a:off x="7554576" y="727896"/>
-                <a:ext cx="1520700" cy="323100"/>
-              </a:xfrm>
-              <a:prstGeom prst="rect">
-                <a:avLst/>
-              </a:prstGeom>
-              <a:noFill/>
-              <a:ln>
-                <a:noFill/>
-              </a:ln>
-            </p:spPr>
-            <p:txBody>
-              <a:bodyPr anchorCtr="0" anchor="t" bIns="66625" lIns="66625" spcFirstLastPara="1" rIns="66625" wrap="square" tIns="66625">
-                <a:spAutoFit/>
-              </a:bodyPr>
-              <a:lstStyle/>
-              <a:p>
-                <a:pPr indent="0" lvl="0" marL="0" rtl="0" algn="l">
-                  <a:spcBef>
-                    <a:spcPts val="0"/>
-                  </a:spcBef>
-                  <a:spcAft>
-                    <a:spcPts val="0"/>
-                  </a:spcAft>
-                  <a:buNone/>
-                </a:pPr>
-                <a:r>
-                  <a:rPr lang="es-419" sz="656">
-                    <a:solidFill>
-                      <a:schemeClr val="dk2"/>
-                    </a:solidFill>
-                  </a:rPr>
-                  <a:t>Distribución observada</a:t>
-                </a:r>
-                <a:endParaRPr sz="656">
-                  <a:solidFill>
-                    <a:schemeClr val="dk2"/>
-                  </a:solidFill>
-                </a:endParaRPr>
-              </a:p>
-            </p:txBody>
-          </p:sp>
-        </p:grpSp>
-        <p:sp>
-          <p:nvSpPr>
-            <p:cNvPr id="89" name="Google Shape;89;p15"/>
-            <p:cNvSpPr/>
-            <p:nvPr/>
-          </p:nvSpPr>
-          <p:spPr>
-            <a:xfrm>
-              <a:off x="7504925" y="679871"/>
-              <a:ext cx="101700" cy="101700"/>
-            </a:xfrm>
-            <a:prstGeom prst="rect">
-              <a:avLst/>
-            </a:prstGeom>
-            <a:solidFill>
-              <a:srgbClr val="ACDAD6"/>
-            </a:solidFill>
-            <a:ln cap="flat" cmpd="sng" w="6950">
-              <a:solidFill>
-                <a:schemeClr val="dk2"/>
-              </a:solidFill>
-              <a:prstDash val="solid"/>
-              <a:round/>
-              <a:headEnd len="sm" w="sm" type="none"/>
-              <a:tailEnd len="sm" w="sm" type="none"/>
-            </a:ln>
-          </p:spPr>
-          <p:txBody>
-            <a:bodyPr anchorCtr="0" anchor="ctr" bIns="66625" lIns="66625" spcFirstLastPara="1" rIns="66625" wrap="square" tIns="66625">
-              <a:noAutofit/>
-            </a:bodyPr>
-            <a:lstStyle/>
-            <a:p>
-              <a:pPr indent="0" lvl="0" marL="0" rtl="0" algn="ctr">
-                <a:spcBef>
-                  <a:spcPts val="0"/>
-                </a:spcBef>
-                <a:spcAft>
-                  <a:spcPts val="0"/>
-                </a:spcAft>
-                <a:buNone/>
-              </a:pPr>
-              <a:r>
-                <a:t/>
-              </a:r>
-              <a:endParaRPr sz="1020"/>
-            </a:p>
-          </p:txBody>
-        </p:sp>
-        <p:sp>
-          <p:nvSpPr>
-            <p:cNvPr id="90" name="Google Shape;90;p15"/>
-            <p:cNvSpPr/>
-            <p:nvPr/>
-          </p:nvSpPr>
-          <p:spPr>
-            <a:xfrm>
-              <a:off x="7504925" y="832271"/>
-              <a:ext cx="101700" cy="101700"/>
-            </a:xfrm>
-            <a:prstGeom prst="rect">
-              <a:avLst/>
-            </a:prstGeom>
-            <a:solidFill>
-              <a:srgbClr val="98C5D5"/>
-            </a:solidFill>
-            <a:ln cap="flat" cmpd="sng" w="6950">
-              <a:solidFill>
-                <a:schemeClr val="dk2"/>
-              </a:solidFill>
-              <a:prstDash val="solid"/>
-              <a:round/>
-              <a:headEnd len="sm" w="sm" type="none"/>
-              <a:tailEnd len="sm" w="sm" type="none"/>
-            </a:ln>
-          </p:spPr>
-          <p:txBody>
-            <a:bodyPr anchorCtr="0" anchor="ctr" bIns="66625" lIns="66625" spcFirstLastPara="1" rIns="66625" wrap="square" tIns="66625">
-              <a:noAutofit/>
-            </a:bodyPr>
-            <a:lstStyle/>
-            <a:p>
-              <a:pPr indent="0" lvl="0" marL="0" rtl="0" algn="ctr">
-                <a:spcBef>
-                  <a:spcPts val="0"/>
-                </a:spcBef>
-                <a:spcAft>
-                  <a:spcPts val="0"/>
-                </a:spcAft>
-                <a:buNone/>
-              </a:pPr>
-              <a:r>
-                <a:t/>
-              </a:r>
-              <a:endParaRPr sz="1020"/>
-            </a:p>
-          </p:txBody>
-        </p:sp>
-      </p:grpSp>
-      <p:grpSp>
-        <p:nvGrpSpPr>
-          <p:cNvPr id="91" name="Google Shape;91;p15"/>
-          <p:cNvGrpSpPr/>
-          <p:nvPr/>
-        </p:nvGrpSpPr>
-        <p:grpSpPr>
-          <a:xfrm>
-            <a:off x="2303549" y="141569"/>
-            <a:ext cx="1687746" cy="2175453"/>
-            <a:chOff x="3160742" y="163655"/>
-            <a:chExt cx="2315787" cy="2984979"/>
-          </a:xfrm>
-        </p:grpSpPr>
-        <p:pic>
-          <p:nvPicPr>
-            <p:cNvPr id="92" name="Google Shape;92;p15" title="gc_bias_violin.jpg"/>
-            <p:cNvPicPr preferRelativeResize="0"/>
-            <p:nvPr/>
-          </p:nvPicPr>
-          <p:blipFill rotWithShape="1">
-            <a:blip r:embed="rId5">
-              <a:alphaModFix/>
-            </a:blip>
-            <a:srcRect b="11708" l="0" r="0" t="0"/>
-            <a:stretch/>
-          </p:blipFill>
-          <p:spPr>
-            <a:xfrm>
-              <a:off x="3438900" y="163655"/>
-              <a:ext cx="1858876" cy="2461777"/>
-            </a:xfrm>
-            <a:prstGeom prst="rect">
-              <a:avLst/>
-            </a:prstGeom>
-            <a:noFill/>
-            <a:ln>
-              <a:noFill/>
-            </a:ln>
-          </p:spPr>
-        </p:pic>
-        <p:sp>
-          <p:nvSpPr>
-            <p:cNvPr id="93" name="Google Shape;93;p15"/>
-            <p:cNvSpPr txBox="1"/>
-            <p:nvPr/>
-          </p:nvSpPr>
-          <p:spPr>
-            <a:xfrm>
-              <a:off x="3160742" y="2609422"/>
-              <a:ext cx="2073000" cy="523200"/>
-            </a:xfrm>
-            <a:prstGeom prst="rect">
-              <a:avLst/>
-            </a:prstGeom>
-            <a:noFill/>
-            <a:ln>
-              <a:noFill/>
-            </a:ln>
-          </p:spPr>
-          <p:txBody>
-            <a:bodyPr anchorCtr="0" anchor="t" bIns="66625" lIns="66625" spcFirstLastPara="1" rIns="66625" wrap="square" tIns="66625">
-              <a:spAutoFit/>
-            </a:bodyPr>
-            <a:lstStyle/>
-            <a:p>
-              <a:pPr indent="0" lvl="0" marL="0" rtl="0" algn="ctr">
-                <a:spcBef>
-                  <a:spcPts val="0"/>
-                </a:spcBef>
-                <a:spcAft>
-                  <a:spcPts val="0"/>
-                </a:spcAft>
-                <a:buNone/>
-              </a:pPr>
-              <a:r>
-                <a:rPr lang="es-419" sz="802">
-                  <a:solidFill>
-                    <a:schemeClr val="dk2"/>
-                  </a:solidFill>
-                </a:rPr>
-                <a:t>Promotores </a:t>
-              </a:r>
-              <a:endParaRPr sz="802">
-                <a:solidFill>
-                  <a:schemeClr val="dk2"/>
-                </a:solidFill>
-              </a:endParaRPr>
-            </a:p>
-            <a:p>
-              <a:pPr indent="0" lvl="0" marL="0" rtl="0" algn="ctr">
-                <a:spcBef>
-                  <a:spcPts val="0"/>
-                </a:spcBef>
-                <a:spcAft>
-                  <a:spcPts val="0"/>
-                </a:spcAft>
-                <a:buNone/>
-              </a:pPr>
-              <a:r>
-                <a:rPr lang="es-419" sz="802">
-                  <a:solidFill>
-                    <a:schemeClr val="dk2"/>
-                  </a:solidFill>
-                </a:rPr>
-                <a:t>no detectado</a:t>
-              </a:r>
-              <a:endParaRPr sz="802">
-                <a:solidFill>
-                  <a:schemeClr val="dk2"/>
-                </a:solidFill>
-              </a:endParaRPr>
-            </a:p>
-          </p:txBody>
-        </p:sp>
-        <p:sp>
-          <p:nvSpPr>
-            <p:cNvPr id="94" name="Google Shape;94;p15"/>
-            <p:cNvSpPr txBox="1"/>
-            <p:nvPr/>
-          </p:nvSpPr>
-          <p:spPr>
-            <a:xfrm>
-              <a:off x="4548029" y="2625434"/>
-              <a:ext cx="928500" cy="523200"/>
-            </a:xfrm>
-            <a:prstGeom prst="rect">
-              <a:avLst/>
-            </a:prstGeom>
-            <a:noFill/>
-            <a:ln>
-              <a:noFill/>
-            </a:ln>
-          </p:spPr>
-          <p:txBody>
-            <a:bodyPr anchorCtr="0" anchor="t" bIns="66625" lIns="66625" spcFirstLastPara="1" rIns="66625" wrap="square" tIns="66625">
-              <a:spAutoFit/>
-            </a:bodyPr>
-            <a:lstStyle/>
-            <a:p>
-              <a:pPr indent="0" lvl="0" marL="0" rtl="0" algn="ctr">
-                <a:spcBef>
-                  <a:spcPts val="0"/>
-                </a:spcBef>
-                <a:spcAft>
-                  <a:spcPts val="0"/>
-                </a:spcAft>
-                <a:buNone/>
-              </a:pPr>
-              <a:r>
-                <a:rPr lang="es-419" sz="802">
-                  <a:solidFill>
-                    <a:schemeClr val="dk2"/>
-                  </a:solidFill>
-                </a:rPr>
-                <a:t>Promotores d</a:t>
-              </a:r>
-              <a:r>
-                <a:rPr lang="es-419" sz="802">
-                  <a:solidFill>
-                    <a:schemeClr val="dk2"/>
-                  </a:solidFill>
-                </a:rPr>
-                <a:t>etectados</a:t>
-              </a:r>
-              <a:endParaRPr sz="802">
-                <a:solidFill>
-                  <a:schemeClr val="dk2"/>
-                </a:solidFill>
-              </a:endParaRPr>
-            </a:p>
-          </p:txBody>
-        </p:sp>
-      </p:grpSp>
       <p:pic>
         <p:nvPicPr>
-          <p:cNvPr id="95" name="Google Shape;95;p15" title="g4_retencion_por_gc.jpg"/>
+          <p:cNvPr id="64" name="Google Shape;64;p15" title="panel_a_venn_presort2022.png"/>
           <p:cNvPicPr preferRelativeResize="0"/>
           <p:nvPr/>
         </p:nvPicPr>
         <p:blipFill>
-          <a:blip r:embed="rId6">
+          <a:blip r:embed="rId3">
             <a:alphaModFix/>
           </a:blip>
           <a:stretch>
@@ -7765,8 +6373,8 @@
         </p:blipFill>
         <p:spPr>
           <a:xfrm>
-            <a:off x="4655476" y="2445601"/>
-            <a:ext cx="4137446" cy="2545499"/>
+            <a:off x="0" y="749097"/>
+            <a:ext cx="2138076" cy="2138076"/>
           </a:xfrm>
           <a:prstGeom prst="rect">
             <a:avLst/>
@@ -7777,16 +6385,24 @@
           </a:ln>
         </p:spPr>
       </p:pic>
-      <p:sp>
-        <p:nvSpPr>
-          <p:cNvPr id="96" name="Google Shape;96;p15"/>
-          <p:cNvSpPr txBox="1"/>
+      <p:pic>
+        <p:nvPicPr>
+          <p:cNvPr id="65" name="Google Shape;65;p15" title="panel_b_gc_bias_violin.jpg"/>
+          <p:cNvPicPr preferRelativeResize="0"/>
           <p:nvPr/>
-        </p:nvSpPr>
+        </p:nvPicPr>
+        <p:blipFill>
+          <a:blip r:embed="rId4">
+            <a:alphaModFix/>
+          </a:blip>
+          <a:stretch>
+            <a:fillRect/>
+          </a:stretch>
+        </p:blipFill>
         <p:spPr>
           <a:xfrm>
-            <a:off x="1366125" y="4014950"/>
-            <a:ext cx="3000000" cy="1046700"/>
+            <a:off x="2167982" y="692847"/>
+            <a:ext cx="1900521" cy="2138076"/>
           </a:xfrm>
           <a:prstGeom prst="rect">
             <a:avLst/>
@@ -7796,97 +6412,35 @@
             <a:noFill/>
           </a:ln>
         </p:spPr>
-        <p:txBody>
-          <a:bodyPr anchorCtr="0" anchor="t" bIns="91425" lIns="91425" spcFirstLastPara="1" rIns="91425" wrap="square" tIns="91425">
-            <a:spAutoFit/>
-          </a:bodyPr>
-          <a:lstStyle/>
-          <a:p>
-            <a:pPr indent="0" lvl="0" marL="0" rtl="0" algn="l">
-              <a:spcBef>
-                <a:spcPts val="0"/>
-              </a:spcBef>
-              <a:spcAft>
-                <a:spcPts val="0"/>
-              </a:spcAft>
-              <a:buNone/>
-            </a:pPr>
-            <a:r>
-              <a:rPr lang="es-419" sz="700">
-                <a:solidFill>
-                  <a:schemeClr val="dk1"/>
-                </a:solidFill>
-              </a:rPr>
-              <a:t>(D) Porcentaje de los promotores de la </a:t>
-            </a:r>
-            <a:r>
-              <a:rPr i="1" lang="es-419" sz="700">
-                <a:solidFill>
-                  <a:schemeClr val="dk1"/>
-                </a:solidFill>
-              </a:rPr>
-              <a:t>library</a:t>
-            </a:r>
-            <a:r>
-              <a:rPr lang="es-419" sz="700">
-                <a:solidFill>
-                  <a:schemeClr val="dk1"/>
-                </a:solidFill>
-              </a:rPr>
-              <a:t> que se recupera en cada etapa del ensayo (</a:t>
-            </a:r>
-            <a:r>
-              <a:rPr i="1" lang="es-419" sz="700">
-                <a:solidFill>
-                  <a:schemeClr val="dk1"/>
-                </a:solidFill>
-              </a:rPr>
-              <a:t>pool</a:t>
-            </a:r>
-            <a:r>
-              <a:rPr lang="es-419" sz="700">
-                <a:solidFill>
-                  <a:schemeClr val="dk1"/>
-                </a:solidFill>
-              </a:rPr>
-              <a:t> previo al </a:t>
-            </a:r>
-            <a:r>
-              <a:rPr i="1" lang="es-419" sz="700">
-                <a:solidFill>
-                  <a:schemeClr val="dk1"/>
-                </a:solidFill>
-              </a:rPr>
-              <a:t>sorting </a:t>
-            </a:r>
-            <a:r>
-              <a:rPr lang="es-419" sz="700">
-                <a:solidFill>
-                  <a:schemeClr val="dk1"/>
-                </a:solidFill>
-              </a:rPr>
-              <a:t>en el MPRA de splicing, detección en el </a:t>
-            </a:r>
-            <a:r>
-              <a:rPr i="1" lang="es-419" sz="700">
-                <a:solidFill>
-                  <a:schemeClr val="dk1"/>
-                </a:solidFill>
-              </a:rPr>
-              <a:t>sorting</a:t>
-            </a:r>
-            <a:r>
-              <a:rPr lang="es-419" sz="700">
-                <a:solidFill>
-                  <a:schemeClr val="dk1"/>
-                </a:solidFill>
-              </a:rPr>
-              <a:t> y alta confianza) según el contenido de G+C del fragmento (intervalos de 0,05), para promotores sin G4 (gris), con G4 solo en la hebra codificante (rojo) o solo en la hebra molde (azul). Línea continua: réplica 1; línea discontinua: réplica 2. El tamaño del punto indica el número de promotores en el intervalo; se muestran los intervalos con al menos 20 promotores de cada grupo. </a:t>
-            </a:r>
-            <a:endParaRPr sz="1000"/>
-          </a:p>
-        </p:txBody>
-      </p:sp>
+      </p:pic>
+      <p:pic>
+        <p:nvPicPr>
+          <p:cNvPr id="66" name="Google Shape;66;p15" title="panel_c_gc_bias_bars.jpg"/>
+          <p:cNvPicPr preferRelativeResize="0"/>
+          <p:nvPr/>
+        </p:nvPicPr>
+        <p:blipFill>
+          <a:blip r:embed="rId5">
+            <a:alphaModFix/>
+          </a:blip>
+          <a:stretch>
+            <a:fillRect/>
+          </a:stretch>
+        </p:blipFill>
+        <p:spPr>
+          <a:xfrm>
+            <a:off x="184850" y="2960925"/>
+            <a:ext cx="3592648" cy="1864749"/>
+          </a:xfrm>
+          <a:prstGeom prst="rect">
+            <a:avLst/>
+          </a:prstGeom>
+          <a:noFill/>
+          <a:ln>
+            <a:noFill/>
+          </a:ln>
+        </p:spPr>
+      </p:pic>
     </p:spTree>
   </p:cSld>
   <p:clrMapOvr>
@@ -7900,7 +6454,7 @@
   <p:cSld>
     <p:spTree>
       <p:nvGrpSpPr>
-        <p:cNvPr id="100" name="Shape 100"/>
+        <p:cNvPr id="70" name="Shape 70"/>
         <p:cNvGrpSpPr/>
         <p:nvPr/>
       </p:nvGrpSpPr>
@@ -7914,7 +6468,7 @@
       </p:grpSpPr>
       <p:pic>
         <p:nvPicPr>
-          <p:cNvPr id="101" name="Google Shape;101;p16"/>
+          <p:cNvPr id="71" name="Google Shape;71;p16" title="g4_retencion_por_gc.jpg"/>
           <p:cNvPicPr preferRelativeResize="0"/>
           <p:nvPr/>
         </p:nvPicPr>
@@ -7928,8 +6482,8 @@
         </p:blipFill>
         <p:spPr>
           <a:xfrm>
-            <a:off x="884425" y="152400"/>
-            <a:ext cx="5012300" cy="3762750"/>
+            <a:off x="152400" y="152400"/>
+            <a:ext cx="6597642" cy="4838701"/>
           </a:xfrm>
           <a:prstGeom prst="rect">
             <a:avLst/>
@@ -7940,147 +6494,6 @@
           </a:ln>
         </p:spPr>
       </p:pic>
-      <p:sp>
-        <p:nvSpPr>
-          <p:cNvPr id="102" name="Google Shape;102;p16"/>
-          <p:cNvSpPr txBox="1"/>
-          <p:nvPr/>
-        </p:nvSpPr>
-        <p:spPr>
-          <a:xfrm>
-            <a:off x="242725" y="4030035"/>
-            <a:ext cx="9044400" cy="1006500"/>
-          </a:xfrm>
-          <a:prstGeom prst="rect">
-            <a:avLst/>
-          </a:prstGeom>
-          <a:noFill/>
-          <a:ln>
-            <a:noFill/>
-          </a:ln>
-        </p:spPr>
-        <p:txBody>
-          <a:bodyPr anchorCtr="0" anchor="t" bIns="91425" lIns="91425" spcFirstLastPara="1" rIns="91425" wrap="square" tIns="91425">
-            <a:spAutoFit/>
-          </a:bodyPr>
-          <a:lstStyle/>
-          <a:p>
-            <a:pPr indent="0" lvl="0" marL="0" rtl="0" algn="l">
-              <a:lnSpc>
-                <a:spcPct val="115000"/>
-              </a:lnSpc>
-              <a:spcBef>
-                <a:spcPts val="0"/>
-              </a:spcBef>
-              <a:spcAft>
-                <a:spcPts val="1200"/>
-              </a:spcAft>
-              <a:buNone/>
-            </a:pPr>
-            <a:r>
-              <a:rPr b="1" lang="es-419" sz="1200">
-                <a:solidFill>
-                  <a:schemeClr val="dk2"/>
-                </a:solidFill>
-              </a:rPr>
-              <a:t>Robustez de los controles celulares internos de spike-in.</a:t>
-            </a:r>
-            <a:r>
-              <a:rPr lang="es-419" sz="1200">
-                <a:solidFill>
-                  <a:schemeClr val="dk2"/>
-                </a:solidFill>
-              </a:rPr>
-              <a:t> 30, 300 o 3000 células fueron añadidas en forma de </a:t>
-            </a:r>
-            <a:r>
-              <a:rPr lang="es-419" sz="1200">
-                <a:solidFill>
-                  <a:schemeClr val="dk2"/>
-                </a:solidFill>
-              </a:rPr>
-              <a:t>estándar</a:t>
-            </a:r>
-            <a:r>
-              <a:rPr lang="es-419" sz="1200">
-                <a:solidFill>
-                  <a:schemeClr val="dk2"/>
-                </a:solidFill>
-              </a:rPr>
-              <a:t> interno a cada muestra. Los counts corregidos de cada una de las tres líneas celulares usadas como </a:t>
-            </a:r>
-            <a:r>
-              <a:rPr lang="es-419" sz="1200">
-                <a:solidFill>
-                  <a:schemeClr val="dk2"/>
-                </a:solidFill>
-              </a:rPr>
-              <a:t>estándar</a:t>
-            </a:r>
-            <a:r>
-              <a:rPr lang="es-419" sz="1200">
-                <a:solidFill>
-                  <a:schemeClr val="dk2"/>
-                </a:solidFill>
-              </a:rPr>
-              <a:t> fueron normalizadas al de aquella con representación intermedia (Spike-in 2). Los valores para cada fracción de </a:t>
-            </a:r>
-            <a:r>
-              <a:rPr lang="es-419" sz="1200">
-                <a:solidFill>
-                  <a:schemeClr val="dk2"/>
-                </a:solidFill>
-              </a:rPr>
-              <a:t>células</a:t>
-            </a:r>
-            <a:r>
-              <a:rPr lang="es-419" sz="1200">
-                <a:solidFill>
-                  <a:schemeClr val="dk2"/>
-                </a:solidFill>
-              </a:rPr>
-              <a:t> se muestran para ambas </a:t>
-            </a:r>
-            <a:r>
-              <a:rPr lang="es-419" sz="1200">
-                <a:solidFill>
-                  <a:schemeClr val="dk2"/>
-                </a:solidFill>
-              </a:rPr>
-              <a:t>réplicas</a:t>
-            </a:r>
-            <a:r>
-              <a:rPr lang="es-419" sz="1200">
-                <a:solidFill>
-                  <a:schemeClr val="dk2"/>
-                </a:solidFill>
-              </a:rPr>
-              <a:t>, y muestran la ausencia de sesgos técnicos relevantes entre las muestras en la </a:t>
-            </a:r>
-            <a:r>
-              <a:rPr lang="es-419" sz="1200">
-                <a:solidFill>
-                  <a:schemeClr val="dk2"/>
-                </a:solidFill>
-              </a:rPr>
-              <a:t>cuantificación</a:t>
-            </a:r>
-            <a:r>
-              <a:rPr lang="es-419" sz="1200">
-                <a:solidFill>
-                  <a:schemeClr val="dk2"/>
-                </a:solidFill>
-              </a:rPr>
-              <a:t> en escala masiva.</a:t>
-            </a:r>
-            <a:endParaRPr sz="1800">
-              <a:solidFill>
-                <a:schemeClr val="dk2"/>
-              </a:solidFill>
-            </a:endParaRPr>
-          </a:p>
-        </p:txBody>
-      </p:sp>
     </p:spTree>
   </p:cSld>
   <p:clrMapOvr>
@@ -8094,7 +6507,7 @@
   <p:cSld>
     <p:spTree>
       <p:nvGrpSpPr>
-        <p:cNvPr id="106" name="Shape 106"/>
+        <p:cNvPr id="75" name="Shape 75"/>
         <p:cNvGrpSpPr/>
         <p:nvPr/>
       </p:nvGrpSpPr>
@@ -8106,16 +6519,24 @@
           <a:chExt cx="0" cy="0"/>
         </a:xfrm>
       </p:grpSpPr>
-      <p:sp>
-        <p:nvSpPr>
-          <p:cNvPr id="107" name="Google Shape;107;p17"/>
-          <p:cNvSpPr txBox="1"/>
+      <p:pic>
+        <p:nvPicPr>
+          <p:cNvPr id="76" name="Google Shape;76;p17" title="spike_in_robustez.jpg"/>
+          <p:cNvPicPr preferRelativeResize="0"/>
           <p:nvPr/>
-        </p:nvSpPr>
+        </p:nvPicPr>
+        <p:blipFill>
+          <a:blip r:embed="rId3">
+            <a:alphaModFix/>
+          </a:blip>
+          <a:stretch>
+            <a:fillRect/>
+          </a:stretch>
+        </p:blipFill>
         <p:spPr>
           <a:xfrm>
-            <a:off x="0" y="0"/>
-            <a:ext cx="3000000" cy="1647000"/>
+            <a:off x="152400" y="152400"/>
+            <a:ext cx="6451599" cy="4838700"/>
           </a:xfrm>
           <a:prstGeom prst="rect">
             <a:avLst/>
@@ -8125,96 +6546,35 @@
             <a:noFill/>
           </a:ln>
         </p:spPr>
-        <p:txBody>
-          <a:bodyPr anchorCtr="0" anchor="t" bIns="91425" lIns="91425" spcFirstLastPara="1" rIns="91425" wrap="square" tIns="91425">
-            <a:spAutoFit/>
-          </a:bodyPr>
-          <a:lstStyle/>
-          <a:p>
-            <a:pPr indent="0" lvl="0" marL="0" rtl="0" algn="l">
-              <a:spcBef>
-                <a:spcPts val="0"/>
-              </a:spcBef>
-              <a:spcAft>
-                <a:spcPts val="0"/>
-              </a:spcAft>
-              <a:buNone/>
-            </a:pPr>
-            <a:r>
-              <a:rPr b="1" lang="es-419" sz="1050">
-                <a:solidFill>
-                  <a:srgbClr val="0B0B0B"/>
-                </a:solidFill>
-                <a:highlight>
-                  <a:srgbClr val="FCFCFB"/>
-                </a:highlight>
-                <a:latin typeface="Roboto"/>
-                <a:ea typeface="Roboto"/>
-                <a:cs typeface="Roboto"/>
-                <a:sym typeface="Roboto"/>
-              </a:rPr>
-              <a:t>Reconstrucción de la distribución de expresión para un promotor individual</a:t>
-            </a:r>
-            <a:r>
-              <a:rPr lang="es-419" sz="1050">
-                <a:solidFill>
-                  <a:srgbClr val="0B0B0B"/>
-                </a:solidFill>
-                <a:highlight>
-                  <a:srgbClr val="FCFCFB"/>
-                </a:highlight>
-                <a:latin typeface="Roboto"/>
-                <a:ea typeface="Roboto"/>
-                <a:cs typeface="Roboto"/>
-                <a:sym typeface="Roboto"/>
-              </a:rPr>
-              <a:t>, KIAA0753_1, a modo de ejemplo. El histograma muestra la frecuencia relativa de lecturas normalizadas asociadas a esta secuencia en cada una de las 6 fracciones (</a:t>
-            </a:r>
-            <a:r>
-              <a:rPr i="1" lang="es-419" sz="1050">
-                <a:solidFill>
-                  <a:srgbClr val="0B0B0B"/>
-                </a:solidFill>
-                <a:highlight>
-                  <a:srgbClr val="FCFCFB"/>
-                </a:highlight>
-                <a:latin typeface="Roboto"/>
-                <a:ea typeface="Roboto"/>
-                <a:cs typeface="Roboto"/>
-                <a:sym typeface="Roboto"/>
-              </a:rPr>
-              <a:t>gates</a:t>
-            </a:r>
-            <a:r>
-              <a:rPr lang="es-419" sz="1050">
-                <a:solidFill>
-                  <a:srgbClr val="0B0B0B"/>
-                </a:solidFill>
-                <a:highlight>
-                  <a:srgbClr val="FCFCFB"/>
-                </a:highlight>
-                <a:latin typeface="Roboto"/>
-                <a:ea typeface="Roboto"/>
-                <a:cs typeface="Roboto"/>
-                <a:sym typeface="Roboto"/>
-              </a:rPr>
-              <a:t>) de fluorescencia EGFP en que fueron clasificadas las células, para ambas réplicas experimentales (tonalidades clara/oscura).</a:t>
-            </a:r>
-            <a:r>
-              <a:rPr lang="es-419" sz="1100">
-                <a:solidFill>
-                  <a:schemeClr val="dk1"/>
-                </a:solidFill>
-              </a:rPr>
-              <a:t> </a:t>
-            </a:r>
-            <a:endParaRPr/>
-          </a:p>
-        </p:txBody>
-      </p:sp>
+      </p:pic>
+    </p:spTree>
+  </p:cSld>
+  <p:clrMapOvr>
+    <a:masterClrMapping/>
+  </p:clrMapOvr>
+</p:sld>
+</file>
+
+<file path=ppt/slides/slide6.xml><?xml version="1.0" encoding="utf-8"?>
+<p:sld xmlns:a="http://schemas.openxmlformats.org/drawingml/2006/main" xmlns:r="http://schemas.openxmlformats.org/officeDocument/2006/relationships" xmlns:mc="http://schemas.openxmlformats.org/markup-compatibility/2006" xmlns:mv="urn:schemas-microsoft-com:mac:vml" xmlns:p="http://schemas.openxmlformats.org/presentationml/2006/main" xmlns:c="http://schemas.openxmlformats.org/drawingml/2006/chart" xmlns:dgm="http://schemas.openxmlformats.org/drawingml/2006/diagram" xmlns:o="urn:schemas-microsoft-com:office:office" xmlns:v="urn:schemas-microsoft-com:vml" xmlns:pvml="urn:schemas-microsoft-com:office:powerpoint" xmlns:com="http://schemas.openxmlformats.org/drawingml/2006/compatibility" xmlns:p14="http://schemas.microsoft.com/office/powerpoint/2010/main" xmlns:p15="http://schemas.microsoft.com/office/powerpoint/2012/main" xmlns:ahyp="http://schemas.microsoft.com/office/drawing/2018/hyperlinkcolor">
+  <p:cSld>
+    <p:spTree>
+      <p:nvGrpSpPr>
+        <p:cNvPr id="80" name="Shape 80"/>
+        <p:cNvGrpSpPr/>
+        <p:nvPr/>
+      </p:nvGrpSpPr>
+      <p:grpSpPr>
+        <a:xfrm>
+          <a:off x="0" y="0"/>
+          <a:ext cx="0" cy="0"/>
+          <a:chOff x="0" y="0"/>
+          <a:chExt cx="0" cy="0"/>
+        </a:xfrm>
+      </p:grpSpPr>
       <p:pic>
         <p:nvPicPr>
-          <p:cNvPr id="108" name="Google Shape;108;p17" title="histograma_gates_KIAA0753.jpg"/>
+          <p:cNvPr id="81" name="Google Shape;81;p18" title="histograma_gates_KIAA0753.jpg"/>
           <p:cNvPicPr preferRelativeResize="0"/>
           <p:nvPr/>
         </p:nvPicPr>
@@ -8248,12 +6608,12 @@
 </p:sld>
 </file>
 
-<file path=ppt/slides/slide6.xml><?xml version="1.0" encoding="utf-8"?>
+<file path=ppt/slides/slide7.xml><?xml version="1.0" encoding="utf-8"?>
 <p:sld xmlns:a="http://schemas.openxmlformats.org/drawingml/2006/main" xmlns:r="http://schemas.openxmlformats.org/officeDocument/2006/relationships" xmlns:mc="http://schemas.openxmlformats.org/markup-compatibility/2006" xmlns:mv="urn:schemas-microsoft-com:mac:vml" xmlns:p="http://schemas.openxmlformats.org/presentationml/2006/main" xmlns:c="http://schemas.openxmlformats.org/drawingml/2006/chart" xmlns:dgm="http://schemas.openxmlformats.org/drawingml/2006/diagram" xmlns:o="urn:schemas-microsoft-com:office:office" xmlns:v="urn:schemas-microsoft-com:vml" xmlns:pvml="urn:schemas-microsoft-com:office:powerpoint" xmlns:com="http://schemas.openxmlformats.org/drawingml/2006/compatibility" xmlns:p14="http://schemas.microsoft.com/office/powerpoint/2010/main" xmlns:p15="http://schemas.microsoft.com/office/powerpoint/2012/main" xmlns:ahyp="http://schemas.microsoft.com/office/drawing/2018/hyperlinkcolor">
   <p:cSld>
     <p:spTree>
       <p:nvGrpSpPr>
-        <p:cNvPr id="112" name="Shape 112"/>
+        <p:cNvPr id="85" name="Shape 85"/>
         <p:cNvGrpSpPr/>
         <p:nvPr/>
       </p:nvGrpSpPr>
@@ -8267,7 +6627,7 @@
       </p:grpSpPr>
       <p:pic>
         <p:nvPicPr>
-          <p:cNvPr id="113" name="Google Shape;113;p18" title="extra_densidad_individual.jpg"/>
+          <p:cNvPr id="86" name="Google Shape;86;p19" title="densidad_individual_promotores.jpg"/>
           <p:cNvPicPr preferRelativeResize="0"/>
           <p:nvPr/>
         </p:nvPicPr>
@@ -8281,8 +6641,8 @@
         </p:blipFill>
         <p:spPr>
           <a:xfrm>
-            <a:off x="1788012" y="548950"/>
-            <a:ext cx="4725724" cy="3544301"/>
+            <a:off x="1382025" y="136325"/>
+            <a:ext cx="4761933" cy="3571450"/>
           </a:xfrm>
           <a:prstGeom prst="rect">
             <a:avLst/>
@@ -8293,116 +6653,6 @@
           </a:ln>
         </p:spPr>
       </p:pic>
-      <p:sp>
-        <p:nvSpPr>
-          <p:cNvPr id="114" name="Google Shape;114;p18"/>
-          <p:cNvSpPr txBox="1"/>
-          <p:nvPr/>
-        </p:nvSpPr>
-        <p:spPr>
-          <a:xfrm>
-            <a:off x="353950" y="4093250"/>
-            <a:ext cx="5775300" cy="1485300"/>
-          </a:xfrm>
-          <a:prstGeom prst="rect">
-            <a:avLst/>
-          </a:prstGeom>
-          <a:noFill/>
-          <a:ln>
-            <a:noFill/>
-          </a:ln>
-        </p:spPr>
-        <p:txBody>
-          <a:bodyPr anchorCtr="0" anchor="t" bIns="91425" lIns="91425" spcFirstLastPara="1" rIns="91425" wrap="square" tIns="91425">
-            <a:spAutoFit/>
-          </a:bodyPr>
-          <a:lstStyle/>
-          <a:p>
-            <a:pPr indent="0" lvl="0" marL="0" rtl="0" algn="l">
-              <a:spcBef>
-                <a:spcPts val="0"/>
-              </a:spcBef>
-              <a:spcAft>
-                <a:spcPts val="0"/>
-              </a:spcAft>
-              <a:buNone/>
-            </a:pPr>
-            <a:r>
-              <a:rPr b="1" lang="es-419" sz="1050">
-                <a:solidFill>
-                  <a:srgbClr val="0B0B0B"/>
-                </a:solidFill>
-                <a:highlight>
-                  <a:srgbClr val="FCFCFB"/>
-                </a:highlight>
-                <a:latin typeface="Roboto"/>
-                <a:ea typeface="Roboto"/>
-                <a:cs typeface="Roboto"/>
-                <a:sym typeface="Roboto"/>
-              </a:rPr>
-              <a:t>Distribución de fluorescencia EGFP para promotores individuales, validados por citometría de flujo. </a:t>
-            </a:r>
-            <a:r>
-              <a:rPr lang="es-419" sz="1050">
-                <a:solidFill>
-                  <a:srgbClr val="0B0B0B"/>
-                </a:solidFill>
-                <a:highlight>
-                  <a:srgbClr val="FCFCFB"/>
-                </a:highlight>
-                <a:latin typeface="Roboto"/>
-                <a:ea typeface="Roboto"/>
-                <a:cs typeface="Roboto"/>
-                <a:sym typeface="Roboto"/>
-              </a:rPr>
-              <a:t>Se generaron líneas celulares HEK293T-A2 estables integradas con el reportero EGFP bajo el control de un promotor individual, para 8 secuencias de la </a:t>
-            </a:r>
-            <a:r>
-              <a:rPr i="1" lang="es-419" sz="1050">
-                <a:solidFill>
-                  <a:srgbClr val="0B0B0B"/>
-                </a:solidFill>
-                <a:highlight>
-                  <a:srgbClr val="FCFCFB"/>
-                </a:highlight>
-                <a:latin typeface="Roboto"/>
-                <a:ea typeface="Roboto"/>
-                <a:cs typeface="Roboto"/>
-                <a:sym typeface="Roboto"/>
-              </a:rPr>
-              <a:t>library</a:t>
-            </a:r>
-            <a:r>
-              <a:rPr lang="es-419" sz="1050">
-                <a:solidFill>
-                  <a:srgbClr val="0B0B0B"/>
-                </a:solidFill>
-                <a:highlight>
-                  <a:srgbClr val="FCFCFB"/>
-                </a:highlight>
-                <a:latin typeface="Roboto"/>
-                <a:ea typeface="Roboto"/>
-                <a:cs typeface="Roboto"/>
-                <a:sym typeface="Roboto"/>
-              </a:rPr>
-              <a:t> (BTG1_1, ETS1_1, KIAA0753_1, LSM1_1, METAP2_1, PPP1R14B_3, TMEM87A_1, ZKSCAN2_1; n = 3 réplicas técnicas cada una) y un promotor de referencia de alta actividad (Strong). En cada panel se muestra la densidad de la señal de fluorescencia EGFP (escala logarítmica) del promotor correspondiente, superpuesta a la distribución de fondo de una población no transfectada (Control, gris).</a:t>
-            </a:r>
-            <a:r>
-              <a:rPr lang="es-419" sz="1100">
-                <a:solidFill>
-                  <a:schemeClr val="dk1"/>
-                </a:solidFill>
-              </a:rPr>
-              <a:t> </a:t>
-            </a:r>
-            <a:endParaRPr sz="1800">
-              <a:solidFill>
-                <a:schemeClr val="dk2"/>
-              </a:solidFill>
-            </a:endParaRPr>
-          </a:p>
-        </p:txBody>
-      </p:sp>
     </p:spTree>
   </p:cSld>
   <p:clrMapOvr>
@@ -8411,12 +6661,12 @@
 </p:sld>
 </file>
 
-<file path=ppt/slides/slide7.xml><?xml version="1.0" encoding="utf-8"?>
+<file path=ppt/slides/slide8.xml><?xml version="1.0" encoding="utf-8"?>
 <p:sld xmlns:a="http://schemas.openxmlformats.org/drawingml/2006/main" xmlns:r="http://schemas.openxmlformats.org/officeDocument/2006/relationships" xmlns:mc="http://schemas.openxmlformats.org/markup-compatibility/2006" xmlns:mv="urn:schemas-microsoft-com:mac:vml" xmlns:p="http://schemas.openxmlformats.org/presentationml/2006/main" xmlns:c="http://schemas.openxmlformats.org/drawingml/2006/chart" xmlns:dgm="http://schemas.openxmlformats.org/drawingml/2006/diagram" xmlns:o="urn:schemas-microsoft-com:office:office" xmlns:v="urn:schemas-microsoft-com:vml" xmlns:pvml="urn:schemas-microsoft-com:office:powerpoint" xmlns:com="http://schemas.openxmlformats.org/drawingml/2006/compatibility" xmlns:p14="http://schemas.microsoft.com/office/powerpoint/2010/main" xmlns:p15="http://schemas.microsoft.com/office/powerpoint/2012/main" xmlns:ahyp="http://schemas.microsoft.com/office/drawing/2018/hyperlinkcolor">
   <p:cSld>
     <p:spTree>
       <p:nvGrpSpPr>
-        <p:cNvPr id="118" name="Shape 118"/>
+        <p:cNvPr id="90" name="Shape 90"/>
         <p:cNvGrpSpPr/>
         <p:nvPr/>
       </p:nvGrpSpPr>
@@ -8430,7 +6680,7 @@
       </p:grpSpPr>
       <p:pic>
         <p:nvPicPr>
-          <p:cNvPr id="119" name="Google Shape;119;p19"/>
+          <p:cNvPr id="91" name="Google Shape;91;p20"/>
           <p:cNvPicPr preferRelativeResize="0"/>
           <p:nvPr/>
         </p:nvPicPr>
@@ -8458,7 +6708,7 @@
       </p:pic>
       <p:pic>
         <p:nvPicPr>
-          <p:cNvPr id="120" name="Google Shape;120;p19"/>
+          <p:cNvPr id="92" name="Google Shape;92;p20"/>
           <p:cNvPicPr preferRelativeResize="0"/>
           <p:nvPr/>
         </p:nvPicPr>
@@ -8486,7 +6736,7 @@
       </p:pic>
       <p:sp>
         <p:nvSpPr>
-          <p:cNvPr id="121" name="Google Shape;121;p19"/>
+          <p:cNvPr id="93" name="Google Shape;93;p20"/>
           <p:cNvSpPr txBox="1"/>
           <p:nvPr/>
         </p:nvSpPr>
@@ -8592,7 +6842,7 @@
       </p:sp>
       <p:pic>
         <p:nvPicPr>
-          <p:cNvPr id="122" name="Google Shape;122;p19" title="panel_b_histograma_gates_ejemplo.jpg"/>
+          <p:cNvPr id="94" name="Google Shape;94;p20" title="panel_b_histograma_gates_ejemplo.jpg"/>
           <p:cNvPicPr preferRelativeResize="0"/>
           <p:nvPr/>
         </p:nvPicPr>
@@ -8626,12 +6876,12 @@
 </p:sld>
 </file>
 
-<file path=ppt/slides/slide8.xml><?xml version="1.0" encoding="utf-8"?>
+<file path=ppt/slides/slide9.xml><?xml version="1.0" encoding="utf-8"?>
 <p:sld xmlns:a="http://schemas.openxmlformats.org/drawingml/2006/main" xmlns:r="http://schemas.openxmlformats.org/officeDocument/2006/relationships" xmlns:mc="http://schemas.openxmlformats.org/markup-compatibility/2006" xmlns:mv="urn:schemas-microsoft-com:mac:vml" xmlns:p="http://schemas.openxmlformats.org/presentationml/2006/main" xmlns:c="http://schemas.openxmlformats.org/drawingml/2006/chart" xmlns:dgm="http://schemas.openxmlformats.org/drawingml/2006/diagram" xmlns:o="urn:schemas-microsoft-com:office:office" xmlns:v="urn:schemas-microsoft-com:vml" xmlns:pvml="urn:schemas-microsoft-com:office:powerpoint" xmlns:com="http://schemas.openxmlformats.org/drawingml/2006/compatibility" xmlns:p14="http://schemas.microsoft.com/office/powerpoint/2010/main" xmlns:p15="http://schemas.microsoft.com/office/powerpoint/2012/main" xmlns:ahyp="http://schemas.microsoft.com/office/drawing/2018/hyperlinkcolor">
   <p:cSld>
     <p:spTree>
       <p:nvGrpSpPr>
-        <p:cNvPr id="126" name="Shape 126"/>
+        <p:cNvPr id="98" name="Shape 98"/>
         <p:cNvGrpSpPr/>
         <p:nvPr/>
       </p:nvGrpSpPr>
@@ -8643,414 +6893,9 @@
           <a:chExt cx="0" cy="0"/>
         </a:xfrm>
       </p:grpSpPr>
-      <p:grpSp>
-        <p:nvGrpSpPr>
-          <p:cNvPr id="127" name="Google Shape;127;p20"/>
-          <p:cNvGrpSpPr/>
-          <p:nvPr/>
-        </p:nvGrpSpPr>
-        <p:grpSpPr>
-          <a:xfrm>
-            <a:off x="2391552" y="-2"/>
-            <a:ext cx="2391285" cy="2381206"/>
-            <a:chOff x="86225" y="82225"/>
-            <a:chExt cx="3256551" cy="3242825"/>
-          </a:xfrm>
-        </p:grpSpPr>
-        <p:pic>
-          <p:nvPicPr>
-            <p:cNvPr id="128" name="Google Shape;128;p20"/>
-            <p:cNvPicPr preferRelativeResize="0"/>
-            <p:nvPr/>
-          </p:nvPicPr>
-          <p:blipFill rotWithShape="1">
-            <a:blip r:embed="rId3">
-              <a:alphaModFix/>
-            </a:blip>
-            <a:srcRect b="0" l="744" r="0" t="970"/>
-            <a:stretch/>
-          </p:blipFill>
-          <p:spPr>
-            <a:xfrm>
-              <a:off x="86225" y="82225"/>
-              <a:ext cx="3256551" cy="3242825"/>
-            </a:xfrm>
-            <a:prstGeom prst="rect">
-              <a:avLst/>
-            </a:prstGeom>
-            <a:noFill/>
-            <a:ln>
-              <a:noFill/>
-            </a:ln>
-          </p:spPr>
-        </p:pic>
-        <p:sp>
-          <p:nvSpPr>
-            <p:cNvPr id="129" name="Google Shape;129;p20"/>
-            <p:cNvSpPr txBox="1"/>
-            <p:nvPr/>
-          </p:nvSpPr>
-          <p:spPr>
-            <a:xfrm>
-              <a:off x="1458265" y="374911"/>
-              <a:ext cx="721500" cy="354000"/>
-            </a:xfrm>
-            <a:prstGeom prst="rect">
-              <a:avLst/>
-            </a:prstGeom>
-            <a:solidFill>
-              <a:srgbClr val="EFF6FB"/>
-            </a:solidFill>
-            <a:ln>
-              <a:noFill/>
-            </a:ln>
-          </p:spPr>
-          <p:txBody>
-            <a:bodyPr anchorCtr="0" anchor="t" bIns="67150" lIns="67150" spcFirstLastPara="1" rIns="67150" wrap="square" tIns="67150">
-              <a:spAutoFit/>
-            </a:bodyPr>
-            <a:lstStyle/>
-            <a:p>
-              <a:pPr indent="0" lvl="0" marL="0" rtl="0" algn="l">
-                <a:spcBef>
-                  <a:spcPts val="0"/>
-                </a:spcBef>
-                <a:spcAft>
-                  <a:spcPts val="0"/>
-                </a:spcAft>
-                <a:buNone/>
-              </a:pPr>
-              <a:r>
-                <a:rPr lang="es-419" sz="808">
-                  <a:solidFill>
-                    <a:schemeClr val="dk2"/>
-                  </a:solidFill>
-                </a:rPr>
-                <a:t>9756</a:t>
-              </a:r>
-              <a:endParaRPr sz="808">
-                <a:solidFill>
-                  <a:schemeClr val="dk2"/>
-                </a:solidFill>
-              </a:endParaRPr>
-            </a:p>
-          </p:txBody>
-        </p:sp>
-        <p:sp>
-          <p:nvSpPr>
-            <p:cNvPr id="130" name="Google Shape;130;p20"/>
-            <p:cNvSpPr txBox="1"/>
-            <p:nvPr/>
-          </p:nvSpPr>
-          <p:spPr>
-            <a:xfrm>
-              <a:off x="1370694" y="185978"/>
-              <a:ext cx="806100" cy="369300"/>
-            </a:xfrm>
-            <a:prstGeom prst="rect">
-              <a:avLst/>
-            </a:prstGeom>
-            <a:noFill/>
-            <a:ln>
-              <a:noFill/>
-            </a:ln>
-          </p:spPr>
-          <p:txBody>
-            <a:bodyPr anchorCtr="0" anchor="t" bIns="67150" lIns="67150" spcFirstLastPara="1" rIns="67150" wrap="square" tIns="67150">
-              <a:spAutoFit/>
-            </a:bodyPr>
-            <a:lstStyle/>
-            <a:p>
-              <a:pPr indent="0" lvl="0" marL="0" rtl="0" algn="l">
-                <a:spcBef>
-                  <a:spcPts val="0"/>
-                </a:spcBef>
-                <a:spcAft>
-                  <a:spcPts val="0"/>
-                </a:spcAft>
-                <a:buNone/>
-              </a:pPr>
-              <a:r>
-                <a:rPr lang="es-419" sz="881">
-                  <a:solidFill>
-                    <a:schemeClr val="dk2"/>
-                  </a:solidFill>
-                </a:rPr>
-                <a:t>Library</a:t>
-              </a:r>
-              <a:endParaRPr sz="881">
-                <a:solidFill>
-                  <a:schemeClr val="dk2"/>
-                </a:solidFill>
-              </a:endParaRPr>
-            </a:p>
-          </p:txBody>
-        </p:sp>
-        <p:sp>
-          <p:nvSpPr>
-            <p:cNvPr id="131" name="Google Shape;131;p20"/>
-            <p:cNvSpPr txBox="1"/>
-            <p:nvPr/>
-          </p:nvSpPr>
-          <p:spPr>
-            <a:xfrm>
-              <a:off x="469151" y="1223250"/>
-              <a:ext cx="901500" cy="369300"/>
-            </a:xfrm>
-            <a:prstGeom prst="rect">
-              <a:avLst/>
-            </a:prstGeom>
-            <a:noFill/>
-            <a:ln>
-              <a:noFill/>
-            </a:ln>
-          </p:spPr>
-          <p:txBody>
-            <a:bodyPr anchorCtr="0" anchor="t" bIns="67150" lIns="67150" spcFirstLastPara="1" rIns="67150" wrap="square" tIns="67150">
-              <a:spAutoFit/>
-            </a:bodyPr>
-            <a:lstStyle/>
-            <a:p>
-              <a:pPr indent="0" lvl="0" marL="0" rtl="0" algn="l">
-                <a:spcBef>
-                  <a:spcPts val="0"/>
-                </a:spcBef>
-                <a:spcAft>
-                  <a:spcPts val="0"/>
-                </a:spcAft>
-                <a:buNone/>
-              </a:pPr>
-              <a:r>
-                <a:rPr lang="es-419" sz="881">
-                  <a:solidFill>
-                    <a:schemeClr val="dk2"/>
-                  </a:solidFill>
-                </a:rPr>
-                <a:t>Réplica 1 </a:t>
-              </a:r>
-              <a:endParaRPr sz="881">
-                <a:solidFill>
-                  <a:schemeClr val="dk2"/>
-                </a:solidFill>
-              </a:endParaRPr>
-            </a:p>
-          </p:txBody>
-        </p:sp>
-        <p:sp>
-          <p:nvSpPr>
-            <p:cNvPr id="132" name="Google Shape;132;p20"/>
-            <p:cNvSpPr txBox="1"/>
-            <p:nvPr/>
-          </p:nvSpPr>
-          <p:spPr>
-            <a:xfrm>
-              <a:off x="2182524" y="1223250"/>
-              <a:ext cx="901500" cy="369300"/>
-            </a:xfrm>
-            <a:prstGeom prst="rect">
-              <a:avLst/>
-            </a:prstGeom>
-            <a:noFill/>
-            <a:ln>
-              <a:noFill/>
-            </a:ln>
-          </p:spPr>
-          <p:txBody>
-            <a:bodyPr anchorCtr="0" anchor="t" bIns="67150" lIns="67150" spcFirstLastPara="1" rIns="67150" wrap="square" tIns="67150">
-              <a:spAutoFit/>
-            </a:bodyPr>
-            <a:lstStyle/>
-            <a:p>
-              <a:pPr indent="0" lvl="0" marL="0" rtl="0" algn="l">
-                <a:spcBef>
-                  <a:spcPts val="0"/>
-                </a:spcBef>
-                <a:spcAft>
-                  <a:spcPts val="0"/>
-                </a:spcAft>
-                <a:buNone/>
-              </a:pPr>
-              <a:r>
-                <a:rPr lang="es-419" sz="881">
-                  <a:solidFill>
-                    <a:schemeClr val="dk2"/>
-                  </a:solidFill>
-                </a:rPr>
-                <a:t>Réplica 2 </a:t>
-              </a:r>
-              <a:endParaRPr sz="881">
-                <a:solidFill>
-                  <a:schemeClr val="dk2"/>
-                </a:solidFill>
-              </a:endParaRPr>
-            </a:p>
-          </p:txBody>
-        </p:sp>
-        <p:sp>
-          <p:nvSpPr>
-            <p:cNvPr id="133" name="Google Shape;133;p20"/>
-            <p:cNvSpPr txBox="1"/>
-            <p:nvPr/>
-          </p:nvSpPr>
-          <p:spPr>
-            <a:xfrm>
-              <a:off x="649447" y="1510800"/>
-              <a:ext cx="540900" cy="354000"/>
-            </a:xfrm>
-            <a:prstGeom prst="rect">
-              <a:avLst/>
-            </a:prstGeom>
-            <a:solidFill>
-              <a:srgbClr val="BCD9E5"/>
-            </a:solidFill>
-            <a:ln>
-              <a:noFill/>
-            </a:ln>
-          </p:spPr>
-          <p:txBody>
-            <a:bodyPr anchorCtr="0" anchor="t" bIns="67150" lIns="67150" spcFirstLastPara="1" rIns="67150" wrap="square" tIns="67150">
-              <a:spAutoFit/>
-            </a:bodyPr>
-            <a:lstStyle/>
-            <a:p>
-              <a:pPr indent="0" lvl="0" marL="0" rtl="0" algn="l">
-                <a:spcBef>
-                  <a:spcPts val="0"/>
-                </a:spcBef>
-                <a:spcAft>
-                  <a:spcPts val="0"/>
-                </a:spcAft>
-                <a:buNone/>
-              </a:pPr>
-              <a:r>
-                <a:rPr lang="es-419" sz="808">
-                  <a:solidFill>
-                    <a:schemeClr val="dk2"/>
-                  </a:solidFill>
-                </a:rPr>
-                <a:t>835</a:t>
-              </a:r>
-              <a:endParaRPr sz="808">
-                <a:solidFill>
-                  <a:schemeClr val="dk2"/>
-                </a:solidFill>
-              </a:endParaRPr>
-            </a:p>
-          </p:txBody>
-        </p:sp>
-        <p:sp>
-          <p:nvSpPr>
-            <p:cNvPr id="134" name="Google Shape;134;p20"/>
-            <p:cNvSpPr txBox="1"/>
-            <p:nvPr/>
-          </p:nvSpPr>
-          <p:spPr>
-            <a:xfrm>
-              <a:off x="1414623" y="1510788"/>
-              <a:ext cx="645000" cy="354000"/>
-            </a:xfrm>
-            <a:prstGeom prst="rect">
-              <a:avLst/>
-            </a:prstGeom>
-            <a:solidFill>
-              <a:srgbClr val="B3D9DD"/>
-            </a:solidFill>
-            <a:ln>
-              <a:noFill/>
-            </a:ln>
-          </p:spPr>
-          <p:txBody>
-            <a:bodyPr anchorCtr="0" anchor="t" bIns="67150" lIns="67150" spcFirstLastPara="1" rIns="67150" wrap="square" tIns="67150">
-              <a:spAutoFit/>
-            </a:bodyPr>
-            <a:lstStyle/>
-            <a:p>
-              <a:pPr indent="0" lvl="0" marL="0" rtl="0" algn="l">
-                <a:spcBef>
-                  <a:spcPts val="0"/>
-                </a:spcBef>
-                <a:spcAft>
-                  <a:spcPts val="0"/>
-                </a:spcAft>
-                <a:buNone/>
-              </a:pPr>
-              <a:r>
-                <a:rPr lang="es-419" sz="808">
-                  <a:solidFill>
-                    <a:schemeClr val="dk2"/>
-                  </a:solidFill>
-                </a:rPr>
-                <a:t>10401</a:t>
-              </a:r>
-              <a:endParaRPr sz="808">
-                <a:solidFill>
-                  <a:schemeClr val="dk2"/>
-                </a:solidFill>
-              </a:endParaRPr>
-            </a:p>
-          </p:txBody>
-        </p:sp>
-        <p:sp>
-          <p:nvSpPr>
-            <p:cNvPr id="135" name="Google Shape;135;p20"/>
-            <p:cNvSpPr txBox="1"/>
-            <p:nvPr/>
-          </p:nvSpPr>
-          <p:spPr>
-            <a:xfrm>
-              <a:off x="2355862" y="1510788"/>
-              <a:ext cx="645000" cy="354000"/>
-            </a:xfrm>
-            <a:prstGeom prst="rect">
-              <a:avLst/>
-            </a:prstGeom>
-            <a:solidFill>
-              <a:srgbClr val="CDE8E8"/>
-            </a:solidFill>
-            <a:ln>
-              <a:noFill/>
-            </a:ln>
-          </p:spPr>
-          <p:txBody>
-            <a:bodyPr anchorCtr="0" anchor="t" bIns="67150" lIns="67150" spcFirstLastPara="1" rIns="67150" wrap="square" tIns="67150">
-              <a:spAutoFit/>
-            </a:bodyPr>
-            <a:lstStyle/>
-            <a:p>
-              <a:pPr indent="0" lvl="0" marL="0" rtl="0" algn="l">
-                <a:spcBef>
-                  <a:spcPts val="0"/>
-                </a:spcBef>
-                <a:spcAft>
-                  <a:spcPts val="0"/>
-                </a:spcAft>
-                <a:buClr>
-                  <a:schemeClr val="dk1"/>
-                </a:buClr>
-                <a:buSzPts val="877"/>
-                <a:buFont typeface="Arial"/>
-                <a:buNone/>
-              </a:pPr>
-              <a:r>
-                <a:rPr lang="es-419" sz="808">
-                  <a:solidFill>
-                    <a:schemeClr val="dk2"/>
-                  </a:solidFill>
-                </a:rPr>
-                <a:t>2919</a:t>
-              </a:r>
-              <a:endParaRPr sz="808">
-                <a:solidFill>
-                  <a:schemeClr val="dk2"/>
-                </a:solidFill>
-              </a:endParaRPr>
-            </a:p>
-          </p:txBody>
-        </p:sp>
-      </p:grpSp>
       <p:sp>
         <p:nvSpPr>
-          <p:cNvPr id="136" name="Google Shape;136;p20"/>
+          <p:cNvPr id="99" name="Google Shape;99;p21"/>
           <p:cNvSpPr txBox="1"/>
           <p:nvPr/>
         </p:nvSpPr>
@@ -9227,7 +7072,7 @@
       </p:sp>
       <p:grpSp>
         <p:nvGrpSpPr>
-          <p:cNvPr id="137" name="Google Shape;137;p20"/>
+          <p:cNvPr id="100" name="Google Shape;100;p21"/>
           <p:cNvGrpSpPr/>
           <p:nvPr/>
         </p:nvGrpSpPr>
@@ -9241,12 +7086,12 @@
         </p:grpSpPr>
         <p:pic>
           <p:nvPicPr>
-            <p:cNvPr id="138" name="Google Shape;138;p20" title="mean_replicates_prefilter.jpg"/>
+            <p:cNvPr id="101" name="Google Shape;101;p21" title="mean_replicates_prefilter.jpg"/>
             <p:cNvPicPr preferRelativeResize="0"/>
             <p:nvPr/>
           </p:nvPicPr>
           <p:blipFill rotWithShape="1">
-            <a:blip r:embed="rId4">
+            <a:blip r:embed="rId3">
               <a:alphaModFix/>
             </a:blip>
             <a:srcRect b="0" l="87149" r="0" t="0"/>
@@ -9268,12 +7113,12 @@
         </p:pic>
         <p:pic>
           <p:nvPicPr>
-            <p:cNvPr id="139" name="Google Shape;139;p20" title="mean_replicates_prefilter.jpg"/>
+            <p:cNvPr id="102" name="Google Shape;102;p21" title="mean_replicates_prefilter.jpg"/>
             <p:cNvPicPr preferRelativeResize="0"/>
             <p:nvPr/>
           </p:nvPicPr>
           <p:blipFill rotWithShape="1">
-            <a:blip r:embed="rId4">
+            <a:blip r:embed="rId3">
               <a:alphaModFix/>
             </a:blip>
             <a:srcRect b="0" l="0" r="31371" t="0"/>
@@ -9295,12 +7140,12 @@
         </p:pic>
         <p:pic>
           <p:nvPicPr>
-            <p:cNvPr id="140" name="Google Shape;140;p20" title="mean_replicates_prefilter.jpg"/>
+            <p:cNvPr id="103" name="Google Shape;103;p21" title="mean_replicates_prefilter.jpg"/>
             <p:cNvPicPr preferRelativeResize="0"/>
             <p:nvPr/>
           </p:nvPicPr>
           <p:blipFill rotWithShape="1">
-            <a:blip r:embed="rId4">
+            <a:blip r:embed="rId3">
               <a:alphaModFix/>
             </a:blip>
             <a:srcRect b="38266" l="69245" r="11846" t="43974"/>
@@ -9323,12 +7168,12 @@
       </p:grpSp>
       <p:pic>
         <p:nvPicPr>
-          <p:cNvPr id="141" name="Google Shape;141;p20" title="mean_replicates_postfilter.jpg"/>
+          <p:cNvPr id="104" name="Google Shape;104;p21" title="mean_replicates_postfilter.jpg"/>
           <p:cNvPicPr preferRelativeResize="0"/>
           <p:nvPr/>
         </p:nvPicPr>
         <p:blipFill>
-          <a:blip r:embed="rId5">
+          <a:blip r:embed="rId4">
             <a:alphaModFix/>
           </a:blip>
           <a:stretch>
@@ -9351,7 +7196,35 @@
       </p:pic>
       <p:pic>
         <p:nvPicPr>
-          <p:cNvPr id="142" name="Google Shape;142;p20" title="panel_d_var_replicates.jpg"/>
+          <p:cNvPr id="105" name="Google Shape;105;p21" title="panel_d_var_replicates.jpg"/>
+          <p:cNvPicPr preferRelativeResize="0"/>
+          <p:nvPr/>
+        </p:nvPicPr>
+        <p:blipFill>
+          <a:blip r:embed="rId5">
+            <a:alphaModFix/>
+          </a:blip>
+          <a:stretch>
+            <a:fillRect/>
+          </a:stretch>
+        </p:blipFill>
+        <p:spPr>
+          <a:xfrm>
+            <a:off x="2513125" y="2371369"/>
+            <a:ext cx="2391726" cy="2306479"/>
+          </a:xfrm>
+          <a:prstGeom prst="rect">
+            <a:avLst/>
+          </a:prstGeom>
+          <a:noFill/>
+          <a:ln>
+            <a:noFill/>
+          </a:ln>
+        </p:spPr>
+      </p:pic>
+      <p:pic>
+        <p:nvPicPr>
+          <p:cNvPr id="106" name="Google Shape;106;p21" title="panel_c_candidato2_venn_postfiltro.png"/>
           <p:cNvPicPr preferRelativeResize="0"/>
           <p:nvPr/>
         </p:nvPicPr>
@@ -9365,8 +7238,8 @@
         </p:blipFill>
         <p:spPr>
           <a:xfrm>
-            <a:off x="2513125" y="2371369"/>
-            <a:ext cx="2391726" cy="2306479"/>
+            <a:off x="2555675" y="196225"/>
+            <a:ext cx="2169923" cy="2169923"/>
           </a:xfrm>
           <a:prstGeom prst="rect">
             <a:avLst/>

--- a/docs/Fig R1.pptx
+++ b/docs/Fig R1.pptx
@@ -812,7 +812,7 @@
       </p:grpSpPr>
       <p:sp>
         <p:nvSpPr>
-          <p:cNvPr id="56" name="Google Shape;56;g3d678bf7346_0_0:notes"/>
+          <p:cNvPr id="56" name="Google Shape;56;g396169342f1_0_0:notes"/>
           <p:cNvSpPr/>
           <p:nvPr>
             <p:ph idx="2" type="sldImg"/>
@@ -847,7 +847,7 @@
       </p:sp>
       <p:sp>
         <p:nvSpPr>
-          <p:cNvPr id="57" name="Google Shape;57;g3d678bf7346_0_0:notes"/>
+          <p:cNvPr id="57" name="Google Shape;57;g396169342f1_0_0:notes"/>
           <p:cNvSpPr txBox="1"/>
           <p:nvPr>
             <p:ph idx="1" type="body"/>
@@ -911,7 +911,7 @@
       </p:grpSpPr>
       <p:sp>
         <p:nvSpPr>
-          <p:cNvPr id="61" name="Google Shape;61;g3d678bf7346_0_8:notes"/>
+          <p:cNvPr id="61" name="Google Shape;61;g3d678bf7346_0_0:notes"/>
           <p:cNvSpPr/>
           <p:nvPr>
             <p:ph idx="2" type="sldImg"/>
@@ -946,7 +946,7 @@
       </p:sp>
       <p:sp>
         <p:nvSpPr>
-          <p:cNvPr id="62" name="Google Shape;62;g3d678bf7346_0_8:notes"/>
+          <p:cNvPr id="62" name="Google Shape;62;g3d678bf7346_0_0:notes"/>
           <p:cNvSpPr txBox="1"/>
           <p:nvPr>
             <p:ph idx="1" type="body"/>
@@ -996,7 +996,7 @@
   <p:cSld>
     <p:spTree>
       <p:nvGrpSpPr>
-        <p:cNvPr id="67" name="Shape 67"/>
+        <p:cNvPr id="65" name="Shape 65"/>
         <p:cNvGrpSpPr/>
         <p:nvPr/>
       </p:nvGrpSpPr>
@@ -1010,7 +1010,7 @@
       </p:grpSpPr>
       <p:sp>
         <p:nvSpPr>
-          <p:cNvPr id="68" name="Google Shape;68;h4a488b9c3ec7d190_0_2:notes"/>
+          <p:cNvPr id="66" name="Google Shape;66;g3f5e045cd8f_0_8:notes"/>
           <p:cNvSpPr/>
           <p:nvPr>
             <p:ph idx="2" type="sldImg"/>
@@ -1045,7 +1045,7 @@
       </p:sp>
       <p:sp>
         <p:nvSpPr>
-          <p:cNvPr id="69" name="Google Shape;69;h4a488b9c3ec7d190_0_2:notes"/>
+          <p:cNvPr id="67" name="Google Shape;67;g3f5e045cd8f_0_8:notes"/>
           <p:cNvSpPr txBox="1"/>
           <p:nvPr>
             <p:ph idx="1" type="body"/>
@@ -1095,7 +1095,7 @@
   <p:cSld>
     <p:spTree>
       <p:nvGrpSpPr>
-        <p:cNvPr id="72" name="Shape 72"/>
+        <p:cNvPr id="70" name="Shape 70"/>
         <p:cNvGrpSpPr/>
         <p:nvPr/>
       </p:nvGrpSpPr>
@@ -1109,7 +1109,7 @@
       </p:grpSpPr>
       <p:sp>
         <p:nvSpPr>
-          <p:cNvPr id="73" name="Google Shape;73;g396169342f1_0_0:notes"/>
+          <p:cNvPr id="71" name="Google Shape;71;g3d678bf7346_0_17:notes"/>
           <p:cNvSpPr/>
           <p:nvPr>
             <p:ph idx="2" type="sldImg"/>
@@ -1144,7 +1144,7 @@
       </p:sp>
       <p:sp>
         <p:nvSpPr>
-          <p:cNvPr id="74" name="Google Shape;74;g396169342f1_0_0:notes"/>
+          <p:cNvPr id="72" name="Google Shape;72;g3d678bf7346_0_17:notes"/>
           <p:cNvSpPr txBox="1"/>
           <p:nvPr>
             <p:ph idx="1" type="body"/>
@@ -1194,7 +1194,7 @@
   <p:cSld>
     <p:spTree>
       <p:nvGrpSpPr>
-        <p:cNvPr id="77" name="Shape 77"/>
+        <p:cNvPr id="75" name="Shape 75"/>
         <p:cNvGrpSpPr/>
         <p:nvPr/>
       </p:nvGrpSpPr>
@@ -1208,7 +1208,7 @@
       </p:grpSpPr>
       <p:sp>
         <p:nvSpPr>
-          <p:cNvPr id="78" name="Google Shape;78;g3f5e045cd8f_0_8:notes"/>
+          <p:cNvPr id="76" name="Google Shape;76;g3d678bf7346_0_8:notes"/>
           <p:cNvSpPr/>
           <p:nvPr>
             <p:ph idx="2" type="sldImg"/>
@@ -1243,7 +1243,7 @@
       </p:sp>
       <p:sp>
         <p:nvSpPr>
-          <p:cNvPr id="79" name="Google Shape;79;g3f5e045cd8f_0_8:notes"/>
+          <p:cNvPr id="77" name="Google Shape;77;g3d678bf7346_0_8:notes"/>
           <p:cNvSpPr txBox="1"/>
           <p:nvPr>
             <p:ph idx="1" type="body"/>
@@ -1307,7 +1307,7 @@
       </p:grpSpPr>
       <p:sp>
         <p:nvSpPr>
-          <p:cNvPr id="83" name="Google Shape;83;g3f5e045cd8f_0_2:notes"/>
+          <p:cNvPr id="83" name="Google Shape;83;h4a488b9c3ec7d190_0_2:notes"/>
           <p:cNvSpPr/>
           <p:nvPr>
             <p:ph idx="2" type="sldImg"/>
@@ -1342,7 +1342,7 @@
       </p:sp>
       <p:sp>
         <p:nvSpPr>
-          <p:cNvPr id="84" name="Google Shape;84;g3f5e045cd8f_0_2:notes"/>
+          <p:cNvPr id="84" name="Google Shape;84;h4a488b9c3ec7d190_0_2:notes"/>
           <p:cNvSpPr txBox="1"/>
           <p:nvPr>
             <p:ph idx="1" type="body"/>
@@ -1406,7 +1406,7 @@
       </p:grpSpPr>
       <p:sp>
         <p:nvSpPr>
-          <p:cNvPr id="88" name="Google Shape;88;g3d678bf7346_0_23:notes"/>
+          <p:cNvPr id="88" name="Google Shape;88;g3f5e045cd8f_0_2:notes"/>
           <p:cNvSpPr/>
           <p:nvPr>
             <p:ph idx="2" type="sldImg"/>
@@ -1441,7 +1441,7 @@
       </p:sp>
       <p:sp>
         <p:nvSpPr>
-          <p:cNvPr id="89" name="Google Shape;89;g3d678bf7346_0_23:notes"/>
+          <p:cNvPr id="89" name="Google Shape;89;g3f5e045cd8f_0_2:notes"/>
           <p:cNvSpPr txBox="1"/>
           <p:nvPr>
             <p:ph idx="1" type="body"/>
@@ -1491,7 +1491,7 @@
   <p:cSld>
     <p:spTree>
       <p:nvGrpSpPr>
-        <p:cNvPr id="95" name="Shape 95"/>
+        <p:cNvPr id="92" name="Shape 92"/>
         <p:cNvGrpSpPr/>
         <p:nvPr/>
       </p:nvGrpSpPr>
@@ -1505,7 +1505,7 @@
       </p:grpSpPr>
       <p:sp>
         <p:nvSpPr>
-          <p:cNvPr id="96" name="Google Shape;96;g3d678bf7346_0_17:notes"/>
+          <p:cNvPr id="93" name="Google Shape;93;g3d678bf7346_0_23:notes"/>
           <p:cNvSpPr/>
           <p:nvPr>
             <p:ph idx="2" type="sldImg"/>
@@ -1540,7 +1540,7 @@
       </p:sp>
       <p:sp>
         <p:nvSpPr>
-          <p:cNvPr id="97" name="Google Shape;97;g3d678bf7346_0_17:notes"/>
+          <p:cNvPr id="94" name="Google Shape;94;g3d678bf7346_0_23:notes"/>
           <p:cNvSpPr txBox="1"/>
           <p:nvPr>
             <p:ph idx="1" type="body"/>
@@ -6306,7 +6306,7 @@
       </p:grpSpPr>
       <p:pic>
         <p:nvPicPr>
-          <p:cNvPr id="59" name="Google Shape;59;p14" title="representatividad_library_venn.png"/>
+          <p:cNvPr id="59" name="Google Shape;59;p14" title="spike_in_robustez.jpg"/>
           <p:cNvPicPr preferRelativeResize="0"/>
           <p:nvPr/>
         </p:nvPicPr>
@@ -6321,7 +6321,7 @@
         <p:spPr>
           <a:xfrm>
             <a:off x="152400" y="152400"/>
-            <a:ext cx="3271624" cy="3271624"/>
+            <a:ext cx="6451599" cy="4838700"/>
           </a:xfrm>
           <a:prstGeom prst="rect">
             <a:avLst/>
@@ -6359,7 +6359,166 @@
       </p:grpSpPr>
       <p:pic>
         <p:nvPicPr>
-          <p:cNvPr id="64" name="Google Shape;64;p15" title="panel_a_venn_presort2022.png"/>
+          <p:cNvPr id="64" name="Google Shape;64;p15" title="representatividad_library_venn.png"/>
+          <p:cNvPicPr preferRelativeResize="0"/>
+          <p:nvPr/>
+        </p:nvPicPr>
+        <p:blipFill>
+          <a:blip r:embed="rId3">
+            <a:alphaModFix/>
+          </a:blip>
+          <a:stretch>
+            <a:fillRect/>
+          </a:stretch>
+        </p:blipFill>
+        <p:spPr>
+          <a:xfrm>
+            <a:off x="152400" y="152400"/>
+            <a:ext cx="3271624" cy="3271624"/>
+          </a:xfrm>
+          <a:prstGeom prst="rect">
+            <a:avLst/>
+          </a:prstGeom>
+          <a:noFill/>
+          <a:ln>
+            <a:noFill/>
+          </a:ln>
+        </p:spPr>
+      </p:pic>
+    </p:spTree>
+  </p:cSld>
+  <p:clrMapOvr>
+    <a:masterClrMapping/>
+  </p:clrMapOvr>
+</p:sld>
+</file>
+
+<file path=ppt/slides/slide4.xml><?xml version="1.0" encoding="utf-8"?>
+<p:sld xmlns:a="http://schemas.openxmlformats.org/drawingml/2006/main" xmlns:r="http://schemas.openxmlformats.org/officeDocument/2006/relationships" xmlns:mc="http://schemas.openxmlformats.org/markup-compatibility/2006" xmlns:mv="urn:schemas-microsoft-com:mac:vml" xmlns:p="http://schemas.openxmlformats.org/presentationml/2006/main" xmlns:c="http://schemas.openxmlformats.org/drawingml/2006/chart" xmlns:dgm="http://schemas.openxmlformats.org/drawingml/2006/diagram" xmlns:o="urn:schemas-microsoft-com:office:office" xmlns:v="urn:schemas-microsoft-com:vml" xmlns:pvml="urn:schemas-microsoft-com:office:powerpoint" xmlns:com="http://schemas.openxmlformats.org/drawingml/2006/compatibility" xmlns:p14="http://schemas.microsoft.com/office/powerpoint/2010/main" xmlns:p15="http://schemas.microsoft.com/office/powerpoint/2012/main" xmlns:ahyp="http://schemas.microsoft.com/office/drawing/2018/hyperlinkcolor">
+  <p:cSld>
+    <p:spTree>
+      <p:nvGrpSpPr>
+        <p:cNvPr id="68" name="Shape 68"/>
+        <p:cNvGrpSpPr/>
+        <p:nvPr/>
+      </p:nvGrpSpPr>
+      <p:grpSpPr>
+        <a:xfrm>
+          <a:off x="0" y="0"/>
+          <a:ext cx="0" cy="0"/>
+          <a:chOff x="0" y="0"/>
+          <a:chExt cx="0" cy="0"/>
+        </a:xfrm>
+      </p:grpSpPr>
+      <p:pic>
+        <p:nvPicPr>
+          <p:cNvPr id="69" name="Google Shape;69;p16" title="histograma_gates_KIAA0753.jpg"/>
+          <p:cNvPicPr preferRelativeResize="0"/>
+          <p:nvPr/>
+        </p:nvPicPr>
+        <p:blipFill>
+          <a:blip r:embed="rId3">
+            <a:alphaModFix/>
+          </a:blip>
+          <a:stretch>
+            <a:fillRect/>
+          </a:stretch>
+        </p:blipFill>
+        <p:spPr>
+          <a:xfrm>
+            <a:off x="3152400" y="152400"/>
+            <a:ext cx="5839201" cy="4379401"/>
+          </a:xfrm>
+          <a:prstGeom prst="rect">
+            <a:avLst/>
+          </a:prstGeom>
+          <a:noFill/>
+          <a:ln>
+            <a:noFill/>
+          </a:ln>
+        </p:spPr>
+      </p:pic>
+    </p:spTree>
+  </p:cSld>
+  <p:clrMapOvr>
+    <a:masterClrMapping/>
+  </p:clrMapOvr>
+</p:sld>
+</file>
+
+<file path=ppt/slides/slide5.xml><?xml version="1.0" encoding="utf-8"?>
+<p:sld xmlns:a="http://schemas.openxmlformats.org/drawingml/2006/main" xmlns:r="http://schemas.openxmlformats.org/officeDocument/2006/relationships" xmlns:mc="http://schemas.openxmlformats.org/markup-compatibility/2006" xmlns:mv="urn:schemas-microsoft-com:mac:vml" xmlns:p="http://schemas.openxmlformats.org/presentationml/2006/main" xmlns:c="http://schemas.openxmlformats.org/drawingml/2006/chart" xmlns:dgm="http://schemas.openxmlformats.org/drawingml/2006/diagram" xmlns:o="urn:schemas-microsoft-com:office:office" xmlns:v="urn:schemas-microsoft-com:vml" xmlns:pvml="urn:schemas-microsoft-com:office:powerpoint" xmlns:com="http://schemas.openxmlformats.org/drawingml/2006/compatibility" xmlns:p14="http://schemas.microsoft.com/office/powerpoint/2010/main" xmlns:p15="http://schemas.microsoft.com/office/powerpoint/2012/main" xmlns:ahyp="http://schemas.microsoft.com/office/drawing/2018/hyperlinkcolor">
+  <p:cSld>
+    <p:spTree>
+      <p:nvGrpSpPr>
+        <p:cNvPr id="73" name="Shape 73"/>
+        <p:cNvGrpSpPr/>
+        <p:nvPr/>
+      </p:nvGrpSpPr>
+      <p:grpSpPr>
+        <a:xfrm>
+          <a:off x="0" y="0"/>
+          <a:ext cx="0" cy="0"/>
+          <a:chOff x="0" y="0"/>
+          <a:chExt cx="0" cy="0"/>
+        </a:xfrm>
+      </p:grpSpPr>
+      <p:pic>
+        <p:nvPicPr>
+          <p:cNvPr id="74" name="Google Shape;74;p17" title="filtros_consistencia_replicas.jpg"/>
+          <p:cNvPicPr preferRelativeResize="0"/>
+          <p:nvPr/>
+        </p:nvPicPr>
+        <p:blipFill>
+          <a:blip r:embed="rId3">
+            <a:alphaModFix/>
+          </a:blip>
+          <a:stretch>
+            <a:fillRect/>
+          </a:stretch>
+        </p:blipFill>
+        <p:spPr>
+          <a:xfrm>
+            <a:off x="152400" y="152400"/>
+            <a:ext cx="4752425" cy="4218705"/>
+          </a:xfrm>
+          <a:prstGeom prst="rect">
+            <a:avLst/>
+          </a:prstGeom>
+          <a:noFill/>
+          <a:ln>
+            <a:noFill/>
+          </a:ln>
+        </p:spPr>
+      </p:pic>
+    </p:spTree>
+  </p:cSld>
+  <p:clrMapOvr>
+    <a:masterClrMapping/>
+  </p:clrMapOvr>
+</p:sld>
+</file>
+
+<file path=ppt/slides/slide6.xml><?xml version="1.0" encoding="utf-8"?>
+<p:sld xmlns:a="http://schemas.openxmlformats.org/drawingml/2006/main" xmlns:r="http://schemas.openxmlformats.org/officeDocument/2006/relationships" xmlns:mc="http://schemas.openxmlformats.org/markup-compatibility/2006" xmlns:mv="urn:schemas-microsoft-com:mac:vml" xmlns:p="http://schemas.openxmlformats.org/presentationml/2006/main" xmlns:c="http://schemas.openxmlformats.org/drawingml/2006/chart" xmlns:dgm="http://schemas.openxmlformats.org/drawingml/2006/diagram" xmlns:o="urn:schemas-microsoft-com:office:office" xmlns:v="urn:schemas-microsoft-com:vml" xmlns:pvml="urn:schemas-microsoft-com:office:powerpoint" xmlns:com="http://schemas.openxmlformats.org/drawingml/2006/compatibility" xmlns:p14="http://schemas.microsoft.com/office/powerpoint/2010/main" xmlns:p15="http://schemas.microsoft.com/office/powerpoint/2012/main" xmlns:ahyp="http://schemas.microsoft.com/office/drawing/2018/hyperlinkcolor">
+  <p:cSld>
+    <p:spTree>
+      <p:nvGrpSpPr>
+        <p:cNvPr id="78" name="Shape 78"/>
+        <p:cNvGrpSpPr/>
+        <p:nvPr/>
+      </p:nvGrpSpPr>
+      <p:grpSpPr>
+        <a:xfrm>
+          <a:off x="0" y="0"/>
+          <a:ext cx="0" cy="0"/>
+          <a:chOff x="0" y="0"/>
+          <a:chExt cx="0" cy="0"/>
+        </a:xfrm>
+      </p:grpSpPr>
+      <p:pic>
+        <p:nvPicPr>
+          <p:cNvPr id="79" name="Google Shape;79;p18" title="panel_a_venn_presort2022.png"/>
           <p:cNvPicPr preferRelativeResize="0"/>
           <p:nvPr/>
         </p:nvPicPr>
@@ -6387,7 +6546,7 @@
       </p:pic>
       <p:pic>
         <p:nvPicPr>
-          <p:cNvPr id="65" name="Google Shape;65;p15" title="panel_b_gc_bias_violin.jpg"/>
+          <p:cNvPr id="80" name="Google Shape;80;p18" title="panel_b_gc_bias_violin.jpg"/>
           <p:cNvPicPr preferRelativeResize="0"/>
           <p:nvPr/>
         </p:nvPicPr>
@@ -6415,7 +6574,7 @@
       </p:pic>
       <p:pic>
         <p:nvPicPr>
-          <p:cNvPr id="66" name="Google Shape;66;p15" title="panel_c_gc_bias_bars.jpg"/>
+          <p:cNvPr id="81" name="Google Shape;81;p18" title="panel_c_gc_bias_bars.jpg"/>
           <p:cNvPicPr preferRelativeResize="0"/>
           <p:nvPr/>
         </p:nvPicPr>
@@ -6431,165 +6590,6 @@
           <a:xfrm>
             <a:off x="184850" y="2960925"/>
             <a:ext cx="3592648" cy="1864749"/>
-          </a:xfrm>
-          <a:prstGeom prst="rect">
-            <a:avLst/>
-          </a:prstGeom>
-          <a:noFill/>
-          <a:ln>
-            <a:noFill/>
-          </a:ln>
-        </p:spPr>
-      </p:pic>
-    </p:spTree>
-  </p:cSld>
-  <p:clrMapOvr>
-    <a:masterClrMapping/>
-  </p:clrMapOvr>
-</p:sld>
-</file>
-
-<file path=ppt/slides/slide4.xml><?xml version="1.0" encoding="utf-8"?>
-<p:sld xmlns:a="http://schemas.openxmlformats.org/drawingml/2006/main" xmlns:r="http://schemas.openxmlformats.org/officeDocument/2006/relationships" xmlns:mc="http://schemas.openxmlformats.org/markup-compatibility/2006" xmlns:mv="urn:schemas-microsoft-com:mac:vml" xmlns:p="http://schemas.openxmlformats.org/presentationml/2006/main" xmlns:c="http://schemas.openxmlformats.org/drawingml/2006/chart" xmlns:dgm="http://schemas.openxmlformats.org/drawingml/2006/diagram" xmlns:o="urn:schemas-microsoft-com:office:office" xmlns:v="urn:schemas-microsoft-com:vml" xmlns:pvml="urn:schemas-microsoft-com:office:powerpoint" xmlns:com="http://schemas.openxmlformats.org/drawingml/2006/compatibility" xmlns:p14="http://schemas.microsoft.com/office/powerpoint/2010/main" xmlns:p15="http://schemas.microsoft.com/office/powerpoint/2012/main" xmlns:ahyp="http://schemas.microsoft.com/office/drawing/2018/hyperlinkcolor">
-  <p:cSld>
-    <p:spTree>
-      <p:nvGrpSpPr>
-        <p:cNvPr id="70" name="Shape 70"/>
-        <p:cNvGrpSpPr/>
-        <p:nvPr/>
-      </p:nvGrpSpPr>
-      <p:grpSpPr>
-        <a:xfrm>
-          <a:off x="0" y="0"/>
-          <a:ext cx="0" cy="0"/>
-          <a:chOff x="0" y="0"/>
-          <a:chExt cx="0" cy="0"/>
-        </a:xfrm>
-      </p:grpSpPr>
-      <p:pic>
-        <p:nvPicPr>
-          <p:cNvPr id="71" name="Google Shape;71;p16" title="g4_retencion_por_gc.jpg"/>
-          <p:cNvPicPr preferRelativeResize="0"/>
-          <p:nvPr/>
-        </p:nvPicPr>
-        <p:blipFill>
-          <a:blip r:embed="rId3">
-            <a:alphaModFix/>
-          </a:blip>
-          <a:stretch>
-            <a:fillRect/>
-          </a:stretch>
-        </p:blipFill>
-        <p:spPr>
-          <a:xfrm>
-            <a:off x="152400" y="152400"/>
-            <a:ext cx="6597642" cy="4838701"/>
-          </a:xfrm>
-          <a:prstGeom prst="rect">
-            <a:avLst/>
-          </a:prstGeom>
-          <a:noFill/>
-          <a:ln>
-            <a:noFill/>
-          </a:ln>
-        </p:spPr>
-      </p:pic>
-    </p:spTree>
-  </p:cSld>
-  <p:clrMapOvr>
-    <a:masterClrMapping/>
-  </p:clrMapOvr>
-</p:sld>
-</file>
-
-<file path=ppt/slides/slide5.xml><?xml version="1.0" encoding="utf-8"?>
-<p:sld xmlns:a="http://schemas.openxmlformats.org/drawingml/2006/main" xmlns:r="http://schemas.openxmlformats.org/officeDocument/2006/relationships" xmlns:mc="http://schemas.openxmlformats.org/markup-compatibility/2006" xmlns:mv="urn:schemas-microsoft-com:mac:vml" xmlns:p="http://schemas.openxmlformats.org/presentationml/2006/main" xmlns:c="http://schemas.openxmlformats.org/drawingml/2006/chart" xmlns:dgm="http://schemas.openxmlformats.org/drawingml/2006/diagram" xmlns:o="urn:schemas-microsoft-com:office:office" xmlns:v="urn:schemas-microsoft-com:vml" xmlns:pvml="urn:schemas-microsoft-com:office:powerpoint" xmlns:com="http://schemas.openxmlformats.org/drawingml/2006/compatibility" xmlns:p14="http://schemas.microsoft.com/office/powerpoint/2010/main" xmlns:p15="http://schemas.microsoft.com/office/powerpoint/2012/main" xmlns:ahyp="http://schemas.microsoft.com/office/drawing/2018/hyperlinkcolor">
-  <p:cSld>
-    <p:spTree>
-      <p:nvGrpSpPr>
-        <p:cNvPr id="75" name="Shape 75"/>
-        <p:cNvGrpSpPr/>
-        <p:nvPr/>
-      </p:nvGrpSpPr>
-      <p:grpSpPr>
-        <a:xfrm>
-          <a:off x="0" y="0"/>
-          <a:ext cx="0" cy="0"/>
-          <a:chOff x="0" y="0"/>
-          <a:chExt cx="0" cy="0"/>
-        </a:xfrm>
-      </p:grpSpPr>
-      <p:pic>
-        <p:nvPicPr>
-          <p:cNvPr id="76" name="Google Shape;76;p17" title="spike_in_robustez.jpg"/>
-          <p:cNvPicPr preferRelativeResize="0"/>
-          <p:nvPr/>
-        </p:nvPicPr>
-        <p:blipFill>
-          <a:blip r:embed="rId3">
-            <a:alphaModFix/>
-          </a:blip>
-          <a:stretch>
-            <a:fillRect/>
-          </a:stretch>
-        </p:blipFill>
-        <p:spPr>
-          <a:xfrm>
-            <a:off x="152400" y="152400"/>
-            <a:ext cx="6451599" cy="4838700"/>
-          </a:xfrm>
-          <a:prstGeom prst="rect">
-            <a:avLst/>
-          </a:prstGeom>
-          <a:noFill/>
-          <a:ln>
-            <a:noFill/>
-          </a:ln>
-        </p:spPr>
-      </p:pic>
-    </p:spTree>
-  </p:cSld>
-  <p:clrMapOvr>
-    <a:masterClrMapping/>
-  </p:clrMapOvr>
-</p:sld>
-</file>
-
-<file path=ppt/slides/slide6.xml><?xml version="1.0" encoding="utf-8"?>
-<p:sld xmlns:a="http://schemas.openxmlformats.org/drawingml/2006/main" xmlns:r="http://schemas.openxmlformats.org/officeDocument/2006/relationships" xmlns:mc="http://schemas.openxmlformats.org/markup-compatibility/2006" xmlns:mv="urn:schemas-microsoft-com:mac:vml" xmlns:p="http://schemas.openxmlformats.org/presentationml/2006/main" xmlns:c="http://schemas.openxmlformats.org/drawingml/2006/chart" xmlns:dgm="http://schemas.openxmlformats.org/drawingml/2006/diagram" xmlns:o="urn:schemas-microsoft-com:office:office" xmlns:v="urn:schemas-microsoft-com:vml" xmlns:pvml="urn:schemas-microsoft-com:office:powerpoint" xmlns:com="http://schemas.openxmlformats.org/drawingml/2006/compatibility" xmlns:p14="http://schemas.microsoft.com/office/powerpoint/2010/main" xmlns:p15="http://schemas.microsoft.com/office/powerpoint/2012/main" xmlns:ahyp="http://schemas.microsoft.com/office/drawing/2018/hyperlinkcolor">
-  <p:cSld>
-    <p:spTree>
-      <p:nvGrpSpPr>
-        <p:cNvPr id="80" name="Shape 80"/>
-        <p:cNvGrpSpPr/>
-        <p:nvPr/>
-      </p:nvGrpSpPr>
-      <p:grpSpPr>
-        <a:xfrm>
-          <a:off x="0" y="0"/>
-          <a:ext cx="0" cy="0"/>
-          <a:chOff x="0" y="0"/>
-          <a:chExt cx="0" cy="0"/>
-        </a:xfrm>
-      </p:grpSpPr>
-      <p:pic>
-        <p:nvPicPr>
-          <p:cNvPr id="81" name="Google Shape;81;p18" title="histograma_gates_KIAA0753.jpg"/>
-          <p:cNvPicPr preferRelativeResize="0"/>
-          <p:nvPr/>
-        </p:nvPicPr>
-        <p:blipFill>
-          <a:blip r:embed="rId3">
-            <a:alphaModFix/>
-          </a:blip>
-          <a:stretch>
-            <a:fillRect/>
-          </a:stretch>
-        </p:blipFill>
-        <p:spPr>
-          <a:xfrm>
-            <a:off x="3152400" y="152400"/>
-            <a:ext cx="5839201" cy="4379401"/>
           </a:xfrm>
           <a:prstGeom prst="rect">
             <a:avLst/>
@@ -6627,7 +6627,7 @@
       </p:grpSpPr>
       <p:pic>
         <p:nvPicPr>
-          <p:cNvPr id="86" name="Google Shape;86;p19" title="densidad_individual_promotores.jpg"/>
+          <p:cNvPr id="86" name="Google Shape;86;p19" title="g4_retencion_por_gc.jpg"/>
           <p:cNvPicPr preferRelativeResize="0"/>
           <p:nvPr/>
         </p:nvPicPr>
@@ -6641,8 +6641,8 @@
         </p:blipFill>
         <p:spPr>
           <a:xfrm>
-            <a:off x="1382025" y="136325"/>
-            <a:ext cx="4761933" cy="3571450"/>
+            <a:off x="152400" y="152400"/>
+            <a:ext cx="6597642" cy="4838701"/>
           </a:xfrm>
           <a:prstGeom prst="rect">
             <a:avLst/>
@@ -6680,7 +6680,60 @@
       </p:grpSpPr>
       <p:pic>
         <p:nvPicPr>
-          <p:cNvPr id="91" name="Google Shape;91;p20"/>
+          <p:cNvPr id="91" name="Google Shape;91;p20" title="densidad_individual_promotores.jpg"/>
+          <p:cNvPicPr preferRelativeResize="0"/>
+          <p:nvPr/>
+        </p:nvPicPr>
+        <p:blipFill>
+          <a:blip r:embed="rId3">
+            <a:alphaModFix/>
+          </a:blip>
+          <a:stretch>
+            <a:fillRect/>
+          </a:stretch>
+        </p:blipFill>
+        <p:spPr>
+          <a:xfrm>
+            <a:off x="1382025" y="136325"/>
+            <a:ext cx="4761933" cy="3571450"/>
+          </a:xfrm>
+          <a:prstGeom prst="rect">
+            <a:avLst/>
+          </a:prstGeom>
+          <a:noFill/>
+          <a:ln>
+            <a:noFill/>
+          </a:ln>
+        </p:spPr>
+      </p:pic>
+    </p:spTree>
+  </p:cSld>
+  <p:clrMapOvr>
+    <a:masterClrMapping/>
+  </p:clrMapOvr>
+</p:sld>
+</file>
+
+<file path=ppt/slides/slide9.xml><?xml version="1.0" encoding="utf-8"?>
+<p:sld xmlns:a="http://schemas.openxmlformats.org/drawingml/2006/main" xmlns:r="http://schemas.openxmlformats.org/officeDocument/2006/relationships" xmlns:mc="http://schemas.openxmlformats.org/markup-compatibility/2006" xmlns:mv="urn:schemas-microsoft-com:mac:vml" xmlns:p="http://schemas.openxmlformats.org/presentationml/2006/main" xmlns:c="http://schemas.openxmlformats.org/drawingml/2006/chart" xmlns:dgm="http://schemas.openxmlformats.org/drawingml/2006/diagram" xmlns:o="urn:schemas-microsoft-com:office:office" xmlns:v="urn:schemas-microsoft-com:vml" xmlns:pvml="urn:schemas-microsoft-com:office:powerpoint" xmlns:com="http://schemas.openxmlformats.org/drawingml/2006/compatibility" xmlns:p14="http://schemas.microsoft.com/office/powerpoint/2010/main" xmlns:p15="http://schemas.microsoft.com/office/powerpoint/2012/main" xmlns:ahyp="http://schemas.microsoft.com/office/drawing/2018/hyperlinkcolor">
+  <p:cSld>
+    <p:spTree>
+      <p:nvGrpSpPr>
+        <p:cNvPr id="95" name="Shape 95"/>
+        <p:cNvGrpSpPr/>
+        <p:nvPr/>
+      </p:nvGrpSpPr>
+      <p:grpSpPr>
+        <a:xfrm>
+          <a:off x="0" y="0"/>
+          <a:ext cx="0" cy="0"/>
+          <a:chOff x="0" y="0"/>
+          <a:chExt cx="0" cy="0"/>
+        </a:xfrm>
+      </p:grpSpPr>
+      <p:pic>
+        <p:nvPicPr>
+          <p:cNvPr id="96" name="Google Shape;96;p21"/>
           <p:cNvPicPr preferRelativeResize="0"/>
           <p:nvPr/>
         </p:nvPicPr>
@@ -6708,7 +6761,7 @@
       </p:pic>
       <p:pic>
         <p:nvPicPr>
-          <p:cNvPr id="92" name="Google Shape;92;p20"/>
+          <p:cNvPr id="97" name="Google Shape;97;p21"/>
           <p:cNvPicPr preferRelativeResize="0"/>
           <p:nvPr/>
         </p:nvPicPr>
@@ -6736,7 +6789,7 @@
       </p:pic>
       <p:sp>
         <p:nvSpPr>
-          <p:cNvPr id="93" name="Google Shape;93;p20"/>
+          <p:cNvPr id="98" name="Google Shape;98;p21"/>
           <p:cNvSpPr txBox="1"/>
           <p:nvPr/>
         </p:nvSpPr>
@@ -6842,7 +6895,7 @@
       </p:sp>
       <p:pic>
         <p:nvPicPr>
-          <p:cNvPr id="94" name="Google Shape;94;p20" title="panel_b_histograma_gates_ejemplo.jpg"/>
+          <p:cNvPr id="99" name="Google Shape;99;p21" title="panel_b_histograma_gates_ejemplo.jpg"/>
           <p:cNvPicPr preferRelativeResize="0"/>
           <p:nvPr/>
         </p:nvPicPr>
@@ -6876,389 +6929,286 @@
 </p:sld>
 </file>
 
-<file path=ppt/slides/slide9.xml><?xml version="1.0" encoding="utf-8"?>
-<p:sld xmlns:a="http://schemas.openxmlformats.org/drawingml/2006/main" xmlns:r="http://schemas.openxmlformats.org/officeDocument/2006/relationships" xmlns:mc="http://schemas.openxmlformats.org/markup-compatibility/2006" xmlns:mv="urn:schemas-microsoft-com:mac:vml" xmlns:p="http://schemas.openxmlformats.org/presentationml/2006/main" xmlns:c="http://schemas.openxmlformats.org/drawingml/2006/chart" xmlns:dgm="http://schemas.openxmlformats.org/drawingml/2006/diagram" xmlns:o="urn:schemas-microsoft-com:office:office" xmlns:v="urn:schemas-microsoft-com:vml" xmlns:pvml="urn:schemas-microsoft-com:office:powerpoint" xmlns:com="http://schemas.openxmlformats.org/drawingml/2006/compatibility" xmlns:p14="http://schemas.microsoft.com/office/powerpoint/2010/main" xmlns:p15="http://schemas.microsoft.com/office/powerpoint/2012/main" xmlns:ahyp="http://schemas.microsoft.com/office/drawing/2018/hyperlinkcolor">
-  <p:cSld>
-    <p:spTree>
-      <p:nvGrpSpPr>
-        <p:cNvPr id="98" name="Shape 98"/>
-        <p:cNvGrpSpPr/>
-        <p:nvPr/>
-      </p:nvGrpSpPr>
-      <p:grpSpPr>
-        <a:xfrm>
-          <a:off x="0" y="0"/>
-          <a:ext cx="0" cy="0"/>
-          <a:chOff x="0" y="0"/>
-          <a:chExt cx="0" cy="0"/>
-        </a:xfrm>
-      </p:grpSpPr>
-      <p:sp>
-        <p:nvSpPr>
-          <p:cNvPr id="99" name="Google Shape;99;p21"/>
-          <p:cNvSpPr txBox="1"/>
-          <p:nvPr/>
-        </p:nvSpPr>
-        <p:spPr>
-          <a:xfrm>
-            <a:off x="5057225" y="91400"/>
-            <a:ext cx="3948900" cy="4051200"/>
-          </a:xfrm>
-          <a:prstGeom prst="rect">
-            <a:avLst/>
-          </a:prstGeom>
-          <a:noFill/>
-          <a:ln>
-            <a:noFill/>
-          </a:ln>
-        </p:spPr>
-        <p:txBody>
-          <a:bodyPr anchorCtr="0" anchor="t" bIns="91425" lIns="91425" spcFirstLastPara="1" rIns="91425" wrap="square" tIns="91425">
-            <a:spAutoFit/>
-          </a:bodyPr>
-          <a:lstStyle/>
-          <a:p>
-            <a:pPr indent="0" lvl="0" marL="0" rtl="0" algn="l">
-              <a:spcBef>
-                <a:spcPts val="0"/>
-              </a:spcBef>
-              <a:spcAft>
-                <a:spcPts val="0"/>
-              </a:spcAft>
-              <a:buNone/>
-            </a:pPr>
-            <a:r>
-              <a:rPr b="1" lang="es-419" sz="1200"/>
-              <a:t>Análisis de correlación y consistencia entre réplicas de secuenciación. </a:t>
-            </a:r>
-            <a:endParaRPr b="1" sz="1200"/>
-          </a:p>
-          <a:p>
-            <a:pPr indent="0" lvl="0" marL="0" rtl="0" algn="l">
-              <a:lnSpc>
-                <a:spcPct val="115000"/>
-              </a:lnSpc>
-              <a:spcBef>
-                <a:spcPts val="1200"/>
-              </a:spcBef>
-              <a:spcAft>
-                <a:spcPts val="0"/>
-              </a:spcAft>
-              <a:buClr>
-                <a:schemeClr val="dk1"/>
-              </a:buClr>
-              <a:buSzPts val="1100"/>
-              <a:buFont typeface="Arial"/>
-              <a:buNone/>
-            </a:pPr>
-            <a:r>
-              <a:rPr b="1" lang="es-419" sz="1200">
-                <a:solidFill>
-                  <a:schemeClr val="dk1"/>
-                </a:solidFill>
-              </a:rPr>
-              <a:t>(A-B)</a:t>
-            </a:r>
-            <a:r>
-              <a:rPr lang="es-419" sz="1200">
-                <a:solidFill>
-                  <a:schemeClr val="dk1"/>
-                </a:solidFill>
-              </a:rPr>
-              <a:t> Gráfico de dispersión que muestra la correlación de la media de expresión entre las dos réplicas experimentales antes (A) y después (A confianza alta, y B) de aplicar los filtros de consistencia (coeficientes de </a:t>
-            </a:r>
-            <a:r>
-              <a:rPr i="1" lang="es-419" sz="1200">
-                <a:solidFill>
-                  <a:schemeClr val="dk1"/>
-                </a:solidFill>
-              </a:rPr>
-              <a:t>Pearson</a:t>
-            </a:r>
-            <a:r>
-              <a:rPr lang="es-419" sz="1200">
-                <a:solidFill>
-                  <a:schemeClr val="dk1"/>
-                </a:solidFill>
-              </a:rPr>
-              <a:t> de 0.72 y 0.85, respectivamente). Los </a:t>
-            </a:r>
-            <a:r>
-              <a:rPr i="1" lang="es-419" sz="1200">
-                <a:solidFill>
-                  <a:schemeClr val="dk1"/>
-                </a:solidFill>
-              </a:rPr>
-              <a:t>counts</a:t>
-            </a:r>
-            <a:r>
-              <a:rPr lang="es-419" sz="1200">
-                <a:solidFill>
-                  <a:schemeClr val="dk1"/>
-                </a:solidFill>
-              </a:rPr>
-              <a:t> mínimos y la eliminación de perfiles bimodales incrementan la robustez de la determinación de la actividad. </a:t>
-            </a:r>
-            <a:r>
-              <a:rPr b="1" lang="es-419" sz="1200">
-                <a:solidFill>
-                  <a:schemeClr val="dk1"/>
-                </a:solidFill>
-              </a:rPr>
-              <a:t>(C)</a:t>
-            </a:r>
-            <a:r>
-              <a:rPr lang="es-419" sz="1200">
-                <a:solidFill>
-                  <a:schemeClr val="dk1"/>
-                </a:solidFill>
-              </a:rPr>
-              <a:t> Representación del subconjunto final de 12214 promotores de alta confianza seleccionados para los análisis subsiguientes, detallando su presencia por réplicas.</a:t>
-            </a:r>
-            <a:r>
-              <a:rPr b="1" lang="es-419" sz="1200">
-                <a:solidFill>
-                  <a:schemeClr val="dk1"/>
-                </a:solidFill>
-              </a:rPr>
-              <a:t>(D) </a:t>
-            </a:r>
-            <a:r>
-              <a:rPr lang="es-419" sz="1200">
-                <a:solidFill>
-                  <a:schemeClr val="dk1"/>
-                </a:solidFill>
-              </a:rPr>
-              <a:t>Gráfico de dispersión que muestra la correlación de la varianza de expresión entre las dos réplicas experimentales después de aplicar los filtros de consistencia (coeficientes de </a:t>
-            </a:r>
-            <a:r>
-              <a:rPr i="1" lang="es-419" sz="1200">
-                <a:solidFill>
-                  <a:schemeClr val="dk1"/>
-                </a:solidFill>
-              </a:rPr>
-              <a:t>Pearson</a:t>
-            </a:r>
-            <a:r>
-              <a:rPr lang="es-419" sz="1200">
-                <a:solidFill>
-                  <a:schemeClr val="dk1"/>
-                </a:solidFill>
-              </a:rPr>
-              <a:t> 0.31). </a:t>
-            </a:r>
-            <a:endParaRPr b="1" sz="1200">
-              <a:solidFill>
-                <a:schemeClr val="dk1"/>
-              </a:solidFill>
-            </a:endParaRPr>
-          </a:p>
-          <a:p>
-            <a:pPr indent="0" lvl="0" marL="0" rtl="0" algn="l">
-              <a:spcBef>
-                <a:spcPts val="1200"/>
-              </a:spcBef>
-              <a:spcAft>
-                <a:spcPts val="0"/>
-              </a:spcAft>
-              <a:buNone/>
-            </a:pPr>
-            <a:r>
-              <a:t/>
-            </a:r>
-            <a:endParaRPr b="1"/>
-          </a:p>
-        </p:txBody>
-      </p:sp>
-      <p:grpSp>
-        <p:nvGrpSpPr>
-          <p:cNvPr id="100" name="Google Shape;100;p21"/>
-          <p:cNvGrpSpPr/>
-          <p:nvPr/>
-        </p:nvGrpSpPr>
-        <p:grpSpPr>
-          <a:xfrm>
-            <a:off x="9" y="167053"/>
-            <a:ext cx="2391724" cy="2228275"/>
-            <a:chOff x="208625" y="-206579"/>
-            <a:chExt cx="4062721" cy="3785076"/>
-          </a:xfrm>
-        </p:grpSpPr>
-        <p:pic>
-          <p:nvPicPr>
-            <p:cNvPr id="101" name="Google Shape;101;p21" title="mean_replicates_prefilter.jpg"/>
-            <p:cNvPicPr preferRelativeResize="0"/>
-            <p:nvPr/>
-          </p:nvPicPr>
-          <p:blipFill rotWithShape="1">
-            <a:blip r:embed="rId3">
-              <a:alphaModFix/>
-            </a:blip>
-            <a:srcRect b="0" l="87149" r="0" t="0"/>
-            <a:stretch/>
-          </p:blipFill>
-          <p:spPr>
-            <a:xfrm>
-              <a:off x="3617220" y="-206579"/>
-              <a:ext cx="654126" cy="3785076"/>
-            </a:xfrm>
-            <a:prstGeom prst="rect">
-              <a:avLst/>
-            </a:prstGeom>
-            <a:noFill/>
-            <a:ln>
-              <a:noFill/>
-            </a:ln>
-          </p:spPr>
-        </p:pic>
-        <p:pic>
-          <p:nvPicPr>
-            <p:cNvPr id="102" name="Google Shape;102;p21" title="mean_replicates_prefilter.jpg"/>
-            <p:cNvPicPr preferRelativeResize="0"/>
-            <p:nvPr/>
-          </p:nvPicPr>
-          <p:blipFill rotWithShape="1">
-            <a:blip r:embed="rId3">
-              <a:alphaModFix/>
-            </a:blip>
-            <a:srcRect b="0" l="0" r="31371" t="0"/>
-            <a:stretch/>
-          </p:blipFill>
-          <p:spPr>
-            <a:xfrm>
-              <a:off x="208625" y="-146375"/>
-              <a:ext cx="3397100" cy="3712451"/>
-            </a:xfrm>
-            <a:prstGeom prst="rect">
-              <a:avLst/>
-            </a:prstGeom>
-            <a:noFill/>
-            <a:ln>
-              <a:noFill/>
-            </a:ln>
-          </p:spPr>
-        </p:pic>
-        <p:pic>
-          <p:nvPicPr>
-            <p:cNvPr id="103" name="Google Shape;103;p21" title="mean_replicates_prefilter.jpg"/>
-            <p:cNvPicPr preferRelativeResize="0"/>
-            <p:nvPr/>
-          </p:nvPicPr>
-          <p:blipFill rotWithShape="1">
-            <a:blip r:embed="rId3">
-              <a:alphaModFix/>
-            </a:blip>
-            <a:srcRect b="38266" l="69245" r="11846" t="43974"/>
-            <a:stretch/>
-          </p:blipFill>
-          <p:spPr>
-            <a:xfrm>
-              <a:off x="649472" y="440675"/>
-              <a:ext cx="954675" cy="672499"/>
-            </a:xfrm>
-            <a:prstGeom prst="rect">
-              <a:avLst/>
-            </a:prstGeom>
-            <a:noFill/>
-            <a:ln>
-              <a:noFill/>
-            </a:ln>
-          </p:spPr>
-        </p:pic>
-      </p:grpSp>
-      <p:pic>
-        <p:nvPicPr>
-          <p:cNvPr id="104" name="Google Shape;104;p21" title="mean_replicates_postfilter.jpg"/>
-          <p:cNvPicPr preferRelativeResize="0"/>
-          <p:nvPr/>
-        </p:nvPicPr>
-        <p:blipFill>
-          <a:blip r:embed="rId4">
-            <a:alphaModFix/>
-          </a:blip>
-          <a:stretch>
-            <a:fillRect/>
-          </a:stretch>
-        </p:blipFill>
-        <p:spPr>
-          <a:xfrm>
-            <a:off x="40551" y="2395181"/>
-            <a:ext cx="2310431" cy="2228072"/>
-          </a:xfrm>
-          <a:prstGeom prst="rect">
-            <a:avLst/>
-          </a:prstGeom>
-          <a:noFill/>
-          <a:ln>
-            <a:noFill/>
-          </a:ln>
-        </p:spPr>
-      </p:pic>
-      <p:pic>
-        <p:nvPicPr>
-          <p:cNvPr id="105" name="Google Shape;105;p21" title="panel_d_var_replicates.jpg"/>
-          <p:cNvPicPr preferRelativeResize="0"/>
-          <p:nvPr/>
-        </p:nvPicPr>
-        <p:blipFill>
-          <a:blip r:embed="rId5">
-            <a:alphaModFix/>
-          </a:blip>
-          <a:stretch>
-            <a:fillRect/>
-          </a:stretch>
-        </p:blipFill>
-        <p:spPr>
-          <a:xfrm>
-            <a:off x="2513125" y="2371369"/>
-            <a:ext cx="2391726" cy="2306479"/>
-          </a:xfrm>
-          <a:prstGeom prst="rect">
-            <a:avLst/>
-          </a:prstGeom>
-          <a:noFill/>
-          <a:ln>
-            <a:noFill/>
-          </a:ln>
-        </p:spPr>
-      </p:pic>
-      <p:pic>
-        <p:nvPicPr>
-          <p:cNvPr id="106" name="Google Shape;106;p21" title="panel_c_candidato2_venn_postfiltro.png"/>
-          <p:cNvPicPr preferRelativeResize="0"/>
-          <p:nvPr/>
-        </p:nvPicPr>
-        <p:blipFill>
-          <a:blip r:embed="rId6">
-            <a:alphaModFix/>
-          </a:blip>
-          <a:stretch>
-            <a:fillRect/>
-          </a:stretch>
-        </p:blipFill>
-        <p:spPr>
-          <a:xfrm>
-            <a:off x="2555675" y="196225"/>
-            <a:ext cx="2169923" cy="2169923"/>
-          </a:xfrm>
-          <a:prstGeom prst="rect">
-            <a:avLst/>
-          </a:prstGeom>
-          <a:noFill/>
-          <a:ln>
-            <a:noFill/>
-          </a:ln>
-        </p:spPr>
-      </p:pic>
-    </p:spTree>
-  </p:cSld>
-  <p:clrMapOvr>
-    <a:masterClrMapping/>
-  </p:clrMapOvr>
-</p:sld>
+<file path=ppt/theme/theme1.xml><?xml version="1.0" encoding="utf-8"?>
+<a:theme xmlns:a="http://schemas.openxmlformats.org/drawingml/2006/main" xmlns:r="http://schemas.openxmlformats.org/officeDocument/2006/relationships">
+  <a:themeElements>
+    <a:clrScheme name="Default">
+      <a:dk1>
+        <a:srgbClr val="000000"/>
+      </a:dk1>
+      <a:lt1>
+        <a:srgbClr val="FFFFFF"/>
+      </a:lt1>
+      <a:dk2>
+        <a:srgbClr val="158158"/>
+      </a:dk2>
+      <a:lt2>
+        <a:srgbClr val="F3F3F3"/>
+      </a:lt2>
+      <a:accent1>
+        <a:srgbClr val="058DC7"/>
+      </a:accent1>
+      <a:accent2>
+        <a:srgbClr val="50B432"/>
+      </a:accent2>
+      <a:accent3>
+        <a:srgbClr val="ED561B"/>
+      </a:accent3>
+      <a:accent4>
+        <a:srgbClr val="EDEF00"/>
+      </a:accent4>
+      <a:accent5>
+        <a:srgbClr val="24CBE5"/>
+      </a:accent5>
+      <a:accent6>
+        <a:srgbClr val="64E572"/>
+      </a:accent6>
+      <a:hlink>
+        <a:srgbClr val="2200CC"/>
+      </a:hlink>
+      <a:folHlink>
+        <a:srgbClr val="551A8B"/>
+      </a:folHlink>
+    </a:clrScheme>
+    <a:fontScheme name="Office">
+      <a:majorFont>
+        <a:latin typeface="Arial"/>
+        <a:ea typeface=""/>
+        <a:cs typeface=""/>
+        <a:font script="Jpan" typeface="ＭＳ Ｐゴシック"/>
+        <a:font script="Hang" typeface="맑은 고딕"/>
+        <a:font script="Hans" typeface="宋体"/>
+        <a:font script="Hant" typeface="新細明體"/>
+        <a:font script="Arab" typeface="Times New Roman"/>
+        <a:font script="Hebr" typeface="Times New Roman"/>
+        <a:font script="Thai" typeface="Angsana New"/>
+        <a:font script="Ethi" typeface="Nyala"/>
+        <a:font script="Beng" typeface="Vrinda"/>
+        <a:font script="Gujr" typeface="Shruti"/>
+        <a:font script="Khmr" typeface="MoolBoran"/>
+        <a:font script="Knda" typeface="Tunga"/>
+        <a:font script="Guru" typeface="Raavi"/>
+        <a:font script="Cans" typeface="Euphemia"/>
+        <a:font script="Cher" typeface="Plantagenet Cherokee"/>
+        <a:font script="Yiii" typeface="Microsoft Yi Baiti"/>
+        <a:font script="Tibt" typeface="Microsoft Himalaya"/>
+        <a:font script="Thaa" typeface="MV Boli"/>
+        <a:font script="Deva" typeface="Mangal"/>
+        <a:font script="Telu" typeface="Gautami"/>
+        <a:font script="Taml" typeface="Latha"/>
+        <a:font script="Syrc" typeface="Estrangelo Edessa"/>
+        <a:font script="Orya" typeface="Kalinga"/>
+        <a:font script="Mlym" typeface="Kartika"/>
+        <a:font script="Laoo" typeface="DokChampa"/>
+        <a:font script="Sinh" typeface="Iskoola Pota"/>
+        <a:font script="Mong" typeface="Mongolian Baiti"/>
+        <a:font script="Viet" typeface="Times New Roman"/>
+        <a:font script="Uigh" typeface="Microsoft Uighur"/>
+        <a:font script="Geor" typeface="Sylfaen"/>
+      </a:majorFont>
+      <a:minorFont>
+        <a:latin typeface="Arial"/>
+        <a:ea typeface=""/>
+        <a:cs typeface=""/>
+        <a:font script="Jpan" typeface="ＭＳ Ｐゴシック"/>
+        <a:font script="Hang" typeface="맑은 고딕"/>
+        <a:font script="Hans" typeface="宋体"/>
+        <a:font script="Hant" typeface="新細明體"/>
+        <a:font script="Arab" typeface="Arial"/>
+        <a:font script="Hebr" typeface="Arial"/>
+        <a:font script="Thai" typeface="Cordia New"/>
+        <a:font script="Ethi" typeface="Nyala"/>
+        <a:font script="Beng" typeface="Vrinda"/>
+        <a:font script="Gujr" typeface="Shruti"/>
+        <a:font script="Khmr" typeface="DaunPenh"/>
+        <a:font script="Knda" typeface="Tunga"/>
+        <a:font script="Guru" typeface="Raavi"/>
+        <a:font script="Cans" typeface="Euphemia"/>
+        <a:font script="Cher" typeface="Plantagenet Cherokee"/>
+        <a:font script="Yiii" typeface="Microsoft Yi Baiti"/>
+        <a:font script="Tibt" typeface="Microsoft Himalaya"/>
+        <a:font script="Thaa" typeface="MV Boli"/>
+        <a:font script="Deva" typeface="Mangal"/>
+        <a:font script="Telu" typeface="Gautami"/>
+        <a:font script="Taml" typeface="Latha"/>
+        <a:font script="Syrc" typeface="Estrangelo Edessa"/>
+        <a:font script="Orya" typeface="Kalinga"/>
+        <a:font script="Mlym" typeface="Kartika"/>
+        <a:font script="Laoo" typeface="DokChampa"/>
+        <a:font script="Sinh" typeface="Iskoola Pota"/>
+        <a:font script="Mong" typeface="Mongolian Baiti"/>
+        <a:font script="Viet" typeface="Arial"/>
+        <a:font script="Uigh" typeface="Microsoft Uighur"/>
+        <a:font script="Geor" typeface="Sylfaen"/>
+      </a:minorFont>
+    </a:fontScheme>
+    <a:fmtScheme name="Office">
+      <a:fillStyleLst>
+        <a:solidFill>
+          <a:schemeClr val="phClr"/>
+        </a:solidFill>
+        <a:gradFill rotWithShape="1">
+          <a:gsLst>
+            <a:gs pos="0">
+              <a:schemeClr val="phClr">
+                <a:tint val="50000"/>
+                <a:satMod val="300000"/>
+              </a:schemeClr>
+            </a:gs>
+            <a:gs pos="35000">
+              <a:schemeClr val="phClr">
+                <a:tint val="37000"/>
+                <a:satMod val="300000"/>
+              </a:schemeClr>
+            </a:gs>
+            <a:gs pos="100000">
+              <a:schemeClr val="phClr">
+                <a:tint val="15000"/>
+                <a:satMod val="350000"/>
+              </a:schemeClr>
+            </a:gs>
+          </a:gsLst>
+          <a:lin ang="16200000" scaled="1"/>
+        </a:gradFill>
+        <a:gradFill rotWithShape="1">
+          <a:gsLst>
+            <a:gs pos="0">
+              <a:schemeClr val="phClr">
+                <a:tint val="100000"/>
+                <a:shade val="100000"/>
+                <a:satMod val="130000"/>
+              </a:schemeClr>
+            </a:gs>
+            <a:gs pos="100000">
+              <a:schemeClr val="phClr">
+                <a:tint val="50000"/>
+                <a:shade val="100000"/>
+                <a:satMod val="350000"/>
+              </a:schemeClr>
+            </a:gs>
+          </a:gsLst>
+          <a:lin ang="16200000" scaled="0"/>
+        </a:gradFill>
+      </a:fillStyleLst>
+      <a:lnStyleLst>
+        <a:ln w="9525" cap="flat" cmpd="sng" algn="ctr">
+          <a:solidFill>
+            <a:schemeClr val="phClr">
+              <a:shade val="95000"/>
+              <a:satMod val="105000"/>
+            </a:schemeClr>
+          </a:solidFill>
+          <a:prstDash val="solid"/>
+        </a:ln>
+        <a:ln w="25400" cap="flat" cmpd="sng" algn="ctr">
+          <a:solidFill>
+            <a:schemeClr val="phClr"/>
+          </a:solidFill>
+          <a:prstDash val="solid"/>
+        </a:ln>
+        <a:ln w="38100" cap="flat" cmpd="sng" algn="ctr">
+          <a:solidFill>
+            <a:schemeClr val="phClr"/>
+          </a:solidFill>
+          <a:prstDash val="solid"/>
+        </a:ln>
+      </a:lnStyleLst>
+      <a:effectStyleLst>
+        <a:effectStyle>
+          <a:effectLst>
+            <a:outerShdw blurRad="40000" dist="20000" dir="5400000" rotWithShape="0">
+              <a:srgbClr val="000000">
+                <a:alpha val="38000"/>
+              </a:srgbClr>
+            </a:outerShdw>
+          </a:effectLst>
+        </a:effectStyle>
+        <a:effectStyle>
+          <a:effectLst>
+            <a:outerShdw blurRad="40000" dist="23000" dir="5400000" rotWithShape="0">
+              <a:srgbClr val="000000">
+                <a:alpha val="35000"/>
+              </a:srgbClr>
+            </a:outerShdw>
+          </a:effectLst>
+        </a:effectStyle>
+        <a:effectStyle>
+          <a:effectLst>
+            <a:outerShdw blurRad="40000" dist="23000" dir="5400000" rotWithShape="0">
+              <a:srgbClr val="000000">
+                <a:alpha val="35000"/>
+              </a:srgbClr>
+            </a:outerShdw>
+          </a:effectLst>
+          <a:scene3d>
+            <a:camera prst="orthographicFront">
+              <a:rot lat="0" lon="0" rev="0"/>
+            </a:camera>
+            <a:lightRig rig="threePt" dir="t">
+              <a:rot lat="0" lon="0" rev="1200000"/>
+            </a:lightRig>
+          </a:scene3d>
+          <a:sp3d>
+            <a:bevelT w="63500" h="25400"/>
+          </a:sp3d>
+        </a:effectStyle>
+      </a:effectStyleLst>
+      <a:bgFillStyleLst>
+        <a:solidFill>
+          <a:schemeClr val="phClr"/>
+        </a:solidFill>
+        <a:gradFill rotWithShape="1">
+          <a:gsLst>
+            <a:gs pos="0">
+              <a:schemeClr val="phClr">
+                <a:tint val="40000"/>
+                <a:satMod val="350000"/>
+              </a:schemeClr>
+            </a:gs>
+            <a:gs pos="40000">
+              <a:schemeClr val="phClr">
+                <a:tint val="45000"/>
+                <a:shade val="99000"/>
+                <a:satMod val="350000"/>
+              </a:schemeClr>
+            </a:gs>
+            <a:gs pos="100000">
+              <a:schemeClr val="phClr">
+                <a:shade val="20000"/>
+                <a:satMod val="255000"/>
+              </a:schemeClr>
+            </a:gs>
+          </a:gsLst>
+          <a:path path="circle">
+            <a:fillToRect l="50000" t="-80000" r="50000" b="180000"/>
+          </a:path>
+        </a:gradFill>
+        <a:gradFill rotWithShape="1">
+          <a:gsLst>
+            <a:gs pos="0">
+              <a:schemeClr val="phClr">
+                <a:tint val="80000"/>
+                <a:satMod val="300000"/>
+              </a:schemeClr>
+            </a:gs>
+            <a:gs pos="100000">
+              <a:schemeClr val="phClr">
+                <a:shade val="30000"/>
+                <a:satMod val="200000"/>
+              </a:schemeClr>
+            </a:gs>
+          </a:gsLst>
+          <a:path path="circle">
+            <a:fillToRect l="50000" t="50000" r="50000" b="50000"/>
+          </a:path>
+        </a:gradFill>
+      </a:bgFillStyleLst>
+    </a:fmtScheme>
+  </a:themeElements>
+</a:theme>
 </file>
 
-<file path=ppt/theme/theme1.xml><?xml version="1.0" encoding="utf-8"?>
+<file path=ppt/theme/theme2.xml><?xml version="1.0" encoding="utf-8"?>
 <a:theme xmlns:a="http://schemas.openxmlformats.org/drawingml/2006/main" xmlns:r="http://schemas.openxmlformats.org/officeDocument/2006/relationships" name="Simple Light">
   <a:themeElements>
     <a:clrScheme name="Simple Light">
@@ -7535,283 +7485,4 @@
     </a:fmtScheme>
   </a:themeElements>
 </a:theme>
-</file>
-
-<file path=ppt/theme/theme2.xml><?xml version="1.0" encoding="utf-8"?>
-<a:theme xmlns:a="http://schemas.openxmlformats.org/drawingml/2006/main" xmlns:r="http://schemas.openxmlformats.org/officeDocument/2006/relationships">
-  <a:themeElements>
-    <a:clrScheme name="Default">
-      <a:dk1>
-        <a:srgbClr val="000000"/>
-      </a:dk1>
-      <a:lt1>
-        <a:srgbClr val="FFFFFF"/>
-      </a:lt1>
-      <a:dk2>
-        <a:srgbClr val="158158"/>
-      </a:dk2>
-      <a:lt2>
-        <a:srgbClr val="F3F3F3"/>
-      </a:lt2>
-      <a:accent1>
-        <a:srgbClr val="058DC7"/>
-      </a:accent1>
-      <a:accent2>
-        <a:srgbClr val="50B432"/>
-      </a:accent2>
-      <a:accent3>
-        <a:srgbClr val="ED561B"/>
-      </a:accent3>
-      <a:accent4>
-        <a:srgbClr val="EDEF00"/>
-      </a:accent4>
-      <a:accent5>
-        <a:srgbClr val="24CBE5"/>
-      </a:accent5>
-      <a:accent6>
-        <a:srgbClr val="64E572"/>
-      </a:accent6>
-      <a:hlink>
-        <a:srgbClr val="2200CC"/>
-      </a:hlink>
-      <a:folHlink>
-        <a:srgbClr val="551A8B"/>
-      </a:folHlink>
-    </a:clrScheme>
-    <a:fontScheme name="Office">
-      <a:majorFont>
-        <a:latin typeface="Arial"/>
-        <a:ea typeface=""/>
-        <a:cs typeface=""/>
-        <a:font script="Jpan" typeface="ＭＳ Ｐゴシック"/>
-        <a:font script="Hang" typeface="맑은 고딕"/>
-        <a:font script="Hans" typeface="宋体"/>
-        <a:font script="Hant" typeface="新細明體"/>
-        <a:font script="Arab" typeface="Times New Roman"/>
-        <a:font script="Hebr" typeface="Times New Roman"/>
-        <a:font script="Thai" typeface="Angsana New"/>
-        <a:font script="Ethi" typeface="Nyala"/>
-        <a:font script="Beng" typeface="Vrinda"/>
-        <a:font script="Gujr" typeface="Shruti"/>
-        <a:font script="Khmr" typeface="MoolBoran"/>
-        <a:font script="Knda" typeface="Tunga"/>
-        <a:font script="Guru" typeface="Raavi"/>
-        <a:font script="Cans" typeface="Euphemia"/>
-        <a:font script="Cher" typeface="Plantagenet Cherokee"/>
-        <a:font script="Yiii" typeface="Microsoft Yi Baiti"/>
-        <a:font script="Tibt" typeface="Microsoft Himalaya"/>
-        <a:font script="Thaa" typeface="MV Boli"/>
-        <a:font script="Deva" typeface="Mangal"/>
-        <a:font script="Telu" typeface="Gautami"/>
-        <a:font script="Taml" typeface="Latha"/>
-        <a:font script="Syrc" typeface="Estrangelo Edessa"/>
-        <a:font script="Orya" typeface="Kalinga"/>
-        <a:font script="Mlym" typeface="Kartika"/>
-        <a:font script="Laoo" typeface="DokChampa"/>
-        <a:font script="Sinh" typeface="Iskoola Pota"/>
-        <a:font script="Mong" typeface="Mongolian Baiti"/>
-        <a:font script="Viet" typeface="Times New Roman"/>
-        <a:font script="Uigh" typeface="Microsoft Uighur"/>
-        <a:font script="Geor" typeface="Sylfaen"/>
-      </a:majorFont>
-      <a:minorFont>
-        <a:latin typeface="Arial"/>
-        <a:ea typeface=""/>
-        <a:cs typeface=""/>
-        <a:font script="Jpan" typeface="ＭＳ Ｐゴシック"/>
-        <a:font script="Hang" typeface="맑은 고딕"/>
-        <a:font script="Hans" typeface="宋体"/>
-        <a:font script="Hant" typeface="新細明體"/>
-        <a:font script="Arab" typeface="Arial"/>
-        <a:font script="Hebr" typeface="Arial"/>
-        <a:font script="Thai" typeface="Cordia New"/>
-        <a:font script="Ethi" typeface="Nyala"/>
-        <a:font script="Beng" typeface="Vrinda"/>
-        <a:font script="Gujr" typeface="Shruti"/>
-        <a:font script="Khmr" typeface="DaunPenh"/>
-        <a:font script="Knda" typeface="Tunga"/>
-        <a:font script="Guru" typeface="Raavi"/>
-        <a:font script="Cans" typeface="Euphemia"/>
-        <a:font script="Cher" typeface="Plantagenet Cherokee"/>
-        <a:font script="Yiii" typeface="Microsoft Yi Baiti"/>
-        <a:font script="Tibt" typeface="Microsoft Himalaya"/>
-        <a:font script="Thaa" typeface="MV Boli"/>
-        <a:font script="Deva" typeface="Mangal"/>
-        <a:font script="Telu" typeface="Gautami"/>
-        <a:font script="Taml" typeface="Latha"/>
-        <a:font script="Syrc" typeface="Estrangelo Edessa"/>
-        <a:font script="Orya" typeface="Kalinga"/>
-        <a:font script="Mlym" typeface="Kartika"/>
-        <a:font script="Laoo" typeface="DokChampa"/>
-        <a:font script="Sinh" typeface="Iskoola Pota"/>
-        <a:font script="Mong" typeface="Mongolian Baiti"/>
-        <a:font script="Viet" typeface="Arial"/>
-        <a:font script="Uigh" typeface="Microsoft Uighur"/>
-        <a:font script="Geor" typeface="Sylfaen"/>
-      </a:minorFont>
-    </a:fontScheme>
-    <a:fmtScheme name="Office">
-      <a:fillStyleLst>
-        <a:solidFill>
-          <a:schemeClr val="phClr"/>
-        </a:solidFill>
-        <a:gradFill rotWithShape="1">
-          <a:gsLst>
-            <a:gs pos="0">
-              <a:schemeClr val="phClr">
-                <a:tint val="50000"/>
-                <a:satMod val="300000"/>
-              </a:schemeClr>
-            </a:gs>
-            <a:gs pos="35000">
-              <a:schemeClr val="phClr">
-                <a:tint val="37000"/>
-                <a:satMod val="300000"/>
-              </a:schemeClr>
-            </a:gs>
-            <a:gs pos="100000">
-              <a:schemeClr val="phClr">
-                <a:tint val="15000"/>
-                <a:satMod val="350000"/>
-              </a:schemeClr>
-            </a:gs>
-          </a:gsLst>
-          <a:lin ang="16200000" scaled="1"/>
-        </a:gradFill>
-        <a:gradFill rotWithShape="1">
-          <a:gsLst>
-            <a:gs pos="0">
-              <a:schemeClr val="phClr">
-                <a:tint val="100000"/>
-                <a:shade val="100000"/>
-                <a:satMod val="130000"/>
-              </a:schemeClr>
-            </a:gs>
-            <a:gs pos="100000">
-              <a:schemeClr val="phClr">
-                <a:tint val="50000"/>
-                <a:shade val="100000"/>
-                <a:satMod val="350000"/>
-              </a:schemeClr>
-            </a:gs>
-          </a:gsLst>
-          <a:lin ang="16200000" scaled="0"/>
-        </a:gradFill>
-      </a:fillStyleLst>
-      <a:lnStyleLst>
-        <a:ln w="9525" cap="flat" cmpd="sng" algn="ctr">
-          <a:solidFill>
-            <a:schemeClr val="phClr">
-              <a:shade val="95000"/>
-              <a:satMod val="105000"/>
-            </a:schemeClr>
-          </a:solidFill>
-          <a:prstDash val="solid"/>
-        </a:ln>
-        <a:ln w="25400" cap="flat" cmpd="sng" algn="ctr">
-          <a:solidFill>
-            <a:schemeClr val="phClr"/>
-          </a:solidFill>
-          <a:prstDash val="solid"/>
-        </a:ln>
-        <a:ln w="38100" cap="flat" cmpd="sng" algn="ctr">
-          <a:solidFill>
-            <a:schemeClr val="phClr"/>
-          </a:solidFill>
-          <a:prstDash val="solid"/>
-        </a:ln>
-      </a:lnStyleLst>
-      <a:effectStyleLst>
-        <a:effectStyle>
-          <a:effectLst>
-            <a:outerShdw blurRad="40000" dist="20000" dir="5400000" rotWithShape="0">
-              <a:srgbClr val="000000">
-                <a:alpha val="38000"/>
-              </a:srgbClr>
-            </a:outerShdw>
-          </a:effectLst>
-        </a:effectStyle>
-        <a:effectStyle>
-          <a:effectLst>
-            <a:outerShdw blurRad="40000" dist="23000" dir="5400000" rotWithShape="0">
-              <a:srgbClr val="000000">
-                <a:alpha val="35000"/>
-              </a:srgbClr>
-            </a:outerShdw>
-          </a:effectLst>
-        </a:effectStyle>
-        <a:effectStyle>
-          <a:effectLst>
-            <a:outerShdw blurRad="40000" dist="23000" dir="5400000" rotWithShape="0">
-              <a:srgbClr val="000000">
-                <a:alpha val="35000"/>
-              </a:srgbClr>
-            </a:outerShdw>
-          </a:effectLst>
-          <a:scene3d>
-            <a:camera prst="orthographicFront">
-              <a:rot lat="0" lon="0" rev="0"/>
-            </a:camera>
-            <a:lightRig rig="threePt" dir="t">
-              <a:rot lat="0" lon="0" rev="1200000"/>
-            </a:lightRig>
-          </a:scene3d>
-          <a:sp3d>
-            <a:bevelT w="63500" h="25400"/>
-          </a:sp3d>
-        </a:effectStyle>
-      </a:effectStyleLst>
-      <a:bgFillStyleLst>
-        <a:solidFill>
-          <a:schemeClr val="phClr"/>
-        </a:solidFill>
-        <a:gradFill rotWithShape="1">
-          <a:gsLst>
-            <a:gs pos="0">
-              <a:schemeClr val="phClr">
-                <a:tint val="40000"/>
-                <a:satMod val="350000"/>
-              </a:schemeClr>
-            </a:gs>
-            <a:gs pos="40000">
-              <a:schemeClr val="phClr">
-                <a:tint val="45000"/>
-                <a:shade val="99000"/>
-                <a:satMod val="350000"/>
-              </a:schemeClr>
-            </a:gs>
-            <a:gs pos="100000">
-              <a:schemeClr val="phClr">
-                <a:shade val="20000"/>
-                <a:satMod val="255000"/>
-              </a:schemeClr>
-            </a:gs>
-          </a:gsLst>
-          <a:path path="circle">
-            <a:fillToRect l="50000" t="-80000" r="50000" b="180000"/>
-          </a:path>
-        </a:gradFill>
-        <a:gradFill rotWithShape="1">
-          <a:gsLst>
-            <a:gs pos="0">
-              <a:schemeClr val="phClr">
-                <a:tint val="80000"/>
-                <a:satMod val="300000"/>
-              </a:schemeClr>
-            </a:gs>
-            <a:gs pos="100000">
-              <a:schemeClr val="phClr">
-                <a:shade val="30000"/>
-                <a:satMod val="200000"/>
-              </a:schemeClr>
-            </a:gs>
-          </a:gsLst>
-          <a:path path="circle">
-            <a:fillToRect l="50000" t="50000" r="50000" b="50000"/>
-          </a:path>
-        </a:gradFill>
-      </a:bgFillStyleLst>
-    </a:fmtScheme>
-  </a:themeElements>
-</a:theme>
 </file>
--- a/docs/Fig R1.pptx
+++ b/docs/Fig R1.pptx
@@ -16,7 +16,6 @@
     <p:sldId id="261" r:id="rId11"/>
     <p:sldId id="262" r:id="rId12"/>
     <p:sldId id="263" r:id="rId13"/>
-    <p:sldId id="264" r:id="rId14"/>
   </p:sldIdLst>
   <p:sldSz cy="5143500" cx="9144000"/>
   <p:notesSz cx="6858000" cy="9144000"/>
@@ -1406,7 +1405,7 @@
       </p:grpSpPr>
       <p:sp>
         <p:nvSpPr>
-          <p:cNvPr id="88" name="Google Shape;88;g3f5e045cd8f_0_2:notes"/>
+          <p:cNvPr id="88" name="Google Shape;88;g3d678bf7346_0_23:notes"/>
           <p:cNvSpPr/>
           <p:nvPr>
             <p:ph idx="2" type="sldImg"/>
@@ -1441,106 +1440,7 @@
       </p:sp>
       <p:sp>
         <p:nvSpPr>
-          <p:cNvPr id="89" name="Google Shape;89;g3f5e045cd8f_0_2:notes"/>
-          <p:cNvSpPr txBox="1"/>
-          <p:nvPr>
-            <p:ph idx="1" type="body"/>
-          </p:nvPr>
-        </p:nvSpPr>
-        <p:spPr>
-          <a:xfrm>
-            <a:off x="685800" y="4343400"/>
-            <a:ext cx="5486400" cy="4114800"/>
-          </a:xfrm>
-          <a:prstGeom prst="rect">
-            <a:avLst/>
-          </a:prstGeom>
-        </p:spPr>
-        <p:txBody>
-          <a:bodyPr anchorCtr="0" anchor="t" bIns="91425" lIns="91425" spcFirstLastPara="1" rIns="91425" wrap="square" tIns="91425">
-            <a:noAutofit/>
-          </a:bodyPr>
-          <a:lstStyle/>
-          <a:p>
-            <a:pPr indent="0" lvl="0" marL="0" rtl="0" algn="l">
-              <a:spcBef>
-                <a:spcPts val="0"/>
-              </a:spcBef>
-              <a:spcAft>
-                <a:spcPts val="0"/>
-              </a:spcAft>
-              <a:buNone/>
-            </a:pPr>
-            <a:r>
-              <a:t/>
-            </a:r>
-            <a:endParaRPr/>
-          </a:p>
-        </p:txBody>
-      </p:sp>
-    </p:spTree>
-  </p:cSld>
-  <p:clrMapOvr>
-    <a:masterClrMapping/>
-  </p:clrMapOvr>
-</p:notes>
-</file>
-
-<file path=ppt/notesSlides/notesSlide9.xml><?xml version="1.0" encoding="utf-8"?>
-<p:notes xmlns:a="http://schemas.openxmlformats.org/drawingml/2006/main" xmlns:r="http://schemas.openxmlformats.org/officeDocument/2006/relationships" xmlns:mc="http://schemas.openxmlformats.org/markup-compatibility/2006" xmlns:mv="urn:schemas-microsoft-com:mac:vml" xmlns:p="http://schemas.openxmlformats.org/presentationml/2006/main" xmlns:c="http://schemas.openxmlformats.org/drawingml/2006/chart" xmlns:dgm="http://schemas.openxmlformats.org/drawingml/2006/diagram" xmlns:o="urn:schemas-microsoft-com:office:office" xmlns:v="urn:schemas-microsoft-com:vml" xmlns:pvml="urn:schemas-microsoft-com:office:powerpoint" xmlns:com="http://schemas.openxmlformats.org/drawingml/2006/compatibility" xmlns:p14="http://schemas.microsoft.com/office/powerpoint/2010/main" xmlns:p15="http://schemas.microsoft.com/office/powerpoint/2012/main" xmlns:ahyp="http://schemas.microsoft.com/office/drawing/2018/hyperlinkcolor" showMasterPhAnim="0" showMasterSp="0">
-  <p:cSld>
-    <p:spTree>
-      <p:nvGrpSpPr>
-        <p:cNvPr id="92" name="Shape 92"/>
-        <p:cNvGrpSpPr/>
-        <p:nvPr/>
-      </p:nvGrpSpPr>
-      <p:grpSpPr>
-        <a:xfrm>
-          <a:off x="0" y="0"/>
-          <a:ext cx="0" cy="0"/>
-          <a:chOff x="0" y="0"/>
-          <a:chExt cx="0" cy="0"/>
-        </a:xfrm>
-      </p:grpSpPr>
-      <p:sp>
-        <p:nvSpPr>
-          <p:cNvPr id="93" name="Google Shape;93;g3d678bf7346_0_23:notes"/>
-          <p:cNvSpPr/>
-          <p:nvPr>
-            <p:ph idx="2" type="sldImg"/>
-          </p:nvPr>
-        </p:nvSpPr>
-        <p:spPr>
-          <a:xfrm>
-            <a:off x="381300" y="685800"/>
-            <a:ext cx="6096000" cy="3429000"/>
-          </a:xfrm>
-          <a:custGeom>
-            <a:rect b="b" l="l" r="r" t="t"/>
-            <a:pathLst>
-              <a:path extrusionOk="0" h="120000" w="120000">
-                <a:moveTo>
-                  <a:pt x="0" y="0"/>
-                </a:moveTo>
-                <a:lnTo>
-                  <a:pt x="120000" y="0"/>
-                </a:lnTo>
-                <a:lnTo>
-                  <a:pt x="120000" y="120000"/>
-                </a:lnTo>
-                <a:lnTo>
-                  <a:pt x="0" y="120000"/>
-                </a:lnTo>
-                <a:close/>
-              </a:path>
-            </a:pathLst>
-          </a:custGeom>
-        </p:spPr>
-      </p:sp>
-      <p:sp>
-        <p:nvSpPr>
-          <p:cNvPr id="94" name="Google Shape;94;g3d678bf7346_0_23:notes"/>
+          <p:cNvPr id="89" name="Google Shape;89;g3d678bf7346_0_23:notes"/>
           <p:cNvSpPr txBox="1"/>
           <p:nvPr>
             <p:ph idx="1" type="body"/>
@@ -6680,60 +6580,7 @@
       </p:grpSpPr>
       <p:pic>
         <p:nvPicPr>
-          <p:cNvPr id="91" name="Google Shape;91;p20" title="densidad_individual_promotores.jpg"/>
-          <p:cNvPicPr preferRelativeResize="0"/>
-          <p:nvPr/>
-        </p:nvPicPr>
-        <p:blipFill>
-          <a:blip r:embed="rId3">
-            <a:alphaModFix/>
-          </a:blip>
-          <a:stretch>
-            <a:fillRect/>
-          </a:stretch>
-        </p:blipFill>
-        <p:spPr>
-          <a:xfrm>
-            <a:off x="1382025" y="136325"/>
-            <a:ext cx="4761933" cy="3571450"/>
-          </a:xfrm>
-          <a:prstGeom prst="rect">
-            <a:avLst/>
-          </a:prstGeom>
-          <a:noFill/>
-          <a:ln>
-            <a:noFill/>
-          </a:ln>
-        </p:spPr>
-      </p:pic>
-    </p:spTree>
-  </p:cSld>
-  <p:clrMapOvr>
-    <a:masterClrMapping/>
-  </p:clrMapOvr>
-</p:sld>
-</file>
-
-<file path=ppt/slides/slide9.xml><?xml version="1.0" encoding="utf-8"?>
-<p:sld xmlns:a="http://schemas.openxmlformats.org/drawingml/2006/main" xmlns:r="http://schemas.openxmlformats.org/officeDocument/2006/relationships" xmlns:mc="http://schemas.openxmlformats.org/markup-compatibility/2006" xmlns:mv="urn:schemas-microsoft-com:mac:vml" xmlns:p="http://schemas.openxmlformats.org/presentationml/2006/main" xmlns:c="http://schemas.openxmlformats.org/drawingml/2006/chart" xmlns:dgm="http://schemas.openxmlformats.org/drawingml/2006/diagram" xmlns:o="urn:schemas-microsoft-com:office:office" xmlns:v="urn:schemas-microsoft-com:vml" xmlns:pvml="urn:schemas-microsoft-com:office:powerpoint" xmlns:com="http://schemas.openxmlformats.org/drawingml/2006/compatibility" xmlns:p14="http://schemas.microsoft.com/office/powerpoint/2010/main" xmlns:p15="http://schemas.microsoft.com/office/powerpoint/2012/main" xmlns:ahyp="http://schemas.microsoft.com/office/drawing/2018/hyperlinkcolor">
-  <p:cSld>
-    <p:spTree>
-      <p:nvGrpSpPr>
-        <p:cNvPr id="95" name="Shape 95"/>
-        <p:cNvGrpSpPr/>
-        <p:nvPr/>
-      </p:nvGrpSpPr>
-      <p:grpSpPr>
-        <a:xfrm>
-          <a:off x="0" y="0"/>
-          <a:ext cx="0" cy="0"/>
-          <a:chOff x="0" y="0"/>
-          <a:chExt cx="0" cy="0"/>
-        </a:xfrm>
-      </p:grpSpPr>
-      <p:pic>
-        <p:nvPicPr>
-          <p:cNvPr id="96" name="Google Shape;96;p21"/>
+          <p:cNvPr id="91" name="Google Shape;91;p20"/>
           <p:cNvPicPr preferRelativeResize="0"/>
           <p:nvPr/>
         </p:nvPicPr>
@@ -6761,7 +6608,7 @@
       </p:pic>
       <p:pic>
         <p:nvPicPr>
-          <p:cNvPr id="97" name="Google Shape;97;p21"/>
+          <p:cNvPr id="92" name="Google Shape;92;p20"/>
           <p:cNvPicPr preferRelativeResize="0"/>
           <p:nvPr/>
         </p:nvPicPr>
@@ -6789,7 +6636,7 @@
       </p:pic>
       <p:sp>
         <p:nvSpPr>
-          <p:cNvPr id="98" name="Google Shape;98;p21"/>
+          <p:cNvPr id="93" name="Google Shape;93;p20"/>
           <p:cNvSpPr txBox="1"/>
           <p:nvPr/>
         </p:nvSpPr>
@@ -6895,7 +6742,7 @@
       </p:sp>
       <p:pic>
         <p:nvPicPr>
-          <p:cNvPr id="99" name="Google Shape;99;p21" title="panel_b_histograma_gates_ejemplo.jpg"/>
+          <p:cNvPr id="94" name="Google Shape;94;p20" title="panel_b_histograma_gates_ejemplo.jpg"/>
           <p:cNvPicPr preferRelativeResize="0"/>
           <p:nvPr/>
         </p:nvPicPr>
